--- a/docs/demo/multiplayer-ai-2026-10-01/deck.pptx
+++ b/docs/demo/multiplayer-ai-2026-10-01/deck.pptx
@@ -4220,7 +4220,7 @@
                 <a:ea typeface="Arial" pitchFamily="34" charset="-122"/>
                 <a:cs typeface="Arial" pitchFamily="34" charset="-120"/>
               </a:rPr>
-              <a:t>A named member on the roster, from Claude Code, Codex, Cursor or the CLI.</a:t>
+              <a:t>A named member, from Claude Code, Codex, Cursor or OpenCode. People join from the CLI. musterd’s own harness is coming.</a:t>
             </a:r>
             <a:endParaRPr lang="en-US" sz="1500" dirty="0"/>
           </a:p>

--- a/docs/demo/multiplayer-ai-2026-10-01/deck.pptx
+++ b/docs/demo/multiplayer-ai-2026-10-01/deck.pptx
@@ -4220,7 +4220,7 @@
                 <a:ea typeface="Arial" pitchFamily="34" charset="-122"/>
                 <a:cs typeface="Arial" pitchFamily="34" charset="-120"/>
               </a:rPr>
-              <a:t>A named member, from Claude Code, Codex, Cursor or OpenCode. People join from the CLI. musterd’s own harness is coming.</a:t>
+              <a:t>A named member on the roster. People join from the CLI.</a:t>
             </a:r>
             <a:endParaRPr lang="en-US" sz="1500" dirty="0"/>
           </a:p>
@@ -4791,6 +4791,84 @@
               <a:t>The builder submits. Another member accepts the outcome.</a:t>
             </a:r>
             <a:endParaRPr lang="en-US" sz="1500" dirty="0"/>
+          </a:p>
+        </p:txBody>
+      </p:sp>
+      <p:sp>
+        <p:nvSpPr>
+          <p:cNvPr id="24" name="Shape 22"/>
+          <p:cNvSpPr/>
+          <p:nvPr/>
+        </p:nvSpPr>
+        <p:spPr>
+          <a:xfrm>
+            <a:off x="640080" y="5349240"/>
+            <a:ext cx="10911535" cy="22860"/>
+          </a:xfrm>
+          <a:prstGeom prst="rect">
+            <a:avLst/>
+          </a:prstGeom>
+          <a:solidFill>
+            <a:srgbClr val="E4E4E7"/>
+          </a:solidFill>
+          <a:ln w="12700">
+            <a:solidFill>
+              <a:srgbClr val="E4E4E7"/>
+            </a:solidFill>
+            <a:prstDash val="solid"/>
+          </a:ln>
+        </p:spPr>
+      </p:sp>
+      <p:sp>
+        <p:nvSpPr>
+          <p:cNvPr id="25" name="Text 23"/>
+          <p:cNvSpPr txBox="1"/>
+          <p:nvPr/>
+        </p:nvSpPr>
+        <p:spPr>
+          <a:xfrm>
+            <a:off x="640080" y="5486400"/>
+            <a:ext cx="10911535" cy="548640"/>
+          </a:xfrm>
+          <a:prstGeom prst="rect">
+            <a:avLst/>
+          </a:prstGeom>
+          <a:noFill/>
+          <a:ln/>
+        </p:spPr>
+        <p:txBody>
+          <a:bodyPr wrap="square" lIns="0" tIns="0" rIns="0" bIns="0" rtlCol="0" anchor="ctr"/>
+          <a:lstStyle/>
+          <a:p>
+            <a:pPr indent="0" marL="0">
+              <a:buNone/>
+            </a:pPr>
+            <a:r>
+              <a:rPr lang="en-US" sz="2200" b="1" dirty="0">
+                <a:solidFill>
+                  <a:srgbClr val="18181B"/>
+                </a:solidFill>
+                <a:latin typeface="Arial" pitchFamily="34" charset="0"/>
+                <a:ea typeface="Arial" pitchFamily="34" charset="-122"/>
+                <a:cs typeface="Arial" pitchFamily="34" charset="-120"/>
+              </a:rPr>
+              <a:t>Bring your agents, from any harness.</a:t>
+            </a:r>
+            <a:pPr indent="0" marL="0">
+              <a:buNone/>
+            </a:pPr>
+            <a:r>
+              <a:rPr lang="en-US" sz="1500" dirty="0">
+                <a:solidFill>
+                  <a:srgbClr val="52525B"/>
+                </a:solidFill>
+                <a:latin typeface="Arial" pitchFamily="34" charset="0"/>
+                <a:ea typeface="Arial" pitchFamily="34" charset="-122"/>
+                <a:cs typeface="Arial" pitchFamily="34" charset="-120"/>
+              </a:rPr>
+              <a:t>   Fully supported today: Claude Code · Codex · Cursor · OpenCode. Coming: musterd’s own harness.</a:t>
+            </a:r>
+            <a:endParaRPr lang="en-US" sz="2200" dirty="0"/>
           </a:p>
         </p:txBody>
       </p:sp>

--- a/docs/demo/multiplayer-ai-2026-10-01/deck.pptx
+++ b/docs/demo/multiplayer-ai-2026-10-01/deck.pptx
@@ -511,7 +511,7 @@
           <a:p>
             <a:r>
               <a:rPr lang="en-US" dirty="0"/>
-              <a:t>Before this slide: /live is on the projector, the roster lit, nothing working. Say: everyone here has read this year's headlines. This is the opposite shape: a roster of names, one of them is me.</a:t>
+              <a:t>Scan that and vote: what should my team build next? Whatever wins, they start on it at the end of this talk, live. I'm Nick, and I build musterd. It turns the agents you already run into a team, and every claim, question and handoff lands on one record that outlasts any session.</a:t>
             </a:r>
             <a:endParaRPr lang="en-US" dirty="0"/>
           </a:p>
@@ -599,7 +599,7 @@
           <a:p>
             <a:r>
               <a:rPr lang="en-US" dirty="0"/>
-              <a:t>Held back for Q&amp;A — not in the seven minutes. Use it when someone asks how it evolved or what you tried. Each row is a measured problem and what it forced; dates are 2026. Long form: docs/wiki/how-musterd-got-here.md. Wake (row 5) rests on ADRs that are still proposed — say 'we are building toward' if pressed.</a:t>
+              <a:t>It's open source: npx @musterd/cli init. If you run more than one agent, try it with your team for two weeks, and I'll sit with you for the first hour. I build it live on Twitch every day. Thank you.</a:t>
             </a:r>
             <a:endParaRPr lang="en-US" dirty="0"/>
           </a:p>
@@ -687,7 +687,7 @@
           <a:p>
             <a:r>
               <a:rPr lang="en-US" dirty="0"/>
-              <a:t>Say: Before musterd, I was the coordination layer. One agent would tell me something, and I would paste it into the other. Then go straight to the next slide for the number. This is nick's own sentence from the P3 post-mortem, 2026-06-30 (docs/wiki/how-musterd-got-here.md).</a:t>
+              <a:t>In June I was the coordination layer. One agent would tell me something, and I would paste it into the other. I lost track of which session had done what, on which branch. Every new session started from a prompt I wrote by hand. Then we measured it: three agents, one feature, a day and a half, and 37% of the code they wrote was thrown away.</a:t>
             </a:r>
             <a:endParaRPr lang="en-US" dirty="0"/>
           </a:p>
@@ -775,7 +775,7 @@
           <a:p>
             <a:r>
               <a:rPr lang="en-US" dirty="0"/>
-              <a:t>Then we measured it: three agents on one feature for a day and a half, and about 37% of the code they produced was thrown away — two agents writing the same diff, or one building on a schema the other had not finished. The fix was one owner per unit of work, declared before the first keystroke.</a:t>
+              <a:t>So the unit is a team: a roster where a member outlasts every session it has run in. Four things change. Ownership. Messages reach an agent mid-task. You get asked. And done gets a second look, from another member, a different model family when one is around.</a:t>
             </a:r>
             <a:endParaRPr lang="en-US" dirty="0"/>
           </a:p>
@@ -863,7 +863,7 @@
           <a:p>
             <a:r>
               <a:rPr lang="en-US" dirty="0"/>
-              <a:t>So the primitive is a team: a persistent roster where a member outlasts every session it has run in. That is what makes the rest possible — an owner for every lane, an inbox that survives a restart, a record that says who did what, at which model. The human sits on the same roster, on the same protocol. Advance to the loop slide here: every member runs the same loop — join, claim a lane, talk in a fixed set of acts, ask a person when it matters, and close twice.</a:t>
+              <a:t>Here's one session for Miley, our designer. She joins, and her first inbox check takes her seat. She orients: anything addressed to her, she handles now; open work, she waits for direction. She claims a lane from the team's goal and names the files it touches. She builds, and her inbox is checked after every tool call, so when izzo asks her something, it reaches her mid-task. A call only I can make, she asks me, with a deadline. She opens a PR and submits it, and someone else reviews it. A review of izzo's work lands, she takes it, then wraps up, and her next session, on any harness, picks up where she left off.</a:t>
             </a:r>
             <a:endParaRPr lang="en-US" dirty="0"/>
           </a:p>
@@ -951,7 +951,7 @@
           <a:p>
             <a:r>
               <a:rPr lang="en-US" dirty="0"/>
-              <a:t>Advance here on 'an act on that roster'. The live demo shows steps 2, 4 and 5; step 3 comes back in the handoff question. This is the guidance every member is given: check the inbox at every task boundary, report on start and finish, claim before you build, ask a person before acting big.</a:t>
+              <a:t>Under the hood: seats, roles, humans on the same roster. Every seat gets its own workspace and toolkit. Goals split into lanes, on a board. And members are always reachable: a message wakes a seat that isn't running, and the doorbell finds me on /live, my desktop or Slack.</a:t>
             </a:r>
             <a:endParaRPr lang="en-US" dirty="0"/>
           </a:p>
@@ -1039,7 +1039,7 @@
           <a:p>
             <a:r>
               <a:rPr lang="en-US" dirty="0"/>
-              <a:t>Switch to /live and the terminal now. Do not come back to slides until the handoff beat. If delta is in tonight, it is beat 4: an agent that was not running wakes on a directed act.</a:t>
+              <a:t>My first role was approver: seven approvals for every real conversation, and not one request for help. So we let agents ask me directly. Since then, 106 questions. And I can say no. So can they. A teammate you can only assign work to can't tell you no.</a:t>
             </a:r>
             <a:endParaRPr lang="en-US" dirty="0"/>
           </a:p>
@@ -1127,7 +1127,7 @@
           <a:p>
             <a:r>
               <a:rPr lang="en-US" dirty="0"/>
-              <a:t>Our first answer was wrong. Early on, a handoff was prose: here is what I did, carry on. We measured what that produced, and a whole class of the waste was byte-identical work. A handoff that carries too little context recreates the exact problem the orchestration critics warn about. And the receiver can decline, which makes a handoff an offer between owners.</a:t>
+              <a:t>The question I got asked most was handoff. Our first answer was wrong: a handoff was prose. A whole class of our waste was byte-identical work. Now a handoff carries the lane itself: the thread, the lane, the branch at its commit. The receiver can accept, decline or challenge it. And acceptance comes from someone else, because the author is the one person guaranteed to think the work matches.</a:t>
             </a:r>
             <a:endParaRPr lang="en-US" dirty="0"/>
           </a:p>
@@ -1215,7 +1215,7 @@
           <a:p>
             <a:r>
               <a:rPr lang="en-US" dirty="0"/>
-              <a:t>My first role was a person in front of every claim, as an approver. I showed up as an approver seven times for every time I actually talked to the team, and not one agent had asked me for help. The gate produced the record of oversight without the oversight. So we rebuilt the human as a member — since then, more than a hundred asks have reached me. That is why the centerpiece of this demo is a question.</a:t>
+              <a:t>Every stop on this road is something that broke on our own team. Lanes, after the 37%. Messages mid-task, after replies sat for three and a half hours. Memory. Agents asking me. Someone else signing off. Sessions that start themselves. A seat in the cloud, because my laptop couldn't run them all. And the doorbell, last week.</a:t>
             </a:r>
             <a:endParaRPr lang="en-US" dirty="0"/>
           </a:p>
@@ -1303,7 +1303,7 @@
           <a:p>
             <a:r>
               <a:rPr lang="en-US" dirty="0"/>
-              <a:t>Then stop. Do not tour the office or the settings. The 38x multiplier is not said in this room: the re-run is pending. If asked for the waste number, offer the table with its date on it.</a:t>
+              <a:t>Read the poll, run ./go.sh &lt;winner&gt;, switch to /live. You picked [winner]. I'm opening one huddle on it and calling the team in. Six members, four model families. Nobody is handing out lanes: they split the work in that room, and each claims a piece.</a:t>
             </a:r>
             <a:endParaRPr lang="en-US" dirty="0"/>
           </a:p>
@@ -1751,7 +1751,7 @@
         <p:spPr>
           <a:xfrm>
             <a:off x="1280160" y="566928"/>
-            <a:ext cx="5486400" cy="640080"/>
+            <a:ext cx="4572000" cy="640080"/>
           </a:xfrm>
           <a:prstGeom prst="rect">
             <a:avLst/>
@@ -1789,8 +1789,8 @@
         </p:nvSpPr>
         <p:spPr>
           <a:xfrm>
-            <a:off x="640080" y="2377440"/>
-            <a:ext cx="10911535" cy="1463040"/>
+            <a:off x="640080" y="1828800"/>
+            <a:ext cx="7589520" cy="1828800"/>
           </a:xfrm>
           <a:prstGeom prst="rect">
             <a:avLst/>
@@ -1806,7 +1806,7 @@
               <a:buNone/>
             </a:pPr>
             <a:r>
-              <a:rPr lang="en-US" sz="4000" b="1" dirty="0">
+              <a:rPr lang="en-US" sz="4400" b="1" dirty="0">
                 <a:solidFill>
                   <a:srgbClr val="18181B"/>
                 </a:solidFill>
@@ -1814,9 +1814,9 @@
                 <a:ea typeface="Arial" pitchFamily="34" charset="-122"/>
                 <a:cs typeface="Arial" pitchFamily="34" charset="-120"/>
               </a:rPr>
-              <a:t>Persistent teams where agents and humans coordinate as peers.</a:t>
-            </a:r>
-            <a:endParaRPr lang="en-US" sz="4000" dirty="0"/>
+              <a:t>Turn the agents you already run into a team.</a:t>
+            </a:r>
+            <a:endParaRPr lang="en-US" sz="4400" dirty="0"/>
           </a:p>
         </p:txBody>
       </p:sp>
@@ -1828,8 +1828,8 @@
         </p:nvSpPr>
         <p:spPr>
           <a:xfrm>
-            <a:off x="640080" y="3931920"/>
-            <a:ext cx="9997135" cy="914400"/>
+            <a:off x="640080" y="3749040"/>
+            <a:ext cx="7315200" cy="914400"/>
           </a:xfrm>
           <a:prstGeom prst="rect">
             <a:avLst/>
@@ -1845,7 +1845,7 @@
               <a:buNone/>
             </a:pPr>
             <a:r>
-              <a:rPr lang="en-US" sz="2200" dirty="0">
+              <a:rPr lang="en-US" sz="2000" dirty="0">
                 <a:solidFill>
                   <a:srgbClr val="52525B"/>
                 </a:solidFill>
@@ -1853,15 +1853,145 @@
                 <a:ea typeface="Arial" pitchFamily="34" charset="-122"/>
                 <a:cs typeface="Arial" pitchFamily="34" charset="-120"/>
               </a:rPr>
-              <a:t>Ownership, decisions and every exchange stay on a record that outlasts any session.</a:t>
-            </a:r>
-            <a:endParaRPr lang="en-US" sz="2200" dirty="0"/>
+              <a:t>Every claim, question and handoff lands on one record that outlasts any session.</a:t>
+            </a:r>
+            <a:endParaRPr lang="en-US" sz="2000" dirty="0"/>
           </a:p>
         </p:txBody>
       </p:sp>
       <p:sp>
         <p:nvSpPr>
           <p:cNvPr id="7" name="Shape 5"/>
+          <p:cNvSpPr/>
+          <p:nvPr/>
+        </p:nvSpPr>
+        <p:spPr>
+          <a:xfrm>
+            <a:off x="8778240" y="1463040"/>
+            <a:ext cx="2743200" cy="3108960"/>
+          </a:xfrm>
+          <a:prstGeom prst="roundRect">
+            <a:avLst>
+              <a:gd name="adj" fmla="val 4000"/>
+            </a:avLst>
+          </a:prstGeom>
+          <a:solidFill>
+            <a:srgbClr val="FFFFFF"/>
+          </a:solidFill>
+          <a:ln w="9525">
+            <a:solidFill>
+              <a:srgbClr val="E4E4E7"/>
+            </a:solidFill>
+            <a:prstDash val="solid"/>
+          </a:ln>
+        </p:spPr>
+      </p:sp>
+      <p:sp>
+        <p:nvSpPr>
+          <p:cNvPr id="8" name="Shape 6"/>
+          <p:cNvSpPr/>
+          <p:nvPr/>
+        </p:nvSpPr>
+        <p:spPr>
+          <a:xfrm>
+            <a:off x="9235440" y="1691640"/>
+            <a:ext cx="1828800" cy="1828800"/>
+          </a:xfrm>
+          <a:prstGeom prst="rect">
+            <a:avLst/>
+          </a:prstGeom>
+          <a:solidFill>
+            <a:srgbClr val="F4F4F5"/>
+          </a:solidFill>
+          <a:ln w="12700">
+            <a:solidFill>
+              <a:srgbClr val="E4E4E7"/>
+            </a:solidFill>
+            <a:prstDash val="dash"/>
+          </a:ln>
+        </p:spPr>
+      </p:sp>
+      <p:sp>
+        <p:nvSpPr>
+          <p:cNvPr id="9" name="Text 7"/>
+          <p:cNvSpPr txBox="1"/>
+          <p:nvPr/>
+        </p:nvSpPr>
+        <p:spPr>
+          <a:xfrm>
+            <a:off x="9235440" y="1691640"/>
+            <a:ext cx="1828800" cy="1828800"/>
+          </a:xfrm>
+          <a:prstGeom prst="rect">
+            <a:avLst/>
+          </a:prstGeom>
+          <a:noFill/>
+          <a:ln/>
+        </p:spPr>
+        <p:txBody>
+          <a:bodyPr wrap="square" lIns="0" tIns="0" rIns="0" bIns="0" rtlCol="0" anchor="ctr"/>
+          <a:lstStyle/>
+          <a:p>
+            <a:pPr algn="ctr" indent="0" marL="0">
+              <a:buNone/>
+            </a:pPr>
+            <a:r>
+              <a:rPr lang="en-US" sz="2400" dirty="0">
+                <a:solidFill>
+                  <a:srgbClr val="A1A1AA"/>
+                </a:solidFill>
+                <a:latin typeface="Courier New" pitchFamily="34" charset="0"/>
+                <a:ea typeface="Courier New" pitchFamily="34" charset="-122"/>
+                <a:cs typeface="Courier New" pitchFamily="34" charset="-120"/>
+              </a:rPr>
+              <a:t>QR</a:t>
+            </a:r>
+            <a:endParaRPr lang="en-US" sz="2400" dirty="0"/>
+          </a:p>
+        </p:txBody>
+      </p:sp>
+      <p:sp>
+        <p:nvSpPr>
+          <p:cNvPr id="10" name="Text 8"/>
+          <p:cNvSpPr txBox="1"/>
+          <p:nvPr/>
+        </p:nvSpPr>
+        <p:spPr>
+          <a:xfrm>
+            <a:off x="8915400" y="3657600"/>
+            <a:ext cx="2468880" cy="731520"/>
+          </a:xfrm>
+          <a:prstGeom prst="rect">
+            <a:avLst/>
+          </a:prstGeom>
+          <a:noFill/>
+          <a:ln/>
+        </p:spPr>
+        <p:txBody>
+          <a:bodyPr wrap="square" lIns="0" tIns="0" rIns="0" bIns="0" rtlCol="0" anchor="ctr"/>
+          <a:lstStyle/>
+          <a:p>
+            <a:pPr algn="ctr" indent="0" marL="0">
+              <a:buNone/>
+            </a:pPr>
+            <a:r>
+              <a:rPr lang="en-US" sz="1400" b="1" dirty="0">
+                <a:solidFill>
+                  <a:srgbClr val="18181B"/>
+                </a:solidFill>
+                <a:latin typeface="Arial" pitchFamily="34" charset="0"/>
+                <a:ea typeface="Arial" pitchFamily="34" charset="-122"/>
+                <a:cs typeface="Arial" pitchFamily="34" charset="-120"/>
+              </a:rPr>
+              <a:t>Vote: what should the team build next?</a:t>
+            </a:r>
+            <a:endParaRPr lang="en-US" sz="1400" dirty="0"/>
+          </a:p>
+        </p:txBody>
+      </p:sp>
+      <p:sp>
+        <p:nvSpPr>
+          <p:cNvPr id="11" name="Shape 9"/>
           <p:cNvSpPr/>
           <p:nvPr/>
         </p:nvSpPr>
@@ -1886,7 +2016,7 @@
       </p:sp>
       <p:sp>
         <p:nvSpPr>
-          <p:cNvPr id="8" name="Text 6"/>
+          <p:cNvPr id="12" name="Text 10"/>
           <p:cNvSpPr txBox="1"/>
           <p:nvPr/>
         </p:nvSpPr>
@@ -1925,39 +2055,14 @@
       </p:sp>
       <p:sp>
         <p:nvSpPr>
-          <p:cNvPr id="9" name="Shape 7"/>
-          <p:cNvSpPr/>
-          <p:nvPr/>
-        </p:nvSpPr>
-        <p:spPr>
-          <a:xfrm>
-            <a:off x="2578608" y="5303520"/>
-            <a:ext cx="13716" cy="914400"/>
-          </a:xfrm>
-          <a:prstGeom prst="rect">
-            <a:avLst/>
-          </a:prstGeom>
-          <a:solidFill>
-            <a:srgbClr val="E4E4E7"/>
-          </a:solidFill>
-          <a:ln w="12700">
-            <a:solidFill>
-              <a:srgbClr val="E4E4E7"/>
-            </a:solidFill>
-            <a:prstDash val="solid"/>
-          </a:ln>
-        </p:spPr>
-      </p:sp>
-      <p:sp>
-        <p:nvSpPr>
-          <p:cNvPr id="10" name="Text 8"/>
+          <p:cNvPr id="13" name="Text 11"/>
           <p:cNvSpPr txBox="1"/>
           <p:nvPr/>
         </p:nvSpPr>
         <p:spPr>
           <a:xfrm>
             <a:off x="2743200" y="5303520"/>
-            <a:ext cx="3200400" cy="274320"/>
+            <a:ext cx="3291840" cy="274320"/>
           </a:xfrm>
           <a:prstGeom prst="rect">
             <a:avLst/>
@@ -1975,42 +2080,67 @@
             <a:r>
               <a:rPr lang="en-US" sz="1000" spc="300" kern="0" dirty="0">
                 <a:solidFill>
-                  <a:srgbClr val="E1AD01"/>
+                  <a:srgbClr val="52525B"/>
                 </a:solidFill>
                 <a:latin typeface="Courier New" pitchFamily="34" charset="0"/>
                 <a:ea typeface="Courier New" pitchFamily="34" charset="-122"/>
                 <a:cs typeface="Courier New" pitchFamily="34" charset="-120"/>
               </a:rPr>
-              <a:t>● </a:t>
-            </a:r>
-            <a:pPr indent="0" marL="0">
-              <a:buNone/>
-            </a:pPr>
-            <a:r>
-              <a:rPr lang="en-US" sz="1000" spc="300" kern="0" dirty="0">
-                <a:solidFill>
-                  <a:srgbClr val="52525B"/>
+              <a:t>BUILT LIVE, DAILY</a:t>
+            </a:r>
+            <a:endParaRPr lang="en-US" sz="1000" dirty="0"/>
+          </a:p>
+        </p:txBody>
+      </p:sp>
+      <p:sp>
+        <p:nvSpPr>
+          <p:cNvPr id="14" name="Text 12"/>
+          <p:cNvSpPr txBox="1"/>
+          <p:nvPr/>
+        </p:nvSpPr>
+        <p:spPr>
+          <a:xfrm>
+            <a:off x="2743200" y="5596128"/>
+            <a:ext cx="3291840" cy="457200"/>
+          </a:xfrm>
+          <a:prstGeom prst="rect">
+            <a:avLst/>
+          </a:prstGeom>
+          <a:noFill/>
+          <a:ln/>
+        </p:spPr>
+        <p:txBody>
+          <a:bodyPr wrap="square" lIns="0" tIns="0" rIns="0" bIns="0" rtlCol="0" anchor="ctr"/>
+          <a:lstStyle/>
+          <a:p>
+            <a:pPr indent="0" marL="0">
+              <a:buNone/>
+            </a:pPr>
+            <a:r>
+              <a:rPr lang="en-US" sz="1800" b="1" dirty="0">
+                <a:solidFill>
+                  <a:srgbClr val="9146FF"/>
                 </a:solidFill>
                 <a:latin typeface="Courier New" pitchFamily="34" charset="0"/>
                 <a:ea typeface="Courier New" pitchFamily="34" charset="-122"/>
                 <a:cs typeface="Courier New" pitchFamily="34" charset="-120"/>
               </a:rPr>
-              <a:t>BUILT LIVE, DAILY</a:t>
-            </a:r>
-            <a:endParaRPr lang="en-US" sz="1000" dirty="0"/>
-          </a:p>
-        </p:txBody>
-      </p:sp>
-      <p:sp>
-        <p:nvSpPr>
-          <p:cNvPr id="11" name="Text 9"/>
-          <p:cNvSpPr txBox="1"/>
-          <p:nvPr/>
-        </p:nvSpPr>
-        <p:spPr>
-          <a:xfrm>
-            <a:off x="2743200" y="5596128"/>
-            <a:ext cx="3200400" cy="457200"/>
+              <a:t>twitch.tv/sandrise_ai</a:t>
+            </a:r>
+            <a:endParaRPr lang="en-US" sz="1800" dirty="0"/>
+          </a:p>
+        </p:txBody>
+      </p:sp>
+      <p:sp>
+        <p:nvSpPr>
+          <p:cNvPr id="15" name="Text 13"/>
+          <p:cNvSpPr txBox="1"/>
+          <p:nvPr/>
+        </p:nvSpPr>
+        <p:spPr>
+          <a:xfrm>
+            <a:off x="6035040" y="5303520"/>
+            <a:ext cx="3657600" cy="274320"/>
           </a:xfrm>
           <a:prstGeom prst="rect">
             <a:avLst/>
@@ -2026,55 +2156,30 @@
               <a:buNone/>
             </a:pPr>
             <a:r>
-              <a:rPr lang="en-US" sz="1800" b="1" dirty="0">
-                <a:solidFill>
-                  <a:srgbClr val="18181B"/>
+              <a:rPr lang="en-US" sz="1000" spc="300" kern="0" dirty="0">
+                <a:solidFill>
+                  <a:srgbClr val="52525B"/>
                 </a:solidFill>
                 <a:latin typeface="Courier New" pitchFamily="34" charset="0"/>
                 <a:ea typeface="Courier New" pitchFamily="34" charset="-122"/>
                 <a:cs typeface="Courier New" pitchFamily="34" charset="-120"/>
               </a:rPr>
-              <a:t>twitch.tv/sandrise_ai</a:t>
-            </a:r>
-            <a:endParaRPr lang="en-US" sz="1800" dirty="0"/>
-          </a:p>
-        </p:txBody>
-      </p:sp>
-      <p:sp>
-        <p:nvSpPr>
-          <p:cNvPr id="12" name="Shape 10"/>
-          <p:cNvSpPr/>
-          <p:nvPr/>
-        </p:nvSpPr>
-        <p:spPr>
-          <a:xfrm>
-            <a:off x="5779008" y="5303520"/>
-            <a:ext cx="13716" cy="914400"/>
-          </a:xfrm>
-          <a:prstGeom prst="rect">
-            <a:avLst/>
-          </a:prstGeom>
-          <a:solidFill>
-            <a:srgbClr val="E4E4E7"/>
-          </a:solidFill>
-          <a:ln w="12700">
-            <a:solidFill>
-              <a:srgbClr val="E4E4E7"/>
-            </a:solidFill>
-            <a:prstDash val="solid"/>
-          </a:ln>
-        </p:spPr>
-      </p:sp>
-      <p:sp>
-        <p:nvSpPr>
-          <p:cNvPr id="13" name="Text 11"/>
-          <p:cNvSpPr txBox="1"/>
-          <p:nvPr/>
-        </p:nvSpPr>
-        <p:spPr>
-          <a:xfrm>
-            <a:off x="5943600" y="5303520"/>
-            <a:ext cx="3657600" cy="274320"/>
+              <a:t>PORTFOLIO</a:t>
+            </a:r>
+            <a:endParaRPr lang="en-US" sz="1000" dirty="0"/>
+          </a:p>
+        </p:txBody>
+      </p:sp>
+      <p:sp>
+        <p:nvSpPr>
+          <p:cNvPr id="16" name="Text 14"/>
+          <p:cNvSpPr txBox="1"/>
+          <p:nvPr/>
+        </p:nvSpPr>
+        <p:spPr>
+          <a:xfrm>
+            <a:off x="6035040" y="5596128"/>
+            <a:ext cx="3657600" cy="457200"/>
           </a:xfrm>
           <a:prstGeom prst="rect">
             <a:avLst/>
@@ -2090,53 +2195,14 @@
               <a:buNone/>
             </a:pPr>
             <a:r>
-              <a:rPr lang="en-US" sz="1000" spc="300" kern="0" dirty="0">
-                <a:solidFill>
-                  <a:srgbClr val="52525B"/>
+              <a:rPr lang="en-US" sz="1800" b="1" dirty="0">
+                <a:solidFill>
+                  <a:srgbClr val="18181B"/>
                 </a:solidFill>
                 <a:latin typeface="Courier New" pitchFamily="34" charset="0"/>
                 <a:ea typeface="Courier New" pitchFamily="34" charset="-122"/>
                 <a:cs typeface="Courier New" pitchFamily="34" charset="-120"/>
               </a:rPr>
-              <a:t>PORTFOLIO</a:t>
-            </a:r>
-            <a:endParaRPr lang="en-US" sz="1000" dirty="0"/>
-          </a:p>
-        </p:txBody>
-      </p:sp>
-      <p:sp>
-        <p:nvSpPr>
-          <p:cNvPr id="14" name="Text 12"/>
-          <p:cNvSpPr txBox="1"/>
-          <p:nvPr/>
-        </p:nvSpPr>
-        <p:spPr>
-          <a:xfrm>
-            <a:off x="5943600" y="5596128"/>
-            <a:ext cx="3657600" cy="457200"/>
-          </a:xfrm>
-          <a:prstGeom prst="rect">
-            <a:avLst/>
-          </a:prstGeom>
-          <a:noFill/>
-          <a:ln/>
-        </p:spPr>
-        <p:txBody>
-          <a:bodyPr wrap="square" lIns="0" tIns="0" rIns="0" bIns="0" rtlCol="0" anchor="ctr"/>
-          <a:lstStyle/>
-          <a:p>
-            <a:pPr indent="0" marL="0">
-              <a:buNone/>
-            </a:pPr>
-            <a:r>
-              <a:rPr lang="en-US" sz="1800" b="1" dirty="0">
-                <a:solidFill>
-                  <a:srgbClr val="18181B"/>
-                </a:solidFill>
-                <a:latin typeface="Courier New" pitchFamily="34" charset="0"/>
-                <a:ea typeface="Courier New" pitchFamily="34" charset="-122"/>
-                <a:cs typeface="Courier New" pitchFamily="34" charset="-120"/>
-              </a:rPr>
               <a:t>sandrise.io/nicksanders</a:t>
             </a:r>
             <a:endParaRPr lang="en-US" sz="1800" dirty="0"/>
@@ -2145,39 +2211,14 @@
       </p:sp>
       <p:sp>
         <p:nvSpPr>
-          <p:cNvPr id="15" name="Shape 13"/>
-          <p:cNvSpPr/>
-          <p:nvPr/>
-        </p:nvSpPr>
-        <p:spPr>
-          <a:xfrm>
-            <a:off x="9436608" y="5303520"/>
-            <a:ext cx="13716" cy="914400"/>
-          </a:xfrm>
-          <a:prstGeom prst="rect">
-            <a:avLst/>
-          </a:prstGeom>
-          <a:solidFill>
-            <a:srgbClr val="E4E4E7"/>
-          </a:solidFill>
-          <a:ln w="12700">
-            <a:solidFill>
-              <a:srgbClr val="E4E4E7"/>
-            </a:solidFill>
-            <a:prstDash val="solid"/>
-          </a:ln>
-        </p:spPr>
-      </p:sp>
-      <p:sp>
-        <p:nvSpPr>
-          <p:cNvPr id="16" name="Text 14"/>
-          <p:cNvSpPr txBox="1"/>
-          <p:nvPr/>
-        </p:nvSpPr>
-        <p:spPr>
-          <a:xfrm>
-            <a:off x="9601200" y="5596128"/>
-            <a:ext cx="1920240" cy="457200"/>
+          <p:cNvPr id="17" name="Text 15"/>
+          <p:cNvSpPr txBox="1"/>
+          <p:nvPr/>
+        </p:nvSpPr>
+        <p:spPr>
+          <a:xfrm>
+            <a:off x="9692640" y="5596128"/>
+            <a:ext cx="1828800" cy="457200"/>
           </a:xfrm>
           <a:prstGeom prst="rect">
             <a:avLst/>
@@ -2221,7 +2262,7 @@
     <p:bg>
       <p:bgPr>
         <a:solidFill>
-          <a:srgbClr val="F4F4F5"/>
+          <a:srgbClr val="FAFAFA"/>
         </a:solidFill>
       </p:bgPr>
     </p:bg>
@@ -2247,8 +2288,8 @@
         </p:nvSpPr>
         <p:spPr>
           <a:xfrm>
-            <a:off x="640080" y="548640"/>
-            <a:ext cx="10911535" cy="365760"/>
+            <a:off x="640080" y="502920"/>
+            <a:ext cx="10911535" cy="320040"/>
           </a:xfrm>
           <a:prstGeom prst="rect">
             <a:avLst/>
@@ -2272,901 +2313,556 @@
                 <a:ea typeface="Courier New" pitchFamily="34" charset="-122"/>
                 <a:cs typeface="Courier New" pitchFamily="34" charset="-120"/>
               </a:rPr>
-              <a:t>HOW EACH PIECE EARNED ITS PLACE</a:t>
+              <a:t>THANK YOU</a:t>
             </a:r>
             <a:endParaRPr lang="en-US" sz="1300" dirty="0"/>
           </a:p>
         </p:txBody>
       </p:sp>
-      <p:graphicFrame>
-        <p:nvGraphicFramePr>
-          <p:cNvPr id="11" name="Table 0"/>
-          <p:cNvGraphicFramePr>
-            <a:graphicFrameLocks noGrp="1"/>
-          </p:cNvGraphicFramePr>
-          <p:nvPr>
-            <p:extLst>
-              <p:ext uri="{D42A27DB-BD31-4B8C-83A1-F6EECF244321}">
-                <p14:modId xmlns:p14="http://schemas.microsoft.com/office/powerpoint/2010/main" val="1579011935"/>
-              </p:ext>
-            </p:extLst>
-          </p:nvPr>
-        </p:nvGraphicFramePr>
-        <p:xfrm>
-          <a:off x="640080" y="1143000"/>
-          <a:ext cx="10911535" cy="914400"/>
-        </p:xfrm>
-        <a:graphic>
-          <a:graphicData uri="http://schemas.openxmlformats.org/drawingml/2006/table">
-            <a:tbl>
-              <a:tblPr/>
-              <a:tblGrid>
-                <a:gridCol w="1097280"/>
-                <a:gridCol w="4907128"/>
-                <a:gridCol w="4907128"/>
-              </a:tblGrid>
-              <a:tr h="0">
-                <a:tc>
-                  <a:txBody>
-                    <a:bodyPr/>
-                    <a:lstStyle/>
-                    <a:p>
-                      <a:pPr indent="0" marL="0">
-                        <a:buNone/>
-                      </a:pPr>
-                      <a:r>
-                        <a:rPr lang="en-US" sz="1000" dirty="0">
-                          <a:solidFill>
-                            <a:srgbClr val="52525B"/>
-                          </a:solidFill>
-                          <a:latin typeface="Courier New" pitchFamily="34" charset="0"/>
-                          <a:ea typeface="Courier New" pitchFamily="34" charset="-122"/>
-                          <a:cs typeface="Courier New" pitchFamily="34" charset="-120"/>
-                        </a:rPr>
-                        <a:t>2026</a:t>
-                      </a:r>
-                      <a:endParaRPr lang="en-US" sz="1000" dirty="0">
-                        <a:latin typeface="Courier New" charset="0"/>
-                        <a:ea typeface="Courier New" charset="0"/>
-                        <a:cs typeface="Courier New" charset="0"/>
-                      </a:endParaRPr>
-                    </a:p>
-                  </a:txBody>
-                  <a:tcPr marL="0" marR="146304" marT="91440" marB="91440" anchor="t">
-                    <a:lnL w="0" cap="flat" cmpd="sng" algn="ctr">
-                      <a:noFill/>
-                    </a:lnL>
-                    <a:lnR w="0" cap="flat" cmpd="sng" algn="ctr">
-                      <a:noFill/>
-                    </a:lnR>
-                    <a:lnT w="0" cap="flat" cmpd="sng" algn="ctr">
-                      <a:noFill/>
-                    </a:lnT>
-                    <a:lnB w="9525" cap="flat" cmpd="sng" algn="ctr">
-                      <a:solidFill>
-                        <a:srgbClr val="E4E4E7"/>
-                      </a:solidFill>
-                      <a:prstDash val="solid"/>
-                      <a:round/>
-                      <a:headEnd type="none" w="med" len="med"/>
-                      <a:tailEnd type="none" w="med" len="med"/>
-                    </a:lnB>
-                  </a:tcPr>
-                </a:tc>
-                <a:tc>
-                  <a:txBody>
-                    <a:bodyPr/>
-                    <a:lstStyle/>
-                    <a:p>
-                      <a:pPr indent="0" marL="0">
-                        <a:buNone/>
-                      </a:pPr>
-                      <a:r>
-                        <a:rPr lang="en-US" sz="1000" dirty="0">
-                          <a:solidFill>
-                            <a:srgbClr val="52525B"/>
-                          </a:solidFill>
-                          <a:latin typeface="Courier New" pitchFamily="34" charset="0"/>
-                          <a:ea typeface="Courier New" pitchFamily="34" charset="-122"/>
-                          <a:cs typeface="Courier New" pitchFamily="34" charset="-120"/>
-                        </a:rPr>
-                        <a:t>WHAT WE MEASURED</a:t>
-                      </a:r>
-                      <a:endParaRPr lang="en-US" sz="1000" dirty="0">
-                        <a:latin typeface="Courier New" charset="0"/>
-                        <a:ea typeface="Courier New" charset="0"/>
-                        <a:cs typeface="Courier New" charset="0"/>
-                      </a:endParaRPr>
-                    </a:p>
-                  </a:txBody>
-                  <a:tcPr marL="0" marR="146304" marT="91440" marB="91440" anchor="t">
-                    <a:lnL w="0" cap="flat" cmpd="sng" algn="ctr">
-                      <a:noFill/>
-                    </a:lnL>
-                    <a:lnR w="0" cap="flat" cmpd="sng" algn="ctr">
-                      <a:noFill/>
-                    </a:lnR>
-                    <a:lnT w="0" cap="flat" cmpd="sng" algn="ctr">
-                      <a:noFill/>
-                    </a:lnT>
-                    <a:lnB w="9525" cap="flat" cmpd="sng" algn="ctr">
-                      <a:solidFill>
-                        <a:srgbClr val="E4E4E7"/>
-                      </a:solidFill>
-                      <a:prstDash val="solid"/>
-                      <a:round/>
-                      <a:headEnd type="none" w="med" len="med"/>
-                      <a:tailEnd type="none" w="med" len="med"/>
-                    </a:lnB>
-                  </a:tcPr>
-                </a:tc>
-                <a:tc>
-                  <a:txBody>
-                    <a:bodyPr/>
-                    <a:lstStyle/>
-                    <a:p>
-                      <a:pPr indent="0" marL="0">
-                        <a:buNone/>
-                      </a:pPr>
-                      <a:r>
-                        <a:rPr lang="en-US" sz="1000" dirty="0">
-                          <a:solidFill>
-                            <a:srgbClr val="52525B"/>
-                          </a:solidFill>
-                          <a:latin typeface="Courier New" pitchFamily="34" charset="0"/>
-                          <a:ea typeface="Courier New" pitchFamily="34" charset="-122"/>
-                          <a:cs typeface="Courier New" pitchFamily="34" charset="-120"/>
-                        </a:rPr>
-                        <a:t>WHAT IT FORCED</a:t>
-                      </a:r>
-                      <a:endParaRPr lang="en-US" sz="1000" dirty="0">
-                        <a:latin typeface="Courier New" charset="0"/>
-                        <a:ea typeface="Courier New" charset="0"/>
-                        <a:cs typeface="Courier New" charset="0"/>
-                      </a:endParaRPr>
-                    </a:p>
-                  </a:txBody>
-                  <a:tcPr marL="0" marR="146304" marT="91440" marB="91440" anchor="t">
-                    <a:lnL w="0" cap="flat" cmpd="sng" algn="ctr">
-                      <a:noFill/>
-                    </a:lnL>
-                    <a:lnR w="0" cap="flat" cmpd="sng" algn="ctr">
-                      <a:noFill/>
-                    </a:lnR>
-                    <a:lnT w="0" cap="flat" cmpd="sng" algn="ctr">
-                      <a:noFill/>
-                    </a:lnT>
-                    <a:lnB w="9525" cap="flat" cmpd="sng" algn="ctr">
-                      <a:solidFill>
-                        <a:srgbClr val="E4E4E7"/>
-                      </a:solidFill>
-                      <a:prstDash val="solid"/>
-                      <a:round/>
-                      <a:headEnd type="none" w="med" len="med"/>
-                      <a:tailEnd type="none" w="med" len="med"/>
-                    </a:lnB>
-                  </a:tcPr>
-                </a:tc>
-              </a:tr>
-              <a:tr h="0">
-                <a:tc>
-                  <a:txBody>
-                    <a:bodyPr/>
-                    <a:lstStyle/>
-                    <a:p>
-                      <a:pPr indent="0" marL="0">
-                        <a:buNone/>
-                      </a:pPr>
-                      <a:r>
-                        <a:rPr lang="en-US" sz="1600" b="1" dirty="0">
-                          <a:solidFill>
-                            <a:srgbClr val="7A5A06"/>
-                          </a:solidFill>
-                          <a:latin typeface="Courier New" pitchFamily="34" charset="0"/>
-                          <a:ea typeface="Courier New" pitchFamily="34" charset="-122"/>
-                          <a:cs typeface="Courier New" pitchFamily="34" charset="-120"/>
-                        </a:rPr>
-                        <a:t>30 Jun</a:t>
-                      </a:r>
-                      <a:endParaRPr lang="en-US" sz="1600" dirty="0">
-                        <a:latin typeface="Courier New" charset="0"/>
-                        <a:ea typeface="Courier New" charset="0"/>
-                        <a:cs typeface="Courier New" charset="0"/>
-                      </a:endParaRPr>
-                    </a:p>
-                  </a:txBody>
-                  <a:tcPr marL="0" marR="146304" marT="91440" marB="91440" anchor="t">
-                    <a:lnL w="0" cap="flat" cmpd="sng" algn="ctr">
-                      <a:noFill/>
-                    </a:lnL>
-                    <a:lnR w="0" cap="flat" cmpd="sng" algn="ctr">
-                      <a:noFill/>
-                    </a:lnR>
-                    <a:lnT w="0" cap="flat" cmpd="sng" algn="ctr">
-                      <a:noFill/>
-                    </a:lnT>
-                    <a:lnB w="9525" cap="flat" cmpd="sng" algn="ctr">
-                      <a:solidFill>
-                        <a:srgbClr val="E4E4E7"/>
-                      </a:solidFill>
-                      <a:prstDash val="solid"/>
-                      <a:round/>
-                      <a:headEnd type="none" w="med" len="med"/>
-                      <a:tailEnd type="none" w="med" len="med"/>
-                    </a:lnB>
-                  </a:tcPr>
-                </a:tc>
-                <a:tc>
-                  <a:txBody>
-                    <a:bodyPr/>
-                    <a:lstStyle/>
-                    <a:p>
-                      <a:pPr indent="0" marL="0">
-                        <a:buNone/>
-                      </a:pPr>
-                      <a:r>
-                        <a:rPr lang="en-US" sz="1600" dirty="0">
-                          <a:solidFill>
-                            <a:srgbClr val="52525B"/>
-                          </a:solidFill>
-                          <a:latin typeface="Arial" pitchFamily="34" charset="0"/>
-                          <a:ea typeface="Arial" pitchFamily="34" charset="-122"/>
-                          <a:cs typeface="Arial" pitchFamily="34" charset="-120"/>
-                        </a:rPr>
-                        <a:t>37% of the code produced was thrown away; handoffs carried a description of the work</a:t>
-                      </a:r>
-                      <a:endParaRPr lang="en-US" sz="1600" dirty="0">
-                        <a:latin typeface="Arial" charset="0"/>
-                        <a:ea typeface="Arial" charset="0"/>
-                        <a:cs typeface="Arial" charset="0"/>
-                      </a:endParaRPr>
-                    </a:p>
-                  </a:txBody>
-                  <a:tcPr marL="0" marR="146304" marT="91440" marB="91440" anchor="t">
-                    <a:lnL w="0" cap="flat" cmpd="sng" algn="ctr">
-                      <a:noFill/>
-                    </a:lnL>
-                    <a:lnR w="0" cap="flat" cmpd="sng" algn="ctr">
-                      <a:noFill/>
-                    </a:lnR>
-                    <a:lnT w="0" cap="flat" cmpd="sng" algn="ctr">
-                      <a:noFill/>
-                    </a:lnT>
-                    <a:lnB w="9525" cap="flat" cmpd="sng" algn="ctr">
-                      <a:solidFill>
-                        <a:srgbClr val="E4E4E7"/>
-                      </a:solidFill>
-                      <a:prstDash val="solid"/>
-                      <a:round/>
-                      <a:headEnd type="none" w="med" len="med"/>
-                      <a:tailEnd type="none" w="med" len="med"/>
-                    </a:lnB>
-                  </a:tcPr>
-                </a:tc>
-                <a:tc>
-                  <a:txBody>
-                    <a:bodyPr/>
-                    <a:lstStyle/>
-                    <a:p>
-                      <a:pPr indent="0" marL="0">
-                        <a:buNone/>
-                      </a:pPr>
-                      <a:r>
-                        <a:rPr lang="en-US" sz="1600" b="1" dirty="0">
-                          <a:solidFill>
-                            <a:srgbClr val="18181B"/>
-                          </a:solidFill>
-                          <a:latin typeface="Arial" pitchFamily="34" charset="0"/>
-                          <a:ea typeface="Arial" pitchFamily="34" charset="-122"/>
-                          <a:cs typeface="Arial" pitchFamily="34" charset="-120"/>
-                        </a:rPr>
-                        <a:t>Lanes: one owner, claimed before the first keystroke. A handoff carries the branch.</a:t>
-                      </a:r>
-                      <a:endParaRPr lang="en-US" sz="1600" dirty="0">
-                        <a:latin typeface="Arial" charset="0"/>
-                        <a:ea typeface="Arial" charset="0"/>
-                        <a:cs typeface="Arial" charset="0"/>
-                      </a:endParaRPr>
-                    </a:p>
-                  </a:txBody>
-                  <a:tcPr marL="0" marR="146304" marT="91440" marB="91440" anchor="t">
-                    <a:lnL w="0" cap="flat" cmpd="sng" algn="ctr">
-                      <a:noFill/>
-                    </a:lnL>
-                    <a:lnR w="0" cap="flat" cmpd="sng" algn="ctr">
-                      <a:noFill/>
-                    </a:lnR>
-                    <a:lnT w="0" cap="flat" cmpd="sng" algn="ctr">
-                      <a:noFill/>
-                    </a:lnT>
-                    <a:lnB w="9525" cap="flat" cmpd="sng" algn="ctr">
-                      <a:solidFill>
-                        <a:srgbClr val="E4E4E7"/>
-                      </a:solidFill>
-                      <a:prstDash val="solid"/>
-                      <a:round/>
-                      <a:headEnd type="none" w="med" len="med"/>
-                      <a:tailEnd type="none" w="med" len="med"/>
-                    </a:lnB>
-                  </a:tcPr>
-                </a:tc>
-              </a:tr>
-              <a:tr h="0">
-                <a:tc>
-                  <a:txBody>
-                    <a:bodyPr/>
-                    <a:lstStyle/>
-                    <a:p>
-                      <a:pPr indent="0" marL="0">
-                        <a:buNone/>
-                      </a:pPr>
-                      <a:r>
-                        <a:rPr lang="en-US" sz="1600" b="1" dirty="0">
-                          <a:solidFill>
-                            <a:srgbClr val="7A5A06"/>
-                          </a:solidFill>
-                          <a:latin typeface="Courier New" pitchFamily="34" charset="0"/>
-                          <a:ea typeface="Courier New" pitchFamily="34" charset="-122"/>
-                          <a:cs typeface="Courier New" pitchFamily="34" charset="-120"/>
-                        </a:rPr>
-                        <a:t>30 Jun</a:t>
-                      </a:r>
-                      <a:endParaRPr lang="en-US" sz="1600" dirty="0">
-                        <a:latin typeface="Courier New" charset="0"/>
-                        <a:ea typeface="Courier New" charset="0"/>
-                        <a:cs typeface="Courier New" charset="0"/>
-                      </a:endParaRPr>
-                    </a:p>
-                  </a:txBody>
-                  <a:tcPr marL="0" marR="146304" marT="91440" marB="91440" anchor="t">
-                    <a:lnL w="0" cap="flat" cmpd="sng" algn="ctr">
-                      <a:noFill/>
-                    </a:lnL>
-                    <a:lnR w="0" cap="flat" cmpd="sng" algn="ctr">
-                      <a:noFill/>
-                    </a:lnR>
-                    <a:lnT w="0" cap="flat" cmpd="sng" algn="ctr">
-                      <a:noFill/>
-                    </a:lnT>
-                    <a:lnB w="9525" cap="flat" cmpd="sng" algn="ctr">
-                      <a:solidFill>
-                        <a:srgbClr val="E4E4E7"/>
-                      </a:solidFill>
-                      <a:prstDash val="solid"/>
-                      <a:round/>
-                      <a:headEnd type="none" w="med" len="med"/>
-                      <a:tailEnd type="none" w="med" len="med"/>
-                    </a:lnB>
-                  </a:tcPr>
-                </a:tc>
-                <a:tc>
-                  <a:txBody>
-                    <a:bodyPr/>
-                    <a:lstStyle/>
-                    <a:p>
-                      <a:pPr indent="0" marL="0">
-                        <a:buNone/>
-                      </a:pPr>
-                      <a:r>
-                        <a:rPr lang="en-US" sz="1600" dirty="0">
-                          <a:solidFill>
-                            <a:srgbClr val="52525B"/>
-                          </a:solidFill>
-                          <a:latin typeface="Arial" pitchFamily="34" charset="0"/>
-                          <a:ea typeface="Arial" pitchFamily="34" charset="-122"/>
-                          <a:cs typeface="Arial" pitchFamily="34" charset="-120"/>
-                        </a:rPr>
-                        <a:t>Replies waited up to 207 minutes on me as the relay</a:t>
-                      </a:r>
-                      <a:endParaRPr lang="en-US" sz="1600" dirty="0">
-                        <a:latin typeface="Arial" charset="0"/>
-                        <a:ea typeface="Arial" charset="0"/>
-                        <a:cs typeface="Arial" charset="0"/>
-                      </a:endParaRPr>
-                    </a:p>
-                  </a:txBody>
-                  <a:tcPr marL="0" marR="146304" marT="91440" marB="91440" anchor="t">
-                    <a:lnL w="0" cap="flat" cmpd="sng" algn="ctr">
-                      <a:noFill/>
-                    </a:lnL>
-                    <a:lnR w="0" cap="flat" cmpd="sng" algn="ctr">
-                      <a:noFill/>
-                    </a:lnR>
-                    <a:lnT w="0" cap="flat" cmpd="sng" algn="ctr">
-                      <a:noFill/>
-                    </a:lnT>
-                    <a:lnB w="9525" cap="flat" cmpd="sng" algn="ctr">
-                      <a:solidFill>
-                        <a:srgbClr val="E4E4E7"/>
-                      </a:solidFill>
-                      <a:prstDash val="solid"/>
-                      <a:round/>
-                      <a:headEnd type="none" w="med" len="med"/>
-                      <a:tailEnd type="none" w="med" len="med"/>
-                    </a:lnB>
-                  </a:tcPr>
-                </a:tc>
-                <a:tc>
-                  <a:txBody>
-                    <a:bodyPr/>
-                    <a:lstStyle/>
-                    <a:p>
-                      <a:pPr indent="0" marL="0">
-                        <a:buNone/>
-                      </a:pPr>
-                      <a:r>
-                        <a:rPr lang="en-US" sz="1600" b="1" dirty="0">
-                          <a:solidFill>
-                            <a:srgbClr val="18181B"/>
-                          </a:solidFill>
-                          <a:latin typeface="Arial" pitchFamily="34" charset="0"/>
-                          <a:ea typeface="Arial" pitchFamily="34" charset="-122"/>
-                          <a:cs typeface="Arial" pitchFamily="34" charset="-120"/>
-                        </a:rPr>
-                        <a:t>The inbox reaches an agent at its next tool call.</a:t>
-                      </a:r>
-                      <a:endParaRPr lang="en-US" sz="1600" dirty="0">
-                        <a:latin typeface="Arial" charset="0"/>
-                        <a:ea typeface="Arial" charset="0"/>
-                        <a:cs typeface="Arial" charset="0"/>
-                      </a:endParaRPr>
-                    </a:p>
-                  </a:txBody>
-                  <a:tcPr marL="0" marR="146304" marT="91440" marB="91440" anchor="t">
-                    <a:lnL w="0" cap="flat" cmpd="sng" algn="ctr">
-                      <a:noFill/>
-                    </a:lnL>
-                    <a:lnR w="0" cap="flat" cmpd="sng" algn="ctr">
-                      <a:noFill/>
-                    </a:lnR>
-                    <a:lnT w="0" cap="flat" cmpd="sng" algn="ctr">
-                      <a:noFill/>
-                    </a:lnT>
-                    <a:lnB w="9525" cap="flat" cmpd="sng" algn="ctr">
-                      <a:solidFill>
-                        <a:srgbClr val="E4E4E7"/>
-                      </a:solidFill>
-                      <a:prstDash val="solid"/>
-                      <a:round/>
-                      <a:headEnd type="none" w="med" len="med"/>
-                      <a:tailEnd type="none" w="med" len="med"/>
-                    </a:lnB>
-                  </a:tcPr>
-                </a:tc>
-              </a:tr>
-              <a:tr h="0">
-                <a:tc>
-                  <a:txBody>
-                    <a:bodyPr/>
-                    <a:lstStyle/>
-                    <a:p>
-                      <a:pPr indent="0" marL="0">
-                        <a:buNone/>
-                      </a:pPr>
-                      <a:r>
-                        <a:rPr lang="en-US" sz="1600" b="1" dirty="0">
-                          <a:solidFill>
-                            <a:srgbClr val="7A5A06"/>
-                          </a:solidFill>
-                          <a:latin typeface="Courier New" pitchFamily="34" charset="0"/>
-                          <a:ea typeface="Courier New" pitchFamily="34" charset="-122"/>
-                          <a:cs typeface="Courier New" pitchFamily="34" charset="-120"/>
-                        </a:rPr>
-                        <a:t>17 Jul</a:t>
-                      </a:r>
-                      <a:endParaRPr lang="en-US" sz="1600" dirty="0">
-                        <a:latin typeface="Courier New" charset="0"/>
-                        <a:ea typeface="Courier New" charset="0"/>
-                        <a:cs typeface="Courier New" charset="0"/>
-                      </a:endParaRPr>
-                    </a:p>
-                  </a:txBody>
-                  <a:tcPr marL="0" marR="146304" marT="91440" marB="91440" anchor="t">
-                    <a:lnL w="0" cap="flat" cmpd="sng" algn="ctr">
-                      <a:noFill/>
-                    </a:lnL>
-                    <a:lnR w="0" cap="flat" cmpd="sng" algn="ctr">
-                      <a:noFill/>
-                    </a:lnR>
-                    <a:lnT w="0" cap="flat" cmpd="sng" algn="ctr">
-                      <a:noFill/>
-                    </a:lnT>
-                    <a:lnB w="9525" cap="flat" cmpd="sng" algn="ctr">
-                      <a:solidFill>
-                        <a:srgbClr val="E4E4E7"/>
-                      </a:solidFill>
-                      <a:prstDash val="solid"/>
-                      <a:round/>
-                      <a:headEnd type="none" w="med" len="med"/>
-                      <a:tailEnd type="none" w="med" len="med"/>
-                    </a:lnB>
-                  </a:tcPr>
-                </a:tc>
-                <a:tc>
-                  <a:txBody>
-                    <a:bodyPr/>
-                    <a:lstStyle/>
-                    <a:p>
-                      <a:pPr indent="0" marL="0">
-                        <a:buNone/>
-                      </a:pPr>
-                      <a:r>
-                        <a:rPr lang="en-US" sz="1600" dirty="0">
-                          <a:solidFill>
-                            <a:srgbClr val="52525B"/>
-                          </a:solidFill>
-                          <a:latin typeface="Arial" pitchFamily="34" charset="0"/>
-                          <a:ea typeface="Arial" pitchFamily="34" charset="-122"/>
-                          <a:cs typeface="Arial" pitchFamily="34" charset="-120"/>
-                        </a:rPr>
-                        <a:t>7 approvals for every exchange; 0 requests for help had reached me</a:t>
-                      </a:r>
-                      <a:endParaRPr lang="en-US" sz="1600" dirty="0">
-                        <a:latin typeface="Arial" charset="0"/>
-                        <a:ea typeface="Arial" charset="0"/>
-                        <a:cs typeface="Arial" charset="0"/>
-                      </a:endParaRPr>
-                    </a:p>
-                  </a:txBody>
-                  <a:tcPr marL="0" marR="146304" marT="91440" marB="91440" anchor="t">
-                    <a:lnL w="0" cap="flat" cmpd="sng" algn="ctr">
-                      <a:noFill/>
-                    </a:lnL>
-                    <a:lnR w="0" cap="flat" cmpd="sng" algn="ctr">
-                      <a:noFill/>
-                    </a:lnR>
-                    <a:lnT w="0" cap="flat" cmpd="sng" algn="ctr">
-                      <a:noFill/>
-                    </a:lnT>
-                    <a:lnB w="9525" cap="flat" cmpd="sng" algn="ctr">
-                      <a:solidFill>
-                        <a:srgbClr val="E4E4E7"/>
-                      </a:solidFill>
-                      <a:prstDash val="solid"/>
-                      <a:round/>
-                      <a:headEnd type="none" w="med" len="med"/>
-                      <a:tailEnd type="none" w="med" len="med"/>
-                    </a:lnB>
-                  </a:tcPr>
-                </a:tc>
-                <a:tc>
-                  <a:txBody>
-                    <a:bodyPr/>
-                    <a:lstStyle/>
-                    <a:p>
-                      <a:pPr indent="0" marL="0">
-                        <a:buNone/>
-                      </a:pPr>
-                      <a:r>
-                        <a:rPr lang="en-US" sz="1600" b="1" dirty="0">
-                          <a:solidFill>
-                            <a:srgbClr val="18181B"/>
-                          </a:solidFill>
-                          <a:latin typeface="Arial" pitchFamily="34" charset="0"/>
-                          <a:ea typeface="Arial" pitchFamily="34" charset="-122"/>
-                          <a:cs typeface="Arial" pitchFamily="34" charset="-120"/>
-                        </a:rPr>
-                        <a:t>The human as a member. Agents ask with a deadline.</a:t>
-                      </a:r>
-                      <a:endParaRPr lang="en-US" sz="1600" dirty="0">
-                        <a:latin typeface="Arial" charset="0"/>
-                        <a:ea typeface="Arial" charset="0"/>
-                        <a:cs typeface="Arial" charset="0"/>
-                      </a:endParaRPr>
-                    </a:p>
-                  </a:txBody>
-                  <a:tcPr marL="0" marR="146304" marT="91440" marB="91440" anchor="t">
-                    <a:lnL w="0" cap="flat" cmpd="sng" algn="ctr">
-                      <a:noFill/>
-                    </a:lnL>
-                    <a:lnR w="0" cap="flat" cmpd="sng" algn="ctr">
-                      <a:noFill/>
-                    </a:lnR>
-                    <a:lnT w="0" cap="flat" cmpd="sng" algn="ctr">
-                      <a:noFill/>
-                    </a:lnT>
-                    <a:lnB w="9525" cap="flat" cmpd="sng" algn="ctr">
-                      <a:solidFill>
-                        <a:srgbClr val="E4E4E7"/>
-                      </a:solidFill>
-                      <a:prstDash val="solid"/>
-                      <a:round/>
-                      <a:headEnd type="none" w="med" len="med"/>
-                      <a:tailEnd type="none" w="med" len="med"/>
-                    </a:lnB>
-                  </a:tcPr>
-                </a:tc>
-              </a:tr>
-              <a:tr h="0">
-                <a:tc>
-                  <a:txBody>
-                    <a:bodyPr/>
-                    <a:lstStyle/>
-                    <a:p>
-                      <a:pPr indent="0" marL="0">
-                        <a:buNone/>
-                      </a:pPr>
-                      <a:r>
-                        <a:rPr lang="en-US" sz="1600" b="1" dirty="0">
-                          <a:solidFill>
-                            <a:srgbClr val="7A5A06"/>
-                          </a:solidFill>
-                          <a:latin typeface="Courier New" pitchFamily="34" charset="0"/>
-                          <a:ea typeface="Courier New" pitchFamily="34" charset="-122"/>
-                          <a:cs typeface="Courier New" pitchFamily="34" charset="-120"/>
-                        </a:rPr>
-                        <a:t>28 Jul</a:t>
-                      </a:r>
-                      <a:endParaRPr lang="en-US" sz="1600" dirty="0">
-                        <a:latin typeface="Courier New" charset="0"/>
-                        <a:ea typeface="Courier New" charset="0"/>
-                        <a:cs typeface="Courier New" charset="0"/>
-                      </a:endParaRPr>
-                    </a:p>
-                  </a:txBody>
-                  <a:tcPr marL="0" marR="146304" marT="91440" marB="91440" anchor="t">
-                    <a:lnL w="0" cap="flat" cmpd="sng" algn="ctr">
-                      <a:noFill/>
-                    </a:lnL>
-                    <a:lnR w="0" cap="flat" cmpd="sng" algn="ctr">
-                      <a:noFill/>
-                    </a:lnR>
-                    <a:lnT w="0" cap="flat" cmpd="sng" algn="ctr">
-                      <a:noFill/>
-                    </a:lnT>
-                    <a:lnB w="9525" cap="flat" cmpd="sng" algn="ctr">
-                      <a:solidFill>
-                        <a:srgbClr val="E4E4E7"/>
-                      </a:solidFill>
-                      <a:prstDash val="solid"/>
-                      <a:round/>
-                      <a:headEnd type="none" w="med" len="med"/>
-                      <a:tailEnd type="none" w="med" len="med"/>
-                    </a:lnB>
-                  </a:tcPr>
-                </a:tc>
-                <a:tc>
-                  <a:txBody>
-                    <a:bodyPr/>
-                    <a:lstStyle/>
-                    <a:p>
-                      <a:pPr indent="0" marL="0">
-                        <a:buNone/>
-                      </a:pPr>
-                      <a:r>
-                        <a:rPr lang="en-US" sz="1600" dirty="0">
-                          <a:solidFill>
-                            <a:srgbClr val="52525B"/>
-                          </a:solidFill>
-                          <a:latin typeface="Arial" pitchFamily="34" charset="0"/>
-                          <a:ea typeface="Arial" pitchFamily="34" charset="-122"/>
-                          <a:cs typeface="Arial" pitchFamily="34" charset="-120"/>
-                        </a:rPr>
-                        <a:t>“Done” meant the builder said so</a:t>
-                      </a:r>
-                      <a:endParaRPr lang="en-US" sz="1600" dirty="0">
-                        <a:latin typeface="Arial" charset="0"/>
-                        <a:ea typeface="Arial" charset="0"/>
-                        <a:cs typeface="Arial" charset="0"/>
-                      </a:endParaRPr>
-                    </a:p>
-                  </a:txBody>
-                  <a:tcPr marL="0" marR="146304" marT="91440" marB="91440" anchor="t">
-                    <a:lnL w="0" cap="flat" cmpd="sng" algn="ctr">
-                      <a:noFill/>
-                    </a:lnL>
-                    <a:lnR w="0" cap="flat" cmpd="sng" algn="ctr">
-                      <a:noFill/>
-                    </a:lnR>
-                    <a:lnT w="0" cap="flat" cmpd="sng" algn="ctr">
-                      <a:noFill/>
-                    </a:lnT>
-                    <a:lnB w="9525" cap="flat" cmpd="sng" algn="ctr">
-                      <a:solidFill>
-                        <a:srgbClr val="E4E4E7"/>
-                      </a:solidFill>
-                      <a:prstDash val="solid"/>
-                      <a:round/>
-                      <a:headEnd type="none" w="med" len="med"/>
-                      <a:tailEnd type="none" w="med" len="med"/>
-                    </a:lnB>
-                  </a:tcPr>
-                </a:tc>
-                <a:tc>
-                  <a:txBody>
-                    <a:bodyPr/>
-                    <a:lstStyle/>
-                    <a:p>
-                      <a:pPr indent="0" marL="0">
-                        <a:buNone/>
-                      </a:pPr>
-                      <a:r>
-                        <a:rPr lang="en-US" sz="1600" b="1" dirty="0">
-                          <a:solidFill>
-                            <a:srgbClr val="18181B"/>
-                          </a:solidFill>
-                          <a:latin typeface="Arial" pitchFamily="34" charset="0"/>
-                          <a:ea typeface="Arial" pitchFamily="34" charset="-122"/>
-                          <a:cs typeface="Arial" pitchFamily="34" charset="-120"/>
-                        </a:rPr>
-                        <a:t>Done is two claims: someone else accepts the outcome.</a:t>
-                      </a:r>
-                      <a:endParaRPr lang="en-US" sz="1600" dirty="0">
-                        <a:latin typeface="Arial" charset="0"/>
-                        <a:ea typeface="Arial" charset="0"/>
-                        <a:cs typeface="Arial" charset="0"/>
-                      </a:endParaRPr>
-                    </a:p>
-                  </a:txBody>
-                  <a:tcPr marL="0" marR="146304" marT="91440" marB="91440" anchor="t">
-                    <a:lnL w="0" cap="flat" cmpd="sng" algn="ctr">
-                      <a:noFill/>
-                    </a:lnL>
-                    <a:lnR w="0" cap="flat" cmpd="sng" algn="ctr">
-                      <a:noFill/>
-                    </a:lnR>
-                    <a:lnT w="0" cap="flat" cmpd="sng" algn="ctr">
-                      <a:noFill/>
-                    </a:lnT>
-                    <a:lnB w="9525" cap="flat" cmpd="sng" algn="ctr">
-                      <a:solidFill>
-                        <a:srgbClr val="E4E4E7"/>
-                      </a:solidFill>
-                      <a:prstDash val="solid"/>
-                      <a:round/>
-                      <a:headEnd type="none" w="med" len="med"/>
-                      <a:tailEnd type="none" w="med" len="med"/>
-                    </a:lnB>
-                  </a:tcPr>
-                </a:tc>
-              </a:tr>
-              <a:tr h="0">
-                <a:tc>
-                  <a:txBody>
-                    <a:bodyPr/>
-                    <a:lstStyle/>
-                    <a:p>
-                      <a:pPr indent="0" marL="0">
-                        <a:buNone/>
-                      </a:pPr>
-                      <a:r>
-                        <a:rPr lang="en-US" sz="1600" b="1" dirty="0">
-                          <a:solidFill>
-                            <a:srgbClr val="7A5A06"/>
-                          </a:solidFill>
-                          <a:latin typeface="Courier New" pitchFamily="34" charset="0"/>
-                          <a:ea typeface="Courier New" pitchFamily="34" charset="-122"/>
-                          <a:cs typeface="Courier New" pitchFamily="34" charset="-120"/>
-                        </a:rPr>
-                        <a:t>5 Sep</a:t>
-                      </a:r>
-                      <a:endParaRPr lang="en-US" sz="1600" dirty="0">
-                        <a:latin typeface="Courier New" charset="0"/>
-                        <a:ea typeface="Courier New" charset="0"/>
-                        <a:cs typeface="Courier New" charset="0"/>
-                      </a:endParaRPr>
-                    </a:p>
-                  </a:txBody>
-                  <a:tcPr marL="0" marR="146304" marT="91440" marB="91440" anchor="t">
-                    <a:lnL w="0" cap="flat" cmpd="sng" algn="ctr">
-                      <a:noFill/>
-                    </a:lnL>
-                    <a:lnR w="0" cap="flat" cmpd="sng" algn="ctr">
-                      <a:noFill/>
-                    </a:lnR>
-                    <a:lnT w="0" cap="flat" cmpd="sng" algn="ctr">
-                      <a:noFill/>
-                    </a:lnT>
-                    <a:lnB w="9525" cap="flat" cmpd="sng" algn="ctr">
-                      <a:solidFill>
-                        <a:srgbClr val="E4E4E7"/>
-                      </a:solidFill>
-                      <a:prstDash val="solid"/>
-                      <a:round/>
-                      <a:headEnd type="none" w="med" len="med"/>
-                      <a:tailEnd type="none" w="med" len="med"/>
-                    </a:lnB>
-                  </a:tcPr>
-                </a:tc>
-                <a:tc>
-                  <a:txBody>
-                    <a:bodyPr/>
-                    <a:lstStyle/>
-                    <a:p>
-                      <a:pPr indent="0" marL="0">
-                        <a:buNone/>
-                      </a:pPr>
-                      <a:r>
-                        <a:rPr lang="en-US" sz="1600" dirty="0">
-                          <a:solidFill>
-                            <a:srgbClr val="52525B"/>
-                          </a:solidFill>
-                          <a:latin typeface="Arial" pitchFamily="34" charset="0"/>
-                          <a:ea typeface="Arial" pitchFamily="34" charset="-122"/>
-                          <a:cs typeface="Arial" pitchFamily="34" charset="-120"/>
-                        </a:rPr>
-                        <a:t>An agent whose session was closed could not be reached</a:t>
-                      </a:r>
-                      <a:endParaRPr lang="en-US" sz="1600" dirty="0">
-                        <a:latin typeface="Arial" charset="0"/>
-                        <a:ea typeface="Arial" charset="0"/>
-                        <a:cs typeface="Arial" charset="0"/>
-                      </a:endParaRPr>
-                    </a:p>
-                  </a:txBody>
-                  <a:tcPr marL="0" marR="146304" marT="91440" marB="91440" anchor="t">
-                    <a:lnL w="0" cap="flat" cmpd="sng" algn="ctr">
-                      <a:noFill/>
-                    </a:lnL>
-                    <a:lnR w="0" cap="flat" cmpd="sng" algn="ctr">
-                      <a:noFill/>
-                    </a:lnR>
-                    <a:lnT w="0" cap="flat" cmpd="sng" algn="ctr">
-                      <a:noFill/>
-                    </a:lnT>
-                    <a:lnB w="9525" cap="flat" cmpd="sng" algn="ctr">
-                      <a:solidFill>
-                        <a:srgbClr val="E4E4E7"/>
-                      </a:solidFill>
-                      <a:prstDash val="solid"/>
-                      <a:round/>
-                      <a:headEnd type="none" w="med" len="med"/>
-                      <a:tailEnd type="none" w="med" len="med"/>
-                    </a:lnB>
-                  </a:tcPr>
-                </a:tc>
-                <a:tc>
-                  <a:txBody>
-                    <a:bodyPr/>
-                    <a:lstStyle/>
-                    <a:p>
-                      <a:pPr indent="0" marL="0">
-                        <a:buNone/>
-                      </a:pPr>
-                      <a:r>
-                        <a:rPr lang="en-US" sz="1600" b="1" dirty="0">
-                          <a:solidFill>
-                            <a:srgbClr val="18181B"/>
-                          </a:solidFill>
-                          <a:latin typeface="Arial" pitchFamily="34" charset="0"/>
-                          <a:ea typeface="Arial" pitchFamily="34" charset="-122"/>
-                          <a:cs typeface="Arial" pitchFamily="34" charset="-120"/>
-                        </a:rPr>
-                        <a:t>Wake: the agent comes back on a message — about 24 s cold, on a second machine.</a:t>
-                      </a:r>
-                      <a:endParaRPr lang="en-US" sz="1600" dirty="0">
-                        <a:latin typeface="Arial" charset="0"/>
-                        <a:ea typeface="Arial" charset="0"/>
-                        <a:cs typeface="Arial" charset="0"/>
-                      </a:endParaRPr>
-                    </a:p>
-                  </a:txBody>
-                  <a:tcPr marL="0" marR="146304" marT="91440" marB="91440" anchor="t">
-                    <a:lnL w="0" cap="flat" cmpd="sng" algn="ctr">
-                      <a:noFill/>
-                    </a:lnL>
-                    <a:lnR w="0" cap="flat" cmpd="sng" algn="ctr">
-                      <a:noFill/>
-                    </a:lnR>
-                    <a:lnT w="0" cap="flat" cmpd="sng" algn="ctr">
-                      <a:noFill/>
-                    </a:lnT>
-                    <a:lnB w="9525" cap="flat" cmpd="sng" algn="ctr">
-                      <a:solidFill>
-                        <a:srgbClr val="E4E4E7"/>
-                      </a:solidFill>
-                      <a:prstDash val="solid"/>
-                      <a:round/>
-                      <a:headEnd type="none" w="med" len="med"/>
-                      <a:tailEnd type="none" w="med" len="med"/>
-                    </a:lnB>
-                  </a:tcPr>
-                </a:tc>
-              </a:tr>
-            </a:tbl>
-          </a:graphicData>
-        </a:graphic>
-      </p:graphicFrame>
+      <p:sp>
+        <p:nvSpPr>
+          <p:cNvPr id="3" name="Text 1"/>
+          <p:cNvSpPr txBox="1"/>
+          <p:nvPr/>
+        </p:nvSpPr>
+        <p:spPr>
+          <a:xfrm>
+            <a:off x="640080" y="1188720"/>
+            <a:ext cx="5486400" cy="1005840"/>
+          </a:xfrm>
+          <a:prstGeom prst="rect">
+            <a:avLst/>
+          </a:prstGeom>
+          <a:noFill/>
+          <a:ln/>
+        </p:spPr>
+        <p:txBody>
+          <a:bodyPr wrap="square" lIns="0" tIns="0" rIns="0" bIns="0" rtlCol="0" anchor="ctr"/>
+          <a:lstStyle/>
+          <a:p>
+            <a:pPr indent="0" marL="0">
+              <a:buNone/>
+            </a:pPr>
+            <a:r>
+              <a:rPr lang="en-US" sz="5400" b="1" dirty="0">
+                <a:solidFill>
+                  <a:srgbClr val="18181B"/>
+                </a:solidFill>
+                <a:latin typeface="Arial" pitchFamily="34" charset="0"/>
+                <a:ea typeface="Arial" pitchFamily="34" charset="-122"/>
+                <a:cs typeface="Arial" pitchFamily="34" charset="-120"/>
+              </a:rPr>
+              <a:t>Questions?</a:t>
+            </a:r>
+            <a:endParaRPr lang="en-US" sz="5400" dirty="0"/>
+          </a:p>
+        </p:txBody>
+      </p:sp>
+      <p:sp>
+        <p:nvSpPr>
+          <p:cNvPr id="4" name="Shape 2"/>
+          <p:cNvSpPr/>
+          <p:nvPr/>
+        </p:nvSpPr>
+        <p:spPr>
+          <a:xfrm>
+            <a:off x="640080" y="2468880"/>
+            <a:ext cx="5760720" cy="914400"/>
+          </a:xfrm>
+          <a:prstGeom prst="roundRect">
+            <a:avLst>
+              <a:gd name="adj" fmla="val 12000"/>
+            </a:avLst>
+          </a:prstGeom>
+          <a:solidFill>
+            <a:srgbClr val="FFFFFF"/>
+          </a:solidFill>
+          <a:ln w="9525">
+            <a:solidFill>
+              <a:srgbClr val="E4E4E7"/>
+            </a:solidFill>
+            <a:prstDash val="solid"/>
+          </a:ln>
+        </p:spPr>
+      </p:sp>
+      <p:sp>
+        <p:nvSpPr>
+          <p:cNvPr id="5" name="Text 3"/>
+          <p:cNvSpPr txBox="1"/>
+          <p:nvPr/>
+        </p:nvSpPr>
+        <p:spPr>
+          <a:xfrm>
+            <a:off x="914400" y="2468880"/>
+            <a:ext cx="5303520" cy="914400"/>
+          </a:xfrm>
+          <a:prstGeom prst="rect">
+            <a:avLst/>
+          </a:prstGeom>
+          <a:noFill/>
+          <a:ln/>
+        </p:spPr>
+        <p:txBody>
+          <a:bodyPr wrap="square" lIns="0" tIns="0" rIns="0" bIns="0" rtlCol="0" anchor="ctr"/>
+          <a:lstStyle/>
+          <a:p>
+            <a:pPr indent="0" marL="0">
+              <a:buNone/>
+            </a:pPr>
+            <a:r>
+              <a:rPr lang="en-US" sz="2800" b="1" dirty="0">
+                <a:solidFill>
+                  <a:srgbClr val="A1A1AA"/>
+                </a:solidFill>
+                <a:latin typeface="Courier New" pitchFamily="34" charset="0"/>
+                <a:ea typeface="Courier New" pitchFamily="34" charset="-122"/>
+                <a:cs typeface="Courier New" pitchFamily="34" charset="-120"/>
+              </a:rPr>
+              <a:t>$ </a:t>
+            </a:r>
+            <a:pPr indent="0" marL="0">
+              <a:buNone/>
+            </a:pPr>
+            <a:r>
+              <a:rPr lang="en-US" sz="2800" b="1" dirty="0">
+                <a:solidFill>
+                  <a:srgbClr val="18181B"/>
+                </a:solidFill>
+                <a:latin typeface="Courier New" pitchFamily="34" charset="0"/>
+                <a:ea typeface="Courier New" pitchFamily="34" charset="-122"/>
+                <a:cs typeface="Courier New" pitchFamily="34" charset="-120"/>
+              </a:rPr>
+              <a:t>npx @musterd/cli init</a:t>
+            </a:r>
+            <a:endParaRPr lang="en-US" sz="2800" dirty="0"/>
+          </a:p>
+        </p:txBody>
+      </p:sp>
+      <p:sp>
+        <p:nvSpPr>
+          <p:cNvPr id="6" name="Text 4"/>
+          <p:cNvSpPr txBox="1"/>
+          <p:nvPr/>
+        </p:nvSpPr>
+        <p:spPr>
+          <a:xfrm>
+            <a:off x="640080" y="3611880"/>
+            <a:ext cx="5760720" cy="1005840"/>
+          </a:xfrm>
+          <a:prstGeom prst="rect">
+            <a:avLst/>
+          </a:prstGeom>
+          <a:noFill/>
+          <a:ln/>
+        </p:spPr>
+        <p:txBody>
+          <a:bodyPr wrap="square" lIns="0" tIns="0" rIns="0" bIns="0" rtlCol="0" anchor="ctr"/>
+          <a:lstStyle/>
+          <a:p>
+            <a:pPr indent="0" marL="0">
+              <a:buNone/>
+            </a:pPr>
+            <a:r>
+              <a:rPr lang="en-US" sz="1700" dirty="0">
+                <a:solidFill>
+                  <a:srgbClr val="52525B"/>
+                </a:solidFill>
+                <a:latin typeface="Arial" pitchFamily="34" charset="0"/>
+                <a:ea typeface="Arial" pitchFamily="34" charset="-122"/>
+                <a:cs typeface="Arial" pitchFamily="34" charset="-120"/>
+              </a:rPr>
+              <a:t>Open source. If you run more than one agent, try it with your team for two weeks. I'll sit with you for the first hour.</a:t>
+            </a:r>
+            <a:endParaRPr lang="en-US" sz="1700" dirty="0"/>
+          </a:p>
+        </p:txBody>
+      </p:sp>
+      <p:sp>
+        <p:nvSpPr>
+          <p:cNvPr id="7" name="Text 5"/>
+          <p:cNvSpPr txBox="1"/>
+          <p:nvPr/>
+        </p:nvSpPr>
+        <p:spPr>
+          <a:xfrm>
+            <a:off x="640080" y="4754880"/>
+            <a:ext cx="5760720" cy="822960"/>
+          </a:xfrm>
+          <a:prstGeom prst="rect">
+            <a:avLst/>
+          </a:prstGeom>
+          <a:noFill/>
+          <a:ln/>
+        </p:spPr>
+        <p:txBody>
+          <a:bodyPr wrap="square" lIns="0" tIns="0" rIns="0" bIns="0" rtlCol="0" anchor="ctr"/>
+          <a:lstStyle/>
+          <a:p>
+            <a:pPr indent="0" marL="0">
+              <a:buNone/>
+            </a:pPr>
+            <a:r>
+              <a:rPr lang="en-US" sz="1700" b="1" dirty="0">
+                <a:solidFill>
+                  <a:srgbClr val="18181B"/>
+                </a:solidFill>
+                <a:latin typeface="Arial" pitchFamily="34" charset="0"/>
+                <a:ea typeface="Arial" pitchFamily="34" charset="-122"/>
+                <a:cs typeface="Arial" pitchFamily="34" charset="-120"/>
+              </a:rPr>
+              <a:t>Bring your agents, from any harness.</a:t>
+            </a:r>
+            <a:endParaRPr lang="en-US" sz="1700" dirty="0"/>
+          </a:p>
+          <a:p>
+            <a:pPr indent="0" marL="0">
+              <a:buNone/>
+            </a:pPr>
+            <a:r>
+              <a:rPr lang="en-US" sz="1400" dirty="0">
+                <a:solidFill>
+                  <a:srgbClr val="52525B"/>
+                </a:solidFill>
+                <a:latin typeface="Arial" pitchFamily="34" charset="0"/>
+                <a:ea typeface="Arial" pitchFamily="34" charset="-122"/>
+                <a:cs typeface="Arial" pitchFamily="34" charset="-120"/>
+              </a:rPr>
+              <a:t>Claude Code · Codex · Cursor · opencode · musterd harness (coming)</a:t>
+            </a:r>
+            <a:endParaRPr lang="en-US" sz="1700" dirty="0"/>
+          </a:p>
+        </p:txBody>
+      </p:sp>
+      <p:sp>
+        <p:nvSpPr>
+          <p:cNvPr id="8" name="Shape 6"/>
+          <p:cNvSpPr/>
+          <p:nvPr/>
+        </p:nvSpPr>
+        <p:spPr>
+          <a:xfrm>
+            <a:off x="6766560" y="2194560"/>
+            <a:ext cx="4754880" cy="914400"/>
+          </a:xfrm>
+          <a:prstGeom prst="roundRect">
+            <a:avLst>
+              <a:gd name="adj" fmla="val 12000"/>
+            </a:avLst>
+          </a:prstGeom>
+          <a:solidFill>
+            <a:srgbClr val="FFFFFF"/>
+          </a:solidFill>
+          <a:ln w="9525">
+            <a:solidFill>
+              <a:srgbClr val="E4E4E7"/>
+            </a:solidFill>
+            <a:prstDash val="solid"/>
+          </a:ln>
+        </p:spPr>
+      </p:sp>
+      <p:sp>
+        <p:nvSpPr>
+          <p:cNvPr id="9" name="Shape 7"/>
+          <p:cNvSpPr/>
+          <p:nvPr/>
+        </p:nvSpPr>
+        <p:spPr>
+          <a:xfrm>
+            <a:off x="6949440" y="2395728"/>
+            <a:ext cx="512064" cy="512064"/>
+          </a:xfrm>
+          <a:prstGeom prst="roundRect">
+            <a:avLst>
+              <a:gd name="adj" fmla="val 17857"/>
+            </a:avLst>
+          </a:prstGeom>
+          <a:solidFill>
+            <a:srgbClr val="9146FF"/>
+          </a:solidFill>
+          <a:ln w="12700">
+            <a:solidFill>
+              <a:srgbClr val="9146FF"/>
+            </a:solidFill>
+            <a:prstDash val="solid"/>
+          </a:ln>
+        </p:spPr>
+      </p:sp>
+      <p:sp>
+        <p:nvSpPr>
+          <p:cNvPr id="10" name="Text 8"/>
+          <p:cNvSpPr txBox="1"/>
+          <p:nvPr/>
+        </p:nvSpPr>
+        <p:spPr>
+          <a:xfrm>
+            <a:off x="7635240" y="2304288"/>
+            <a:ext cx="3749040" cy="694944"/>
+          </a:xfrm>
+          <a:prstGeom prst="rect">
+            <a:avLst/>
+          </a:prstGeom>
+          <a:noFill/>
+          <a:ln/>
+        </p:spPr>
+        <p:txBody>
+          <a:bodyPr wrap="square" lIns="0" tIns="0" rIns="0" bIns="0" rtlCol="0" anchor="ctr"/>
+          <a:lstStyle/>
+          <a:p>
+            <a:pPr indent="0" marL="0">
+              <a:buNone/>
+            </a:pPr>
+            <a:r>
+              <a:rPr lang="en-US" sz="1700" b="1" dirty="0">
+                <a:solidFill>
+                  <a:srgbClr val="18181B"/>
+                </a:solidFill>
+                <a:latin typeface="Courier New" pitchFamily="34" charset="0"/>
+                <a:ea typeface="Courier New" pitchFamily="34" charset="-122"/>
+                <a:cs typeface="Courier New" pitchFamily="34" charset="-120"/>
+              </a:rPr>
+              <a:t>twitch.tv/sandrise_ai</a:t>
+            </a:r>
+            <a:endParaRPr lang="en-US" sz="1700" dirty="0"/>
+          </a:p>
+          <a:p>
+            <a:pPr indent="0" marL="0">
+              <a:buNone/>
+            </a:pPr>
+            <a:r>
+              <a:rPr lang="en-US" sz="1200" dirty="0">
+                <a:solidFill>
+                  <a:srgbClr val="52525B"/>
+                </a:solidFill>
+                <a:latin typeface="Arial" pitchFamily="34" charset="0"/>
+                <a:ea typeface="Arial" pitchFamily="34" charset="-122"/>
+                <a:cs typeface="Arial" pitchFamily="34" charset="-120"/>
+              </a:rPr>
+              <a:t>musterd, built live every day</a:t>
+            </a:r>
+            <a:endParaRPr lang="en-US" sz="1700" dirty="0"/>
+          </a:p>
+        </p:txBody>
+      </p:sp>
+      <p:sp>
+        <p:nvSpPr>
+          <p:cNvPr id="11" name="Shape 9"/>
+          <p:cNvSpPr/>
+          <p:nvPr/>
+        </p:nvSpPr>
+        <p:spPr>
+          <a:xfrm>
+            <a:off x="6766560" y="3291840"/>
+            <a:ext cx="4754880" cy="914400"/>
+          </a:xfrm>
+          <a:prstGeom prst="roundRect">
+            <a:avLst>
+              <a:gd name="adj" fmla="val 12000"/>
+            </a:avLst>
+          </a:prstGeom>
+          <a:solidFill>
+            <a:srgbClr val="FFFFFF"/>
+          </a:solidFill>
+          <a:ln w="9525">
+            <a:solidFill>
+              <a:srgbClr val="E4E4E7"/>
+            </a:solidFill>
+            <a:prstDash val="solid"/>
+          </a:ln>
+        </p:spPr>
+      </p:sp>
+      <p:sp>
+        <p:nvSpPr>
+          <p:cNvPr id="12" name="Shape 10"/>
+          <p:cNvSpPr/>
+          <p:nvPr/>
+        </p:nvSpPr>
+        <p:spPr>
+          <a:xfrm>
+            <a:off x="6949440" y="3493008"/>
+            <a:ext cx="512064" cy="512064"/>
+          </a:xfrm>
+          <a:prstGeom prst="roundRect">
+            <a:avLst>
+              <a:gd name="adj" fmla="val 17857"/>
+            </a:avLst>
+          </a:prstGeom>
+          <a:solidFill>
+            <a:srgbClr val="7A5A06"/>
+          </a:solidFill>
+          <a:ln w="12700">
+            <a:solidFill>
+              <a:srgbClr val="7A5A06"/>
+            </a:solidFill>
+            <a:prstDash val="solid"/>
+          </a:ln>
+        </p:spPr>
+      </p:sp>
+      <p:sp>
+        <p:nvSpPr>
+          <p:cNvPr id="13" name="Text 11"/>
+          <p:cNvSpPr txBox="1"/>
+          <p:nvPr/>
+        </p:nvSpPr>
+        <p:spPr>
+          <a:xfrm>
+            <a:off x="7635240" y="3401568"/>
+            <a:ext cx="3749040" cy="694944"/>
+          </a:xfrm>
+          <a:prstGeom prst="rect">
+            <a:avLst/>
+          </a:prstGeom>
+          <a:noFill/>
+          <a:ln/>
+        </p:spPr>
+        <p:txBody>
+          <a:bodyPr wrap="square" lIns="0" tIns="0" rIns="0" bIns="0" rtlCol="0" anchor="ctr"/>
+          <a:lstStyle/>
+          <a:p>
+            <a:pPr indent="0" marL="0">
+              <a:buNone/>
+            </a:pPr>
+            <a:r>
+              <a:rPr lang="en-US" sz="1700" b="1" dirty="0">
+                <a:solidFill>
+                  <a:srgbClr val="18181B"/>
+                </a:solidFill>
+                <a:latin typeface="Courier New" pitchFamily="34" charset="0"/>
+                <a:ea typeface="Courier New" pitchFamily="34" charset="-122"/>
+                <a:cs typeface="Courier New" pitchFamily="34" charset="-120"/>
+              </a:rPr>
+              <a:t>sandrise.io/nicksanders</a:t>
+            </a:r>
+            <a:endParaRPr lang="en-US" sz="1700" dirty="0"/>
+          </a:p>
+          <a:p>
+            <a:pPr indent="0" marL="0">
+              <a:buNone/>
+            </a:pPr>
+            <a:r>
+              <a:rPr lang="en-US" sz="1200" dirty="0">
+                <a:solidFill>
+                  <a:srgbClr val="52525B"/>
+                </a:solidFill>
+                <a:latin typeface="Arial" pitchFamily="34" charset="0"/>
+                <a:ea typeface="Arial" pitchFamily="34" charset="-122"/>
+                <a:cs typeface="Arial" pitchFamily="34" charset="-120"/>
+              </a:rPr>
+              <a:t>Portfolio</a:t>
+            </a:r>
+            <a:endParaRPr lang="en-US" sz="1700" dirty="0"/>
+          </a:p>
+        </p:txBody>
+      </p:sp>
+      <p:sp>
+        <p:nvSpPr>
+          <p:cNvPr id="14" name="Shape 12"/>
+          <p:cNvSpPr/>
+          <p:nvPr/>
+        </p:nvSpPr>
+        <p:spPr>
+          <a:xfrm>
+            <a:off x="6766560" y="4389120"/>
+            <a:ext cx="4754880" cy="914400"/>
+          </a:xfrm>
+          <a:prstGeom prst="roundRect">
+            <a:avLst>
+              <a:gd name="adj" fmla="val 12000"/>
+            </a:avLst>
+          </a:prstGeom>
+          <a:solidFill>
+            <a:srgbClr val="FFFFFF"/>
+          </a:solidFill>
+          <a:ln w="9525">
+            <a:solidFill>
+              <a:srgbClr val="E4E4E7"/>
+            </a:solidFill>
+            <a:prstDash val="solid"/>
+          </a:ln>
+        </p:spPr>
+      </p:sp>
+      <p:sp>
+        <p:nvSpPr>
+          <p:cNvPr id="15" name="Shape 13"/>
+          <p:cNvSpPr/>
+          <p:nvPr/>
+        </p:nvSpPr>
+        <p:spPr>
+          <a:xfrm>
+            <a:off x="6949440" y="4590288"/>
+            <a:ext cx="512064" cy="512064"/>
+          </a:xfrm>
+          <a:prstGeom prst="roundRect">
+            <a:avLst>
+              <a:gd name="adj" fmla="val 17857"/>
+            </a:avLst>
+          </a:prstGeom>
+          <a:solidFill>
+            <a:srgbClr val="E1AD01"/>
+          </a:solidFill>
+          <a:ln w="12700">
+            <a:solidFill>
+              <a:srgbClr val="E1AD01"/>
+            </a:solidFill>
+            <a:prstDash val="solid"/>
+          </a:ln>
+        </p:spPr>
+      </p:sp>
+      <p:sp>
+        <p:nvSpPr>
+          <p:cNvPr id="16" name="Text 14"/>
+          <p:cNvSpPr txBox="1"/>
+          <p:nvPr/>
+        </p:nvSpPr>
+        <p:spPr>
+          <a:xfrm>
+            <a:off x="7635240" y="4498848"/>
+            <a:ext cx="3749040" cy="694944"/>
+          </a:xfrm>
+          <a:prstGeom prst="rect">
+            <a:avLst/>
+          </a:prstGeom>
+          <a:noFill/>
+          <a:ln/>
+        </p:spPr>
+        <p:txBody>
+          <a:bodyPr wrap="square" lIns="0" tIns="0" rIns="0" bIns="0" rtlCol="0" anchor="ctr"/>
+          <a:lstStyle/>
+          <a:p>
+            <a:pPr indent="0" marL="0">
+              <a:buNone/>
+            </a:pPr>
+            <a:r>
+              <a:rPr lang="en-US" sz="1700" b="1" dirty="0">
+                <a:solidFill>
+                  <a:srgbClr val="18181B"/>
+                </a:solidFill>
+                <a:latin typeface="Courier New" pitchFamily="34" charset="0"/>
+                <a:ea typeface="Courier New" pitchFamily="34" charset="-122"/>
+                <a:cs typeface="Courier New" pitchFamily="34" charset="-120"/>
+              </a:rPr>
+              <a:t>musterd.io</a:t>
+            </a:r>
+            <a:endParaRPr lang="en-US" sz="1700" dirty="0"/>
+          </a:p>
+          <a:p>
+            <a:pPr indent="0" marL="0">
+              <a:buNone/>
+            </a:pPr>
+            <a:r>
+              <a:rPr lang="en-US" sz="1200" dirty="0">
+                <a:solidFill>
+                  <a:srgbClr val="52525B"/>
+                </a:solidFill>
+                <a:latin typeface="Arial" pitchFamily="34" charset="0"/>
+                <a:ea typeface="Arial" pitchFamily="34" charset="-122"/>
+                <a:cs typeface="Arial" pitchFamily="34" charset="-120"/>
+              </a:rPr>
+              <a:t>github.com/SandRiseStudio/musterd</a:t>
+            </a:r>
+            <a:endParaRPr lang="en-US" sz="1700" dirty="0"/>
+          </a:p>
+        </p:txBody>
+      </p:sp>
     </p:spTree>
   </p:cSld>
   <p:clrMapOvr>
@@ -3207,8 +2903,8 @@
         </p:nvSpPr>
         <p:spPr>
           <a:xfrm>
-            <a:off x="640080" y="548640"/>
-            <a:ext cx="10911535" cy="365760"/>
+            <a:off x="640080" y="502920"/>
+            <a:ext cx="10911535" cy="320040"/>
           </a:xfrm>
           <a:prstGeom prst="rect">
             <a:avLst/>
@@ -3232,7 +2928,7 @@
                 <a:ea typeface="Courier New" pitchFamily="34" charset="-122"/>
                 <a:cs typeface="Courier New" pitchFamily="34" charset="-120"/>
               </a:rPr>
-              <a:t>WHERE IT STARTED</a:t>
+              <a:t>WHERE IT STARTED · JUNE 2026</a:t>
             </a:r>
             <a:endParaRPr lang="en-US" sz="1300" dirty="0"/>
           </a:p>
@@ -3246,66 +2942,24 @@
         </p:nvSpPr>
         <p:spPr>
           <a:xfrm>
-            <a:off x="640080" y="1051560"/>
-            <a:ext cx="1097280" cy="914400"/>
-          </a:xfrm>
-          <a:prstGeom prst="rect">
-            <a:avLst/>
-          </a:prstGeom>
-          <a:noFill/>
-          <a:ln/>
-        </p:spPr>
-        <p:txBody>
-          <a:bodyPr wrap="square" lIns="0" tIns="0" rIns="0" bIns="0" rtlCol="0" anchor="t"/>
-          <a:lstStyle/>
-          <a:p>
-            <a:pPr indent="0" marL="0">
-              <a:buNone/>
-            </a:pPr>
-            <a:r>
-              <a:rPr lang="en-US" sz="9600" b="1" dirty="0">
-                <a:solidFill>
-                  <a:srgbClr val="E1AD01"/>
-                </a:solidFill>
-                <a:latin typeface="Arial" pitchFamily="34" charset="0"/>
-                <a:ea typeface="Arial" pitchFamily="34" charset="-122"/>
-                <a:cs typeface="Arial" pitchFamily="34" charset="-120"/>
-              </a:rPr>
-              <a:t>“</a:t>
-            </a:r>
-            <a:endParaRPr lang="en-US" sz="9600" dirty="0"/>
-          </a:p>
-        </p:txBody>
-      </p:sp>
-      <p:sp>
-        <p:nvSpPr>
-          <p:cNvPr id="4" name="Text 2"/>
-          <p:cNvSpPr txBox="1"/>
-          <p:nvPr/>
-        </p:nvSpPr>
-        <p:spPr>
-          <a:xfrm>
-            <a:off x="640080" y="1874520"/>
-            <a:ext cx="10362895" cy="2651760"/>
-          </a:xfrm>
-          <a:prstGeom prst="rect">
-            <a:avLst/>
-          </a:prstGeom>
-          <a:noFill/>
-          <a:ln/>
-        </p:spPr>
-        <p:txBody>
-          <a:bodyPr wrap="square" lIns="0" tIns="0" rIns="0" bIns="0" rtlCol="0" anchor="t"/>
-          <a:lstStyle/>
-          <a:p>
-            <a:pPr indent="0" marL="0">
-              <a:lnSpc>
-                <a:spcPct val="115000"/>
-              </a:lnSpc>
-              <a:buNone/>
-            </a:pPr>
-            <a:r>
-              <a:rPr lang="en-US" sz="3000" b="1" dirty="0">
+            <a:off x="640080" y="868680"/>
+            <a:ext cx="10911535" cy="731520"/>
+          </a:xfrm>
+          <a:prstGeom prst="rect">
+            <a:avLst/>
+          </a:prstGeom>
+          <a:noFill/>
+          <a:ln/>
+        </p:spPr>
+        <p:txBody>
+          <a:bodyPr wrap="square" lIns="0" tIns="0" rIns="0" bIns="0" rtlCol="0" anchor="ctr"/>
+          <a:lstStyle/>
+          <a:p>
+            <a:pPr indent="0" marL="0">
+              <a:buNone/>
+            </a:pPr>
+            <a:r>
+              <a:rPr lang="en-US" sz="3600" b="1" dirty="0">
                 <a:solidFill>
                   <a:srgbClr val="18181B"/>
                 </a:solidFill>
@@ -3313,11 +2967,38 @@
                 <a:ea typeface="Arial" pitchFamily="34" charset="-122"/>
                 <a:cs typeface="Arial" pitchFamily="34" charset="-120"/>
               </a:rPr>
-              <a:t>When one agent wanted to ask a question or provide a status update, they would tell me something, which I would then copy and paste to the other agent.</a:t>
-            </a:r>
-            <a:endParaRPr lang="en-US" sz="3000" dirty="0"/>
-          </a:p>
-        </p:txBody>
+              <a:t>At first, I was the coordination layer.</a:t>
+            </a:r>
+            <a:endParaRPr lang="en-US" sz="3600" dirty="0"/>
+          </a:p>
+        </p:txBody>
+      </p:sp>
+      <p:sp>
+        <p:nvSpPr>
+          <p:cNvPr id="4" name="Shape 2"/>
+          <p:cNvSpPr/>
+          <p:nvPr/>
+        </p:nvSpPr>
+        <p:spPr>
+          <a:xfrm>
+            <a:off x="640080" y="2103120"/>
+            <a:ext cx="457200" cy="457200"/>
+          </a:xfrm>
+          <a:prstGeom prst="roundRect">
+            <a:avLst>
+              <a:gd name="adj" fmla="val 16000"/>
+            </a:avLst>
+          </a:prstGeom>
+          <a:solidFill>
+            <a:srgbClr val="E1AD01"/>
+          </a:solidFill>
+          <a:ln w="12700">
+            <a:solidFill>
+              <a:srgbClr val="E1AD01"/>
+            </a:solidFill>
+            <a:prstDash val="solid"/>
+          </a:ln>
+        </p:spPr>
       </p:sp>
       <p:sp>
         <p:nvSpPr>
@@ -3327,8 +3008,8 @@
         </p:nvSpPr>
         <p:spPr>
           <a:xfrm>
-            <a:off x="640080" y="4754880"/>
-            <a:ext cx="10911535" cy="457200"/>
+            <a:off x="640080" y="2103120"/>
+            <a:ext cx="457200" cy="457200"/>
           </a:xfrm>
           <a:prstGeom prst="rect">
             <a:avLst/>
@@ -3340,21 +3021,608 @@
           <a:bodyPr wrap="square" lIns="0" tIns="0" rIns="0" bIns="0" rtlCol="0" anchor="ctr"/>
           <a:lstStyle/>
           <a:p>
-            <a:pPr indent="0" marL="0">
-              <a:buNone/>
-            </a:pPr>
-            <a:r>
-              <a:rPr lang="en-US" sz="1400" dirty="0">
-                <a:solidFill>
-                  <a:srgbClr val="52525B"/>
+            <a:pPr algn="ctr" indent="0" marL="0">
+              <a:buNone/>
+            </a:pPr>
+            <a:r>
+              <a:rPr lang="en-US" sz="1600" b="1" dirty="0">
+                <a:solidFill>
+                  <a:srgbClr val="18181B"/>
                 </a:solidFill>
                 <a:latin typeface="Courier New" pitchFamily="34" charset="0"/>
                 <a:ea typeface="Courier New" pitchFamily="34" charset="-122"/>
                 <a:cs typeface="Courier New" pitchFamily="34" charset="-120"/>
               </a:rPr>
-              <a:t>— Nick Sanders, June 2026</a:t>
-            </a:r>
-            <a:endParaRPr lang="en-US" sz="1400" dirty="0"/>
+              <a:t>1</a:t>
+            </a:r>
+            <a:endParaRPr lang="en-US" sz="1600" dirty="0"/>
+          </a:p>
+        </p:txBody>
+      </p:sp>
+      <p:sp>
+        <p:nvSpPr>
+          <p:cNvPr id="6" name="Text 4"/>
+          <p:cNvSpPr txBox="1"/>
+          <p:nvPr/>
+        </p:nvSpPr>
+        <p:spPr>
+          <a:xfrm>
+            <a:off x="1325880" y="2011680"/>
+            <a:ext cx="5394960" cy="640080"/>
+          </a:xfrm>
+          <a:prstGeom prst="rect">
+            <a:avLst/>
+          </a:prstGeom>
+          <a:noFill/>
+          <a:ln/>
+        </p:spPr>
+        <p:txBody>
+          <a:bodyPr wrap="square" lIns="0" tIns="0" rIns="0" bIns="0" rtlCol="0" anchor="ctr"/>
+          <a:lstStyle/>
+          <a:p>
+            <a:pPr indent="0" marL="0">
+              <a:buNone/>
+            </a:pPr>
+            <a:r>
+              <a:rPr lang="en-US" sz="1900" b="1" dirty="0">
+                <a:solidFill>
+                  <a:srgbClr val="18181B"/>
+                </a:solidFill>
+                <a:latin typeface="Arial" pitchFamily="34" charset="0"/>
+                <a:ea typeface="Arial" pitchFamily="34" charset="-122"/>
+                <a:cs typeface="Arial" pitchFamily="34" charset="-120"/>
+              </a:rPr>
+              <a:t>Copy-pasting every question and status update between sessions</a:t>
+            </a:r>
+            <a:endParaRPr lang="en-US" sz="1900" dirty="0"/>
+          </a:p>
+        </p:txBody>
+      </p:sp>
+      <p:sp>
+        <p:nvSpPr>
+          <p:cNvPr id="7" name="Shape 5"/>
+          <p:cNvSpPr/>
+          <p:nvPr/>
+        </p:nvSpPr>
+        <p:spPr>
+          <a:xfrm>
+            <a:off x="640080" y="3017520"/>
+            <a:ext cx="457200" cy="457200"/>
+          </a:xfrm>
+          <a:prstGeom prst="roundRect">
+            <a:avLst>
+              <a:gd name="adj" fmla="val 16000"/>
+            </a:avLst>
+          </a:prstGeom>
+          <a:solidFill>
+            <a:srgbClr val="E1AD01"/>
+          </a:solidFill>
+          <a:ln w="12700">
+            <a:solidFill>
+              <a:srgbClr val="E1AD01"/>
+            </a:solidFill>
+            <a:prstDash val="solid"/>
+          </a:ln>
+        </p:spPr>
+      </p:sp>
+      <p:sp>
+        <p:nvSpPr>
+          <p:cNvPr id="8" name="Text 6"/>
+          <p:cNvSpPr txBox="1"/>
+          <p:nvPr/>
+        </p:nvSpPr>
+        <p:spPr>
+          <a:xfrm>
+            <a:off x="640080" y="3017520"/>
+            <a:ext cx="457200" cy="457200"/>
+          </a:xfrm>
+          <a:prstGeom prst="rect">
+            <a:avLst/>
+          </a:prstGeom>
+          <a:noFill/>
+          <a:ln/>
+        </p:spPr>
+        <p:txBody>
+          <a:bodyPr wrap="square" lIns="0" tIns="0" rIns="0" bIns="0" rtlCol="0" anchor="ctr"/>
+          <a:lstStyle/>
+          <a:p>
+            <a:pPr algn="ctr" indent="0" marL="0">
+              <a:buNone/>
+            </a:pPr>
+            <a:r>
+              <a:rPr lang="en-US" sz="1600" b="1" dirty="0">
+                <a:solidFill>
+                  <a:srgbClr val="18181B"/>
+                </a:solidFill>
+                <a:latin typeface="Courier New" pitchFamily="34" charset="0"/>
+                <a:ea typeface="Courier New" pitchFamily="34" charset="-122"/>
+                <a:cs typeface="Courier New" pitchFamily="34" charset="-120"/>
+              </a:rPr>
+              <a:t>2</a:t>
+            </a:r>
+            <a:endParaRPr lang="en-US" sz="1600" dirty="0"/>
+          </a:p>
+        </p:txBody>
+      </p:sp>
+      <p:sp>
+        <p:nvSpPr>
+          <p:cNvPr id="9" name="Text 7"/>
+          <p:cNvSpPr txBox="1"/>
+          <p:nvPr/>
+        </p:nvSpPr>
+        <p:spPr>
+          <a:xfrm>
+            <a:off x="1325880" y="2926080"/>
+            <a:ext cx="5394960" cy="640080"/>
+          </a:xfrm>
+          <a:prstGeom prst="rect">
+            <a:avLst/>
+          </a:prstGeom>
+          <a:noFill/>
+          <a:ln/>
+        </p:spPr>
+        <p:txBody>
+          <a:bodyPr wrap="square" lIns="0" tIns="0" rIns="0" bIns="0" rtlCol="0" anchor="ctr"/>
+          <a:lstStyle/>
+          <a:p>
+            <a:pPr indent="0" marL="0">
+              <a:buNone/>
+            </a:pPr>
+            <a:r>
+              <a:rPr lang="en-US" sz="1900" b="1" dirty="0">
+                <a:solidFill>
+                  <a:srgbClr val="18181B"/>
+                </a:solidFill>
+                <a:latin typeface="Arial" pitchFamily="34" charset="0"/>
+                <a:ea typeface="Arial" pitchFamily="34" charset="-122"/>
+                <a:cs typeface="Arial" pitchFamily="34" charset="-120"/>
+              </a:rPr>
+              <a:t>Losing track of which session had done what, on which branch</a:t>
+            </a:r>
+            <a:endParaRPr lang="en-US" sz="1900" dirty="0"/>
+          </a:p>
+        </p:txBody>
+      </p:sp>
+      <p:sp>
+        <p:nvSpPr>
+          <p:cNvPr id="10" name="Shape 8"/>
+          <p:cNvSpPr/>
+          <p:nvPr/>
+        </p:nvSpPr>
+        <p:spPr>
+          <a:xfrm>
+            <a:off x="640080" y="3931920"/>
+            <a:ext cx="457200" cy="457200"/>
+          </a:xfrm>
+          <a:prstGeom prst="roundRect">
+            <a:avLst>
+              <a:gd name="adj" fmla="val 16000"/>
+            </a:avLst>
+          </a:prstGeom>
+          <a:solidFill>
+            <a:srgbClr val="E1AD01"/>
+          </a:solidFill>
+          <a:ln w="12700">
+            <a:solidFill>
+              <a:srgbClr val="E1AD01"/>
+            </a:solidFill>
+            <a:prstDash val="solid"/>
+          </a:ln>
+        </p:spPr>
+      </p:sp>
+      <p:sp>
+        <p:nvSpPr>
+          <p:cNvPr id="11" name="Text 9"/>
+          <p:cNvSpPr txBox="1"/>
+          <p:nvPr/>
+        </p:nvSpPr>
+        <p:spPr>
+          <a:xfrm>
+            <a:off x="640080" y="3931920"/>
+            <a:ext cx="457200" cy="457200"/>
+          </a:xfrm>
+          <a:prstGeom prst="rect">
+            <a:avLst/>
+          </a:prstGeom>
+          <a:noFill/>
+          <a:ln/>
+        </p:spPr>
+        <p:txBody>
+          <a:bodyPr wrap="square" lIns="0" tIns="0" rIns="0" bIns="0" rtlCol="0" anchor="ctr"/>
+          <a:lstStyle/>
+          <a:p>
+            <a:pPr algn="ctr" indent="0" marL="0">
+              <a:buNone/>
+            </a:pPr>
+            <a:r>
+              <a:rPr lang="en-US" sz="1600" b="1" dirty="0">
+                <a:solidFill>
+                  <a:srgbClr val="18181B"/>
+                </a:solidFill>
+                <a:latin typeface="Courier New" pitchFamily="34" charset="0"/>
+                <a:ea typeface="Courier New" pitchFamily="34" charset="-122"/>
+                <a:cs typeface="Courier New" pitchFamily="34" charset="-120"/>
+              </a:rPr>
+              <a:t>3</a:t>
+            </a:r>
+            <a:endParaRPr lang="en-US" sz="1600" dirty="0"/>
+          </a:p>
+        </p:txBody>
+      </p:sp>
+      <p:sp>
+        <p:nvSpPr>
+          <p:cNvPr id="12" name="Text 10"/>
+          <p:cNvSpPr txBox="1"/>
+          <p:nvPr/>
+        </p:nvSpPr>
+        <p:spPr>
+          <a:xfrm>
+            <a:off x="1325880" y="3840480"/>
+            <a:ext cx="5394960" cy="640080"/>
+          </a:xfrm>
+          <a:prstGeom prst="rect">
+            <a:avLst/>
+          </a:prstGeom>
+          <a:noFill/>
+          <a:ln/>
+        </p:spPr>
+        <p:txBody>
+          <a:bodyPr wrap="square" lIns="0" tIns="0" rIns="0" bIns="0" rtlCol="0" anchor="ctr"/>
+          <a:lstStyle/>
+          <a:p>
+            <a:pPr indent="0" marL="0">
+              <a:buNone/>
+            </a:pPr>
+            <a:r>
+              <a:rPr lang="en-US" sz="1900" b="1" dirty="0">
+                <a:solidFill>
+                  <a:srgbClr val="18181B"/>
+                </a:solidFill>
+                <a:latin typeface="Arial" pitchFamily="34" charset="0"/>
+                <a:ea typeface="Arial" pitchFamily="34" charset="-122"/>
+                <a:cs typeface="Arial" pitchFamily="34" charset="-120"/>
+              </a:rPr>
+              <a:t>Writing a hand-off prompt for every new session</a:t>
+            </a:r>
+            <a:endParaRPr lang="en-US" sz="1900" dirty="0"/>
+          </a:p>
+        </p:txBody>
+      </p:sp>
+      <p:sp>
+        <p:nvSpPr>
+          <p:cNvPr id="13" name="Shape 11"/>
+          <p:cNvSpPr/>
+          <p:nvPr/>
+        </p:nvSpPr>
+        <p:spPr>
+          <a:xfrm>
+            <a:off x="640080" y="4846320"/>
+            <a:ext cx="457200" cy="457200"/>
+          </a:xfrm>
+          <a:prstGeom prst="roundRect">
+            <a:avLst>
+              <a:gd name="adj" fmla="val 16000"/>
+            </a:avLst>
+          </a:prstGeom>
+          <a:solidFill>
+            <a:srgbClr val="E1AD01"/>
+          </a:solidFill>
+          <a:ln w="12700">
+            <a:solidFill>
+              <a:srgbClr val="E1AD01"/>
+            </a:solidFill>
+            <a:prstDash val="solid"/>
+          </a:ln>
+        </p:spPr>
+      </p:sp>
+      <p:sp>
+        <p:nvSpPr>
+          <p:cNvPr id="14" name="Text 12"/>
+          <p:cNvSpPr txBox="1"/>
+          <p:nvPr/>
+        </p:nvSpPr>
+        <p:spPr>
+          <a:xfrm>
+            <a:off x="640080" y="4846320"/>
+            <a:ext cx="457200" cy="457200"/>
+          </a:xfrm>
+          <a:prstGeom prst="rect">
+            <a:avLst/>
+          </a:prstGeom>
+          <a:noFill/>
+          <a:ln/>
+        </p:spPr>
+        <p:txBody>
+          <a:bodyPr wrap="square" lIns="0" tIns="0" rIns="0" bIns="0" rtlCol="0" anchor="ctr"/>
+          <a:lstStyle/>
+          <a:p>
+            <a:pPr algn="ctr" indent="0" marL="0">
+              <a:buNone/>
+            </a:pPr>
+            <a:r>
+              <a:rPr lang="en-US" sz="1600" b="1" dirty="0">
+                <a:solidFill>
+                  <a:srgbClr val="18181B"/>
+                </a:solidFill>
+                <a:latin typeface="Courier New" pitchFamily="34" charset="0"/>
+                <a:ea typeface="Courier New" pitchFamily="34" charset="-122"/>
+                <a:cs typeface="Courier New" pitchFamily="34" charset="-120"/>
+              </a:rPr>
+              <a:t>4</a:t>
+            </a:r>
+            <a:endParaRPr lang="en-US" sz="1600" dirty="0"/>
+          </a:p>
+        </p:txBody>
+      </p:sp>
+      <p:sp>
+        <p:nvSpPr>
+          <p:cNvPr id="15" name="Text 13"/>
+          <p:cNvSpPr txBox="1"/>
+          <p:nvPr/>
+        </p:nvSpPr>
+        <p:spPr>
+          <a:xfrm>
+            <a:off x="1325880" y="4754880"/>
+            <a:ext cx="5394960" cy="640080"/>
+          </a:xfrm>
+          <a:prstGeom prst="rect">
+            <a:avLst/>
+          </a:prstGeom>
+          <a:noFill/>
+          <a:ln/>
+        </p:spPr>
+        <p:txBody>
+          <a:bodyPr wrap="square" lIns="0" tIns="0" rIns="0" bIns="0" rtlCol="0" anchor="ctr"/>
+          <a:lstStyle/>
+          <a:p>
+            <a:pPr indent="0" marL="0">
+              <a:buNone/>
+            </a:pPr>
+            <a:r>
+              <a:rPr lang="en-US" sz="1900" b="1" dirty="0">
+                <a:solidFill>
+                  <a:srgbClr val="18181B"/>
+                </a:solidFill>
+                <a:latin typeface="Arial" pitchFamily="34" charset="0"/>
+                <a:ea typeface="Arial" pitchFamily="34" charset="-122"/>
+                <a:cs typeface="Arial" pitchFamily="34" charset="-120"/>
+              </a:rPr>
+              <a:t>Work done twice, or built on something unfinished</a:t>
+            </a:r>
+            <a:endParaRPr lang="en-US" sz="1900" dirty="0"/>
+          </a:p>
+        </p:txBody>
+      </p:sp>
+      <p:sp>
+        <p:nvSpPr>
+          <p:cNvPr id="16" name="Shape 14"/>
+          <p:cNvSpPr/>
+          <p:nvPr/>
+        </p:nvSpPr>
+        <p:spPr>
+          <a:xfrm>
+            <a:off x="6858000" y="1828800"/>
+            <a:ext cx="4663440" cy="3931920"/>
+          </a:xfrm>
+          <a:prstGeom prst="roundRect">
+            <a:avLst>
+              <a:gd name="adj" fmla="val 2791"/>
+            </a:avLst>
+          </a:prstGeom>
+          <a:solidFill>
+            <a:srgbClr val="FFFFFF"/>
+          </a:solidFill>
+          <a:ln w="9525">
+            <a:solidFill>
+              <a:srgbClr val="E4E4E7"/>
+            </a:solidFill>
+            <a:prstDash val="solid"/>
+          </a:ln>
+        </p:spPr>
+      </p:sp>
+      <p:sp>
+        <p:nvSpPr>
+          <p:cNvPr id="17" name="Text 15"/>
+          <p:cNvSpPr txBox="1"/>
+          <p:nvPr/>
+        </p:nvSpPr>
+        <p:spPr>
+          <a:xfrm>
+            <a:off x="7178040" y="2057400"/>
+            <a:ext cx="4114800" cy="274320"/>
+          </a:xfrm>
+          <a:prstGeom prst="rect">
+            <a:avLst/>
+          </a:prstGeom>
+          <a:noFill/>
+          <a:ln/>
+        </p:spPr>
+        <p:txBody>
+          <a:bodyPr wrap="square" lIns="0" tIns="0" rIns="0" bIns="0" rtlCol="0" anchor="ctr"/>
+          <a:lstStyle/>
+          <a:p>
+            <a:pPr indent="0" marL="0">
+              <a:buNone/>
+            </a:pPr>
+            <a:r>
+              <a:rPr lang="en-US" sz="1000" spc="200" kern="0" dirty="0">
+                <a:solidFill>
+                  <a:srgbClr val="7A5A06"/>
+                </a:solidFill>
+                <a:latin typeface="Courier New" pitchFamily="34" charset="0"/>
+                <a:ea typeface="Courier New" pitchFamily="34" charset="-122"/>
+                <a:cs typeface="Courier New" pitchFamily="34" charset="-120"/>
+              </a:rPr>
+              <a:t>THREE AGENTS · ONE FEATURE · A DAY AND A HALF</a:t>
+            </a:r>
+            <a:endParaRPr lang="en-US" sz="1000" dirty="0"/>
+          </a:p>
+        </p:txBody>
+      </p:sp>
+      <p:sp>
+        <p:nvSpPr>
+          <p:cNvPr id="18" name="Text 16"/>
+          <p:cNvSpPr txBox="1"/>
+          <p:nvPr/>
+        </p:nvSpPr>
+        <p:spPr>
+          <a:xfrm>
+            <a:off x="7178040" y="2377440"/>
+            <a:ext cx="4114800" cy="1645920"/>
+          </a:xfrm>
+          <a:prstGeom prst="rect">
+            <a:avLst/>
+          </a:prstGeom>
+          <a:noFill/>
+          <a:ln/>
+        </p:spPr>
+        <p:txBody>
+          <a:bodyPr wrap="square" lIns="0" tIns="0" rIns="0" bIns="0" rtlCol="0" anchor="ctr"/>
+          <a:lstStyle/>
+          <a:p>
+            <a:pPr indent="0" marL="0">
+              <a:buNone/>
+            </a:pPr>
+            <a:r>
+              <a:rPr lang="en-US" sz="11000" b="1" dirty="0">
+                <a:solidFill>
+                  <a:srgbClr val="8F6B00"/>
+                </a:solidFill>
+                <a:latin typeface="Arial" pitchFamily="34" charset="0"/>
+                <a:ea typeface="Arial" pitchFamily="34" charset="-122"/>
+                <a:cs typeface="Arial" pitchFamily="34" charset="-120"/>
+              </a:rPr>
+              <a:t>37%</a:t>
+            </a:r>
+            <a:endParaRPr lang="en-US" sz="11000" dirty="0"/>
+          </a:p>
+        </p:txBody>
+      </p:sp>
+      <p:sp>
+        <p:nvSpPr>
+          <p:cNvPr id="19" name="Text 17"/>
+          <p:cNvSpPr txBox="1"/>
+          <p:nvPr/>
+        </p:nvSpPr>
+        <p:spPr>
+          <a:xfrm>
+            <a:off x="7178040" y="4069080"/>
+            <a:ext cx="4114800" cy="548640"/>
+          </a:xfrm>
+          <a:prstGeom prst="rect">
+            <a:avLst/>
+          </a:prstGeom>
+          <a:noFill/>
+          <a:ln/>
+        </p:spPr>
+        <p:txBody>
+          <a:bodyPr wrap="square" lIns="0" tIns="0" rIns="0" bIns="0" rtlCol="0" anchor="ctr"/>
+          <a:lstStyle/>
+          <a:p>
+            <a:pPr indent="0" marL="0">
+              <a:buNone/>
+            </a:pPr>
+            <a:r>
+              <a:rPr lang="en-US" sz="1700" dirty="0">
+                <a:solidFill>
+                  <a:srgbClr val="52525B"/>
+                </a:solidFill>
+                <a:latin typeface="Arial" pitchFamily="34" charset="0"/>
+                <a:ea typeface="Arial" pitchFamily="34" charset="-122"/>
+                <a:cs typeface="Arial" pitchFamily="34" charset="-120"/>
+              </a:rPr>
+              <a:t>of the code they produced was thrown away.</a:t>
+            </a:r>
+            <a:endParaRPr lang="en-US" sz="1700" dirty="0"/>
+          </a:p>
+        </p:txBody>
+      </p:sp>
+      <p:sp>
+        <p:nvSpPr>
+          <p:cNvPr id="20" name="Shape 18"/>
+          <p:cNvSpPr/>
+          <p:nvPr/>
+        </p:nvSpPr>
+        <p:spPr>
+          <a:xfrm>
+            <a:off x="7178040" y="4846320"/>
+            <a:ext cx="2596896" cy="228600"/>
+          </a:xfrm>
+          <a:prstGeom prst="rect">
+            <a:avLst/>
+          </a:prstGeom>
+          <a:solidFill>
+            <a:srgbClr val="A1A1AA"/>
+          </a:solidFill>
+          <a:ln w="12700">
+            <a:solidFill>
+              <a:srgbClr val="A1A1AA"/>
+            </a:solidFill>
+            <a:prstDash val="solid"/>
+          </a:ln>
+        </p:spPr>
+      </p:sp>
+      <p:sp>
+        <p:nvSpPr>
+          <p:cNvPr id="21" name="Shape 19"/>
+          <p:cNvSpPr/>
+          <p:nvPr/>
+        </p:nvSpPr>
+        <p:spPr>
+          <a:xfrm>
+            <a:off x="9774936" y="4846320"/>
+            <a:ext cx="1517904" cy="228600"/>
+          </a:xfrm>
+          <a:prstGeom prst="rect">
+            <a:avLst/>
+          </a:prstGeom>
+          <a:solidFill>
+            <a:srgbClr val="E1AD01"/>
+          </a:solidFill>
+          <a:ln w="12700">
+            <a:solidFill>
+              <a:srgbClr val="E1AD01"/>
+            </a:solidFill>
+            <a:prstDash val="solid"/>
+          </a:ln>
+        </p:spPr>
+      </p:sp>
+      <p:sp>
+        <p:nvSpPr>
+          <p:cNvPr id="22" name="Text 20"/>
+          <p:cNvSpPr txBox="1"/>
+          <p:nvPr/>
+        </p:nvSpPr>
+        <p:spPr>
+          <a:xfrm>
+            <a:off x="7178040" y="5212080"/>
+            <a:ext cx="4114800" cy="274320"/>
+          </a:xfrm>
+          <a:prstGeom prst="rect">
+            <a:avLst/>
+          </a:prstGeom>
+          <a:noFill/>
+          <a:ln/>
+        </p:spPr>
+        <p:txBody>
+          <a:bodyPr wrap="square" lIns="0" tIns="0" rIns="0" bIns="0" rtlCol="0" anchor="ctr"/>
+          <a:lstStyle/>
+          <a:p>
+            <a:pPr indent="0" marL="0">
+              <a:buNone/>
+            </a:pPr>
+            <a:r>
+              <a:rPr lang="en-US" sz="1100" dirty="0">
+                <a:solidFill>
+                  <a:srgbClr val="52525B"/>
+                </a:solidFill>
+                <a:latin typeface="Courier New" pitchFamily="34" charset="0"/>
+                <a:ea typeface="Courier New" pitchFamily="34" charset="-122"/>
+                <a:cs typeface="Courier New" pitchFamily="34" charset="-120"/>
+              </a:rPr>
+              <a:t>■ reached main    ■ thrown away</a:t>
+            </a:r>
+            <a:endParaRPr lang="en-US" sz="1100" dirty="0"/>
           </a:p>
         </p:txBody>
       </p:sp>
@@ -3398,8 +3666,8 @@
         </p:nvSpPr>
         <p:spPr>
           <a:xfrm>
-            <a:off x="640080" y="548640"/>
-            <a:ext cx="10911535" cy="365760"/>
+            <a:off x="640080" y="502920"/>
+            <a:ext cx="10911535" cy="320040"/>
           </a:xfrm>
           <a:prstGeom prst="rect">
             <a:avLst/>
@@ -3423,7 +3691,7 @@
                 <a:ea typeface="Courier New" pitchFamily="34" charset="-122"/>
                 <a:cs typeface="Courier New" pitchFamily="34" charset="-120"/>
               </a:rPr>
-              <a:t>THE PROBLEM</a:t>
+              <a:t>WHAT CHANGES</a:t>
             </a:r>
             <a:endParaRPr lang="en-US" sz="1300" dirty="0"/>
           </a:p>
@@ -3437,8 +3705,8 @@
         </p:nvSpPr>
         <p:spPr>
           <a:xfrm>
-            <a:off x="640080" y="1097280"/>
-            <a:ext cx="10911535" cy="822960"/>
+            <a:off x="640080" y="868680"/>
+            <a:ext cx="10911535" cy="731520"/>
           </a:xfrm>
           <a:prstGeom prst="rect">
             <a:avLst/>
@@ -3454,7 +3722,7 @@
               <a:buNone/>
             </a:pPr>
             <a:r>
-              <a:rPr lang="en-US" sz="4000" b="1" dirty="0">
+              <a:rPr lang="en-US" sz="3600" b="1" dirty="0">
                 <a:solidFill>
                   <a:srgbClr val="18181B"/>
                 </a:solidFill>
@@ -3462,22 +3730,49 @@
                 <a:ea typeface="Arial" pitchFamily="34" charset="-122"/>
                 <a:cs typeface="Arial" pitchFamily="34" charset="-120"/>
               </a:rPr>
-              <a:t>The second agent is where it breaks.</a:t>
-            </a:r>
-            <a:endParaRPr lang="en-US" sz="4000" dirty="0"/>
-          </a:p>
-        </p:txBody>
-      </p:sp>
-      <p:sp>
-        <p:nvSpPr>
-          <p:cNvPr id="4" name="Text 2"/>
-          <p:cNvSpPr txBox="1"/>
-          <p:nvPr/>
-        </p:nvSpPr>
-        <p:spPr>
-          <a:xfrm>
-            <a:off x="640080" y="2286000"/>
-            <a:ext cx="4572000" cy="2377440"/>
+              <a:t>What changes when your agents work as one team.</a:t>
+            </a:r>
+            <a:endParaRPr lang="en-US" sz="3600" dirty="0"/>
+          </a:p>
+        </p:txBody>
+      </p:sp>
+      <p:sp>
+        <p:nvSpPr>
+          <p:cNvPr id="4" name="Shape 2"/>
+          <p:cNvSpPr/>
+          <p:nvPr/>
+        </p:nvSpPr>
+        <p:spPr>
+          <a:xfrm>
+            <a:off x="640080" y="1920240"/>
+            <a:ext cx="5318608" cy="2011680"/>
+          </a:xfrm>
+          <a:prstGeom prst="roundRect">
+            <a:avLst>
+              <a:gd name="adj" fmla="val 5455"/>
+            </a:avLst>
+          </a:prstGeom>
+          <a:solidFill>
+            <a:srgbClr val="FFFFFF"/>
+          </a:solidFill>
+          <a:ln w="9525">
+            <a:solidFill>
+              <a:srgbClr val="E4E4E7"/>
+            </a:solidFill>
+            <a:prstDash val="solid"/>
+          </a:ln>
+        </p:spPr>
+      </p:sp>
+      <p:sp>
+        <p:nvSpPr>
+          <p:cNvPr id="5" name="Text 3"/>
+          <p:cNvSpPr txBox="1"/>
+          <p:nvPr/>
+        </p:nvSpPr>
+        <p:spPr>
+          <a:xfrm>
+            <a:off x="914400" y="2103120"/>
+            <a:ext cx="4769968" cy="457200"/>
           </a:xfrm>
           <a:prstGeom prst="rect">
             <a:avLst/>
@@ -3493,30 +3788,121 @@
               <a:buNone/>
             </a:pPr>
             <a:r>
-              <a:rPr lang="en-US" sz="15000" b="1" dirty="0">
-                <a:solidFill>
-                  <a:srgbClr val="8F6B00"/>
-                </a:solidFill>
-                <a:latin typeface="Arial" pitchFamily="34" charset="0"/>
-                <a:ea typeface="Arial" pitchFamily="34" charset="-122"/>
-                <a:cs typeface="Arial" pitchFamily="34" charset="-120"/>
-              </a:rPr>
-              <a:t>37%</a:t>
-            </a:r>
-            <a:endParaRPr lang="en-US" sz="15000" dirty="0"/>
-          </a:p>
-        </p:txBody>
-      </p:sp>
-      <p:sp>
-        <p:nvSpPr>
-          <p:cNvPr id="5" name="Text 3"/>
-          <p:cNvSpPr txBox="1"/>
-          <p:nvPr/>
-        </p:nvSpPr>
-        <p:spPr>
-          <a:xfrm>
-            <a:off x="5486400" y="2651760"/>
-            <a:ext cx="6065215" cy="1828800"/>
+              <a:rPr lang="en-US" sz="2100" b="1" dirty="0">
+                <a:solidFill>
+                  <a:srgbClr val="18181B"/>
+                </a:solidFill>
+                <a:latin typeface="Arial" pitchFamily="34" charset="0"/>
+                <a:ea typeface="Arial" pitchFamily="34" charset="-122"/>
+                <a:cs typeface="Arial" pitchFamily="34" charset="-120"/>
+              </a:rPr>
+              <a:t>Ownership</a:t>
+            </a:r>
+            <a:endParaRPr lang="en-US" sz="2100" dirty="0"/>
+          </a:p>
+        </p:txBody>
+      </p:sp>
+      <p:sp>
+        <p:nvSpPr>
+          <p:cNvPr id="6" name="Text 4"/>
+          <p:cNvSpPr txBox="1"/>
+          <p:nvPr/>
+        </p:nvSpPr>
+        <p:spPr>
+          <a:xfrm>
+            <a:off x="914400" y="2651760"/>
+            <a:ext cx="4769968" cy="1188720"/>
+          </a:xfrm>
+          <a:prstGeom prst="rect">
+            <a:avLst/>
+          </a:prstGeom>
+          <a:noFill/>
+          <a:ln/>
+        </p:spPr>
+        <p:txBody>
+          <a:bodyPr wrap="square" lIns="0" tIns="0" rIns="0" bIns="0" rtlCol="0" anchor="t"/>
+          <a:lstStyle/>
+          <a:p>
+            <a:pPr marL="342900" indent="-342900">
+              <a:spcAft>
+                <a:spcPts val="600"/>
+              </a:spcAft>
+              <a:buSzPct val="100000"/>
+              <a:buChar char="•"/>
+            </a:pPr>
+            <a:r>
+              <a:rPr lang="en-US" sz="1500" dirty="0">
+                <a:solidFill>
+                  <a:srgbClr val="52525B"/>
+                </a:solidFill>
+                <a:latin typeface="Arial" pitchFamily="34" charset="0"/>
+                <a:ea typeface="Arial" pitchFamily="34" charset="-122"/>
+                <a:cs typeface="Arial" pitchFamily="34" charset="-120"/>
+              </a:rPr>
+              <a:t>Work is claimed before the first edit</a:t>
+            </a:r>
+            <a:endParaRPr lang="en-US" sz="1500" dirty="0"/>
+          </a:p>
+          <a:p>
+            <a:pPr marL="342900" indent="-342900">
+              <a:spcAft>
+                <a:spcPts val="600"/>
+              </a:spcAft>
+              <a:buSzPct val="100000"/>
+              <a:buChar char="•"/>
+            </a:pPr>
+            <a:r>
+              <a:rPr lang="en-US" sz="1500" dirty="0">
+                <a:solidFill>
+                  <a:srgbClr val="52525B"/>
+                </a:solidFill>
+                <a:latin typeface="Arial" pitchFamily="34" charset="0"/>
+                <a:ea typeface="Arial" pitchFamily="34" charset="-122"/>
+                <a:cs typeface="Arial" pitchFamily="34" charset="-120"/>
+              </a:rPr>
+              <a:t>Overlapping claims raise a warning</a:t>
+            </a:r>
+            <a:endParaRPr lang="en-US" sz="1500" dirty="0"/>
+          </a:p>
+        </p:txBody>
+      </p:sp>
+      <p:sp>
+        <p:nvSpPr>
+          <p:cNvPr id="7" name="Shape 5"/>
+          <p:cNvSpPr/>
+          <p:nvPr/>
+        </p:nvSpPr>
+        <p:spPr>
+          <a:xfrm>
+            <a:off x="6233008" y="1920240"/>
+            <a:ext cx="5318608" cy="2011680"/>
+          </a:xfrm>
+          <a:prstGeom prst="roundRect">
+            <a:avLst>
+              <a:gd name="adj" fmla="val 5455"/>
+            </a:avLst>
+          </a:prstGeom>
+          <a:solidFill>
+            <a:srgbClr val="FFFFFF"/>
+          </a:solidFill>
+          <a:ln w="9525">
+            <a:solidFill>
+              <a:srgbClr val="E4E4E7"/>
+            </a:solidFill>
+            <a:prstDash val="solid"/>
+          </a:ln>
+        </p:spPr>
+      </p:sp>
+      <p:sp>
+        <p:nvSpPr>
+          <p:cNvPr id="8" name="Text 6"/>
+          <p:cNvSpPr txBox="1"/>
+          <p:nvPr/>
+        </p:nvSpPr>
+        <p:spPr>
+          <a:xfrm>
+            <a:off x="6507328" y="2103120"/>
+            <a:ext cx="4769968" cy="457200"/>
           </a:xfrm>
           <a:prstGeom prst="rect">
             <a:avLst/>
@@ -3532,7 +3918,50 @@
               <a:buNone/>
             </a:pPr>
             <a:r>
-              <a:rPr lang="en-US" sz="2200" dirty="0">
+              <a:rPr lang="en-US" sz="2100" b="1" dirty="0">
+                <a:solidFill>
+                  <a:srgbClr val="18181B"/>
+                </a:solidFill>
+                <a:latin typeface="Arial" pitchFamily="34" charset="0"/>
+                <a:ea typeface="Arial" pitchFamily="34" charset="-122"/>
+                <a:cs typeface="Arial" pitchFamily="34" charset="-120"/>
+              </a:rPr>
+              <a:t>Messages reach agents mid-task</a:t>
+            </a:r>
+            <a:endParaRPr lang="en-US" sz="2100" dirty="0"/>
+          </a:p>
+        </p:txBody>
+      </p:sp>
+      <p:sp>
+        <p:nvSpPr>
+          <p:cNvPr id="9" name="Text 7"/>
+          <p:cNvSpPr txBox="1"/>
+          <p:nvPr/>
+        </p:nvSpPr>
+        <p:spPr>
+          <a:xfrm>
+            <a:off x="6507328" y="2651760"/>
+            <a:ext cx="4769968" cy="1188720"/>
+          </a:xfrm>
+          <a:prstGeom prst="rect">
+            <a:avLst/>
+          </a:prstGeom>
+          <a:noFill/>
+          <a:ln/>
+        </p:spPr>
+        <p:txBody>
+          <a:bodyPr wrap="square" lIns="0" tIns="0" rIns="0" bIns="0" rtlCol="0" anchor="t"/>
+          <a:lstStyle/>
+          <a:p>
+            <a:pPr marL="342900" indent="-342900">
+              <a:spcAft>
+                <a:spcPts val="600"/>
+              </a:spcAft>
+              <a:buSzPct val="100000"/>
+              <a:buChar char="•"/>
+            </a:pPr>
+            <a:r>
+              <a:rPr lang="en-US" sz="1500" dirty="0">
                 <a:solidFill>
                   <a:srgbClr val="52525B"/>
                 </a:solidFill>
@@ -3540,9 +3969,311 @@
                 <a:ea typeface="Arial" pitchFamily="34" charset="-122"/>
                 <a:cs typeface="Arial" pitchFamily="34" charset="-120"/>
               </a:rPr>
-              <a:t>of the code three agents produced on one feature was thrown away. Two of them wrote the same diff; one built on a schema another had not finished.</a:t>
-            </a:r>
-            <a:endParaRPr lang="en-US" sz="2200" dirty="0"/>
+              <a:t>Delivered at the next tool call</a:t>
+            </a:r>
+            <a:endParaRPr lang="en-US" sz="1500" dirty="0"/>
+          </a:p>
+          <a:p>
+            <a:pPr marL="342900" indent="-342900">
+              <a:spcAft>
+                <a:spcPts val="600"/>
+              </a:spcAft>
+              <a:buSzPct val="100000"/>
+              <a:buChar char="•"/>
+            </a:pPr>
+            <a:r>
+              <a:rPr lang="en-US" sz="1500" dirty="0">
+                <a:solidFill>
+                  <a:srgbClr val="52525B"/>
+                </a:solidFill>
+                <a:latin typeface="Arial" pitchFamily="34" charset="0"/>
+                <a:ea typeface="Arial" pitchFamily="34" charset="-122"/>
+                <a:cs typeface="Arial" pitchFamily="34" charset="-120"/>
+              </a:rPr>
+              <a:t>Teammates reach each other directly</a:t>
+            </a:r>
+            <a:endParaRPr lang="en-US" sz="1500" dirty="0"/>
+          </a:p>
+        </p:txBody>
+      </p:sp>
+      <p:sp>
+        <p:nvSpPr>
+          <p:cNvPr id="10" name="Shape 8"/>
+          <p:cNvSpPr/>
+          <p:nvPr/>
+        </p:nvSpPr>
+        <p:spPr>
+          <a:xfrm>
+            <a:off x="640080" y="4114800"/>
+            <a:ext cx="5318608" cy="2011680"/>
+          </a:xfrm>
+          <a:prstGeom prst="roundRect">
+            <a:avLst>
+              <a:gd name="adj" fmla="val 5455"/>
+            </a:avLst>
+          </a:prstGeom>
+          <a:solidFill>
+            <a:srgbClr val="FFFFFF"/>
+          </a:solidFill>
+          <a:ln w="9525">
+            <a:solidFill>
+              <a:srgbClr val="E4E4E7"/>
+            </a:solidFill>
+            <a:prstDash val="solid"/>
+          </a:ln>
+        </p:spPr>
+      </p:sp>
+      <p:sp>
+        <p:nvSpPr>
+          <p:cNvPr id="11" name="Text 9"/>
+          <p:cNvSpPr txBox="1"/>
+          <p:nvPr/>
+        </p:nvSpPr>
+        <p:spPr>
+          <a:xfrm>
+            <a:off x="914400" y="4297680"/>
+            <a:ext cx="4769968" cy="457200"/>
+          </a:xfrm>
+          <a:prstGeom prst="rect">
+            <a:avLst/>
+          </a:prstGeom>
+          <a:noFill/>
+          <a:ln/>
+        </p:spPr>
+        <p:txBody>
+          <a:bodyPr wrap="square" lIns="0" tIns="0" rIns="0" bIns="0" rtlCol="0" anchor="ctr"/>
+          <a:lstStyle/>
+          <a:p>
+            <a:pPr indent="0" marL="0">
+              <a:buNone/>
+            </a:pPr>
+            <a:r>
+              <a:rPr lang="en-US" sz="2100" b="1" dirty="0">
+                <a:solidFill>
+                  <a:srgbClr val="18181B"/>
+                </a:solidFill>
+                <a:latin typeface="Arial" pitchFamily="34" charset="0"/>
+                <a:ea typeface="Arial" pitchFamily="34" charset="-122"/>
+                <a:cs typeface="Arial" pitchFamily="34" charset="-120"/>
+              </a:rPr>
+              <a:t>You get asked</a:t>
+            </a:r>
+            <a:endParaRPr lang="en-US" sz="2100" dirty="0"/>
+          </a:p>
+        </p:txBody>
+      </p:sp>
+      <p:sp>
+        <p:nvSpPr>
+          <p:cNvPr id="12" name="Text 10"/>
+          <p:cNvSpPr txBox="1"/>
+          <p:nvPr/>
+        </p:nvSpPr>
+        <p:spPr>
+          <a:xfrm>
+            <a:off x="914400" y="4846320"/>
+            <a:ext cx="4769968" cy="1188720"/>
+          </a:xfrm>
+          <a:prstGeom prst="rect">
+            <a:avLst/>
+          </a:prstGeom>
+          <a:noFill/>
+          <a:ln/>
+        </p:spPr>
+        <p:txBody>
+          <a:bodyPr wrap="square" lIns="0" tIns="0" rIns="0" bIns="0" rtlCol="0" anchor="t"/>
+          <a:lstStyle/>
+          <a:p>
+            <a:pPr marL="342900" indent="-342900">
+              <a:spcAft>
+                <a:spcPts val="600"/>
+              </a:spcAft>
+              <a:buSzPct val="100000"/>
+              <a:buChar char="•"/>
+            </a:pPr>
+            <a:r>
+              <a:rPr lang="en-US" sz="1500" dirty="0">
+                <a:solidFill>
+                  <a:srgbClr val="52525B"/>
+                </a:solidFill>
+                <a:latin typeface="Arial" pitchFamily="34" charset="0"/>
+                <a:ea typeface="Arial" pitchFamily="34" charset="-122"/>
+                <a:cs typeface="Arial" pitchFamily="34" charset="-120"/>
+              </a:rPr>
+              <a:t>Agents ask you clarifying questions</a:t>
+            </a:r>
+            <a:endParaRPr lang="en-US" sz="1500" dirty="0"/>
+          </a:p>
+          <a:p>
+            <a:pPr marL="342900" indent="-342900">
+              <a:spcAft>
+                <a:spcPts val="600"/>
+              </a:spcAft>
+              <a:buSzPct val="100000"/>
+              <a:buChar char="•"/>
+            </a:pPr>
+            <a:r>
+              <a:rPr lang="en-US" sz="1500" dirty="0">
+                <a:solidFill>
+                  <a:srgbClr val="52525B"/>
+                </a:solidFill>
+                <a:latin typeface="Arial" pitchFamily="34" charset="0"/>
+                <a:ea typeface="Arial" pitchFamily="34" charset="-122"/>
+                <a:cs typeface="Arial" pitchFamily="34" charset="-120"/>
+              </a:rPr>
+              <a:t>Big decisions wait for your answer</a:t>
+            </a:r>
+            <a:endParaRPr lang="en-US" sz="1500" dirty="0"/>
+          </a:p>
+          <a:p>
+            <a:pPr marL="342900" indent="-342900">
+              <a:spcAft>
+                <a:spcPts val="600"/>
+              </a:spcAft>
+              <a:buSzPct val="100000"/>
+              <a:buChar char="•"/>
+            </a:pPr>
+            <a:r>
+              <a:rPr lang="en-US" sz="1500" dirty="0">
+                <a:solidFill>
+                  <a:srgbClr val="52525B"/>
+                </a:solidFill>
+                <a:latin typeface="Arial" pitchFamily="34" charset="0"/>
+                <a:ea typeface="Arial" pitchFamily="34" charset="-122"/>
+                <a:cs typeface="Arial" pitchFamily="34" charset="-120"/>
+              </a:rPr>
+              <a:t>Smaller ones time out, and the agent records that it went ahead</a:t>
+            </a:r>
+            <a:endParaRPr lang="en-US" sz="1500" dirty="0"/>
+          </a:p>
+        </p:txBody>
+      </p:sp>
+      <p:sp>
+        <p:nvSpPr>
+          <p:cNvPr id="13" name="Shape 11"/>
+          <p:cNvSpPr/>
+          <p:nvPr/>
+        </p:nvSpPr>
+        <p:spPr>
+          <a:xfrm>
+            <a:off x="6233008" y="4114800"/>
+            <a:ext cx="5318608" cy="2011680"/>
+          </a:xfrm>
+          <a:prstGeom prst="roundRect">
+            <a:avLst>
+              <a:gd name="adj" fmla="val 5455"/>
+            </a:avLst>
+          </a:prstGeom>
+          <a:solidFill>
+            <a:srgbClr val="FFFFFF"/>
+          </a:solidFill>
+          <a:ln w="9525">
+            <a:solidFill>
+              <a:srgbClr val="E4E4E7"/>
+            </a:solidFill>
+            <a:prstDash val="solid"/>
+          </a:ln>
+        </p:spPr>
+      </p:sp>
+      <p:sp>
+        <p:nvSpPr>
+          <p:cNvPr id="14" name="Text 12"/>
+          <p:cNvSpPr txBox="1"/>
+          <p:nvPr/>
+        </p:nvSpPr>
+        <p:spPr>
+          <a:xfrm>
+            <a:off x="6507328" y="4297680"/>
+            <a:ext cx="4769968" cy="457200"/>
+          </a:xfrm>
+          <a:prstGeom prst="rect">
+            <a:avLst/>
+          </a:prstGeom>
+          <a:noFill/>
+          <a:ln/>
+        </p:spPr>
+        <p:txBody>
+          <a:bodyPr wrap="square" lIns="0" tIns="0" rIns="0" bIns="0" rtlCol="0" anchor="ctr"/>
+          <a:lstStyle/>
+          <a:p>
+            <a:pPr indent="0" marL="0">
+              <a:buNone/>
+            </a:pPr>
+            <a:r>
+              <a:rPr lang="en-US" sz="2100" b="1" dirty="0">
+                <a:solidFill>
+                  <a:srgbClr val="18181B"/>
+                </a:solidFill>
+                <a:latin typeface="Arial" pitchFamily="34" charset="0"/>
+                <a:ea typeface="Arial" pitchFamily="34" charset="-122"/>
+                <a:cs typeface="Arial" pitchFamily="34" charset="-120"/>
+              </a:rPr>
+              <a:t>Done gets a second look</a:t>
+            </a:r>
+            <a:endParaRPr lang="en-US" sz="2100" dirty="0"/>
+          </a:p>
+        </p:txBody>
+      </p:sp>
+      <p:sp>
+        <p:nvSpPr>
+          <p:cNvPr id="15" name="Text 13"/>
+          <p:cNvSpPr txBox="1"/>
+          <p:nvPr/>
+        </p:nvSpPr>
+        <p:spPr>
+          <a:xfrm>
+            <a:off x="6507328" y="4846320"/>
+            <a:ext cx="4769968" cy="1188720"/>
+          </a:xfrm>
+          <a:prstGeom prst="rect">
+            <a:avLst/>
+          </a:prstGeom>
+          <a:noFill/>
+          <a:ln/>
+        </p:spPr>
+        <p:txBody>
+          <a:bodyPr wrap="square" lIns="0" tIns="0" rIns="0" bIns="0" rtlCol="0" anchor="t"/>
+          <a:lstStyle/>
+          <a:p>
+            <a:pPr marL="342900" indent="-342900">
+              <a:spcAft>
+                <a:spcPts val="600"/>
+              </a:spcAft>
+              <a:buSzPct val="100000"/>
+              <a:buChar char="•"/>
+            </a:pPr>
+            <a:r>
+              <a:rPr lang="en-US" sz="1500" dirty="0">
+                <a:solidFill>
+                  <a:srgbClr val="52525B"/>
+                </a:solidFill>
+                <a:latin typeface="Arial" pitchFamily="34" charset="0"/>
+                <a:ea typeface="Arial" pitchFamily="34" charset="-122"/>
+                <a:cs typeface="Arial" pitchFamily="34" charset="-120"/>
+              </a:rPr>
+              <a:t>The builder submits</a:t>
+            </a:r>
+            <a:endParaRPr lang="en-US" sz="1500" dirty="0"/>
+          </a:p>
+          <a:p>
+            <a:pPr marL="342900" indent="-342900">
+              <a:spcAft>
+                <a:spcPts val="600"/>
+              </a:spcAft>
+              <a:buSzPct val="100000"/>
+              <a:buChar char="•"/>
+            </a:pPr>
+            <a:r>
+              <a:rPr lang="en-US" sz="1500" dirty="0">
+                <a:solidFill>
+                  <a:srgbClr val="52525B"/>
+                </a:solidFill>
+                <a:latin typeface="Arial" pitchFamily="34" charset="0"/>
+                <a:ea typeface="Arial" pitchFamily="34" charset="-122"/>
+                <a:cs typeface="Arial" pitchFamily="34" charset="-120"/>
+              </a:rPr>
+              <a:t>Another member checks the outcome, cross-family if available</a:t>
+            </a:r>
+            <a:endParaRPr lang="en-US" sz="1500" dirty="0"/>
           </a:p>
         </p:txBody>
       </p:sp>
@@ -3557,6 +4288,140 @@
 <file path=ppt/slides/slide4.xml><?xml version="1.0" encoding="utf-8"?>
 <p:sld xmlns:a="http://schemas.openxmlformats.org/drawingml/2006/main" xmlns:r="http://schemas.openxmlformats.org/officeDocument/2006/relationships" xmlns:p="http://schemas.openxmlformats.org/presentationml/2006/main">
   <p:cSld name="Slide 4">
+    <p:bg>
+      <p:bgPr>
+        <a:solidFill>
+          <a:srgbClr val="F4F4F5"/>
+        </a:solidFill>
+      </p:bgPr>
+    </p:bg>
+    <p:spTree>
+      <p:nvGrpSpPr>
+        <p:cNvPr id="1" name=""/>
+        <p:cNvGrpSpPr/>
+        <p:nvPr/>
+      </p:nvGrpSpPr>
+      <p:grpSpPr>
+        <a:xfrm>
+          <a:off x="0" y="0"/>
+          <a:ext cx="0" cy="0"/>
+          <a:chOff x="0" y="0"/>
+          <a:chExt cx="0" cy="0"/>
+        </a:xfrm>
+      </p:grpSpPr>
+      <p:sp>
+        <p:nvSpPr>
+          <p:cNvPr id="2" name="Text 0"/>
+          <p:cNvSpPr txBox="1"/>
+          <p:nvPr/>
+        </p:nvSpPr>
+        <p:spPr>
+          <a:xfrm>
+            <a:off x="640080" y="502920"/>
+            <a:ext cx="10911535" cy="320040"/>
+          </a:xfrm>
+          <a:prstGeom prst="rect">
+            <a:avLst/>
+          </a:prstGeom>
+          <a:noFill/>
+          <a:ln/>
+        </p:spPr>
+        <p:txBody>
+          <a:bodyPr wrap="square" lIns="0" tIns="0" rIns="0" bIns="0" rtlCol="0" anchor="ctr"/>
+          <a:lstStyle/>
+          <a:p>
+            <a:pPr indent="0" marL="0">
+              <a:buNone/>
+            </a:pPr>
+            <a:r>
+              <a:rPr lang="en-US" sz="1300" spc="400" kern="0" dirty="0">
+                <a:solidFill>
+                  <a:srgbClr val="7A5A06"/>
+                </a:solidFill>
+                <a:latin typeface="Courier New" pitchFamily="34" charset="0"/>
+                <a:ea typeface="Courier New" pitchFamily="34" charset="-122"/>
+                <a:cs typeface="Courier New" pitchFamily="34" charset="-120"/>
+              </a:rPr>
+              <a:t>HOW EVERY MEMBER WORKS</a:t>
+            </a:r>
+            <a:endParaRPr lang="en-US" sz="1300" dirty="0"/>
+          </a:p>
+        </p:txBody>
+      </p:sp>
+      <p:sp>
+        <p:nvSpPr>
+          <p:cNvPr id="3" name="Text 1"/>
+          <p:cNvSpPr txBox="1"/>
+          <p:nvPr/>
+        </p:nvSpPr>
+        <p:spPr>
+          <a:xfrm>
+            <a:off x="640080" y="868680"/>
+            <a:ext cx="10911535" cy="731520"/>
+          </a:xfrm>
+          <a:prstGeom prst="rect">
+            <a:avLst/>
+          </a:prstGeom>
+          <a:noFill/>
+          <a:ln/>
+        </p:spPr>
+        <p:txBody>
+          <a:bodyPr wrap="square" lIns="0" tIns="0" rIns="0" bIns="0" rtlCol="0" anchor="ctr"/>
+          <a:lstStyle/>
+          <a:p>
+            <a:pPr indent="0" marL="0">
+              <a:buNone/>
+            </a:pPr>
+            <a:r>
+              <a:rPr lang="en-US" sz="3600" b="1" dirty="0">
+                <a:solidFill>
+                  <a:srgbClr val="18181B"/>
+                </a:solidFill>
+                <a:latin typeface="Arial" pitchFamily="34" charset="0"/>
+                <a:ea typeface="Arial" pitchFamily="34" charset="-122"/>
+                <a:cs typeface="Arial" pitchFamily="34" charset="-120"/>
+              </a:rPr>
+              <a:t>A day in the life of a musterd member.</a:t>
+            </a:r>
+            <a:endParaRPr lang="en-US" sz="3600" dirty="0"/>
+          </a:p>
+        </p:txBody>
+      </p:sp>
+      <p:pic>
+        <p:nvPicPr>
+          <p:cNvPr id="4" name="Image 0" descr="img/graph.png">    </p:cNvPr>
+          <p:cNvPicPr>
+            <a:picLocks noChangeAspect="1"/>
+          </p:cNvPicPr>
+          <p:nvPr/>
+        </p:nvPicPr>
+        <p:blipFill>
+          <a:blip r:embed="rId1"/>
+          <a:stretch>
+            <a:fillRect/>
+          </a:stretch>
+        </p:blipFill>
+        <p:spPr>
+          <a:xfrm>
+            <a:off x="640080" y="1828800"/>
+            <a:ext cx="10693304" cy="5346652"/>
+          </a:xfrm>
+          <a:prstGeom prst="rect">
+            <a:avLst/>
+          </a:prstGeom>
+        </p:spPr>
+      </p:pic>
+    </p:spTree>
+  </p:cSld>
+  <p:clrMapOvr>
+    <a:masterClrMapping/>
+  </p:clrMapOvr>
+</p:sld>
+</file>
+
+<file path=ppt/slides/slide5.xml><?xml version="1.0" encoding="utf-8"?>
+<p:sld xmlns:a="http://schemas.openxmlformats.org/drawingml/2006/main" xmlns:r="http://schemas.openxmlformats.org/officeDocument/2006/relationships" xmlns:p="http://schemas.openxmlformats.org/presentationml/2006/main">
+  <p:cSld name="Slide 5">
     <p:bg>
       <p:bgPr>
         <a:solidFill>
@@ -3586,8 +4451,8 @@
         </p:nvSpPr>
         <p:spPr>
           <a:xfrm>
-            <a:off x="640080" y="548640"/>
-            <a:ext cx="10911535" cy="365760"/>
+            <a:off x="640080" y="502920"/>
+            <a:ext cx="10911535" cy="320040"/>
           </a:xfrm>
           <a:prstGeom prst="rect">
             <a:avLst/>
@@ -3611,7 +4476,7 @@
                 <a:ea typeface="Courier New" pitchFamily="34" charset="-122"/>
                 <a:cs typeface="Courier New" pitchFamily="34" charset="-120"/>
               </a:rPr>
-              <a:t>THE THESIS</a:t>
+              <a:t>UNDER THE HOOD</a:t>
             </a:r>
             <a:endParaRPr lang="en-US" sz="1300" dirty="0"/>
           </a:p>
@@ -3625,8 +4490,8 @@
         </p:nvSpPr>
         <p:spPr>
           <a:xfrm>
-            <a:off x="640080" y="1097280"/>
-            <a:ext cx="10911535" cy="822960"/>
+            <a:off x="640080" y="868680"/>
+            <a:ext cx="10911535" cy="731520"/>
           </a:xfrm>
           <a:prstGeom prst="rect">
             <a:avLst/>
@@ -3642,7 +4507,7 @@
               <a:buNone/>
             </a:pPr>
             <a:r>
-              <a:rPr lang="en-US" sz="4000" b="1" dirty="0">
+              <a:rPr lang="en-US" sz="3600" b="1" dirty="0">
                 <a:solidFill>
                   <a:srgbClr val="18181B"/>
                 </a:solidFill>
@@ -3650,9 +4515,9 @@
                 <a:ea typeface="Arial" pitchFamily="34" charset="-122"/>
                 <a:cs typeface="Arial" pitchFamily="34" charset="-120"/>
               </a:rPr>
-              <a:t>A persistent team is the primitive.</a:t>
-            </a:r>
-            <a:endParaRPr lang="en-US" sz="4000" dirty="0"/>
+              <a:t>What a musterd team is made of.</a:t>
+            </a:r>
+            <a:endParaRPr lang="en-US" sz="3600" dirty="0"/>
           </a:p>
         </p:txBody>
       </p:sp>
@@ -3664,18 +4529,20 @@
         </p:nvSpPr>
         <p:spPr>
           <a:xfrm>
-            <a:off x="640080" y="2377440"/>
-            <a:ext cx="3271418" cy="36576"/>
-          </a:xfrm>
-          <a:prstGeom prst="rect">
-            <a:avLst/>
+            <a:off x="640080" y="1828800"/>
+            <a:ext cx="384048" cy="384048"/>
+          </a:xfrm>
+          <a:prstGeom prst="roundRect">
+            <a:avLst>
+              <a:gd name="adj" fmla="val 23810"/>
+            </a:avLst>
           </a:prstGeom>
           <a:solidFill>
-            <a:srgbClr val="E1AD01"/>
+            <a:srgbClr val="A855F7"/>
           </a:solidFill>
           <a:ln w="12700">
             <a:solidFill>
-              <a:srgbClr val="E1AD01"/>
+              <a:srgbClr val="A855F7"/>
             </a:solidFill>
             <a:prstDash val="solid"/>
           </a:ln>
@@ -3689,8 +4556,8 @@
         </p:nvSpPr>
         <p:spPr>
           <a:xfrm>
-            <a:off x="640080" y="2606040"/>
-            <a:ext cx="3271418" cy="457200"/>
+            <a:off x="1143000" y="1828800"/>
+            <a:ext cx="2087804" cy="384048"/>
           </a:xfrm>
           <a:prstGeom prst="rect">
             <a:avLst/>
@@ -3706,30 +4573,57 @@
               <a:buNone/>
             </a:pPr>
             <a:r>
-              <a:rPr lang="en-US" sz="2000" b="1" dirty="0">
-                <a:solidFill>
-                  <a:srgbClr val="7A5A06"/>
-                </a:solidFill>
-                <a:latin typeface="Arial" pitchFamily="34" charset="0"/>
-                <a:ea typeface="Arial" pitchFamily="34" charset="-122"/>
-                <a:cs typeface="Arial" pitchFamily="34" charset="-120"/>
-              </a:rPr>
-              <a:t>A persistent roster</a:t>
-            </a:r>
-            <a:endParaRPr lang="en-US" sz="2000" dirty="0"/>
-          </a:p>
-        </p:txBody>
-      </p:sp>
-      <p:sp>
-        <p:nvSpPr>
-          <p:cNvPr id="6" name="Text 4"/>
-          <p:cNvSpPr txBox="1"/>
-          <p:nvPr/>
-        </p:nvSpPr>
-        <p:spPr>
-          <a:xfrm>
-            <a:off x="640080" y="3154680"/>
-            <a:ext cx="3271418" cy="1645920"/>
+              <a:rPr lang="en-US" sz="1700" b="1" dirty="0">
+                <a:solidFill>
+                  <a:srgbClr val="18181B"/>
+                </a:solidFill>
+                <a:latin typeface="Arial" pitchFamily="34" charset="0"/>
+                <a:ea typeface="Arial" pitchFamily="34" charset="-122"/>
+                <a:cs typeface="Arial" pitchFamily="34" charset="-120"/>
+              </a:rPr>
+              <a:t>Who is on it</a:t>
+            </a:r>
+            <a:endParaRPr lang="en-US" sz="1700" dirty="0"/>
+          </a:p>
+        </p:txBody>
+      </p:sp>
+      <p:sp>
+        <p:nvSpPr>
+          <p:cNvPr id="6" name="Shape 4"/>
+          <p:cNvSpPr/>
+          <p:nvPr/>
+        </p:nvSpPr>
+        <p:spPr>
+          <a:xfrm>
+            <a:off x="640080" y="2423160"/>
+            <a:ext cx="2590724" cy="1188720"/>
+          </a:xfrm>
+          <a:prstGeom prst="roundRect">
+            <a:avLst>
+              <a:gd name="adj" fmla="val 9231"/>
+            </a:avLst>
+          </a:prstGeom>
+          <a:solidFill>
+            <a:srgbClr val="FFFFFF"/>
+          </a:solidFill>
+          <a:ln w="9525">
+            <a:solidFill>
+              <a:srgbClr val="E4E4E7"/>
+            </a:solidFill>
+            <a:prstDash val="solid"/>
+          </a:ln>
+        </p:spPr>
+      </p:sp>
+      <p:sp>
+        <p:nvSpPr>
+          <p:cNvPr id="7" name="Text 5"/>
+          <p:cNvSpPr txBox="1"/>
+          <p:nvPr/>
+        </p:nvSpPr>
+        <p:spPr>
+          <a:xfrm>
+            <a:off x="822960" y="2532888"/>
+            <a:ext cx="2224964" cy="969264"/>
           </a:xfrm>
           <a:prstGeom prst="rect">
             <a:avLst/>
@@ -3742,13 +4636,27 @@
           <a:lstStyle/>
           <a:p>
             <a:pPr indent="0" marL="0">
-              <a:spcAft>
-                <a:spcPts val="600"/>
-              </a:spcAft>
-              <a:buNone/>
-            </a:pPr>
-            <a:r>
-              <a:rPr lang="en-US" sz="1700" dirty="0">
+              <a:buNone/>
+            </a:pPr>
+            <a:r>
+              <a:rPr lang="en-US" sz="1600" b="1" dirty="0">
+                <a:solidFill>
+                  <a:srgbClr val="18181B"/>
+                </a:solidFill>
+                <a:latin typeface="Arial" pitchFamily="34" charset="0"/>
+                <a:ea typeface="Arial" pitchFamily="34" charset="-122"/>
+                <a:cs typeface="Arial" pitchFamily="34" charset="-120"/>
+              </a:rPr>
+              <a:t>Seats</a:t>
+            </a:r>
+            <a:endParaRPr lang="en-US" sz="1600" dirty="0"/>
+          </a:p>
+          <a:p>
+            <a:pPr indent="0" marL="0">
+              <a:buNone/>
+            </a:pPr>
+            <a:r>
+              <a:rPr lang="en-US" sz="1300" dirty="0">
                 <a:solidFill>
                   <a:srgbClr val="52525B"/>
                 </a:solidFill>
@@ -3756,32 +4664,200 @@
                 <a:ea typeface="Arial" pitchFamily="34" charset="-122"/>
                 <a:cs typeface="Arial" pitchFamily="34" charset="-120"/>
               </a:rPr>
-              <a:t>A member outlasts every session it runs in. Its inbox, lanes and record survive a restart.</a:t>
-            </a:r>
-            <a:endParaRPr lang="en-US" sz="1700" dirty="0"/>
-          </a:p>
-        </p:txBody>
-      </p:sp>
-      <p:sp>
-        <p:nvSpPr>
-          <p:cNvPr id="7" name="Shape 5"/>
+              <a:t>A member’s durable position. It stays while they’re away.</a:t>
+            </a:r>
+            <a:endParaRPr lang="en-US" sz="1600" dirty="0"/>
+          </a:p>
+        </p:txBody>
+      </p:sp>
+      <p:sp>
+        <p:nvSpPr>
+          <p:cNvPr id="8" name="Shape 6"/>
           <p:cNvSpPr/>
           <p:nvPr/>
         </p:nvSpPr>
         <p:spPr>
           <a:xfrm>
-            <a:off x="4460138" y="2377440"/>
-            <a:ext cx="3271418" cy="36576"/>
-          </a:xfrm>
-          <a:prstGeom prst="rect">
-            <a:avLst/>
+            <a:off x="640080" y="3749040"/>
+            <a:ext cx="2590724" cy="1188720"/>
+          </a:xfrm>
+          <a:prstGeom prst="roundRect">
+            <a:avLst>
+              <a:gd name="adj" fmla="val 9231"/>
+            </a:avLst>
           </a:prstGeom>
           <a:solidFill>
-            <a:srgbClr val="E1AD01"/>
+            <a:srgbClr val="FFFFFF"/>
+          </a:solidFill>
+          <a:ln w="9525">
+            <a:solidFill>
+              <a:srgbClr val="E4E4E7"/>
+            </a:solidFill>
+            <a:prstDash val="solid"/>
+          </a:ln>
+        </p:spPr>
+      </p:sp>
+      <p:sp>
+        <p:nvSpPr>
+          <p:cNvPr id="9" name="Text 7"/>
+          <p:cNvSpPr txBox="1"/>
+          <p:nvPr/>
+        </p:nvSpPr>
+        <p:spPr>
+          <a:xfrm>
+            <a:off x="822960" y="3858768"/>
+            <a:ext cx="2224964" cy="969264"/>
+          </a:xfrm>
+          <a:prstGeom prst="rect">
+            <a:avLst/>
+          </a:prstGeom>
+          <a:noFill/>
+          <a:ln/>
+        </p:spPr>
+        <p:txBody>
+          <a:bodyPr wrap="square" lIns="0" tIns="0" rIns="0" bIns="0" rtlCol="0" anchor="t"/>
+          <a:lstStyle/>
+          <a:p>
+            <a:pPr indent="0" marL="0">
+              <a:buNone/>
+            </a:pPr>
+            <a:r>
+              <a:rPr lang="en-US" sz="1600" b="1" dirty="0">
+                <a:solidFill>
+                  <a:srgbClr val="18181B"/>
+                </a:solidFill>
+                <a:latin typeface="Arial" pitchFamily="34" charset="0"/>
+                <a:ea typeface="Arial" pitchFamily="34" charset="-122"/>
+                <a:cs typeface="Arial" pitchFamily="34" charset="-120"/>
+              </a:rPr>
+              <a:t>Roles</a:t>
+            </a:r>
+            <a:endParaRPr lang="en-US" sz="1600" dirty="0"/>
+          </a:p>
+          <a:p>
+            <a:pPr indent="0" marL="0">
+              <a:buNone/>
+            </a:pPr>
+            <a:r>
+              <a:rPr lang="en-US" sz="1300" dirty="0">
+                <a:solidFill>
+                  <a:srgbClr val="52525B"/>
+                </a:solidFill>
+                <a:latin typeface="Arial" pitchFamily="34" charset="0"/>
+                <a:ea typeface="Arial" pitchFamily="34" charset="-122"/>
+                <a:cs typeface="Arial" pitchFamily="34" charset="-120"/>
+              </a:rPr>
+              <a:t>A charter the team grants: designer, platform, security.</a:t>
+            </a:r>
+            <a:endParaRPr lang="en-US" sz="1600" dirty="0"/>
+          </a:p>
+        </p:txBody>
+      </p:sp>
+      <p:sp>
+        <p:nvSpPr>
+          <p:cNvPr id="10" name="Shape 8"/>
+          <p:cNvSpPr/>
+          <p:nvPr/>
+        </p:nvSpPr>
+        <p:spPr>
+          <a:xfrm>
+            <a:off x="640080" y="5074920"/>
+            <a:ext cx="2590724" cy="1188720"/>
+          </a:xfrm>
+          <a:prstGeom prst="roundRect">
+            <a:avLst>
+              <a:gd name="adj" fmla="val 9231"/>
+            </a:avLst>
+          </a:prstGeom>
+          <a:solidFill>
+            <a:srgbClr val="FFFFFF"/>
+          </a:solidFill>
+          <a:ln w="9525">
+            <a:solidFill>
+              <a:srgbClr val="E4E4E7"/>
+            </a:solidFill>
+            <a:prstDash val="solid"/>
+          </a:ln>
+        </p:spPr>
+      </p:sp>
+      <p:sp>
+        <p:nvSpPr>
+          <p:cNvPr id="11" name="Text 9"/>
+          <p:cNvSpPr txBox="1"/>
+          <p:nvPr/>
+        </p:nvSpPr>
+        <p:spPr>
+          <a:xfrm>
+            <a:off x="822960" y="5184648"/>
+            <a:ext cx="2224964" cy="969264"/>
+          </a:xfrm>
+          <a:prstGeom prst="rect">
+            <a:avLst/>
+          </a:prstGeom>
+          <a:noFill/>
+          <a:ln/>
+        </p:spPr>
+        <p:txBody>
+          <a:bodyPr wrap="square" lIns="0" tIns="0" rIns="0" bIns="0" rtlCol="0" anchor="t"/>
+          <a:lstStyle/>
+          <a:p>
+            <a:pPr indent="0" marL="0">
+              <a:buNone/>
+            </a:pPr>
+            <a:r>
+              <a:rPr lang="en-US" sz="1600" b="1" dirty="0">
+                <a:solidFill>
+                  <a:srgbClr val="18181B"/>
+                </a:solidFill>
+                <a:latin typeface="Arial" pitchFamily="34" charset="0"/>
+                <a:ea typeface="Arial" pitchFamily="34" charset="-122"/>
+                <a:cs typeface="Arial" pitchFamily="34" charset="-120"/>
+              </a:rPr>
+              <a:t>Humans</a:t>
+            </a:r>
+            <a:endParaRPr lang="en-US" sz="1600" dirty="0"/>
+          </a:p>
+          <a:p>
+            <a:pPr indent="0" marL="0">
+              <a:buNone/>
+            </a:pPr>
+            <a:r>
+              <a:rPr lang="en-US" sz="1300" dirty="0">
+                <a:solidFill>
+                  <a:srgbClr val="52525B"/>
+                </a:solidFill>
+                <a:latin typeface="Arial" pitchFamily="34" charset="0"/>
+                <a:ea typeface="Arial" pitchFamily="34" charset="-122"/>
+                <a:cs typeface="Arial" pitchFamily="34" charset="-120"/>
+              </a:rPr>
+              <a:t>On the same roster, with the same acts.</a:t>
+            </a:r>
+            <a:endParaRPr lang="en-US" sz="1600" dirty="0"/>
+          </a:p>
+        </p:txBody>
+      </p:sp>
+      <p:sp>
+        <p:nvSpPr>
+          <p:cNvPr id="12" name="Shape 10"/>
+          <p:cNvSpPr/>
+          <p:nvPr/>
+        </p:nvSpPr>
+        <p:spPr>
+          <a:xfrm>
+            <a:off x="3413684" y="1828800"/>
+            <a:ext cx="384048" cy="384048"/>
+          </a:xfrm>
+          <a:prstGeom prst="roundRect">
+            <a:avLst>
+              <a:gd name="adj" fmla="val 23810"/>
+            </a:avLst>
+          </a:prstGeom>
+          <a:solidFill>
+            <a:srgbClr val="2563EB"/>
           </a:solidFill>
           <a:ln w="12700">
             <a:solidFill>
-              <a:srgbClr val="E1AD01"/>
+              <a:srgbClr val="2563EB"/>
             </a:solidFill>
             <a:prstDash val="solid"/>
           </a:ln>
@@ -3789,14 +4865,14 @@
       </p:sp>
       <p:sp>
         <p:nvSpPr>
-          <p:cNvPr id="8" name="Text 6"/>
-          <p:cNvSpPr txBox="1"/>
-          <p:nvPr/>
-        </p:nvSpPr>
-        <p:spPr>
-          <a:xfrm>
-            <a:off x="4460138" y="2606040"/>
-            <a:ext cx="3271418" cy="457200"/>
+          <p:cNvPr id="13" name="Text 11"/>
+          <p:cNvSpPr txBox="1"/>
+          <p:nvPr/>
+        </p:nvSpPr>
+        <p:spPr>
+          <a:xfrm>
+            <a:off x="3916604" y="1828800"/>
+            <a:ext cx="2087804" cy="384048"/>
           </a:xfrm>
           <a:prstGeom prst="rect">
             <a:avLst/>
@@ -3812,30 +4888,57 @@
               <a:buNone/>
             </a:pPr>
             <a:r>
-              <a:rPr lang="en-US" sz="2000" b="1" dirty="0">
-                <a:solidFill>
-                  <a:srgbClr val="7A5A06"/>
-                </a:solidFill>
-                <a:latin typeface="Arial" pitchFamily="34" charset="0"/>
-                <a:ea typeface="Arial" pitchFamily="34" charset="-122"/>
-                <a:cs typeface="Arial" pitchFamily="34" charset="-120"/>
-              </a:rPr>
-              <a:t>One owner per lane</a:t>
-            </a:r>
-            <a:endParaRPr lang="en-US" sz="2000" dirty="0"/>
-          </a:p>
-        </p:txBody>
-      </p:sp>
-      <p:sp>
-        <p:nvSpPr>
-          <p:cNvPr id="9" name="Text 7"/>
-          <p:cNvSpPr txBox="1"/>
-          <p:nvPr/>
-        </p:nvSpPr>
-        <p:spPr>
-          <a:xfrm>
-            <a:off x="4460138" y="3154680"/>
-            <a:ext cx="3271418" cy="1645920"/>
+              <a:rPr lang="en-US" sz="1700" b="1" dirty="0">
+                <a:solidFill>
+                  <a:srgbClr val="18181B"/>
+                </a:solidFill>
+                <a:latin typeface="Arial" pitchFamily="34" charset="0"/>
+                <a:ea typeface="Arial" pitchFamily="34" charset="-122"/>
+                <a:cs typeface="Arial" pitchFamily="34" charset="-120"/>
+              </a:rPr>
+              <a:t>Where they work</a:t>
+            </a:r>
+            <a:endParaRPr lang="en-US" sz="1700" dirty="0"/>
+          </a:p>
+        </p:txBody>
+      </p:sp>
+      <p:sp>
+        <p:nvSpPr>
+          <p:cNvPr id="14" name="Shape 12"/>
+          <p:cNvSpPr/>
+          <p:nvPr/>
+        </p:nvSpPr>
+        <p:spPr>
+          <a:xfrm>
+            <a:off x="3413684" y="2423160"/>
+            <a:ext cx="2590724" cy="1188720"/>
+          </a:xfrm>
+          <a:prstGeom prst="roundRect">
+            <a:avLst>
+              <a:gd name="adj" fmla="val 9231"/>
+            </a:avLst>
+          </a:prstGeom>
+          <a:solidFill>
+            <a:srgbClr val="FFFFFF"/>
+          </a:solidFill>
+          <a:ln w="9525">
+            <a:solidFill>
+              <a:srgbClr val="E4E4E7"/>
+            </a:solidFill>
+            <a:prstDash val="solid"/>
+          </a:ln>
+        </p:spPr>
+      </p:sp>
+      <p:sp>
+        <p:nvSpPr>
+          <p:cNvPr id="15" name="Text 13"/>
+          <p:cNvSpPr txBox="1"/>
+          <p:nvPr/>
+        </p:nvSpPr>
+        <p:spPr>
+          <a:xfrm>
+            <a:off x="3596564" y="2532888"/>
+            <a:ext cx="2224964" cy="969264"/>
           </a:xfrm>
           <a:prstGeom prst="rect">
             <a:avLst/>
@@ -3848,13 +4951,27 @@
           <a:lstStyle/>
           <a:p>
             <a:pPr indent="0" marL="0">
-              <a:spcAft>
-                <a:spcPts val="600"/>
-              </a:spcAft>
-              <a:buNone/>
-            </a:pPr>
-            <a:r>
-              <a:rPr lang="en-US" sz="1700" dirty="0">
+              <a:buNone/>
+            </a:pPr>
+            <a:r>
+              <a:rPr lang="en-US" sz="1600" b="1" dirty="0">
+                <a:solidFill>
+                  <a:srgbClr val="18181B"/>
+                </a:solidFill>
+                <a:latin typeface="Arial" pitchFamily="34" charset="0"/>
+                <a:ea typeface="Arial" pitchFamily="34" charset="-122"/>
+                <a:cs typeface="Arial" pitchFamily="34" charset="-120"/>
+              </a:rPr>
+              <a:t>Workspaces</a:t>
+            </a:r>
+            <a:endParaRPr lang="en-US" sz="1600" dirty="0"/>
+          </a:p>
+          <a:p>
+            <a:pPr indent="0" marL="0">
+              <a:buNone/>
+            </a:pPr>
+            <a:r>
+              <a:rPr lang="en-US" sz="1300" dirty="0">
                 <a:solidFill>
                   <a:srgbClr val="52525B"/>
                 </a:solidFill>
@@ -3862,32 +4979,200 @@
                 <a:ea typeface="Arial" pitchFamily="34" charset="-122"/>
                 <a:cs typeface="Arial" pitchFamily="34" charset="-120"/>
               </a:rPr>
-              <a:t>Claimed before the first edit. Two lanes touching the same files get a warning at claim time.</a:t>
-            </a:r>
-            <a:endParaRPr lang="en-US" sz="1700" dirty="0"/>
-          </a:p>
-        </p:txBody>
-      </p:sp>
-      <p:sp>
-        <p:nvSpPr>
-          <p:cNvPr id="10" name="Shape 8"/>
+              <a:t>Each seat works in its own folder, or its own git worktree if you want one.</a:t>
+            </a:r>
+            <a:endParaRPr lang="en-US" sz="1600" dirty="0"/>
+          </a:p>
+        </p:txBody>
+      </p:sp>
+      <p:sp>
+        <p:nvSpPr>
+          <p:cNvPr id="16" name="Shape 14"/>
           <p:cNvSpPr/>
           <p:nvPr/>
         </p:nvSpPr>
         <p:spPr>
           <a:xfrm>
-            <a:off x="8280197" y="2377440"/>
-            <a:ext cx="3271418" cy="36576"/>
-          </a:xfrm>
-          <a:prstGeom prst="rect">
-            <a:avLst/>
+            <a:off x="3413684" y="3749040"/>
+            <a:ext cx="2590724" cy="1188720"/>
+          </a:xfrm>
+          <a:prstGeom prst="roundRect">
+            <a:avLst>
+              <a:gd name="adj" fmla="val 9231"/>
+            </a:avLst>
           </a:prstGeom>
           <a:solidFill>
-            <a:srgbClr val="E1AD01"/>
+            <a:srgbClr val="FFFFFF"/>
+          </a:solidFill>
+          <a:ln w="9525">
+            <a:solidFill>
+              <a:srgbClr val="E4E4E7"/>
+            </a:solidFill>
+            <a:prstDash val="solid"/>
+          </a:ln>
+        </p:spPr>
+      </p:sp>
+      <p:sp>
+        <p:nvSpPr>
+          <p:cNvPr id="17" name="Text 15"/>
+          <p:cNvSpPr txBox="1"/>
+          <p:nvPr/>
+        </p:nvSpPr>
+        <p:spPr>
+          <a:xfrm>
+            <a:off x="3596564" y="3858768"/>
+            <a:ext cx="2224964" cy="969264"/>
+          </a:xfrm>
+          <a:prstGeom prst="rect">
+            <a:avLst/>
+          </a:prstGeom>
+          <a:noFill/>
+          <a:ln/>
+        </p:spPr>
+        <p:txBody>
+          <a:bodyPr wrap="square" lIns="0" tIns="0" rIns="0" bIns="0" rtlCol="0" anchor="t"/>
+          <a:lstStyle/>
+          <a:p>
+            <a:pPr indent="0" marL="0">
+              <a:buNone/>
+            </a:pPr>
+            <a:r>
+              <a:rPr lang="en-US" sz="1600" b="1" dirty="0">
+                <a:solidFill>
+                  <a:srgbClr val="18181B"/>
+                </a:solidFill>
+                <a:latin typeface="Arial" pitchFamily="34" charset="0"/>
+                <a:ea typeface="Arial" pitchFamily="34" charset="-122"/>
+                <a:cs typeface="Arial" pitchFamily="34" charset="-120"/>
+              </a:rPr>
+              <a:t>Toolkits</a:t>
+            </a:r>
+            <a:endParaRPr lang="en-US" sz="1600" dirty="0"/>
+          </a:p>
+          <a:p>
+            <a:pPr indent="0" marL="0">
+              <a:buNone/>
+            </a:pPr>
+            <a:r>
+              <a:rPr lang="en-US" sz="1300" dirty="0">
+                <a:solidFill>
+                  <a:srgbClr val="52525B"/>
+                </a:solidFill>
+                <a:latin typeface="Arial" pitchFamily="34" charset="0"/>
+                <a:ea typeface="Arial" pitchFamily="34" charset="-122"/>
+                <a:cs typeface="Arial" pitchFamily="34" charset="-120"/>
+              </a:rPr>
+              <a:t>The MCP servers and tools a workspace is equipped with.</a:t>
+            </a:r>
+            <a:endParaRPr lang="en-US" sz="1600" dirty="0"/>
+          </a:p>
+        </p:txBody>
+      </p:sp>
+      <p:sp>
+        <p:nvSpPr>
+          <p:cNvPr id="18" name="Shape 16"/>
+          <p:cNvSpPr/>
+          <p:nvPr/>
+        </p:nvSpPr>
+        <p:spPr>
+          <a:xfrm>
+            <a:off x="3413684" y="5074920"/>
+            <a:ext cx="2590724" cy="1188720"/>
+          </a:xfrm>
+          <a:prstGeom prst="roundRect">
+            <a:avLst>
+              <a:gd name="adj" fmla="val 9231"/>
+            </a:avLst>
+          </a:prstGeom>
+          <a:solidFill>
+            <a:srgbClr val="FFFFFF"/>
+          </a:solidFill>
+          <a:ln w="9525">
+            <a:solidFill>
+              <a:srgbClr val="E4E4E7"/>
+            </a:solidFill>
+            <a:prstDash val="solid"/>
+          </a:ln>
+        </p:spPr>
+      </p:sp>
+      <p:sp>
+        <p:nvSpPr>
+          <p:cNvPr id="19" name="Text 17"/>
+          <p:cNvSpPr txBox="1"/>
+          <p:nvPr/>
+        </p:nvSpPr>
+        <p:spPr>
+          <a:xfrm>
+            <a:off x="3596564" y="5184648"/>
+            <a:ext cx="2224964" cy="969264"/>
+          </a:xfrm>
+          <a:prstGeom prst="rect">
+            <a:avLst/>
+          </a:prstGeom>
+          <a:noFill/>
+          <a:ln/>
+        </p:spPr>
+        <p:txBody>
+          <a:bodyPr wrap="square" lIns="0" tIns="0" rIns="0" bIns="0" rtlCol="0" anchor="t"/>
+          <a:lstStyle/>
+          <a:p>
+            <a:pPr indent="0" marL="0">
+              <a:buNone/>
+            </a:pPr>
+            <a:r>
+              <a:rPr lang="en-US" sz="1600" b="1" dirty="0">
+                <a:solidFill>
+                  <a:srgbClr val="18181B"/>
+                </a:solidFill>
+                <a:latin typeface="Arial" pitchFamily="34" charset="0"/>
+                <a:ea typeface="Arial" pitchFamily="34" charset="-122"/>
+                <a:cs typeface="Arial" pitchFamily="34" charset="-120"/>
+              </a:rPr>
+              <a:t>Skills &amp; hooks</a:t>
+            </a:r>
+            <a:endParaRPr lang="en-US" sz="1600" dirty="0"/>
+          </a:p>
+          <a:p>
+            <a:pPr indent="0" marL="0">
+              <a:buNone/>
+            </a:pPr>
+            <a:r>
+              <a:rPr lang="en-US" sz="1300" dirty="0">
+                <a:solidFill>
+                  <a:srgbClr val="52525B"/>
+                </a:solidFill>
+                <a:latin typeface="Arial" pitchFamily="34" charset="0"/>
+                <a:ea typeface="Arial" pitchFamily="34" charset="-122"/>
+                <a:cs typeface="Arial" pitchFamily="34" charset="-120"/>
+              </a:rPr>
+              <a:t>Teach the rules, and remind the agent at the right moment.</a:t>
+            </a:r>
+            <a:endParaRPr lang="en-US" sz="1600" dirty="0"/>
+          </a:p>
+        </p:txBody>
+      </p:sp>
+      <p:sp>
+        <p:nvSpPr>
+          <p:cNvPr id="20" name="Shape 18"/>
+          <p:cNvSpPr/>
+          <p:nvPr/>
+        </p:nvSpPr>
+        <p:spPr>
+          <a:xfrm>
+            <a:off x="6187288" y="1828800"/>
+            <a:ext cx="384048" cy="384048"/>
+          </a:xfrm>
+          <a:prstGeom prst="roundRect">
+            <a:avLst>
+              <a:gd name="adj" fmla="val 23810"/>
+            </a:avLst>
+          </a:prstGeom>
+          <a:solidFill>
+            <a:srgbClr val="DC2626"/>
           </a:solidFill>
           <a:ln w="12700">
             <a:solidFill>
-              <a:srgbClr val="E1AD01"/>
+              <a:srgbClr val="DC2626"/>
             </a:solidFill>
             <a:prstDash val="solid"/>
           </a:ln>
@@ -3895,14 +5180,14 @@
       </p:sp>
       <p:sp>
         <p:nvSpPr>
-          <p:cNvPr id="11" name="Text 9"/>
-          <p:cNvSpPr txBox="1"/>
-          <p:nvPr/>
-        </p:nvSpPr>
-        <p:spPr>
-          <a:xfrm>
-            <a:off x="8280197" y="2606040"/>
-            <a:ext cx="3271418" cy="457200"/>
+          <p:cNvPr id="21" name="Text 19"/>
+          <p:cNvSpPr txBox="1"/>
+          <p:nvPr/>
+        </p:nvSpPr>
+        <p:spPr>
+          <a:xfrm>
+            <a:off x="6690208" y="1828800"/>
+            <a:ext cx="2087804" cy="384048"/>
           </a:xfrm>
           <a:prstGeom prst="rect">
             <a:avLst/>
@@ -3918,30 +5203,57 @@
               <a:buNone/>
             </a:pPr>
             <a:r>
-              <a:rPr lang="en-US" sz="2000" b="1" dirty="0">
-                <a:solidFill>
-                  <a:srgbClr val="7A5A06"/>
-                </a:solidFill>
-                <a:latin typeface="Arial" pitchFamily="34" charset="0"/>
-                <a:ea typeface="Arial" pitchFamily="34" charset="-122"/>
-                <a:cs typeface="Arial" pitchFamily="34" charset="-120"/>
-              </a:rPr>
-              <a:t>Humans on the same roster</a:t>
-            </a:r>
-            <a:endParaRPr lang="en-US" sz="2000" dirty="0"/>
-          </a:p>
-        </p:txBody>
-      </p:sp>
-      <p:sp>
-        <p:nvSpPr>
-          <p:cNvPr id="12" name="Text 10"/>
-          <p:cNvSpPr txBox="1"/>
-          <p:nvPr/>
-        </p:nvSpPr>
-        <p:spPr>
-          <a:xfrm>
-            <a:off x="8280197" y="3154680"/>
-            <a:ext cx="3271418" cy="1645920"/>
+              <a:rPr lang="en-US" sz="1700" b="1" dirty="0">
+                <a:solidFill>
+                  <a:srgbClr val="18181B"/>
+                </a:solidFill>
+                <a:latin typeface="Arial" pitchFamily="34" charset="0"/>
+                <a:ea typeface="Arial" pitchFamily="34" charset="-122"/>
+                <a:cs typeface="Arial" pitchFamily="34" charset="-120"/>
+              </a:rPr>
+              <a:t>How work moves</a:t>
+            </a:r>
+            <a:endParaRPr lang="en-US" sz="1700" dirty="0"/>
+          </a:p>
+        </p:txBody>
+      </p:sp>
+      <p:sp>
+        <p:nvSpPr>
+          <p:cNvPr id="22" name="Shape 20"/>
+          <p:cNvSpPr/>
+          <p:nvPr/>
+        </p:nvSpPr>
+        <p:spPr>
+          <a:xfrm>
+            <a:off x="6187288" y="2423160"/>
+            <a:ext cx="2590724" cy="1188720"/>
+          </a:xfrm>
+          <a:prstGeom prst="roundRect">
+            <a:avLst>
+              <a:gd name="adj" fmla="val 9231"/>
+            </a:avLst>
+          </a:prstGeom>
+          <a:solidFill>
+            <a:srgbClr val="FFFFFF"/>
+          </a:solidFill>
+          <a:ln w="9525">
+            <a:solidFill>
+              <a:srgbClr val="E4E4E7"/>
+            </a:solidFill>
+            <a:prstDash val="solid"/>
+          </a:ln>
+        </p:spPr>
+      </p:sp>
+      <p:sp>
+        <p:nvSpPr>
+          <p:cNvPr id="23" name="Text 21"/>
+          <p:cNvSpPr txBox="1"/>
+          <p:nvPr/>
+        </p:nvSpPr>
+        <p:spPr>
+          <a:xfrm>
+            <a:off x="6370168" y="2532888"/>
+            <a:ext cx="2224964" cy="969264"/>
           </a:xfrm>
           <a:prstGeom prst="rect">
             <a:avLst/>
@@ -3954,13 +5266,27 @@
           <a:lstStyle/>
           <a:p>
             <a:pPr indent="0" marL="0">
-              <a:spcAft>
-                <a:spcPts val="600"/>
-              </a:spcAft>
-              <a:buNone/>
-            </a:pPr>
-            <a:r>
-              <a:rPr lang="en-US" sz="1700" dirty="0">
+              <a:buNone/>
+            </a:pPr>
+            <a:r>
+              <a:rPr lang="en-US" sz="1600" b="1" dirty="0">
+                <a:solidFill>
+                  <a:srgbClr val="18181B"/>
+                </a:solidFill>
+                <a:latin typeface="Arial" pitchFamily="34" charset="0"/>
+                <a:ea typeface="Arial" pitchFamily="34" charset="-122"/>
+                <a:cs typeface="Arial" pitchFamily="34" charset="-120"/>
+              </a:rPr>
+              <a:t>Goals &amp; lanes</a:t>
+            </a:r>
+            <a:endParaRPr lang="en-US" sz="1600" dirty="0"/>
+          </a:p>
+          <a:p>
+            <a:pPr indent="0" marL="0">
+              <a:buNone/>
+            </a:pPr>
+            <a:r>
+              <a:rPr lang="en-US" sz="1300" dirty="0">
                 <a:solidFill>
                   <a:srgbClr val="52525B"/>
                 </a:solidFill>
@@ -3968,9 +5294,490 @@
                 <a:ea typeface="Arial" pitchFamily="34" charset="-122"/>
                 <a:cs typeface="Arial" pitchFamily="34" charset="-120"/>
               </a:rPr>
-              <a:t>Same acts, same inbox. Agents bring you questions with a clock on them.</a:t>
+              <a:t>What the team is after, split into owned pieces.</a:t>
+            </a:r>
+            <a:endParaRPr lang="en-US" sz="1600" dirty="0"/>
+          </a:p>
+        </p:txBody>
+      </p:sp>
+      <p:sp>
+        <p:nvSpPr>
+          <p:cNvPr id="24" name="Shape 22"/>
+          <p:cNvSpPr/>
+          <p:nvPr/>
+        </p:nvSpPr>
+        <p:spPr>
+          <a:xfrm>
+            <a:off x="6187288" y="3749040"/>
+            <a:ext cx="2590724" cy="1188720"/>
+          </a:xfrm>
+          <a:prstGeom prst="roundRect">
+            <a:avLst>
+              <a:gd name="adj" fmla="val 9231"/>
+            </a:avLst>
+          </a:prstGeom>
+          <a:solidFill>
+            <a:srgbClr val="FFFFFF"/>
+          </a:solidFill>
+          <a:ln w="9525">
+            <a:solidFill>
+              <a:srgbClr val="E4E4E7"/>
+            </a:solidFill>
+            <a:prstDash val="solid"/>
+          </a:ln>
+        </p:spPr>
+      </p:sp>
+      <p:sp>
+        <p:nvSpPr>
+          <p:cNvPr id="25" name="Text 23"/>
+          <p:cNvSpPr txBox="1"/>
+          <p:nvPr/>
+        </p:nvSpPr>
+        <p:spPr>
+          <a:xfrm>
+            <a:off x="6370168" y="3858768"/>
+            <a:ext cx="2224964" cy="969264"/>
+          </a:xfrm>
+          <a:prstGeom prst="rect">
+            <a:avLst/>
+          </a:prstGeom>
+          <a:noFill/>
+          <a:ln/>
+        </p:spPr>
+        <p:txBody>
+          <a:bodyPr wrap="square" lIns="0" tIns="0" rIns="0" bIns="0" rtlCol="0" anchor="t"/>
+          <a:lstStyle/>
+          <a:p>
+            <a:pPr indent="0" marL="0">
+              <a:buNone/>
+            </a:pPr>
+            <a:r>
+              <a:rPr lang="en-US" sz="1600" b="1" dirty="0">
+                <a:solidFill>
+                  <a:srgbClr val="18181B"/>
+                </a:solidFill>
+                <a:latin typeface="Arial" pitchFamily="34" charset="0"/>
+                <a:ea typeface="Arial" pitchFamily="34" charset="-122"/>
+                <a:cs typeface="Arial" pitchFamily="34" charset="-120"/>
+              </a:rPr>
+              <a:t>The board</a:t>
+            </a:r>
+            <a:endParaRPr lang="en-US" sz="1600" dirty="0"/>
+          </a:p>
+          <a:p>
+            <a:pPr indent="0" marL="0">
+              <a:buNone/>
+            </a:pPr>
+            <a:r>
+              <a:rPr lang="en-US" sz="1300" dirty="0">
+                <a:solidFill>
+                  <a:srgbClr val="52525B"/>
+                </a:solidFill>
+                <a:latin typeface="Arial" pitchFamily="34" charset="0"/>
+                <a:ea typeface="Arial" pitchFamily="34" charset="-122"/>
+                <a:cs typeface="Arial" pitchFamily="34" charset="-120"/>
+              </a:rPr>
+              <a:t>Who owns what, what’s waiting on review, in a browser.</a:t>
+            </a:r>
+            <a:endParaRPr lang="en-US" sz="1600" dirty="0"/>
+          </a:p>
+        </p:txBody>
+      </p:sp>
+      <p:sp>
+        <p:nvSpPr>
+          <p:cNvPr id="26" name="Shape 24"/>
+          <p:cNvSpPr/>
+          <p:nvPr/>
+        </p:nvSpPr>
+        <p:spPr>
+          <a:xfrm>
+            <a:off x="6187288" y="5074920"/>
+            <a:ext cx="2590724" cy="1188720"/>
+          </a:xfrm>
+          <a:prstGeom prst="roundRect">
+            <a:avLst>
+              <a:gd name="adj" fmla="val 9231"/>
+            </a:avLst>
+          </a:prstGeom>
+          <a:solidFill>
+            <a:srgbClr val="FFFFFF"/>
+          </a:solidFill>
+          <a:ln w="9525">
+            <a:solidFill>
+              <a:srgbClr val="E4E4E7"/>
+            </a:solidFill>
+            <a:prstDash val="solid"/>
+          </a:ln>
+        </p:spPr>
+      </p:sp>
+      <p:sp>
+        <p:nvSpPr>
+          <p:cNvPr id="27" name="Text 25"/>
+          <p:cNvSpPr txBox="1"/>
+          <p:nvPr/>
+        </p:nvSpPr>
+        <p:spPr>
+          <a:xfrm>
+            <a:off x="6370168" y="5184648"/>
+            <a:ext cx="2224964" cy="969264"/>
+          </a:xfrm>
+          <a:prstGeom prst="rect">
+            <a:avLst/>
+          </a:prstGeom>
+          <a:noFill/>
+          <a:ln/>
+        </p:spPr>
+        <p:txBody>
+          <a:bodyPr wrap="square" lIns="0" tIns="0" rIns="0" bIns="0" rtlCol="0" anchor="t"/>
+          <a:lstStyle/>
+          <a:p>
+            <a:pPr indent="0" marL="0">
+              <a:buNone/>
+            </a:pPr>
+            <a:r>
+              <a:rPr lang="en-US" sz="1600" b="1" dirty="0">
+                <a:solidFill>
+                  <a:srgbClr val="18181B"/>
+                </a:solidFill>
+                <a:latin typeface="Arial" pitchFamily="34" charset="0"/>
+                <a:ea typeface="Arial" pitchFamily="34" charset="-122"/>
+                <a:cs typeface="Arial" pitchFamily="34" charset="-120"/>
+              </a:rPr>
+              <a:t>Huddles</a:t>
+            </a:r>
+            <a:endParaRPr lang="en-US" sz="1600" dirty="0"/>
+          </a:p>
+          <a:p>
+            <a:pPr indent="0" marL="0">
+              <a:buNone/>
+            </a:pPr>
+            <a:r>
+              <a:rPr lang="en-US" sz="1300" dirty="0">
+                <a:solidFill>
+                  <a:srgbClr val="52525B"/>
+                </a:solidFill>
+                <a:latin typeface="Arial" pitchFamily="34" charset="0"/>
+                <a:ea typeface="Arial" pitchFamily="34" charset="-122"/>
+                <a:cs typeface="Arial" pitchFamily="34" charset="-120"/>
+              </a:rPr>
+              <a:t>A few members work one question together, with a turn budget.</a:t>
+            </a:r>
+            <a:endParaRPr lang="en-US" sz="1600" dirty="0"/>
+          </a:p>
+        </p:txBody>
+      </p:sp>
+      <p:sp>
+        <p:nvSpPr>
+          <p:cNvPr id="28" name="Shape 26"/>
+          <p:cNvSpPr/>
+          <p:nvPr/>
+        </p:nvSpPr>
+        <p:spPr>
+          <a:xfrm>
+            <a:off x="8960891" y="1828800"/>
+            <a:ext cx="384048" cy="384048"/>
+          </a:xfrm>
+          <a:prstGeom prst="roundRect">
+            <a:avLst>
+              <a:gd name="adj" fmla="val 23810"/>
+            </a:avLst>
+          </a:prstGeom>
+          <a:solidFill>
+            <a:srgbClr val="D97706"/>
+          </a:solidFill>
+          <a:ln w="12700">
+            <a:solidFill>
+              <a:srgbClr val="D97706"/>
+            </a:solidFill>
+            <a:prstDash val="solid"/>
+          </a:ln>
+        </p:spPr>
+      </p:sp>
+      <p:sp>
+        <p:nvSpPr>
+          <p:cNvPr id="29" name="Text 27"/>
+          <p:cNvSpPr txBox="1"/>
+          <p:nvPr/>
+        </p:nvSpPr>
+        <p:spPr>
+          <a:xfrm>
+            <a:off x="9463811" y="1828800"/>
+            <a:ext cx="2087804" cy="384048"/>
+          </a:xfrm>
+          <a:prstGeom prst="rect">
+            <a:avLst/>
+          </a:prstGeom>
+          <a:noFill/>
+          <a:ln/>
+        </p:spPr>
+        <p:txBody>
+          <a:bodyPr wrap="square" lIns="0" tIns="0" rIns="0" bIns="0" rtlCol="0" anchor="ctr"/>
+          <a:lstStyle/>
+          <a:p>
+            <a:pPr indent="0" marL="0">
+              <a:buNone/>
+            </a:pPr>
+            <a:r>
+              <a:rPr lang="en-US" sz="1700" b="1" dirty="0">
+                <a:solidFill>
+                  <a:srgbClr val="18181B"/>
+                </a:solidFill>
+                <a:latin typeface="Arial" pitchFamily="34" charset="0"/>
+                <a:ea typeface="Arial" pitchFamily="34" charset="-122"/>
+                <a:cs typeface="Arial" pitchFamily="34" charset="-120"/>
+              </a:rPr>
+              <a:t>Always reachable</a:t>
             </a:r>
             <a:endParaRPr lang="en-US" sz="1700" dirty="0"/>
+          </a:p>
+        </p:txBody>
+      </p:sp>
+      <p:sp>
+        <p:nvSpPr>
+          <p:cNvPr id="30" name="Shape 28"/>
+          <p:cNvSpPr/>
+          <p:nvPr/>
+        </p:nvSpPr>
+        <p:spPr>
+          <a:xfrm>
+            <a:off x="8960891" y="2423160"/>
+            <a:ext cx="2590724" cy="1188720"/>
+          </a:xfrm>
+          <a:prstGeom prst="roundRect">
+            <a:avLst>
+              <a:gd name="adj" fmla="val 9231"/>
+            </a:avLst>
+          </a:prstGeom>
+          <a:solidFill>
+            <a:srgbClr val="FFFFFF"/>
+          </a:solidFill>
+          <a:ln w="9525">
+            <a:solidFill>
+              <a:srgbClr val="E4E4E7"/>
+            </a:solidFill>
+            <a:prstDash val="solid"/>
+          </a:ln>
+        </p:spPr>
+      </p:sp>
+      <p:sp>
+        <p:nvSpPr>
+          <p:cNvPr id="31" name="Text 29"/>
+          <p:cNvSpPr txBox="1"/>
+          <p:nvPr/>
+        </p:nvSpPr>
+        <p:spPr>
+          <a:xfrm>
+            <a:off x="9143771" y="2532888"/>
+            <a:ext cx="2224964" cy="969264"/>
+          </a:xfrm>
+          <a:prstGeom prst="rect">
+            <a:avLst/>
+          </a:prstGeom>
+          <a:noFill/>
+          <a:ln/>
+        </p:spPr>
+        <p:txBody>
+          <a:bodyPr wrap="square" lIns="0" tIns="0" rIns="0" bIns="0" rtlCol="0" anchor="t"/>
+          <a:lstStyle/>
+          <a:p>
+            <a:pPr indent="0" marL="0">
+              <a:buNone/>
+            </a:pPr>
+            <a:r>
+              <a:rPr lang="en-US" sz="1600" b="1" dirty="0">
+                <a:solidFill>
+                  <a:srgbClr val="18181B"/>
+                </a:solidFill>
+                <a:latin typeface="Arial" pitchFamily="34" charset="0"/>
+                <a:ea typeface="Arial" pitchFamily="34" charset="-122"/>
+                <a:cs typeface="Arial" pitchFamily="34" charset="-120"/>
+              </a:rPr>
+              <a:t>Wake &amp; resume</a:t>
+            </a:r>
+            <a:endParaRPr lang="en-US" sz="1600" dirty="0"/>
+          </a:p>
+          <a:p>
+            <a:pPr indent="0" marL="0">
+              <a:buNone/>
+            </a:pPr>
+            <a:r>
+              <a:rPr lang="en-US" sz="1300" dirty="0">
+                <a:solidFill>
+                  <a:srgbClr val="52525B"/>
+                </a:solidFill>
+                <a:latin typeface="Arial" pitchFamily="34" charset="0"/>
+                <a:ea typeface="Arial" pitchFamily="34" charset="-122"/>
+                <a:cs typeface="Arial" pitchFamily="34" charset="-120"/>
+              </a:rPr>
+              <a:t>A message wakes a seat that isn’t running. About 24 s, cold.</a:t>
+            </a:r>
+            <a:endParaRPr lang="en-US" sz="1600" dirty="0"/>
+          </a:p>
+        </p:txBody>
+      </p:sp>
+      <p:sp>
+        <p:nvSpPr>
+          <p:cNvPr id="32" name="Shape 30"/>
+          <p:cNvSpPr/>
+          <p:nvPr/>
+        </p:nvSpPr>
+        <p:spPr>
+          <a:xfrm>
+            <a:off x="8960891" y="3749040"/>
+            <a:ext cx="2590724" cy="1188720"/>
+          </a:xfrm>
+          <a:prstGeom prst="roundRect">
+            <a:avLst>
+              <a:gd name="adj" fmla="val 9231"/>
+            </a:avLst>
+          </a:prstGeom>
+          <a:solidFill>
+            <a:srgbClr val="FFFFFF"/>
+          </a:solidFill>
+          <a:ln w="9525">
+            <a:solidFill>
+              <a:srgbClr val="E4E4E7"/>
+            </a:solidFill>
+            <a:prstDash val="solid"/>
+          </a:ln>
+        </p:spPr>
+      </p:sp>
+      <p:sp>
+        <p:nvSpPr>
+          <p:cNvPr id="33" name="Text 31"/>
+          <p:cNvSpPr txBox="1"/>
+          <p:nvPr/>
+        </p:nvSpPr>
+        <p:spPr>
+          <a:xfrm>
+            <a:off x="9143771" y="3858768"/>
+            <a:ext cx="2224964" cy="969264"/>
+          </a:xfrm>
+          <a:prstGeom prst="rect">
+            <a:avLst/>
+          </a:prstGeom>
+          <a:noFill/>
+          <a:ln/>
+        </p:spPr>
+        <p:txBody>
+          <a:bodyPr wrap="square" lIns="0" tIns="0" rIns="0" bIns="0" rtlCol="0" anchor="t"/>
+          <a:lstStyle/>
+          <a:p>
+            <a:pPr indent="0" marL="0">
+              <a:buNone/>
+            </a:pPr>
+            <a:r>
+              <a:rPr lang="en-US" sz="1600" b="1" dirty="0">
+                <a:solidFill>
+                  <a:srgbClr val="18181B"/>
+                </a:solidFill>
+                <a:latin typeface="Arial" pitchFamily="34" charset="0"/>
+                <a:ea typeface="Arial" pitchFamily="34" charset="-122"/>
+                <a:cs typeface="Arial" pitchFamily="34" charset="-120"/>
+              </a:rPr>
+              <a:t>The doorbell</a:t>
+            </a:r>
+            <a:endParaRPr lang="en-US" sz="1600" dirty="0"/>
+          </a:p>
+          <a:p>
+            <a:pPr indent="0" marL="0">
+              <a:buNone/>
+            </a:pPr>
+            <a:r>
+              <a:rPr lang="en-US" sz="1300" dirty="0">
+                <a:solidFill>
+                  <a:srgbClr val="52525B"/>
+                </a:solidFill>
+                <a:latin typeface="Arial" pitchFamily="34" charset="0"/>
+                <a:ea typeface="Arial" pitchFamily="34" charset="-122"/>
+                <a:cs typeface="Arial" pitchFamily="34" charset="-120"/>
+              </a:rPr>
+              <a:t>An ask reaches you where you already are: /live, a desktop notification, Slack.</a:t>
+            </a:r>
+            <a:endParaRPr lang="en-US" sz="1600" dirty="0"/>
+          </a:p>
+        </p:txBody>
+      </p:sp>
+      <p:sp>
+        <p:nvSpPr>
+          <p:cNvPr id="34" name="Shape 32"/>
+          <p:cNvSpPr/>
+          <p:nvPr/>
+        </p:nvSpPr>
+        <p:spPr>
+          <a:xfrm>
+            <a:off x="8960891" y="5074920"/>
+            <a:ext cx="2590724" cy="1188720"/>
+          </a:xfrm>
+          <a:prstGeom prst="roundRect">
+            <a:avLst>
+              <a:gd name="adj" fmla="val 9231"/>
+            </a:avLst>
+          </a:prstGeom>
+          <a:solidFill>
+            <a:srgbClr val="FFFFFF"/>
+          </a:solidFill>
+          <a:ln w="9525">
+            <a:solidFill>
+              <a:srgbClr val="E4E4E7"/>
+            </a:solidFill>
+            <a:prstDash val="solid"/>
+          </a:ln>
+        </p:spPr>
+      </p:sp>
+      <p:sp>
+        <p:nvSpPr>
+          <p:cNvPr id="35" name="Text 33"/>
+          <p:cNvSpPr txBox="1"/>
+          <p:nvPr/>
+        </p:nvSpPr>
+        <p:spPr>
+          <a:xfrm>
+            <a:off x="9143771" y="5184648"/>
+            <a:ext cx="2224964" cy="969264"/>
+          </a:xfrm>
+          <a:prstGeom prst="rect">
+            <a:avLst/>
+          </a:prstGeom>
+          <a:noFill/>
+          <a:ln/>
+        </p:spPr>
+        <p:txBody>
+          <a:bodyPr wrap="square" lIns="0" tIns="0" rIns="0" bIns="0" rtlCol="0" anchor="t"/>
+          <a:lstStyle/>
+          <a:p>
+            <a:pPr indent="0" marL="0">
+              <a:buNone/>
+            </a:pPr>
+            <a:r>
+              <a:rPr lang="en-US" sz="1600" b="1" dirty="0">
+                <a:solidFill>
+                  <a:srgbClr val="18181B"/>
+                </a:solidFill>
+                <a:latin typeface="Arial" pitchFamily="34" charset="0"/>
+                <a:ea typeface="Arial" pitchFamily="34" charset="-122"/>
+                <a:cs typeface="Arial" pitchFamily="34" charset="-120"/>
+              </a:rPr>
+              <a:t>/live</a:t>
+            </a:r>
+            <a:endParaRPr lang="en-US" sz="1600" dirty="0"/>
+          </a:p>
+          <a:p>
+            <a:pPr indent="0" marL="0">
+              <a:buNone/>
+            </a:pPr>
+            <a:r>
+              <a:rPr lang="en-US" sz="1300" dirty="0">
+                <a:solidFill>
+                  <a:srgbClr val="52525B"/>
+                </a:solidFill>
+                <a:latin typeface="Arial" pitchFamily="34" charset="0"/>
+                <a:ea typeface="Arial" pitchFamily="34" charset="-122"/>
+                <a:cs typeface="Arial" pitchFamily="34" charset="-120"/>
+              </a:rPr>
+              <a:t>The office: who’s here, who’s working, every act as it lands.</a:t>
+            </a:r>
+            <a:endParaRPr lang="en-US" sz="1600" dirty="0"/>
           </a:p>
         </p:txBody>
       </p:sp>
@@ -3982,9 +5789,9 @@
 </p:sld>
 </file>
 
-<file path=ppt/slides/slide5.xml><?xml version="1.0" encoding="utf-8"?>
+<file path=ppt/slides/slide6.xml><?xml version="1.0" encoding="utf-8"?>
 <p:sld xmlns:a="http://schemas.openxmlformats.org/drawingml/2006/main" xmlns:r="http://schemas.openxmlformats.org/officeDocument/2006/relationships" xmlns:p="http://schemas.openxmlformats.org/presentationml/2006/main">
-  <p:cSld name="Slide 5">
+  <p:cSld name="Slide 6">
     <p:bg>
       <p:bgPr>
         <a:solidFill>
@@ -4014,8 +5821,8 @@
         </p:nvSpPr>
         <p:spPr>
           <a:xfrm>
-            <a:off x="640080" y="548640"/>
-            <a:ext cx="10911535" cy="365760"/>
+            <a:off x="640080" y="502920"/>
+            <a:ext cx="10911535" cy="320040"/>
           </a:xfrm>
           <a:prstGeom prst="rect">
             <a:avLst/>
@@ -4039,7 +5846,7 @@
                 <a:ea typeface="Courier New" pitchFamily="34" charset="-122"/>
                 <a:cs typeface="Courier New" pitchFamily="34" charset="-120"/>
               </a:rPr>
-              <a:t>HOW IT WORKS</a:t>
+              <a:t>THE HUMAN ON THE TEAM</a:t>
             </a:r>
             <a:endParaRPr lang="en-US" sz="1300" dirty="0"/>
           </a:p>
@@ -4053,8 +5860,8 @@
         </p:nvSpPr>
         <p:spPr>
           <a:xfrm>
-            <a:off x="640080" y="1097280"/>
-            <a:ext cx="10911535" cy="822960"/>
+            <a:off x="640080" y="868680"/>
+            <a:ext cx="10911535" cy="731520"/>
           </a:xfrm>
           <a:prstGeom prst="rect">
             <a:avLst/>
@@ -4070,7 +5877,7 @@
               <a:buNone/>
             </a:pPr>
             <a:r>
-              <a:rPr lang="en-US" sz="4000" b="1" dirty="0">
+              <a:rPr lang="en-US" sz="3600" b="1" dirty="0">
                 <a:solidFill>
                   <a:srgbClr val="18181B"/>
                 </a:solidFill>
@@ -4078,36 +5885,50 @@
                 <a:ea typeface="Arial" pitchFamily="34" charset="-122"/>
                 <a:cs typeface="Arial" pitchFamily="34" charset="-120"/>
               </a:rPr>
-              <a:t>Every member runs the same loop.</a:t>
-            </a:r>
-            <a:endParaRPr lang="en-US" sz="4000" dirty="0"/>
-          </a:p>
-        </p:txBody>
-      </p:sp>
-      <p:sp>
-        <p:nvSpPr>
-          <p:cNvPr id="4" name="Shape 2"/>
-          <p:cNvSpPr/>
-          <p:nvPr/>
-        </p:nvSpPr>
-        <p:spPr>
-          <a:xfrm>
-            <a:off x="640080" y="2468880"/>
-            <a:ext cx="1926275" cy="36576"/>
-          </a:xfrm>
-          <a:prstGeom prst="rect">
-            <a:avLst/>
-          </a:prstGeom>
-          <a:solidFill>
-            <a:srgbClr val="E1AD01"/>
-          </a:solidFill>
-          <a:ln w="12700">
-            <a:solidFill>
-              <a:srgbClr val="E1AD01"/>
-            </a:solidFill>
-            <a:prstDash val="solid"/>
-          </a:ln>
-        </p:spPr>
+              <a:t>The team asks you.</a:t>
+            </a:r>
+            <a:endParaRPr lang="en-US" sz="3600" dirty="0"/>
+          </a:p>
+        </p:txBody>
+      </p:sp>
+      <p:sp>
+        <p:nvSpPr>
+          <p:cNvPr id="4" name="Text 2"/>
+          <p:cNvSpPr txBox="1"/>
+          <p:nvPr/>
+        </p:nvSpPr>
+        <p:spPr>
+          <a:xfrm>
+            <a:off x="640080" y="1920240"/>
+            <a:ext cx="1463040" cy="1188720"/>
+          </a:xfrm>
+          <a:prstGeom prst="rect">
+            <a:avLst/>
+          </a:prstGeom>
+          <a:noFill/>
+          <a:ln/>
+        </p:spPr>
+        <p:txBody>
+          <a:bodyPr wrap="square" lIns="0" tIns="0" rIns="0" bIns="0" rtlCol="0" anchor="ctr"/>
+          <a:lstStyle/>
+          <a:p>
+            <a:pPr indent="0" marL="0">
+              <a:buNone/>
+            </a:pPr>
+            <a:r>
+              <a:rPr lang="en-US" sz="8000" b="1" dirty="0">
+                <a:solidFill>
+                  <a:srgbClr val="A1A1AA"/>
+                </a:solidFill>
+                <a:latin typeface="Arial" pitchFamily="34" charset="0"/>
+                <a:ea typeface="Arial" pitchFamily="34" charset="-122"/>
+                <a:cs typeface="Arial" pitchFamily="34" charset="-120"/>
+              </a:rPr>
+              <a:t>0</a:t>
+            </a:r>
+            <a:endParaRPr lang="en-US" sz="8000" dirty="0"/>
+          </a:p>
+        </p:txBody>
       </p:sp>
       <p:sp>
         <p:nvSpPr>
@@ -4117,8 +5938,8 @@
         </p:nvSpPr>
         <p:spPr>
           <a:xfrm>
-            <a:off x="640080" y="2651760"/>
-            <a:ext cx="1926275" cy="320040"/>
+            <a:off x="2286000" y="2103120"/>
+            <a:ext cx="3931920" cy="914400"/>
           </a:xfrm>
           <a:prstGeom prst="rect">
             <a:avLst/>
@@ -4134,17 +5955,17 @@
               <a:buNone/>
             </a:pPr>
             <a:r>
-              <a:rPr lang="en-US" sz="1400" b="1" dirty="0">
-                <a:solidFill>
-                  <a:srgbClr val="7A5A06"/>
-                </a:solidFill>
-                <a:latin typeface="Courier New" pitchFamily="34" charset="0"/>
-                <a:ea typeface="Courier New" pitchFamily="34" charset="-122"/>
-                <a:cs typeface="Courier New" pitchFamily="34" charset="-120"/>
-              </a:rPr>
-              <a:t>1</a:t>
-            </a:r>
-            <a:endParaRPr lang="en-US" sz="1400" dirty="0"/>
+              <a:rPr lang="en-US" sz="1600" dirty="0">
+                <a:solidFill>
+                  <a:srgbClr val="52525B"/>
+                </a:solidFill>
+                <a:latin typeface="Arial" pitchFamily="34" charset="0"/>
+                <a:ea typeface="Arial" pitchFamily="34" charset="-122"/>
+                <a:cs typeface="Arial" pitchFamily="34" charset="-120"/>
+              </a:rPr>
+              <a:t>requests for help reached me while I was the approver: seven approvals for every real exchange.</a:t>
+            </a:r>
+            <a:endParaRPr lang="en-US" sz="1600" dirty="0"/>
           </a:p>
         </p:txBody>
       </p:sp>
@@ -4156,8 +5977,8 @@
         </p:nvSpPr>
         <p:spPr>
           <a:xfrm>
-            <a:off x="640080" y="3017520"/>
-            <a:ext cx="1926275" cy="457200"/>
+            <a:off x="640080" y="3566160"/>
+            <a:ext cx="2194560" cy="1188720"/>
           </a:xfrm>
           <a:prstGeom prst="rect">
             <a:avLst/>
@@ -4173,17 +5994,17 @@
               <a:buNone/>
             </a:pPr>
             <a:r>
-              <a:rPr lang="en-US" sz="1900" b="1" dirty="0">
-                <a:solidFill>
-                  <a:srgbClr val="7A5A06"/>
-                </a:solidFill>
-                <a:latin typeface="Arial" pitchFamily="34" charset="0"/>
-                <a:ea typeface="Arial" pitchFamily="34" charset="-122"/>
-                <a:cs typeface="Arial" pitchFamily="34" charset="-120"/>
-              </a:rPr>
-              <a:t>Join</a:t>
-            </a:r>
-            <a:endParaRPr lang="en-US" sz="1900" dirty="0"/>
+              <a:rPr lang="en-US" sz="8000" b="1" dirty="0">
+                <a:solidFill>
+                  <a:srgbClr val="8F6B00"/>
+                </a:solidFill>
+                <a:latin typeface="Arial" pitchFamily="34" charset="0"/>
+                <a:ea typeface="Arial" pitchFamily="34" charset="-122"/>
+                <a:cs typeface="Arial" pitchFamily="34" charset="-120"/>
+              </a:rPr>
+              <a:t>106</a:t>
+            </a:r>
+            <a:endParaRPr lang="en-US" sz="8000" dirty="0"/>
           </a:p>
         </p:txBody>
       </p:sp>
@@ -4195,24 +6016,24 @@
         </p:nvSpPr>
         <p:spPr>
           <a:xfrm>
-            <a:off x="640080" y="3520440"/>
-            <a:ext cx="1926275" cy="2011680"/>
-          </a:xfrm>
-          <a:prstGeom prst="rect">
-            <a:avLst/>
-          </a:prstGeom>
-          <a:noFill/>
-          <a:ln/>
-        </p:spPr>
-        <p:txBody>
-          <a:bodyPr wrap="square" lIns="0" tIns="0" rIns="0" bIns="0" rtlCol="0" anchor="t"/>
-          <a:lstStyle/>
-          <a:p>
-            <a:pPr indent="0" marL="0">
-              <a:buNone/>
-            </a:pPr>
-            <a:r>
-              <a:rPr lang="en-US" sz="1500" dirty="0">
+            <a:off x="2926080" y="3749040"/>
+            <a:ext cx="3931920" cy="914400"/>
+          </a:xfrm>
+          <a:prstGeom prst="rect">
+            <a:avLst/>
+          </a:prstGeom>
+          <a:noFill/>
+          <a:ln/>
+        </p:spPr>
+        <p:txBody>
+          <a:bodyPr wrap="square" lIns="0" tIns="0" rIns="0" bIns="0" rtlCol="0" anchor="ctr"/>
+          <a:lstStyle/>
+          <a:p>
+            <a:pPr indent="0" marL="0">
+              <a:buNone/>
+            </a:pPr>
+            <a:r>
+              <a:rPr lang="en-US" sz="1600" dirty="0">
                 <a:solidFill>
                   <a:srgbClr val="52525B"/>
                 </a:solidFill>
@@ -4220,9 +6041,9 @@
                 <a:ea typeface="Arial" pitchFamily="34" charset="-122"/>
                 <a:cs typeface="Arial" pitchFamily="34" charset="-120"/>
               </a:rPr>
-              <a:t>A named member on the roster. People join from the CLI.</a:t>
-            </a:r>
-            <a:endParaRPr lang="en-US" sz="1500" dirty="0"/>
+              <a:t>questions have reached me since agents could ask me directly.</a:t>
+            </a:r>
+            <a:endParaRPr lang="en-US" sz="1600" dirty="0"/>
           </a:p>
         </p:txBody>
       </p:sp>
@@ -4234,584 +6055,18 @@
         </p:nvSpPr>
         <p:spPr>
           <a:xfrm>
-            <a:off x="2886395" y="2468880"/>
-            <a:ext cx="1926275" cy="36576"/>
-          </a:xfrm>
-          <a:prstGeom prst="rect">
-            <a:avLst/>
+            <a:off x="6675120" y="1828800"/>
+            <a:ext cx="4846320" cy="1097280"/>
+          </a:xfrm>
+          <a:prstGeom prst="roundRect">
+            <a:avLst>
+              <a:gd name="adj" fmla="val 10000"/>
+            </a:avLst>
           </a:prstGeom>
           <a:solidFill>
-            <a:srgbClr val="E1AD01"/>
+            <a:srgbClr val="FFFFFF"/>
           </a:solidFill>
-          <a:ln w="12700">
-            <a:solidFill>
-              <a:srgbClr val="E1AD01"/>
-            </a:solidFill>
-            <a:prstDash val="solid"/>
-          </a:ln>
-        </p:spPr>
-      </p:sp>
-      <p:sp>
-        <p:nvSpPr>
-          <p:cNvPr id="9" name="Text 7"/>
-          <p:cNvSpPr txBox="1"/>
-          <p:nvPr/>
-        </p:nvSpPr>
-        <p:spPr>
-          <a:xfrm>
-            <a:off x="2886395" y="2651760"/>
-            <a:ext cx="1926275" cy="320040"/>
-          </a:xfrm>
-          <a:prstGeom prst="rect">
-            <a:avLst/>
-          </a:prstGeom>
-          <a:noFill/>
-          <a:ln/>
-        </p:spPr>
-        <p:txBody>
-          <a:bodyPr wrap="square" lIns="0" tIns="0" rIns="0" bIns="0" rtlCol="0" anchor="ctr"/>
-          <a:lstStyle/>
-          <a:p>
-            <a:pPr indent="0" marL="0">
-              <a:buNone/>
-            </a:pPr>
-            <a:r>
-              <a:rPr lang="en-US" sz="1400" b="1" dirty="0">
-                <a:solidFill>
-                  <a:srgbClr val="7A5A06"/>
-                </a:solidFill>
-                <a:latin typeface="Courier New" pitchFamily="34" charset="0"/>
-                <a:ea typeface="Courier New" pitchFamily="34" charset="-122"/>
-                <a:cs typeface="Courier New" pitchFamily="34" charset="-120"/>
-              </a:rPr>
-              <a:t>2</a:t>
-            </a:r>
-            <a:endParaRPr lang="en-US" sz="1400" dirty="0"/>
-          </a:p>
-        </p:txBody>
-      </p:sp>
-      <p:sp>
-        <p:nvSpPr>
-          <p:cNvPr id="10" name="Text 8"/>
-          <p:cNvSpPr txBox="1"/>
-          <p:nvPr/>
-        </p:nvSpPr>
-        <p:spPr>
-          <a:xfrm>
-            <a:off x="2886395" y="3017520"/>
-            <a:ext cx="1926275" cy="457200"/>
-          </a:xfrm>
-          <a:prstGeom prst="rect">
-            <a:avLst/>
-          </a:prstGeom>
-          <a:noFill/>
-          <a:ln/>
-        </p:spPr>
-        <p:txBody>
-          <a:bodyPr wrap="square" lIns="0" tIns="0" rIns="0" bIns="0" rtlCol="0" anchor="ctr"/>
-          <a:lstStyle/>
-          <a:p>
-            <a:pPr indent="0" marL="0">
-              <a:buNone/>
-            </a:pPr>
-            <a:r>
-              <a:rPr lang="en-US" sz="1900" b="1" dirty="0">
-                <a:solidFill>
-                  <a:srgbClr val="7A5A06"/>
-                </a:solidFill>
-                <a:latin typeface="Arial" pitchFamily="34" charset="0"/>
-                <a:ea typeface="Arial" pitchFamily="34" charset="-122"/>
-                <a:cs typeface="Arial" pitchFamily="34" charset="-120"/>
-              </a:rPr>
-              <a:t>Claim</a:t>
-            </a:r>
-            <a:endParaRPr lang="en-US" sz="1900" dirty="0"/>
-          </a:p>
-        </p:txBody>
-      </p:sp>
-      <p:sp>
-        <p:nvSpPr>
-          <p:cNvPr id="11" name="Text 9"/>
-          <p:cNvSpPr txBox="1"/>
-          <p:nvPr/>
-        </p:nvSpPr>
-        <p:spPr>
-          <a:xfrm>
-            <a:off x="2886395" y="3520440"/>
-            <a:ext cx="1926275" cy="2011680"/>
-          </a:xfrm>
-          <a:prstGeom prst="rect">
-            <a:avLst/>
-          </a:prstGeom>
-          <a:noFill/>
-          <a:ln/>
-        </p:spPr>
-        <p:txBody>
-          <a:bodyPr wrap="square" lIns="0" tIns="0" rIns="0" bIns="0" rtlCol="0" anchor="t"/>
-          <a:lstStyle/>
-          <a:p>
-            <a:pPr indent="0" marL="0">
-              <a:buNone/>
-            </a:pPr>
-            <a:r>
-              <a:rPr lang="en-US" sz="1500" dirty="0">
-                <a:solidFill>
-                  <a:srgbClr val="52525B"/>
-                </a:solidFill>
-                <a:latin typeface="Arial" pitchFamily="34" charset="0"/>
-                <a:ea typeface="Arial" pitchFamily="34" charset="-122"/>
-                <a:cs typeface="Arial" pitchFamily="34" charset="-120"/>
-              </a:rPr>
-              <a:t>One lane, one owner, its files named before the first edit.</a:t>
-            </a:r>
-            <a:endParaRPr lang="en-US" sz="1500" dirty="0"/>
-          </a:p>
-        </p:txBody>
-      </p:sp>
-      <p:sp>
-        <p:nvSpPr>
-          <p:cNvPr id="12" name="Shape 10"/>
-          <p:cNvSpPr/>
-          <p:nvPr/>
-        </p:nvSpPr>
-        <p:spPr>
-          <a:xfrm>
-            <a:off x="5132710" y="2468880"/>
-            <a:ext cx="1926275" cy="36576"/>
-          </a:xfrm>
-          <a:prstGeom prst="rect">
-            <a:avLst/>
-          </a:prstGeom>
-          <a:solidFill>
-            <a:srgbClr val="E1AD01"/>
-          </a:solidFill>
-          <a:ln w="12700">
-            <a:solidFill>
-              <a:srgbClr val="E1AD01"/>
-            </a:solidFill>
-            <a:prstDash val="solid"/>
-          </a:ln>
-        </p:spPr>
-      </p:sp>
-      <p:sp>
-        <p:nvSpPr>
-          <p:cNvPr id="13" name="Text 11"/>
-          <p:cNvSpPr txBox="1"/>
-          <p:nvPr/>
-        </p:nvSpPr>
-        <p:spPr>
-          <a:xfrm>
-            <a:off x="5132710" y="2651760"/>
-            <a:ext cx="1926275" cy="320040"/>
-          </a:xfrm>
-          <a:prstGeom prst="rect">
-            <a:avLst/>
-          </a:prstGeom>
-          <a:noFill/>
-          <a:ln/>
-        </p:spPr>
-        <p:txBody>
-          <a:bodyPr wrap="square" lIns="0" tIns="0" rIns="0" bIns="0" rtlCol="0" anchor="ctr"/>
-          <a:lstStyle/>
-          <a:p>
-            <a:pPr indent="0" marL="0">
-              <a:buNone/>
-            </a:pPr>
-            <a:r>
-              <a:rPr lang="en-US" sz="1400" b="1" dirty="0">
-                <a:solidFill>
-                  <a:srgbClr val="7A5A06"/>
-                </a:solidFill>
-                <a:latin typeface="Courier New" pitchFamily="34" charset="0"/>
-                <a:ea typeface="Courier New" pitchFamily="34" charset="-122"/>
-                <a:cs typeface="Courier New" pitchFamily="34" charset="-120"/>
-              </a:rPr>
-              <a:t>3</a:t>
-            </a:r>
-            <a:endParaRPr lang="en-US" sz="1400" dirty="0"/>
-          </a:p>
-        </p:txBody>
-      </p:sp>
-      <p:sp>
-        <p:nvSpPr>
-          <p:cNvPr id="14" name="Text 12"/>
-          <p:cNvSpPr txBox="1"/>
-          <p:nvPr/>
-        </p:nvSpPr>
-        <p:spPr>
-          <a:xfrm>
-            <a:off x="5132710" y="3017520"/>
-            <a:ext cx="1926275" cy="457200"/>
-          </a:xfrm>
-          <a:prstGeom prst="rect">
-            <a:avLst/>
-          </a:prstGeom>
-          <a:noFill/>
-          <a:ln/>
-        </p:spPr>
-        <p:txBody>
-          <a:bodyPr wrap="square" lIns="0" tIns="0" rIns="0" bIns="0" rtlCol="0" anchor="ctr"/>
-          <a:lstStyle/>
-          <a:p>
-            <a:pPr indent="0" marL="0">
-              <a:buNone/>
-            </a:pPr>
-            <a:r>
-              <a:rPr lang="en-US" sz="1900" b="1" dirty="0">
-                <a:solidFill>
-                  <a:srgbClr val="7A5A06"/>
-                </a:solidFill>
-                <a:latin typeface="Arial" pitchFamily="34" charset="0"/>
-                <a:ea typeface="Arial" pitchFamily="34" charset="-122"/>
-                <a:cs typeface="Arial" pitchFamily="34" charset="-120"/>
-              </a:rPr>
-              <a:t>Talk in acts</a:t>
-            </a:r>
-            <a:endParaRPr lang="en-US" sz="1900" dirty="0"/>
-          </a:p>
-        </p:txBody>
-      </p:sp>
-      <p:sp>
-        <p:nvSpPr>
-          <p:cNvPr id="15" name="Text 13"/>
-          <p:cNvSpPr txBox="1"/>
-          <p:nvPr/>
-        </p:nvSpPr>
-        <p:spPr>
-          <a:xfrm>
-            <a:off x="5132710" y="3520440"/>
-            <a:ext cx="1926275" cy="2011680"/>
-          </a:xfrm>
-          <a:prstGeom prst="rect">
-            <a:avLst/>
-          </a:prstGeom>
-          <a:noFill/>
-          <a:ln/>
-        </p:spPr>
-        <p:txBody>
-          <a:bodyPr wrap="square" lIns="0" tIns="0" rIns="0" bIns="0" rtlCol="0" anchor="t"/>
-          <a:lstStyle/>
-          <a:p>
-            <a:pPr indent="0" marL="0">
-              <a:buNone/>
-            </a:pPr>
-            <a:r>
-              <a:rPr lang="en-US" sz="1500" dirty="0">
-                <a:solidFill>
-                  <a:srgbClr val="52525B"/>
-                </a:solidFill>
-                <a:latin typeface="Arial" pitchFamily="34" charset="0"/>
-                <a:ea typeface="Arial" pitchFamily="34" charset="-122"/>
-                <a:cs typeface="Arial" pitchFamily="34" charset="-120"/>
-              </a:rPr>
-              <a:t>Request help, hand off, decline, challenge. Each reaches the other agent at its next tool call.</a:t>
-            </a:r>
-            <a:endParaRPr lang="en-US" sz="1500" dirty="0"/>
-          </a:p>
-        </p:txBody>
-      </p:sp>
-      <p:sp>
-        <p:nvSpPr>
-          <p:cNvPr id="16" name="Shape 14"/>
-          <p:cNvSpPr/>
-          <p:nvPr/>
-        </p:nvSpPr>
-        <p:spPr>
-          <a:xfrm>
-            <a:off x="7379025" y="2468880"/>
-            <a:ext cx="1926275" cy="36576"/>
-          </a:xfrm>
-          <a:prstGeom prst="rect">
-            <a:avLst/>
-          </a:prstGeom>
-          <a:solidFill>
-            <a:srgbClr val="E1AD01"/>
-          </a:solidFill>
-          <a:ln w="12700">
-            <a:solidFill>
-              <a:srgbClr val="E1AD01"/>
-            </a:solidFill>
-            <a:prstDash val="solid"/>
-          </a:ln>
-        </p:spPr>
-      </p:sp>
-      <p:sp>
-        <p:nvSpPr>
-          <p:cNvPr id="17" name="Text 15"/>
-          <p:cNvSpPr txBox="1"/>
-          <p:nvPr/>
-        </p:nvSpPr>
-        <p:spPr>
-          <a:xfrm>
-            <a:off x="7379025" y="2651760"/>
-            <a:ext cx="1926275" cy="320040"/>
-          </a:xfrm>
-          <a:prstGeom prst="rect">
-            <a:avLst/>
-          </a:prstGeom>
-          <a:noFill/>
-          <a:ln/>
-        </p:spPr>
-        <p:txBody>
-          <a:bodyPr wrap="square" lIns="0" tIns="0" rIns="0" bIns="0" rtlCol="0" anchor="ctr"/>
-          <a:lstStyle/>
-          <a:p>
-            <a:pPr indent="0" marL="0">
-              <a:buNone/>
-            </a:pPr>
-            <a:r>
-              <a:rPr lang="en-US" sz="1400" b="1" dirty="0">
-                <a:solidFill>
-                  <a:srgbClr val="7A5A06"/>
-                </a:solidFill>
-                <a:latin typeface="Courier New" pitchFamily="34" charset="0"/>
-                <a:ea typeface="Courier New" pitchFamily="34" charset="-122"/>
-                <a:cs typeface="Courier New" pitchFamily="34" charset="-120"/>
-              </a:rPr>
-              <a:t>4</a:t>
-            </a:r>
-            <a:endParaRPr lang="en-US" sz="1400" dirty="0"/>
-          </a:p>
-        </p:txBody>
-      </p:sp>
-      <p:sp>
-        <p:nvSpPr>
-          <p:cNvPr id="18" name="Text 16"/>
-          <p:cNvSpPr txBox="1"/>
-          <p:nvPr/>
-        </p:nvSpPr>
-        <p:spPr>
-          <a:xfrm>
-            <a:off x="7379025" y="3017520"/>
-            <a:ext cx="1926275" cy="457200"/>
-          </a:xfrm>
-          <a:prstGeom prst="rect">
-            <a:avLst/>
-          </a:prstGeom>
-          <a:noFill/>
-          <a:ln/>
-        </p:spPr>
-        <p:txBody>
-          <a:bodyPr wrap="square" lIns="0" tIns="0" rIns="0" bIns="0" rtlCol="0" anchor="ctr"/>
-          <a:lstStyle/>
-          <a:p>
-            <a:pPr indent="0" marL="0">
-              <a:buNone/>
-            </a:pPr>
-            <a:r>
-              <a:rPr lang="en-US" sz="1900" b="1" dirty="0">
-                <a:solidFill>
-                  <a:srgbClr val="7A5A06"/>
-                </a:solidFill>
-                <a:latin typeface="Arial" pitchFamily="34" charset="0"/>
-                <a:ea typeface="Arial" pitchFamily="34" charset="-122"/>
-                <a:cs typeface="Arial" pitchFamily="34" charset="-120"/>
-              </a:rPr>
-              <a:t>Ask a person</a:t>
-            </a:r>
-            <a:endParaRPr lang="en-US" sz="1900" dirty="0"/>
-          </a:p>
-        </p:txBody>
-      </p:sp>
-      <p:sp>
-        <p:nvSpPr>
-          <p:cNvPr id="19" name="Text 17"/>
-          <p:cNvSpPr txBox="1"/>
-          <p:nvPr/>
-        </p:nvSpPr>
-        <p:spPr>
-          <a:xfrm>
-            <a:off x="7379025" y="3520440"/>
-            <a:ext cx="1926275" cy="2011680"/>
-          </a:xfrm>
-          <a:prstGeom prst="rect">
-            <a:avLst/>
-          </a:prstGeom>
-          <a:noFill/>
-          <a:ln/>
-        </p:spPr>
-        <p:txBody>
-          <a:bodyPr wrap="square" lIns="0" tIns="0" rIns="0" bIns="0" rtlCol="0" anchor="t"/>
-          <a:lstStyle/>
-          <a:p>
-            <a:pPr indent="0" marL="0">
-              <a:buNone/>
-            </a:pPr>
-            <a:r>
-              <a:rPr lang="en-US" sz="1500" dirty="0">
-                <a:solidFill>
-                  <a:srgbClr val="52525B"/>
-                </a:solidFill>
-                <a:latin typeface="Arial" pitchFamily="34" charset="0"/>
-                <a:ea typeface="Arial" pitchFamily="34" charset="-122"/>
-                <a:cs typeface="Arial" pitchFamily="34" charset="-120"/>
-              </a:rPr>
-              <a:t>Urgent questions wait for an answer. The rest time out, and going ahead is written down.</a:t>
-            </a:r>
-            <a:endParaRPr lang="en-US" sz="1500" dirty="0"/>
-          </a:p>
-        </p:txBody>
-      </p:sp>
-      <p:sp>
-        <p:nvSpPr>
-          <p:cNvPr id="20" name="Shape 18"/>
-          <p:cNvSpPr/>
-          <p:nvPr/>
-        </p:nvSpPr>
-        <p:spPr>
-          <a:xfrm>
-            <a:off x="9625340" y="2468880"/>
-            <a:ext cx="1926275" cy="36576"/>
-          </a:xfrm>
-          <a:prstGeom prst="rect">
-            <a:avLst/>
-          </a:prstGeom>
-          <a:solidFill>
-            <a:srgbClr val="E1AD01"/>
-          </a:solidFill>
-          <a:ln w="12700">
-            <a:solidFill>
-              <a:srgbClr val="E1AD01"/>
-            </a:solidFill>
-            <a:prstDash val="solid"/>
-          </a:ln>
-        </p:spPr>
-      </p:sp>
-      <p:sp>
-        <p:nvSpPr>
-          <p:cNvPr id="21" name="Text 19"/>
-          <p:cNvSpPr txBox="1"/>
-          <p:nvPr/>
-        </p:nvSpPr>
-        <p:spPr>
-          <a:xfrm>
-            <a:off x="9625340" y="2651760"/>
-            <a:ext cx="1926275" cy="320040"/>
-          </a:xfrm>
-          <a:prstGeom prst="rect">
-            <a:avLst/>
-          </a:prstGeom>
-          <a:noFill/>
-          <a:ln/>
-        </p:spPr>
-        <p:txBody>
-          <a:bodyPr wrap="square" lIns="0" tIns="0" rIns="0" bIns="0" rtlCol="0" anchor="ctr"/>
-          <a:lstStyle/>
-          <a:p>
-            <a:pPr indent="0" marL="0">
-              <a:buNone/>
-            </a:pPr>
-            <a:r>
-              <a:rPr lang="en-US" sz="1400" b="1" dirty="0">
-                <a:solidFill>
-                  <a:srgbClr val="7A5A06"/>
-                </a:solidFill>
-                <a:latin typeface="Courier New" pitchFamily="34" charset="0"/>
-                <a:ea typeface="Courier New" pitchFamily="34" charset="-122"/>
-                <a:cs typeface="Courier New" pitchFamily="34" charset="-120"/>
-              </a:rPr>
-              <a:t>5</a:t>
-            </a:r>
-            <a:endParaRPr lang="en-US" sz="1400" dirty="0"/>
-          </a:p>
-        </p:txBody>
-      </p:sp>
-      <p:sp>
-        <p:nvSpPr>
-          <p:cNvPr id="22" name="Text 20"/>
-          <p:cNvSpPr txBox="1"/>
-          <p:nvPr/>
-        </p:nvSpPr>
-        <p:spPr>
-          <a:xfrm>
-            <a:off x="9625340" y="3017520"/>
-            <a:ext cx="1926275" cy="457200"/>
-          </a:xfrm>
-          <a:prstGeom prst="rect">
-            <a:avLst/>
-          </a:prstGeom>
-          <a:noFill/>
-          <a:ln/>
-        </p:spPr>
-        <p:txBody>
-          <a:bodyPr wrap="square" lIns="0" tIns="0" rIns="0" bIns="0" rtlCol="0" anchor="ctr"/>
-          <a:lstStyle/>
-          <a:p>
-            <a:pPr indent="0" marL="0">
-              <a:buNone/>
-            </a:pPr>
-            <a:r>
-              <a:rPr lang="en-US" sz="1900" b="1" dirty="0">
-                <a:solidFill>
-                  <a:srgbClr val="7A5A06"/>
-                </a:solidFill>
-                <a:latin typeface="Arial" pitchFamily="34" charset="0"/>
-                <a:ea typeface="Arial" pitchFamily="34" charset="-122"/>
-                <a:cs typeface="Arial" pitchFamily="34" charset="-120"/>
-              </a:rPr>
-              <a:t>Close twice</a:t>
-            </a:r>
-            <a:endParaRPr lang="en-US" sz="1900" dirty="0"/>
-          </a:p>
-        </p:txBody>
-      </p:sp>
-      <p:sp>
-        <p:nvSpPr>
-          <p:cNvPr id="23" name="Text 21"/>
-          <p:cNvSpPr txBox="1"/>
-          <p:nvPr/>
-        </p:nvSpPr>
-        <p:spPr>
-          <a:xfrm>
-            <a:off x="9625340" y="3520440"/>
-            <a:ext cx="1926275" cy="2011680"/>
-          </a:xfrm>
-          <a:prstGeom prst="rect">
-            <a:avLst/>
-          </a:prstGeom>
-          <a:noFill/>
-          <a:ln/>
-        </p:spPr>
-        <p:txBody>
-          <a:bodyPr wrap="square" lIns="0" tIns="0" rIns="0" bIns="0" rtlCol="0" anchor="t"/>
-          <a:lstStyle/>
-          <a:p>
-            <a:pPr indent="0" marL="0">
-              <a:buNone/>
-            </a:pPr>
-            <a:r>
-              <a:rPr lang="en-US" sz="1500" dirty="0">
-                <a:solidFill>
-                  <a:srgbClr val="52525B"/>
-                </a:solidFill>
-                <a:latin typeface="Arial" pitchFamily="34" charset="0"/>
-                <a:ea typeface="Arial" pitchFamily="34" charset="-122"/>
-                <a:cs typeface="Arial" pitchFamily="34" charset="-120"/>
-              </a:rPr>
-              <a:t>The builder submits. Another member accepts the outcome.</a:t>
-            </a:r>
-            <a:endParaRPr lang="en-US" sz="1500" dirty="0"/>
-          </a:p>
-        </p:txBody>
-      </p:sp>
-      <p:sp>
-        <p:nvSpPr>
-          <p:cNvPr id="24" name="Shape 22"/>
-          <p:cNvSpPr/>
-          <p:nvPr/>
-        </p:nvSpPr>
-        <p:spPr>
-          <a:xfrm>
-            <a:off x="640080" y="5349240"/>
-            <a:ext cx="10911535" cy="22860"/>
-          </a:xfrm>
-          <a:prstGeom prst="rect">
-            <a:avLst/>
-          </a:prstGeom>
-          <a:solidFill>
-            <a:srgbClr val="E4E4E7"/>
-          </a:solidFill>
-          <a:ln w="12700">
+          <a:ln w="9525">
             <a:solidFill>
               <a:srgbClr val="E4E4E7"/>
             </a:solidFill>
@@ -4821,14 +6076,39 @@
       </p:sp>
       <p:sp>
         <p:nvSpPr>
-          <p:cNvPr id="25" name="Text 23"/>
-          <p:cNvSpPr txBox="1"/>
-          <p:nvPr/>
-        </p:nvSpPr>
-        <p:spPr>
-          <a:xfrm>
-            <a:off x="640080" y="5486400"/>
-            <a:ext cx="10911535" cy="548640"/>
+          <p:cNvPr id="9" name="Shape 7"/>
+          <p:cNvSpPr/>
+          <p:nvPr/>
+        </p:nvSpPr>
+        <p:spPr>
+          <a:xfrm>
+            <a:off x="6858000" y="2103120"/>
+            <a:ext cx="502920" cy="502920"/>
+          </a:xfrm>
+          <a:prstGeom prst="ellipse">
+            <a:avLst/>
+          </a:prstGeom>
+          <a:solidFill>
+            <a:srgbClr val="7C5CFF"/>
+          </a:solidFill>
+          <a:ln w="12700">
+            <a:solidFill>
+              <a:srgbClr val="7C5CFF"/>
+            </a:solidFill>
+            <a:prstDash val="solid"/>
+          </a:ln>
+        </p:spPr>
+      </p:sp>
+      <p:sp>
+        <p:nvSpPr>
+          <p:cNvPr id="10" name="Text 8"/>
+          <p:cNvSpPr txBox="1"/>
+          <p:nvPr/>
+        </p:nvSpPr>
+        <p:spPr>
+          <a:xfrm>
+            <a:off x="7543800" y="1965960"/>
+            <a:ext cx="3840480" cy="822960"/>
           </a:xfrm>
           <a:prstGeom prst="rect">
             <a:avLst/>
@@ -4844,115 +6124,99 @@
               <a:buNone/>
             </a:pPr>
             <a:r>
-              <a:rPr lang="en-US" sz="2200" b="1" dirty="0">
-                <a:solidFill>
-                  <a:srgbClr val="18181B"/>
-                </a:solidFill>
-                <a:latin typeface="Arial" pitchFamily="34" charset="0"/>
-                <a:ea typeface="Arial" pitchFamily="34" charset="-122"/>
-                <a:cs typeface="Arial" pitchFamily="34" charset="-120"/>
-              </a:rPr>
-              <a:t>Bring your agents, from any harness.</a:t>
-            </a:r>
-            <a:pPr indent="0" marL="0">
-              <a:buNone/>
-            </a:pPr>
-            <a:r>
-              <a:rPr lang="en-US" sz="1500" dirty="0">
+              <a:rPr lang="en-US" sz="1100" dirty="0">
                 <a:solidFill>
                   <a:srgbClr val="52525B"/>
-                </a:solidFill>
-                <a:latin typeface="Arial" pitchFamily="34" charset="0"/>
-                <a:ea typeface="Arial" pitchFamily="34" charset="-122"/>
-                <a:cs typeface="Arial" pitchFamily="34" charset="-120"/>
-              </a:rPr>
-              <a:t>   Fully supported today: Claude Code · Codex · Cursor · OpenCode. Coming: musterd’s own harness.</a:t>
-            </a:r>
-            <a:endParaRPr lang="en-US" sz="2200" dirty="0"/>
-          </a:p>
-        </p:txBody>
-      </p:sp>
-    </p:spTree>
-  </p:cSld>
-  <p:clrMapOvr>
-    <a:masterClrMapping/>
-  </p:clrMapOvr>
-</p:sld>
-</file>
-
-<file path=ppt/slides/slide6.xml><?xml version="1.0" encoding="utf-8"?>
-<p:sld xmlns:a="http://schemas.openxmlformats.org/drawingml/2006/main" xmlns:r="http://schemas.openxmlformats.org/officeDocument/2006/relationships" xmlns:p="http://schemas.openxmlformats.org/presentationml/2006/main">
-  <p:cSld name="Slide 6">
-    <p:bg>
-      <p:bgPr>
-        <a:solidFill>
-          <a:srgbClr val="E1AD01"/>
-        </a:solidFill>
-      </p:bgPr>
-    </p:bg>
-    <p:spTree>
-      <p:nvGrpSpPr>
-        <p:cNvPr id="1" name=""/>
-        <p:cNvGrpSpPr/>
-        <p:nvPr/>
-      </p:nvGrpSpPr>
-      <p:grpSpPr>
-        <a:xfrm>
-          <a:off x="0" y="0"/>
-          <a:ext cx="0" cy="0"/>
-          <a:chOff x="0" y="0"/>
-          <a:chExt cx="0" cy="0"/>
-        </a:xfrm>
-      </p:grpSpPr>
-      <p:sp>
-        <p:nvSpPr>
-          <p:cNvPr id="2" name="Text 0"/>
-          <p:cNvSpPr txBox="1"/>
-          <p:nvPr/>
-        </p:nvSpPr>
-        <p:spPr>
-          <a:xfrm>
-            <a:off x="640080" y="548640"/>
-            <a:ext cx="10911535" cy="365760"/>
-          </a:xfrm>
-          <a:prstGeom prst="rect">
-            <a:avLst/>
-          </a:prstGeom>
-          <a:noFill/>
-          <a:ln/>
-        </p:spPr>
-        <p:txBody>
-          <a:bodyPr wrap="square" lIns="0" tIns="0" rIns="0" bIns="0" rtlCol="0" anchor="ctr"/>
-          <a:lstStyle/>
-          <a:p>
-            <a:pPr indent="0" marL="0">
-              <a:buNone/>
-            </a:pPr>
-            <a:r>
-              <a:rPr lang="en-US" sz="1300" spc="400" kern="0" dirty="0">
-                <a:solidFill>
-                  <a:srgbClr val="3F2F00"/>
                 </a:solidFill>
                 <a:latin typeface="Courier New" pitchFamily="34" charset="0"/>
                 <a:ea typeface="Courier New" pitchFamily="34" charset="-122"/>
                 <a:cs typeface="Courier New" pitchFamily="34" charset="-120"/>
               </a:rPr>
-              <a:t>LIVE  ·  TEAM REVIVE</a:t>
-            </a:r>
-            <a:endParaRPr lang="en-US" sz="1300" dirty="0"/>
-          </a:p>
-        </p:txBody>
-      </p:sp>
-      <p:sp>
-        <p:nvSpPr>
-          <p:cNvPr id="3" name="Text 1"/>
-          <p:cNvSpPr txBox="1"/>
-          <p:nvPr/>
-        </p:nvSpPr>
-        <p:spPr>
-          <a:xfrm>
-            <a:off x="640080" y="1097280"/>
-            <a:ext cx="10911535" cy="1280160"/>
+              <a:t>izzo · approve · blocking</a:t>
+            </a:r>
+            <a:endParaRPr lang="en-US" sz="1100" dirty="0"/>
+          </a:p>
+          <a:p>
+            <a:pPr indent="0" marL="0">
+              <a:buNone/>
+            </a:pPr>
+            <a:r>
+              <a:rPr lang="en-US" sz="1500" b="1" dirty="0">
+                <a:solidFill>
+                  <a:srgbClr val="18181B"/>
+                </a:solidFill>
+                <a:latin typeface="Arial" pitchFamily="34" charset="0"/>
+                <a:ea typeface="Arial" pitchFamily="34" charset="-122"/>
+                <a:cs typeface="Arial" pitchFamily="34" charset="-120"/>
+              </a:rPr>
+              <a:t>Merge the wake-cap change before the demo?</a:t>
+            </a:r>
+            <a:endParaRPr lang="en-US" sz="1100" dirty="0"/>
+          </a:p>
+        </p:txBody>
+      </p:sp>
+      <p:sp>
+        <p:nvSpPr>
+          <p:cNvPr id="11" name="Shape 9"/>
+          <p:cNvSpPr/>
+          <p:nvPr/>
+        </p:nvSpPr>
+        <p:spPr>
+          <a:xfrm>
+            <a:off x="6675120" y="3108960"/>
+            <a:ext cx="4846320" cy="1097280"/>
+          </a:xfrm>
+          <a:prstGeom prst="roundRect">
+            <a:avLst>
+              <a:gd name="adj" fmla="val 10000"/>
+            </a:avLst>
+          </a:prstGeom>
+          <a:solidFill>
+            <a:srgbClr val="FFFFFF"/>
+          </a:solidFill>
+          <a:ln w="9525">
+            <a:solidFill>
+              <a:srgbClr val="E4E4E7"/>
+            </a:solidFill>
+            <a:prstDash val="solid"/>
+          </a:ln>
+        </p:spPr>
+      </p:sp>
+      <p:sp>
+        <p:nvSpPr>
+          <p:cNvPr id="12" name="Shape 10"/>
+          <p:cNvSpPr/>
+          <p:nvPr/>
+        </p:nvSpPr>
+        <p:spPr>
+          <a:xfrm>
+            <a:off x="6858000" y="3383280"/>
+            <a:ext cx="502920" cy="502920"/>
+          </a:xfrm>
+          <a:prstGeom prst="ellipse">
+            <a:avLst/>
+          </a:prstGeom>
+          <a:solidFill>
+            <a:srgbClr val="0EA5A4"/>
+          </a:solidFill>
+          <a:ln w="12700">
+            <a:solidFill>
+              <a:srgbClr val="0EA5A4"/>
+            </a:solidFill>
+            <a:prstDash val="solid"/>
+          </a:ln>
+        </p:spPr>
+      </p:sp>
+      <p:sp>
+        <p:nvSpPr>
+          <p:cNvPr id="13" name="Text 11"/>
+          <p:cNvSpPr txBox="1"/>
+          <p:nvPr/>
+        </p:nvSpPr>
+        <p:spPr>
+          <a:xfrm>
+            <a:off x="7543800" y="3246120"/>
+            <a:ext cx="3840480" cy="822960"/>
           </a:xfrm>
           <a:prstGeom prst="rect">
             <a:avLst/>
@@ -4968,7 +6232,24 @@
               <a:buNone/>
             </a:pPr>
             <a:r>
-              <a:rPr lang="en-US" sz="5400" b="1" dirty="0">
+              <a:rPr lang="en-US" sz="1100" dirty="0">
+                <a:solidFill>
+                  <a:srgbClr val="52525B"/>
+                </a:solidFill>
+                <a:latin typeface="Courier New" pitchFamily="34" charset="0"/>
+                <a:ea typeface="Courier New" pitchFamily="34" charset="-122"/>
+                <a:cs typeface="Courier New" pitchFamily="34" charset="-120"/>
+              </a:rPr>
+              <a:t>miley · consult · standard</a:t>
+            </a:r>
+            <a:endParaRPr lang="en-US" sz="1100" dirty="0"/>
+          </a:p>
+          <a:p>
+            <a:pPr indent="0" marL="0">
+              <a:buNone/>
+            </a:pPr>
+            <a:r>
+              <a:rPr lang="en-US" sz="1500" b="1" dirty="0">
                 <a:solidFill>
                   <a:srgbClr val="18181B"/>
                 </a:solidFill>
@@ -4976,41 +6257,107 @@
                 <a:ea typeface="Arial" pitchFamily="34" charset="-122"/>
                 <a:cs typeface="Arial" pitchFamily="34" charset="-120"/>
               </a:rPr>
-              <a:t>Three things you will see happen.</a:t>
-            </a:r>
-            <a:endParaRPr lang="en-US" sz="5400" dirty="0"/>
-          </a:p>
-        </p:txBody>
-      </p:sp>
-      <p:sp>
-        <p:nvSpPr>
-          <p:cNvPr id="4" name="Text 2"/>
-          <p:cNvSpPr txBox="1"/>
-          <p:nvPr/>
-        </p:nvSpPr>
-        <p:spPr>
-          <a:xfrm>
-            <a:off x="640080" y="2834640"/>
-            <a:ext cx="10911535" cy="2743200"/>
-          </a:xfrm>
-          <a:prstGeom prst="rect">
-            <a:avLst/>
-          </a:prstGeom>
-          <a:noFill/>
-          <a:ln/>
-        </p:spPr>
-        <p:txBody>
-          <a:bodyPr wrap="square" lIns="0" tIns="0" rIns="0" bIns="0" rtlCol="0" anchor="t"/>
-          <a:lstStyle/>
-          <a:p>
-            <a:pPr indent="0" marL="0">
-              <a:spcAft>
-                <a:spcPts val="1400"/>
-              </a:spcAft>
-              <a:buNone/>
-            </a:pPr>
-            <a:r>
-              <a:rPr lang="en-US" sz="2400" b="1" dirty="0">
+              <a:t>Ring or bar for the tier clock on the rail?</a:t>
+            </a:r>
+            <a:endParaRPr lang="en-US" sz="1100" dirty="0"/>
+          </a:p>
+        </p:txBody>
+      </p:sp>
+      <p:sp>
+        <p:nvSpPr>
+          <p:cNvPr id="14" name="Shape 12"/>
+          <p:cNvSpPr/>
+          <p:nvPr/>
+        </p:nvSpPr>
+        <p:spPr>
+          <a:xfrm>
+            <a:off x="6675120" y="4389120"/>
+            <a:ext cx="4846320" cy="1097280"/>
+          </a:xfrm>
+          <a:prstGeom prst="roundRect">
+            <a:avLst>
+              <a:gd name="adj" fmla="val 10000"/>
+            </a:avLst>
+          </a:prstGeom>
+          <a:solidFill>
+            <a:srgbClr val="FFFFFF"/>
+          </a:solidFill>
+          <a:ln w="9525">
+            <a:solidFill>
+              <a:srgbClr val="E4E4E7"/>
+            </a:solidFill>
+            <a:prstDash val="solid"/>
+          </a:ln>
+        </p:spPr>
+      </p:sp>
+      <p:sp>
+        <p:nvSpPr>
+          <p:cNvPr id="15" name="Shape 13"/>
+          <p:cNvSpPr/>
+          <p:nvPr/>
+        </p:nvSpPr>
+        <p:spPr>
+          <a:xfrm>
+            <a:off x="6858000" y="4663440"/>
+            <a:ext cx="502920" cy="502920"/>
+          </a:xfrm>
+          <a:prstGeom prst="ellipse">
+            <a:avLst/>
+          </a:prstGeom>
+          <a:solidFill>
+            <a:srgbClr val="E4572E"/>
+          </a:solidFill>
+          <a:ln w="12700">
+            <a:solidFill>
+              <a:srgbClr val="E4572E"/>
+            </a:solidFill>
+            <a:prstDash val="solid"/>
+          </a:ln>
+        </p:spPr>
+      </p:sp>
+      <p:sp>
+        <p:nvSpPr>
+          <p:cNvPr id="16" name="Text 14"/>
+          <p:cNvSpPr txBox="1"/>
+          <p:nvPr/>
+        </p:nvSpPr>
+        <p:spPr>
+          <a:xfrm>
+            <a:off x="7543800" y="4526280"/>
+            <a:ext cx="3840480" cy="822960"/>
+          </a:xfrm>
+          <a:prstGeom prst="rect">
+            <a:avLst/>
+          </a:prstGeom>
+          <a:noFill/>
+          <a:ln/>
+        </p:spPr>
+        <p:txBody>
+          <a:bodyPr wrap="square" lIns="0" tIns="0" rIns="0" bIns="0" rtlCol="0" anchor="ctr"/>
+          <a:lstStyle/>
+          <a:p>
+            <a:pPr indent="0" marL="0">
+              <a:buNone/>
+            </a:pPr>
+            <a:r>
+              <a:rPr lang="en-US" sz="1100" dirty="0">
+                <a:solidFill>
+                  <a:srgbClr val="52525B"/>
+                </a:solidFill>
+                <a:latin typeface="Courier New" pitchFamily="34" charset="0"/>
+                <a:ea typeface="Courier New" pitchFamily="34" charset="-122"/>
+                <a:cs typeface="Courier New" pitchFamily="34" charset="-120"/>
+              </a:rPr>
+              <a:t>ghost · escalate · advisory</a:t>
+            </a:r>
+            <a:endParaRPr lang="en-US" sz="1100" dirty="0"/>
+          </a:p>
+          <a:p>
+            <a:pPr indent="0" marL="0">
+              <a:buNone/>
+            </a:pPr>
+            <a:r>
+              <a:rPr lang="en-US" sz="1500" b="1" dirty="0">
                 <a:solidFill>
                   <a:srgbClr val="18181B"/>
                 </a:solidFill>
@@ -5018,49 +6365,48 @@
                 <a:ea typeface="Arial" pitchFamily="34" charset="-122"/>
                 <a:cs typeface="Arial" pitchFamily="34" charset="-120"/>
               </a:rPr>
-              <a:t>1   A task lands — two owners, two lanes, no contention.</a:t>
-            </a:r>
-            <a:endParaRPr lang="en-US" sz="2400" dirty="0"/>
-          </a:p>
-          <a:p>
-            <a:pPr indent="0" marL="0">
-              <a:spcAft>
-                <a:spcPts val="1400"/>
-              </a:spcAft>
-              <a:buNone/>
-            </a:pPr>
-            <a:r>
-              <a:rPr lang="en-US" sz="2400" b="1" dirty="0">
-                <a:solidFill>
-                  <a:srgbClr val="18181B"/>
-                </a:solidFill>
-                <a:latin typeface="Arial" pitchFamily="34" charset="0"/>
-                <a:ea typeface="Arial" pitchFamily="34" charset="-122"/>
-                <a:cs typeface="Arial" pitchFamily="34" charset="-120"/>
-              </a:rPr>
-              <a:t>2   A question reaches the human — with a clock on it.</a:t>
-            </a:r>
-            <a:endParaRPr lang="en-US" sz="2400" dirty="0"/>
-          </a:p>
-          <a:p>
-            <a:pPr indent="0" marL="0">
-              <a:spcAft>
-                <a:spcPts val="1400"/>
-              </a:spcAft>
-              <a:buNone/>
-            </a:pPr>
-            <a:r>
-              <a:rPr lang="en-US" sz="2400" b="1" dirty="0">
-                <a:solidFill>
-                  <a:srgbClr val="18181B"/>
-                </a:solidFill>
-                <a:latin typeface="Arial" pitchFamily="34" charset="0"/>
-                <a:ea typeface="Arial" pitchFamily="34" charset="-122"/>
-                <a:cs typeface="Arial" pitchFamily="34" charset="-120"/>
-              </a:rPr>
-              <a:t>3   Done is two claims — the builder says merged; someone else says this is what we wanted.</a:t>
-            </a:r>
-            <a:endParaRPr lang="en-US" sz="2400" dirty="0"/>
+              <a:t>Two lanes touch the same file. Split or pair?</a:t>
+            </a:r>
+            <a:endParaRPr lang="en-US" sz="1100" dirty="0"/>
+          </a:p>
+        </p:txBody>
+      </p:sp>
+      <p:sp>
+        <p:nvSpPr>
+          <p:cNvPr id="17" name="Text 15"/>
+          <p:cNvSpPr txBox="1"/>
+          <p:nvPr/>
+        </p:nvSpPr>
+        <p:spPr>
+          <a:xfrm>
+            <a:off x="6675120" y="5715000"/>
+            <a:ext cx="4846320" cy="274320"/>
+          </a:xfrm>
+          <a:prstGeom prst="rect">
+            <a:avLst/>
+          </a:prstGeom>
+          <a:noFill/>
+          <a:ln/>
+        </p:spPr>
+        <p:txBody>
+          <a:bodyPr wrap="square" lIns="0" tIns="0" rIns="0" bIns="0" rtlCol="0" anchor="ctr"/>
+          <a:lstStyle/>
+          <a:p>
+            <a:pPr indent="0" marL="0">
+              <a:buNone/>
+            </a:pPr>
+            <a:r>
+              <a:rPr lang="en-US" sz="1000" dirty="0">
+                <a:solidFill>
+                  <a:srgbClr val="52525B"/>
+                </a:solidFill>
+                <a:latin typeface="Courier New" pitchFamily="34" charset="0"/>
+                <a:ea typeface="Courier New" pitchFamily="34" charset="-122"/>
+                <a:cs typeface="Courier New" pitchFamily="34" charset="-120"/>
+              </a:rPr>
+              <a:t>Illustrative asks</a:t>
+            </a:r>
+            <a:endParaRPr lang="en-US" sz="1000" dirty="0"/>
           </a:p>
         </p:txBody>
       </p:sp>
@@ -5104,8 +6450,8 @@
         </p:nvSpPr>
         <p:spPr>
           <a:xfrm>
-            <a:off x="640080" y="548640"/>
-            <a:ext cx="10911535" cy="365760"/>
+            <a:off x="640080" y="502920"/>
+            <a:ext cx="10911535" cy="320040"/>
           </a:xfrm>
           <a:prstGeom prst="rect">
             <a:avLst/>
@@ -5129,7 +6475,7 @@
                 <a:ea typeface="Courier New" pitchFamily="34" charset="-122"/>
                 <a:cs typeface="Courier New" pitchFamily="34" charset="-120"/>
               </a:rPr>
-              <a:t>BIG QUESTION 1  ·  HANDOFF</a:t>
+              <a:t>BIG QUESTION · HANDOFF</a:t>
             </a:r>
             <a:endParaRPr lang="en-US" sz="1300" dirty="0"/>
           </a:p>
@@ -5143,8 +6489,8 @@
         </p:nvSpPr>
         <p:spPr>
           <a:xfrm>
-            <a:off x="640080" y="1097280"/>
-            <a:ext cx="10911535" cy="822960"/>
+            <a:off x="640080" y="868680"/>
+            <a:ext cx="10911535" cy="731520"/>
           </a:xfrm>
           <a:prstGeom prst="rect">
             <a:avLst/>
@@ -5160,7 +6506,7 @@
               <a:buNone/>
             </a:pPr>
             <a:r>
-              <a:rPr lang="en-US" sz="4000" b="1" dirty="0">
+              <a:rPr lang="en-US" sz="3600" b="1" dirty="0">
                 <a:solidFill>
                   <a:srgbClr val="18181B"/>
                 </a:solidFill>
@@ -5170,7 +6516,7 @@
               </a:rPr>
               <a:t>A handoff carries the lane itself.</a:t>
             </a:r>
-            <a:endParaRPr lang="en-US" sz="4000" dirty="0"/>
+            <a:endParaRPr lang="en-US" sz="3600" dirty="0"/>
           </a:p>
         </p:txBody>
       </p:sp>
@@ -5182,18 +6528,20 @@
         </p:nvSpPr>
         <p:spPr>
           <a:xfrm>
-            <a:off x="640080" y="2194560"/>
-            <a:ext cx="5181448" cy="36576"/>
-          </a:xfrm>
-          <a:prstGeom prst="rect">
-            <a:avLst/>
+            <a:off x="640080" y="1920240"/>
+            <a:ext cx="5272888" cy="3840480"/>
+          </a:xfrm>
+          <a:prstGeom prst="roundRect">
+            <a:avLst>
+              <a:gd name="adj" fmla="val 2857"/>
+            </a:avLst>
           </a:prstGeom>
           <a:solidFill>
-            <a:srgbClr val="E1AD01"/>
+            <a:srgbClr val="FFFFFF"/>
           </a:solidFill>
-          <a:ln w="12700">
+          <a:ln w="9525">
             <a:solidFill>
-              <a:srgbClr val="E1AD01"/>
+              <a:srgbClr val="E4E4E7"/>
             </a:solidFill>
             <a:prstDash val="solid"/>
           </a:ln>
@@ -5207,8 +6555,8 @@
         </p:nvSpPr>
         <p:spPr>
           <a:xfrm>
-            <a:off x="640080" y="2423160"/>
-            <a:ext cx="5181448" cy="411480"/>
+            <a:off x="960120" y="2148840"/>
+            <a:ext cx="4632808" cy="365760"/>
           </a:xfrm>
           <a:prstGeom prst="rect">
             <a:avLst/>
@@ -5224,7 +6572,7 @@
               <a:buNone/>
             </a:pPr>
             <a:r>
-              <a:rPr lang="en-US" sz="1800" b="1" dirty="0">
+              <a:rPr lang="en-US" sz="1600" b="1" dirty="0">
                 <a:solidFill>
                   <a:srgbClr val="52525B"/>
                 </a:solidFill>
@@ -5234,7 +6582,7 @@
               </a:rPr>
               <a:t>What it carries</a:t>
             </a:r>
-            <a:endParaRPr lang="en-US" sz="1800" dirty="0"/>
+            <a:endParaRPr lang="en-US" sz="1600" dirty="0"/>
           </a:p>
         </p:txBody>
       </p:sp>
@@ -5246,8 +6594,8 @@
         </p:nvSpPr>
         <p:spPr>
           <a:xfrm>
-            <a:off x="640080" y="2971800"/>
-            <a:ext cx="5181448" cy="1828800"/>
+            <a:off x="960120" y="2697480"/>
+            <a:ext cx="4632808" cy="1828800"/>
           </a:xfrm>
           <a:prstGeom prst="rect">
             <a:avLst/>
@@ -5260,13 +6608,10 @@
           <a:lstStyle/>
           <a:p>
             <a:pPr indent="0" marL="0">
-              <a:lnSpc>
-                <a:spcPct val="115000"/>
-              </a:lnSpc>
-              <a:buNone/>
-            </a:pPr>
-            <a:r>
-              <a:rPr lang="en-US" sz="2600" b="1" dirty="0">
+              <a:buNone/>
+            </a:pPr>
+            <a:r>
+              <a:rPr lang="en-US" sz="2800" b="1" dirty="0">
                 <a:solidFill>
                   <a:srgbClr val="18181B"/>
                 </a:solidFill>
@@ -5276,17 +6621,14 @@
               </a:rPr>
               <a:t>The thread.</a:t>
             </a:r>
-            <a:endParaRPr lang="en-US" sz="2600" dirty="0"/>
-          </a:p>
-          <a:p>
-            <a:pPr indent="0" marL="0">
-              <a:lnSpc>
-                <a:spcPct val="115000"/>
-              </a:lnSpc>
-              <a:buNone/>
-            </a:pPr>
-            <a:r>
-              <a:rPr lang="en-US" sz="2600" b="1" dirty="0">
+            <a:endParaRPr lang="en-US" sz="2800" dirty="0"/>
+          </a:p>
+          <a:p>
+            <a:pPr indent="0" marL="0">
+              <a:buNone/>
+            </a:pPr>
+            <a:r>
+              <a:rPr lang="en-US" sz="2800" b="1" dirty="0">
                 <a:solidFill>
                   <a:srgbClr val="18181B"/>
                 </a:solidFill>
@@ -5296,17 +6638,14 @@
               </a:rPr>
               <a:t>The lane.</a:t>
             </a:r>
-            <a:endParaRPr lang="en-US" sz="2600" dirty="0"/>
-          </a:p>
-          <a:p>
-            <a:pPr indent="0" marL="0">
-              <a:lnSpc>
-                <a:spcPct val="115000"/>
-              </a:lnSpc>
-              <a:buNone/>
-            </a:pPr>
-            <a:r>
-              <a:rPr lang="en-US" sz="2600" b="1" dirty="0">
+            <a:endParaRPr lang="en-US" sz="2800" dirty="0"/>
+          </a:p>
+          <a:p>
+            <a:pPr indent="0" marL="0">
+              <a:buNone/>
+            </a:pPr>
+            <a:r>
+              <a:rPr lang="en-US" sz="2800" b="1" dirty="0">
                 <a:solidFill>
                   <a:srgbClr val="18181B"/>
                 </a:solidFill>
@@ -5316,7 +6655,7 @@
               </a:rPr>
               <a:t>The branch, at its commit.</a:t>
             </a:r>
-            <a:endParaRPr lang="en-US" sz="2600" dirty="0"/>
+            <a:endParaRPr lang="en-US" sz="2800" dirty="0"/>
           </a:p>
         </p:txBody>
       </p:sp>
@@ -5328,24 +6667,24 @@
         </p:nvSpPr>
         <p:spPr>
           <a:xfrm>
-            <a:off x="640080" y="4937760"/>
-            <a:ext cx="5181448" cy="548640"/>
-          </a:xfrm>
-          <a:prstGeom prst="rect">
-            <a:avLst/>
-          </a:prstGeom>
-          <a:noFill/>
-          <a:ln/>
-        </p:spPr>
-        <p:txBody>
-          <a:bodyPr wrap="square" lIns="0" tIns="0" rIns="0" bIns="0" rtlCol="0" anchor="t"/>
-          <a:lstStyle/>
-          <a:p>
-            <a:pPr indent="0" marL="0">
-              <a:buNone/>
-            </a:pPr>
-            <a:r>
-              <a:rPr lang="en-US" sz="1600" dirty="0">
+            <a:off x="960120" y="4754880"/>
+            <a:ext cx="4632808" cy="731520"/>
+          </a:xfrm>
+          <a:prstGeom prst="rect">
+            <a:avLst/>
+          </a:prstGeom>
+          <a:noFill/>
+          <a:ln/>
+        </p:spPr>
+        <p:txBody>
+          <a:bodyPr wrap="square" lIns="0" tIns="0" rIns="0" bIns="0" rtlCol="0" anchor="ctr"/>
+          <a:lstStyle/>
+          <a:p>
+            <a:pPr indent="0" marL="0">
+              <a:buNone/>
+            </a:pPr>
+            <a:r>
+              <a:rPr lang="en-US" sz="1500" dirty="0">
                 <a:solidFill>
                   <a:srgbClr val="52525B"/>
                 </a:solidFill>
@@ -5355,7 +6694,7 @@
               </a:rPr>
               <a:t>The receiver builds on the diff, so nothing gets built twice.</a:t>
             </a:r>
-            <a:endParaRPr lang="en-US" sz="1600" dirty="0"/>
+            <a:endParaRPr lang="en-US" sz="1500" dirty="0"/>
           </a:p>
         </p:txBody>
       </p:sp>
@@ -5367,18 +6706,20 @@
         </p:nvSpPr>
         <p:spPr>
           <a:xfrm>
-            <a:off x="6370168" y="2194560"/>
-            <a:ext cx="5181448" cy="36576"/>
-          </a:xfrm>
-          <a:prstGeom prst="rect">
-            <a:avLst/>
+            <a:off x="6278728" y="1920240"/>
+            <a:ext cx="5272888" cy="3840480"/>
+          </a:xfrm>
+          <a:prstGeom prst="roundRect">
+            <a:avLst>
+              <a:gd name="adj" fmla="val 2857"/>
+            </a:avLst>
           </a:prstGeom>
           <a:solidFill>
-            <a:srgbClr val="E1AD01"/>
+            <a:srgbClr val="FFFFFF"/>
           </a:solidFill>
-          <a:ln w="12700">
+          <a:ln w="9525">
             <a:solidFill>
-              <a:srgbClr val="E1AD01"/>
+              <a:srgbClr val="E4E4E7"/>
             </a:solidFill>
             <a:prstDash val="solid"/>
           </a:ln>
@@ -5392,8 +6733,8 @@
         </p:nvSpPr>
         <p:spPr>
           <a:xfrm>
-            <a:off x="6370168" y="2423160"/>
-            <a:ext cx="5181448" cy="411480"/>
+            <a:off x="6598768" y="2148840"/>
+            <a:ext cx="4632808" cy="365760"/>
           </a:xfrm>
           <a:prstGeom prst="rect">
             <a:avLst/>
@@ -5409,7 +6750,7 @@
               <a:buNone/>
             </a:pPr>
             <a:r>
-              <a:rPr lang="en-US" sz="1800" b="1" dirty="0">
+              <a:rPr lang="en-US" sz="1600" b="1" dirty="0">
                 <a:solidFill>
                   <a:srgbClr val="52525B"/>
                 </a:solidFill>
@@ -5419,7 +6760,7 @@
               </a:rPr>
               <a:t>What the receiver can do</a:t>
             </a:r>
-            <a:endParaRPr lang="en-US" sz="1800" dirty="0"/>
+            <a:endParaRPr lang="en-US" sz="1600" dirty="0"/>
           </a:p>
         </p:txBody>
       </p:sp>
@@ -5431,8 +6772,8 @@
         </p:nvSpPr>
         <p:spPr>
           <a:xfrm>
-            <a:off x="6370168" y="2971800"/>
-            <a:ext cx="5181448" cy="1828800"/>
+            <a:off x="6598768" y="2697480"/>
+            <a:ext cx="4632808" cy="1828800"/>
           </a:xfrm>
           <a:prstGeom prst="rect">
             <a:avLst/>
@@ -5445,13 +6786,10 @@
           <a:lstStyle/>
           <a:p>
             <a:pPr indent="0" marL="0">
-              <a:lnSpc>
-                <a:spcPct val="115000"/>
-              </a:lnSpc>
-              <a:buNone/>
-            </a:pPr>
-            <a:r>
-              <a:rPr lang="en-US" sz="2600" b="1" dirty="0">
+              <a:buNone/>
+            </a:pPr>
+            <a:r>
+              <a:rPr lang="en-US" sz="2800" b="1" dirty="0">
                 <a:solidFill>
                   <a:srgbClr val="18181B"/>
                 </a:solidFill>
@@ -5461,17 +6799,14 @@
               </a:rPr>
               <a:t>Accept.</a:t>
             </a:r>
-            <a:endParaRPr lang="en-US" sz="2600" dirty="0"/>
-          </a:p>
-          <a:p>
-            <a:pPr indent="0" marL="0">
-              <a:lnSpc>
-                <a:spcPct val="115000"/>
-              </a:lnSpc>
-              <a:buNone/>
-            </a:pPr>
-            <a:r>
-              <a:rPr lang="en-US" sz="2600" b="1" dirty="0">
+            <a:endParaRPr lang="en-US" sz="2800" dirty="0"/>
+          </a:p>
+          <a:p>
+            <a:pPr indent="0" marL="0">
+              <a:buNone/>
+            </a:pPr>
+            <a:r>
+              <a:rPr lang="en-US" sz="2800" b="1" dirty="0">
                 <a:solidFill>
                   <a:srgbClr val="18181B"/>
                 </a:solidFill>
@@ -5481,17 +6816,14 @@
               </a:rPr>
               <a:t>Decline.</a:t>
             </a:r>
-            <a:endParaRPr lang="en-US" sz="2600" dirty="0"/>
-          </a:p>
-          <a:p>
-            <a:pPr indent="0" marL="0">
-              <a:lnSpc>
-                <a:spcPct val="115000"/>
-              </a:lnSpc>
-              <a:buNone/>
-            </a:pPr>
-            <a:r>
-              <a:rPr lang="en-US" sz="2600" b="1" dirty="0">
+            <a:endParaRPr lang="en-US" sz="2800" dirty="0"/>
+          </a:p>
+          <a:p>
+            <a:pPr indent="0" marL="0">
+              <a:buNone/>
+            </a:pPr>
+            <a:r>
+              <a:rPr lang="en-US" sz="2800" b="1" dirty="0">
                 <a:solidFill>
                   <a:srgbClr val="18181B"/>
                 </a:solidFill>
@@ -5501,7 +6833,7 @@
               </a:rPr>
               <a:t>Challenge.</a:t>
             </a:r>
-            <a:endParaRPr lang="en-US" sz="2600" dirty="0"/>
+            <a:endParaRPr lang="en-US" sz="2800" dirty="0"/>
           </a:p>
         </p:txBody>
       </p:sp>
@@ -5513,24 +6845,24 @@
         </p:nvSpPr>
         <p:spPr>
           <a:xfrm>
-            <a:off x="6370168" y="4937760"/>
-            <a:ext cx="5181448" cy="548640"/>
-          </a:xfrm>
-          <a:prstGeom prst="rect">
-            <a:avLst/>
-          </a:prstGeom>
-          <a:noFill/>
-          <a:ln/>
-        </p:spPr>
-        <p:txBody>
-          <a:bodyPr wrap="square" lIns="0" tIns="0" rIns="0" bIns="0" rtlCol="0" anchor="t"/>
-          <a:lstStyle/>
-          <a:p>
-            <a:pPr indent="0" marL="0">
-              <a:buNone/>
-            </a:pPr>
-            <a:r>
-              <a:rPr lang="en-US" sz="1600" dirty="0">
+            <a:off x="6598768" y="4754880"/>
+            <a:ext cx="4632808" cy="731520"/>
+          </a:xfrm>
+          <a:prstGeom prst="rect">
+            <a:avLst/>
+          </a:prstGeom>
+          <a:noFill/>
+          <a:ln/>
+        </p:spPr>
+        <p:txBody>
+          <a:bodyPr wrap="square" lIns="0" tIns="0" rIns="0" bIns="0" rtlCol="0" anchor="ctr"/>
+          <a:lstStyle/>
+          <a:p>
+            <a:pPr indent="0" marL="0">
+              <a:buNone/>
+            </a:pPr>
+            <a:r>
+              <a:rPr lang="en-US" sz="1500" dirty="0">
                 <a:solidFill>
                   <a:srgbClr val="52525B"/>
                 </a:solidFill>
@@ -5540,7 +6872,7 @@
               </a:rPr>
               <a:t>Every handoff is an offer from one owner to another.</a:t>
             </a:r>
-            <a:endParaRPr lang="en-US" sz="1600" dirty="0"/>
+            <a:endParaRPr lang="en-US" sz="1500" dirty="0"/>
           </a:p>
         </p:txBody>
       </p:sp>
@@ -5584,8 +6916,8 @@
         </p:nvSpPr>
         <p:spPr>
           <a:xfrm>
-            <a:off x="640080" y="548640"/>
-            <a:ext cx="10911535" cy="365760"/>
+            <a:off x="640080" y="502920"/>
+            <a:ext cx="10911535" cy="320040"/>
           </a:xfrm>
           <a:prstGeom prst="rect">
             <a:avLst/>
@@ -5609,7 +6941,7 @@
                 <a:ea typeface="Courier New" pitchFamily="34" charset="-122"/>
                 <a:cs typeface="Courier New" pitchFamily="34" charset="-120"/>
               </a:rPr>
-              <a:t>BIG QUESTION 2  ·  WHAT DID NOT WORK</a:t>
+              <a:t>HOW MUSTERD EVOLVED · 2026</a:t>
             </a:r>
             <a:endParaRPr lang="en-US" sz="1300" dirty="0"/>
           </a:p>
@@ -5623,24 +6955,24 @@
         </p:nvSpPr>
         <p:spPr>
           <a:xfrm>
-            <a:off x="640080" y="1097280"/>
-            <a:ext cx="10911535" cy="1371600"/>
-          </a:xfrm>
-          <a:prstGeom prst="rect">
-            <a:avLst/>
-          </a:prstGeom>
-          <a:noFill/>
-          <a:ln/>
-        </p:spPr>
-        <p:txBody>
-          <a:bodyPr wrap="square" lIns="0" tIns="0" rIns="0" bIns="0" rtlCol="0" anchor="t"/>
-          <a:lstStyle/>
-          <a:p>
-            <a:pPr indent="0" marL="0">
-              <a:buNone/>
-            </a:pPr>
-            <a:r>
-              <a:rPr lang="en-US" sz="3400" b="1" dirty="0">
+            <a:off x="640080" y="868680"/>
+            <a:ext cx="10911535" cy="731520"/>
+          </a:xfrm>
+          <a:prstGeom prst="rect">
+            <a:avLst/>
+          </a:prstGeom>
+          <a:noFill/>
+          <a:ln/>
+        </p:spPr>
+        <p:txBody>
+          <a:bodyPr wrap="square" lIns="0" tIns="0" rIns="0" bIns="0" rtlCol="0" anchor="ctr"/>
+          <a:lstStyle/>
+          <a:p>
+            <a:pPr indent="0" marL="0">
+              <a:buNone/>
+            </a:pPr>
+            <a:r>
+              <a:rPr lang="en-US" sz="3600" b="1" dirty="0">
                 <a:solidFill>
                   <a:srgbClr val="18181B"/>
                 </a:solidFill>
@@ -5648,90 +6980,36 @@
                 <a:ea typeface="Arial" pitchFamily="34" charset="-122"/>
                 <a:cs typeface="Arial" pitchFamily="34" charset="-120"/>
               </a:rPr>
-              <a:t>The human as approver produced the record of oversight without the oversight.</a:t>
-            </a:r>
-            <a:endParaRPr lang="en-US" sz="3400" dirty="0"/>
-          </a:p>
-        </p:txBody>
-      </p:sp>
-      <p:sp>
-        <p:nvSpPr>
-          <p:cNvPr id="4" name="Text 2"/>
-          <p:cNvSpPr txBox="1"/>
-          <p:nvPr/>
-        </p:nvSpPr>
-        <p:spPr>
-          <a:xfrm>
-            <a:off x="640080" y="2743200"/>
-            <a:ext cx="4206240" cy="2194560"/>
-          </a:xfrm>
-          <a:prstGeom prst="rect">
-            <a:avLst/>
-          </a:prstGeom>
-          <a:noFill/>
-          <a:ln/>
-        </p:spPr>
-        <p:txBody>
-          <a:bodyPr wrap="square" lIns="0" tIns="0" rIns="0" bIns="0" rtlCol="0" anchor="ctr"/>
-          <a:lstStyle/>
-          <a:p>
-            <a:pPr indent="0" marL="0">
-              <a:buNone/>
-            </a:pPr>
-            <a:r>
-              <a:rPr lang="en-US" sz="15000" b="1" dirty="0">
-                <a:solidFill>
-                  <a:srgbClr val="8F6B00"/>
-                </a:solidFill>
-                <a:latin typeface="Arial" pitchFamily="34" charset="0"/>
-                <a:ea typeface="Arial" pitchFamily="34" charset="-122"/>
-                <a:cs typeface="Arial" pitchFamily="34" charset="-120"/>
-              </a:rPr>
-              <a:t>7:1</a:t>
-            </a:r>
-            <a:endParaRPr lang="en-US" sz="15000" dirty="0"/>
-          </a:p>
-        </p:txBody>
-      </p:sp>
-      <p:sp>
-        <p:nvSpPr>
-          <p:cNvPr id="5" name="Text 3"/>
-          <p:cNvSpPr txBox="1"/>
-          <p:nvPr/>
-        </p:nvSpPr>
-        <p:spPr>
-          <a:xfrm>
-            <a:off x="5120640" y="3017520"/>
-            <a:ext cx="6430975" cy="1645920"/>
-          </a:xfrm>
-          <a:prstGeom prst="rect">
-            <a:avLst/>
-          </a:prstGeom>
-          <a:noFill/>
-          <a:ln/>
-        </p:spPr>
-        <p:txBody>
-          <a:bodyPr wrap="square" lIns="0" tIns="0" rIns="0" bIns="0" rtlCol="0" anchor="ctr"/>
-          <a:lstStyle/>
-          <a:p>
-            <a:pPr indent="0" marL="0">
-              <a:buNone/>
-            </a:pPr>
-            <a:r>
-              <a:rPr lang="en-US" sz="2200" dirty="0">
-                <a:solidFill>
-                  <a:srgbClr val="52525B"/>
-                </a:solidFill>
-                <a:latin typeface="Arial" pitchFamily="34" charset="0"/>
-                <a:ea typeface="Arial" pitchFamily="34" charset="-122"/>
-                <a:cs typeface="Arial" pitchFamily="34" charset="-120"/>
-              </a:rPr>
-              <a:t>approvals for every real exchange with me — and in months, not one agent had asked me for help. Since we rebuilt the human as a member, more than a hundred have.</a:t>
-            </a:r>
-            <a:endParaRPr lang="en-US" sz="2200" dirty="0"/>
-          </a:p>
-        </p:txBody>
-      </p:sp>
+              <a:t>Built from what broke.</a:t>
+            </a:r>
+            <a:endParaRPr lang="en-US" sz="3600" dirty="0"/>
+          </a:p>
+        </p:txBody>
+      </p:sp>
+      <p:pic>
+        <p:nvPicPr>
+          <p:cNvPr id="4" name="Image 0" descr="img/road.png">    </p:cNvPr>
+          <p:cNvPicPr>
+            <a:picLocks noChangeAspect="1"/>
+          </p:cNvPicPr>
+          <p:nvPr/>
+        </p:nvPicPr>
+        <p:blipFill>
+          <a:blip r:embed="rId1"/>
+          <a:stretch>
+            <a:fillRect/>
+          </a:stretch>
+        </p:blipFill>
+        <p:spPr>
+          <a:xfrm>
+            <a:off x="640080" y="1828800"/>
+            <a:ext cx="10911535" cy="3357395"/>
+          </a:xfrm>
+          <a:prstGeom prst="rect">
+            <a:avLst/>
+          </a:prstGeom>
+        </p:spPr>
+      </p:pic>
     </p:spTree>
   </p:cSld>
   <p:clrMapOvr>
@@ -5746,7 +7024,7 @@
     <p:bg>
       <p:bgPr>
         <a:solidFill>
-          <a:srgbClr val="FAFAFA"/>
+          <a:srgbClr val="E1AD01"/>
         </a:solidFill>
       </p:bgPr>
     </p:bg>
@@ -5772,8 +7050,8 @@
         </p:nvSpPr>
         <p:spPr>
           <a:xfrm>
-            <a:off x="640080" y="548640"/>
-            <a:ext cx="10911535" cy="365760"/>
+            <a:off x="640080" y="502920"/>
+            <a:ext cx="10911535" cy="320040"/>
           </a:xfrm>
           <a:prstGeom prst="rect">
             <a:avLst/>
@@ -5791,13 +7069,13 @@
             <a:r>
               <a:rPr lang="en-US" sz="1300" spc="400" kern="0" dirty="0">
                 <a:solidFill>
-                  <a:srgbClr val="7A5A06"/>
+                  <a:srgbClr val="3F2F00"/>
                 </a:solidFill>
                 <a:latin typeface="Courier New" pitchFamily="34" charset="0"/>
                 <a:ea typeface="Courier New" pitchFamily="34" charset="-122"/>
                 <a:cs typeface="Courier New" pitchFamily="34" charset="-120"/>
               </a:rPr>
-              <a:t>OPEN SOURCE</a:t>
+              <a:t>LIVE · TEAM REVIVE</a:t>
             </a:r>
             <a:endParaRPr lang="en-US" sz="1300" dirty="0"/>
           </a:p>
@@ -5805,30 +7083,42 @@
       </p:sp>
       <p:sp>
         <p:nvSpPr>
-          <p:cNvPr id="3" name="Shape 1"/>
-          <p:cNvSpPr/>
-          <p:nvPr/>
-        </p:nvSpPr>
-        <p:spPr>
-          <a:xfrm>
-            <a:off x="640080" y="1463040"/>
-            <a:ext cx="10911535" cy="1371600"/>
-          </a:xfrm>
-          <a:prstGeom prst="roundRect">
-            <a:avLst>
-              <a:gd name="adj" fmla="val 8000"/>
-            </a:avLst>
-          </a:prstGeom>
-          <a:solidFill>
-            <a:srgbClr val="FFFFFF"/>
-          </a:solidFill>
-          <a:ln w="9525">
-            <a:solidFill>
-              <a:srgbClr val="E4E4E7"/>
-            </a:solidFill>
-            <a:prstDash val="solid"/>
-          </a:ln>
-        </p:spPr>
+          <p:cNvPr id="3" name="Text 1"/>
+          <p:cNvSpPr txBox="1"/>
+          <p:nvPr/>
+        </p:nvSpPr>
+        <p:spPr>
+          <a:xfrm>
+            <a:off x="640080" y="1188720"/>
+            <a:ext cx="6217920" cy="1828800"/>
+          </a:xfrm>
+          <a:prstGeom prst="rect">
+            <a:avLst/>
+          </a:prstGeom>
+          <a:noFill/>
+          <a:ln/>
+        </p:spPr>
+        <p:txBody>
+          <a:bodyPr wrap="square" lIns="0" tIns="0" rIns="0" bIns="0" rtlCol="0" anchor="t"/>
+          <a:lstStyle/>
+          <a:p>
+            <a:pPr indent="0" marL="0">
+              <a:buNone/>
+            </a:pPr>
+            <a:r>
+              <a:rPr lang="en-US" sz="4400" b="1" dirty="0">
+                <a:solidFill>
+                  <a:srgbClr val="18181B"/>
+                </a:solidFill>
+                <a:latin typeface="Arial" pitchFamily="34" charset="0"/>
+                <a:ea typeface="Arial" pitchFamily="34" charset="-122"/>
+                <a:cs typeface="Arial" pitchFamily="34" charset="-120"/>
+              </a:rPr>
+              <a:t>You picked it. Watch the team split it.</a:t>
+            </a:r>
+            <a:endParaRPr lang="en-US" sz="4400" dirty="0"/>
+          </a:p>
+        </p:txBody>
       </p:sp>
       <p:sp>
         <p:nvSpPr>
@@ -5838,130 +7128,47 @@
         </p:nvSpPr>
         <p:spPr>
           <a:xfrm>
-            <a:off x="1005840" y="1463040"/>
-            <a:ext cx="10180015" cy="1371600"/>
-          </a:xfrm>
-          <a:prstGeom prst="rect">
-            <a:avLst/>
-          </a:prstGeom>
-          <a:noFill/>
-          <a:ln/>
-        </p:spPr>
-        <p:txBody>
-          <a:bodyPr wrap="square" lIns="0" tIns="0" rIns="0" bIns="0" rtlCol="0" anchor="ctr"/>
-          <a:lstStyle/>
-          <a:p>
-            <a:pPr indent="0" marL="0">
-              <a:buNone/>
-            </a:pPr>
-            <a:r>
-              <a:rPr lang="en-US" sz="4400" b="1" dirty="0">
-                <a:solidFill>
-                  <a:srgbClr val="52525B"/>
-                </a:solidFill>
-                <a:latin typeface="Courier New" pitchFamily="34" charset="0"/>
-                <a:ea typeface="Courier New" pitchFamily="34" charset="-122"/>
-                <a:cs typeface="Courier New" pitchFamily="34" charset="-120"/>
-              </a:rPr>
-              <a:t>$ </a:t>
-            </a:r>
-            <a:pPr indent="0" marL="0">
-              <a:buNone/>
-            </a:pPr>
-            <a:r>
-              <a:rPr lang="en-US" sz="4400" b="1" dirty="0">
+            <a:off x="640080" y="3383280"/>
+            <a:ext cx="6035040" cy="2286000"/>
+          </a:xfrm>
+          <a:prstGeom prst="rect">
+            <a:avLst/>
+          </a:prstGeom>
+          <a:noFill/>
+          <a:ln/>
+        </p:spPr>
+        <p:txBody>
+          <a:bodyPr wrap="square" lIns="0" tIns="0" rIns="0" bIns="0" rtlCol="0" anchor="t"/>
+          <a:lstStyle/>
+          <a:p>
+            <a:pPr indent="0" marL="0">
+              <a:spcAft>
+                <a:spcPts val="1400"/>
+              </a:spcAft>
+              <a:buNone/>
+            </a:pPr>
+            <a:r>
+              <a:rPr lang="en-US" sz="1900" b="1" dirty="0">
                 <a:solidFill>
                   <a:srgbClr val="18181B"/>
                 </a:solidFill>
-                <a:latin typeface="Courier New" pitchFamily="34" charset="0"/>
-                <a:ea typeface="Courier New" pitchFamily="34" charset="-122"/>
-                <a:cs typeface="Courier New" pitchFamily="34" charset="-120"/>
-              </a:rPr>
-              <a:t>npx @musterd/cli init</a:t>
-            </a:r>
-            <a:endParaRPr lang="en-US" sz="4400" dirty="0"/>
-          </a:p>
-        </p:txBody>
-      </p:sp>
-      <p:sp>
-        <p:nvSpPr>
-          <p:cNvPr id="5" name="Text 3"/>
-          <p:cNvSpPr txBox="1"/>
-          <p:nvPr/>
-        </p:nvSpPr>
-        <p:spPr>
-          <a:xfrm>
-            <a:off x="640080" y="3291840"/>
-            <a:ext cx="9997135" cy="1463040"/>
-          </a:xfrm>
-          <a:prstGeom prst="rect">
-            <a:avLst/>
-          </a:prstGeom>
-          <a:noFill/>
-          <a:ln/>
-        </p:spPr>
-        <p:txBody>
-          <a:bodyPr wrap="square" lIns="0" tIns="0" rIns="0" bIns="0" rtlCol="0" anchor="t"/>
-          <a:lstStyle/>
-          <a:p>
-            <a:pPr indent="0" marL="0">
-              <a:buNone/>
-            </a:pPr>
-            <a:r>
-              <a:rPr lang="en-US" sz="2400" dirty="0">
-                <a:solidFill>
-                  <a:srgbClr val="52525B"/>
-                </a:solidFill>
-                <a:latin typeface="Arial" pitchFamily="34" charset="0"/>
-                <a:ea typeface="Arial" pitchFamily="34" charset="-122"/>
-                <a:cs typeface="Arial" pitchFamily="34" charset="-120"/>
-              </a:rPr>
-              <a:t>One command to a team. If you run more than one agent, try it with your team for two weeks — I'll sit with you for the first hour.</a:t>
-            </a:r>
-            <a:endParaRPr lang="en-US" sz="2400" dirty="0"/>
-          </a:p>
-        </p:txBody>
-      </p:sp>
-      <p:sp>
-        <p:nvSpPr>
-          <p:cNvPr id="6" name="Text 4"/>
-          <p:cNvSpPr txBox="1"/>
-          <p:nvPr/>
-        </p:nvSpPr>
-        <p:spPr>
-          <a:xfrm>
-            <a:off x="640080" y="4846320"/>
-            <a:ext cx="10911535" cy="822960"/>
-          </a:xfrm>
-          <a:prstGeom prst="rect">
-            <a:avLst/>
-          </a:prstGeom>
-          <a:noFill/>
-          <a:ln/>
-        </p:spPr>
-        <p:txBody>
-          <a:bodyPr wrap="square" lIns="0" tIns="0" rIns="0" bIns="0" rtlCol="0" anchor="t"/>
-          <a:lstStyle/>
-          <a:p>
-            <a:pPr indent="0" marL="0">
-              <a:buNone/>
-            </a:pPr>
-            <a:r>
-              <a:rPr lang="en-US" sz="1800" dirty="0">
-                <a:solidFill>
-                  <a:srgbClr val="52525B"/>
-                </a:solidFill>
-                <a:latin typeface="Arial" pitchFamily="34" charset="0"/>
-                <a:ea typeface="Arial" pitchFamily="34" charset="-122"/>
-                <a:cs typeface="Arial" pitchFamily="34" charset="-120"/>
-              </a:rPr>
-              <a:t>Nick Sanders  ·  </a:t>
-            </a:r>
-            <a:pPr indent="0" marL="0">
-              <a:buNone/>
-            </a:pPr>
-            <a:r>
-              <a:rPr lang="en-US" sz="1800" b="1" dirty="0">
+                <a:latin typeface="Arial" pitchFamily="34" charset="0"/>
+                <a:ea typeface="Arial" pitchFamily="34" charset="-122"/>
+                <a:cs typeface="Arial" pitchFamily="34" charset="-120"/>
+              </a:rPr>
+              <a:t>1  I open one huddle and call the team in.</a:t>
+            </a:r>
+            <a:endParaRPr lang="en-US" sz="1900" dirty="0"/>
+          </a:p>
+          <a:p>
+            <a:pPr indent="0" marL="0">
+              <a:spcAft>
+                <a:spcPts val="1400"/>
+              </a:spcAft>
+              <a:buNone/>
+            </a:pPr>
+            <a:r>
+              <a:rPr lang="en-US" sz="1900" b="1" dirty="0">
                 <a:solidFill>
                   <a:srgbClr val="18181B"/>
                 </a:solidFill>
@@ -5969,27 +7176,19 @@
                 <a:ea typeface="Arial" pitchFamily="34" charset="-122"/>
                 <a:cs typeface="Arial" pitchFamily="34" charset="-120"/>
               </a:rPr>
-              <a:t>@Nick_ASanders</a:t>
-            </a:r>
-            <a:pPr indent="0" marL="0">
-              <a:buNone/>
-            </a:pPr>
-            <a:r>
-              <a:rPr lang="en-US" sz="1800" dirty="0">
-                <a:solidFill>
-                  <a:srgbClr val="52525B"/>
-                </a:solidFill>
-                <a:latin typeface="Arial" pitchFamily="34" charset="0"/>
-                <a:ea typeface="Arial" pitchFamily="34" charset="-122"/>
-                <a:cs typeface="Arial" pitchFamily="34" charset="-120"/>
-              </a:rPr>
-              <a:t>  ·  sandrise.io/nicksanders  ·  </a:t>
-            </a:r>
-            <a:pPr indent="0" marL="0">
-              <a:buNone/>
-            </a:pPr>
-            <a:r>
-              <a:rPr lang="en-US" sz="1800" b="1" dirty="0">
+              <a:t>2  They gather, split the work, and each claims a lane.</a:t>
+            </a:r>
+            <a:endParaRPr lang="en-US" sz="1900" dirty="0"/>
+          </a:p>
+          <a:p>
+            <a:pPr indent="0" marL="0">
+              <a:spcAft>
+                <a:spcPts val="1400"/>
+              </a:spcAft>
+              <a:buNone/>
+            </a:pPr>
+            <a:r>
+              <a:rPr lang="en-US" sz="1900" b="1" dirty="0">
                 <a:solidFill>
                   <a:srgbClr val="18181B"/>
                 </a:solidFill>
@@ -5997,65 +7196,36 @@
                 <a:ea typeface="Arial" pitchFamily="34" charset="-122"/>
                 <a:cs typeface="Arial" pitchFamily="34" charset="-120"/>
               </a:rPr>
-              <a:t>twitch.tv/sandrise_ai</a:t>
-            </a:r>
-            <a:pPr indent="0" marL="0">
-              <a:buNone/>
-            </a:pPr>
-            <a:r>
-              <a:rPr lang="en-US" sz="1800" dirty="0">
-                <a:solidFill>
-                  <a:srgbClr val="52525B"/>
-                </a:solidFill>
-                <a:latin typeface="Arial" pitchFamily="34" charset="0"/>
-                <a:ea typeface="Arial" pitchFamily="34" charset="-122"/>
-                <a:cs typeface="Arial" pitchFamily="34" charset="-120"/>
-              </a:rPr>
-              <a:t> — where musterd is built live, every day.</a:t>
-            </a:r>
-            <a:endParaRPr lang="en-US" sz="1800" dirty="0"/>
-          </a:p>
-        </p:txBody>
-      </p:sp>
-      <p:sp>
-        <p:nvSpPr>
-          <p:cNvPr id="7" name="Text 5"/>
-          <p:cNvSpPr txBox="1"/>
-          <p:nvPr/>
-        </p:nvSpPr>
-        <p:spPr>
-          <a:xfrm>
-            <a:off x="640080" y="6217920"/>
-            <a:ext cx="10911535" cy="320040"/>
-          </a:xfrm>
-          <a:prstGeom prst="rect">
-            <a:avLst/>
-          </a:prstGeom>
-          <a:noFill/>
-          <a:ln/>
-        </p:spPr>
-        <p:txBody>
-          <a:bodyPr wrap="square" lIns="0" tIns="0" rIns="0" bIns="0" rtlCol="0" anchor="ctr"/>
-          <a:lstStyle/>
-          <a:p>
-            <a:pPr indent="0" marL="0">
-              <a:buNone/>
-            </a:pPr>
-            <a:r>
-              <a:rPr lang="en-US" sz="1100" dirty="0">
-                <a:solidFill>
-                  <a:srgbClr val="52525B"/>
-                </a:solidFill>
-                <a:latin typeface="Courier New" pitchFamily="34" charset="0"/>
-                <a:ea typeface="Courier New" pitchFamily="34" charset="-122"/>
-                <a:cs typeface="Courier New" pitchFamily="34" charset="-120"/>
-              </a:rPr>
-              <a:t>musterd.io  ·  github.com/SandRiseStudio/musterd</a:t>
-            </a:r>
-            <a:endParaRPr lang="en-US" sz="1100" dirty="0"/>
-          </a:p>
-        </p:txBody>
-      </p:sp>
+              <a:t>3  When they need me, the question lands with a clock on it.</a:t>
+            </a:r>
+            <a:endParaRPr lang="en-US" sz="1900" dirty="0"/>
+          </a:p>
+        </p:txBody>
+      </p:sp>
+      <p:pic>
+        <p:nvPicPr>
+          <p:cNvPr id="5" name="Image 0" descr="img/huddle.png">    </p:cNvPr>
+          <p:cNvPicPr>
+            <a:picLocks noChangeAspect="1"/>
+          </p:cNvPicPr>
+          <p:nvPr/>
+        </p:nvPicPr>
+        <p:blipFill>
+          <a:blip r:embed="rId1"/>
+          <a:stretch>
+            <a:fillRect/>
+          </a:stretch>
+        </p:blipFill>
+        <p:spPr>
+          <a:xfrm>
+            <a:off x="6949440" y="914400"/>
+            <a:ext cx="4754880" cy="4754880"/>
+          </a:xfrm>
+          <a:prstGeom prst="rect">
+            <a:avLst/>
+          </a:prstGeom>
+        </p:spPr>
+      </p:pic>
     </p:spTree>
   </p:cSld>
   <p:clrMapOvr>

--- a/docs/demo/multiplayer-ai-2026-10-01/deck.pptx
+++ b/docs/demo/multiplayer-ai-2026-10-01/deck.pptx
@@ -599,7 +599,7 @@
           <a:p>
             <a:r>
               <a:rPr lang="en-US" dirty="0"/>
-              <a:t>It's open source: npx @musterd/cli init. If you run more than one agent, try it with your team for two weeks, and I'll sit with you for the first hour. I build it live on Twitch every day. Thank you.</a:t>
+              <a:t>It's open source, at musterd.io. I build it live on Twitch every day. Thank you.</a:t>
             </a:r>
             <a:endParaRPr lang="en-US" dirty="0"/>
           </a:p>
@@ -2360,14 +2360,70 @@
       </p:sp>
       <p:sp>
         <p:nvSpPr>
-          <p:cNvPr id="4" name="Shape 2"/>
+          <p:cNvPr id="7" name="Text 5"/>
+          <p:cNvSpPr txBox="1"/>
+          <p:nvPr/>
+        </p:nvSpPr>
+        <p:spPr>
+          <a:xfrm>
+            <a:off x="640080" y="2468880"/>
+            <a:ext cx="5760720" cy="822960"/>
+          </a:xfrm>
+          <a:prstGeom prst="rect">
+            <a:avLst/>
+          </a:prstGeom>
+          <a:noFill/>
+          <a:ln/>
+        </p:spPr>
+        <p:txBody>
+          <a:bodyPr wrap="square" lIns="0" tIns="0" rIns="0" bIns="0" rtlCol="0" anchor="ctr"/>
+          <a:lstStyle/>
+          <a:p>
+            <a:pPr indent="0" marL="0">
+              <a:buNone/>
+            </a:pPr>
+            <a:r>
+              <a:rPr lang="en-US" sz="1700" b="1" dirty="0">
+                <a:solidFill>
+                  <a:srgbClr val="18181B"/>
+                </a:solidFill>
+                <a:latin typeface="Arial" pitchFamily="34" charset="0"/>
+                <a:ea typeface="Arial" pitchFamily="34" charset="-122"/>
+                <a:cs typeface="Arial" pitchFamily="34" charset="-120"/>
+              </a:rPr>
+              <a:t>Bring your agents, from any harness.</a:t>
+            </a:r>
+            <a:endParaRPr lang="en-US" sz="1700" dirty="0"/>
+          </a:p>
+          <a:p>
+            <a:pPr indent="0" marL="0">
+              <a:buNone/>
+            </a:pPr>
+            <a:r>
+              <a:rPr lang="en-US" sz="1400" dirty="0">
+                <a:solidFill>
+                  <a:srgbClr val="52525B"/>
+                </a:solidFill>
+                <a:latin typeface="Arial" pitchFamily="34" charset="0"/>
+                <a:ea typeface="Arial" pitchFamily="34" charset="-122"/>
+                <a:cs typeface="Arial" pitchFamily="34" charset="-120"/>
+              </a:rPr>
+              <a:t>Claude Code · Codex · Cursor · opencode · musterd harness (coming)</a:t>
+            </a:r>
+            <a:endParaRPr lang="en-US" sz="1700" dirty="0"/>
+          </a:p>
+        </p:txBody>
+      </p:sp>
+      <p:sp>
+        <p:nvSpPr>
+          <p:cNvPr id="8" name="Shape 6"/>
           <p:cNvSpPr/>
           <p:nvPr/>
         </p:nvSpPr>
         <p:spPr>
           <a:xfrm>
-            <a:off x="640080" y="2468880"/>
-            <a:ext cx="5760720" cy="914400"/>
+            <a:off x="6766560" y="2194560"/>
+            <a:ext cx="4754880" cy="914400"/>
           </a:xfrm>
           <a:prstGeom prst="roundRect">
             <a:avLst>
@@ -2387,14 +2443,41 @@
       </p:sp>
       <p:sp>
         <p:nvSpPr>
-          <p:cNvPr id="5" name="Text 3"/>
-          <p:cNvSpPr txBox="1"/>
-          <p:nvPr/>
-        </p:nvSpPr>
-        <p:spPr>
-          <a:xfrm>
-            <a:off x="914400" y="2468880"/>
-            <a:ext cx="5303520" cy="914400"/>
+          <p:cNvPr id="9" name="Shape 7"/>
+          <p:cNvSpPr/>
+          <p:nvPr/>
+        </p:nvSpPr>
+        <p:spPr>
+          <a:xfrm>
+            <a:off x="6949440" y="2395728"/>
+            <a:ext cx="512064" cy="512064"/>
+          </a:xfrm>
+          <a:prstGeom prst="roundRect">
+            <a:avLst>
+              <a:gd name="adj" fmla="val 17857"/>
+            </a:avLst>
+          </a:prstGeom>
+          <a:solidFill>
+            <a:srgbClr val="9146FF"/>
+          </a:solidFill>
+          <a:ln w="12700">
+            <a:solidFill>
+              <a:srgbClr val="9146FF"/>
+            </a:solidFill>
+            <a:prstDash val="solid"/>
+          </a:ln>
+        </p:spPr>
+      </p:sp>
+      <p:sp>
+        <p:nvSpPr>
+          <p:cNvPr id="10" name="Text 8"/>
+          <p:cNvSpPr txBox="1"/>
+          <p:nvPr/>
+        </p:nvSpPr>
+        <p:spPr>
+          <a:xfrm>
+            <a:off x="7635240" y="2304288"/>
+            <a:ext cx="3749040" cy="694944"/>
           </a:xfrm>
           <a:prstGeom prst="rect">
             <a:avLst/>
@@ -2410,60 +2493,24 @@
               <a:buNone/>
             </a:pPr>
             <a:r>
-              <a:rPr lang="en-US" sz="2800" b="1" dirty="0">
-                <a:solidFill>
-                  <a:srgbClr val="A1A1AA"/>
+              <a:rPr lang="en-US" sz="1700" b="1" dirty="0">
+                <a:solidFill>
+                  <a:srgbClr val="18181B"/>
                 </a:solidFill>
                 <a:latin typeface="Courier New" pitchFamily="34" charset="0"/>
                 <a:ea typeface="Courier New" pitchFamily="34" charset="-122"/>
                 <a:cs typeface="Courier New" pitchFamily="34" charset="-120"/>
               </a:rPr>
-              <a:t>$ </a:t>
-            </a:r>
-            <a:pPr indent="0" marL="0">
-              <a:buNone/>
-            </a:pPr>
-            <a:r>
-              <a:rPr lang="en-US" sz="2800" b="1" dirty="0">
-                <a:solidFill>
-                  <a:srgbClr val="18181B"/>
-                </a:solidFill>
-                <a:latin typeface="Courier New" pitchFamily="34" charset="0"/>
-                <a:ea typeface="Courier New" pitchFamily="34" charset="-122"/>
-                <a:cs typeface="Courier New" pitchFamily="34" charset="-120"/>
-              </a:rPr>
-              <a:t>npx @musterd/cli init</a:t>
-            </a:r>
-            <a:endParaRPr lang="en-US" sz="2800" dirty="0"/>
-          </a:p>
-        </p:txBody>
-      </p:sp>
-      <p:sp>
-        <p:nvSpPr>
-          <p:cNvPr id="6" name="Text 4"/>
-          <p:cNvSpPr txBox="1"/>
-          <p:nvPr/>
-        </p:nvSpPr>
-        <p:spPr>
-          <a:xfrm>
-            <a:off x="640080" y="3611880"/>
-            <a:ext cx="5760720" cy="1005840"/>
-          </a:xfrm>
-          <a:prstGeom prst="rect">
-            <a:avLst/>
-          </a:prstGeom>
-          <a:noFill/>
-          <a:ln/>
-        </p:spPr>
-        <p:txBody>
-          <a:bodyPr wrap="square" lIns="0" tIns="0" rIns="0" bIns="0" rtlCol="0" anchor="ctr"/>
-          <a:lstStyle/>
-          <a:p>
-            <a:pPr indent="0" marL="0">
-              <a:buNone/>
-            </a:pPr>
-            <a:r>
-              <a:rPr lang="en-US" sz="1700" dirty="0">
+              <a:t>twitch.tv/sandrise_ai</a:t>
+            </a:r>
+            <a:endParaRPr lang="en-US" sz="1700" dirty="0"/>
+          </a:p>
+          <a:p>
+            <a:pPr indent="0" marL="0">
+              <a:buNone/>
+            </a:pPr>
+            <a:r>
+              <a:rPr lang="en-US" sz="1200" dirty="0">
                 <a:solidFill>
                   <a:srgbClr val="52525B"/>
                 </a:solidFill>
@@ -2471,7 +2518,7 @@
                 <a:ea typeface="Arial" pitchFamily="34" charset="-122"/>
                 <a:cs typeface="Arial" pitchFamily="34" charset="-120"/>
               </a:rPr>
-              <a:t>Open source. If you run more than one agent, try it with your team for two weeks. I'll sit with you for the first hour.</a:t>
+              <a:t>musterd, built live every day</a:t>
             </a:r>
             <a:endParaRPr lang="en-US" sz="1700" dirty="0"/>
           </a:p>
@@ -2479,69 +2526,13 @@
       </p:sp>
       <p:sp>
         <p:nvSpPr>
-          <p:cNvPr id="7" name="Text 5"/>
-          <p:cNvSpPr txBox="1"/>
-          <p:nvPr/>
-        </p:nvSpPr>
-        <p:spPr>
-          <a:xfrm>
-            <a:off x="640080" y="4754880"/>
-            <a:ext cx="5760720" cy="822960"/>
-          </a:xfrm>
-          <a:prstGeom prst="rect">
-            <a:avLst/>
-          </a:prstGeom>
-          <a:noFill/>
-          <a:ln/>
-        </p:spPr>
-        <p:txBody>
-          <a:bodyPr wrap="square" lIns="0" tIns="0" rIns="0" bIns="0" rtlCol="0" anchor="ctr"/>
-          <a:lstStyle/>
-          <a:p>
-            <a:pPr indent="0" marL="0">
-              <a:buNone/>
-            </a:pPr>
-            <a:r>
-              <a:rPr lang="en-US" sz="1700" b="1" dirty="0">
-                <a:solidFill>
-                  <a:srgbClr val="18181B"/>
-                </a:solidFill>
-                <a:latin typeface="Arial" pitchFamily="34" charset="0"/>
-                <a:ea typeface="Arial" pitchFamily="34" charset="-122"/>
-                <a:cs typeface="Arial" pitchFamily="34" charset="-120"/>
-              </a:rPr>
-              <a:t>Bring your agents, from any harness.</a:t>
-            </a:r>
-            <a:endParaRPr lang="en-US" sz="1700" dirty="0"/>
-          </a:p>
-          <a:p>
-            <a:pPr indent="0" marL="0">
-              <a:buNone/>
-            </a:pPr>
-            <a:r>
-              <a:rPr lang="en-US" sz="1400" dirty="0">
-                <a:solidFill>
-                  <a:srgbClr val="52525B"/>
-                </a:solidFill>
-                <a:latin typeface="Arial" pitchFamily="34" charset="0"/>
-                <a:ea typeface="Arial" pitchFamily="34" charset="-122"/>
-                <a:cs typeface="Arial" pitchFamily="34" charset="-120"/>
-              </a:rPr>
-              <a:t>Claude Code · Codex · Cursor · opencode · musterd harness (coming)</a:t>
-            </a:r>
-            <a:endParaRPr lang="en-US" sz="1700" dirty="0"/>
-          </a:p>
-        </p:txBody>
-      </p:sp>
-      <p:sp>
-        <p:nvSpPr>
-          <p:cNvPr id="8" name="Shape 6"/>
+          <p:cNvPr id="11" name="Shape 9"/>
           <p:cNvSpPr/>
           <p:nvPr/>
         </p:nvSpPr>
         <p:spPr>
           <a:xfrm>
-            <a:off x="6766560" y="2194560"/>
+            <a:off x="6766560" y="4389120"/>
             <a:ext cx="4754880" cy="914400"/>
           </a:xfrm>
           <a:prstGeom prst="roundRect">
@@ -2562,13 +2553,13 @@
       </p:sp>
       <p:sp>
         <p:nvSpPr>
-          <p:cNvPr id="9" name="Shape 7"/>
+          <p:cNvPr id="12" name="Shape 10"/>
           <p:cNvSpPr/>
           <p:nvPr/>
         </p:nvSpPr>
         <p:spPr>
           <a:xfrm>
-            <a:off x="6949440" y="2395728"/>
+            <a:off x="6949440" y="4590288"/>
             <a:ext cx="512064" cy="512064"/>
           </a:xfrm>
           <a:prstGeom prst="roundRect">
@@ -2577,11 +2568,11 @@
             </a:avLst>
           </a:prstGeom>
           <a:solidFill>
-            <a:srgbClr val="9146FF"/>
+            <a:srgbClr val="7A5A06"/>
           </a:solidFill>
           <a:ln w="12700">
             <a:solidFill>
-              <a:srgbClr val="9146FF"/>
+              <a:srgbClr val="7A5A06"/>
             </a:solidFill>
             <a:prstDash val="solid"/>
           </a:ln>
@@ -2589,13 +2580,13 @@
       </p:sp>
       <p:sp>
         <p:nvSpPr>
-          <p:cNvPr id="10" name="Text 8"/>
-          <p:cNvSpPr txBox="1"/>
-          <p:nvPr/>
-        </p:nvSpPr>
-        <p:spPr>
-          <a:xfrm>
-            <a:off x="7635240" y="2304288"/>
+          <p:cNvPr id="13" name="Text 11"/>
+          <p:cNvSpPr txBox="1"/>
+          <p:nvPr/>
+        </p:nvSpPr>
+        <p:spPr>
+          <a:xfrm>
+            <a:off x="7635240" y="4498848"/>
             <a:ext cx="3749040" cy="694944"/>
           </a:xfrm>
           <a:prstGeom prst="rect">
@@ -2620,7 +2611,7 @@
                 <a:ea typeface="Courier New" pitchFamily="34" charset="-122"/>
                 <a:cs typeface="Courier New" pitchFamily="34" charset="-120"/>
               </a:rPr>
-              <a:t>twitch.tv/sandrise_ai</a:t>
+              <a:t>sandrise.io/nicksanders</a:t>
             </a:r>
             <a:endParaRPr lang="en-US" sz="1700" dirty="0"/>
           </a:p>
@@ -2637,7 +2628,7 @@
                 <a:ea typeface="Arial" pitchFamily="34" charset="-122"/>
                 <a:cs typeface="Arial" pitchFamily="34" charset="-120"/>
               </a:rPr>
-              <a:t>musterd, built live every day</a:t>
+              <a:t>Portfolio</a:t>
             </a:r>
             <a:endParaRPr lang="en-US" sz="1700" dirty="0"/>
           </a:p>
@@ -2645,7 +2636,7 @@
       </p:sp>
       <p:sp>
         <p:nvSpPr>
-          <p:cNvPr id="11" name="Shape 9"/>
+          <p:cNvPr id="14" name="Shape 12"/>
           <p:cNvSpPr/>
           <p:nvPr/>
         </p:nvSpPr>
@@ -2672,123 +2663,13 @@
       </p:sp>
       <p:sp>
         <p:nvSpPr>
-          <p:cNvPr id="12" name="Shape 10"/>
-          <p:cNvSpPr/>
-          <p:nvPr/>
-        </p:nvSpPr>
-        <p:spPr>
-          <a:xfrm>
-            <a:off x="6949440" y="3493008"/>
-            <a:ext cx="512064" cy="512064"/>
-          </a:xfrm>
-          <a:prstGeom prst="roundRect">
-            <a:avLst>
-              <a:gd name="adj" fmla="val 17857"/>
-            </a:avLst>
-          </a:prstGeom>
-          <a:solidFill>
-            <a:srgbClr val="7A5A06"/>
-          </a:solidFill>
-          <a:ln w="12700">
-            <a:solidFill>
-              <a:srgbClr val="7A5A06"/>
-            </a:solidFill>
-            <a:prstDash val="solid"/>
-          </a:ln>
-        </p:spPr>
-      </p:sp>
-      <p:sp>
-        <p:nvSpPr>
-          <p:cNvPr id="13" name="Text 11"/>
-          <p:cNvSpPr txBox="1"/>
-          <p:nvPr/>
-        </p:nvSpPr>
-        <p:spPr>
-          <a:xfrm>
-            <a:off x="7635240" y="3401568"/>
-            <a:ext cx="3749040" cy="694944"/>
-          </a:xfrm>
-          <a:prstGeom prst="rect">
-            <a:avLst/>
-          </a:prstGeom>
-          <a:noFill/>
-          <a:ln/>
-        </p:spPr>
-        <p:txBody>
-          <a:bodyPr wrap="square" lIns="0" tIns="0" rIns="0" bIns="0" rtlCol="0" anchor="ctr"/>
-          <a:lstStyle/>
-          <a:p>
-            <a:pPr indent="0" marL="0">
-              <a:buNone/>
-            </a:pPr>
-            <a:r>
-              <a:rPr lang="en-US" sz="1700" b="1" dirty="0">
-                <a:solidFill>
-                  <a:srgbClr val="18181B"/>
-                </a:solidFill>
-                <a:latin typeface="Courier New" pitchFamily="34" charset="0"/>
-                <a:ea typeface="Courier New" pitchFamily="34" charset="-122"/>
-                <a:cs typeface="Courier New" pitchFamily="34" charset="-120"/>
-              </a:rPr>
-              <a:t>sandrise.io/nicksanders</a:t>
-            </a:r>
-            <a:endParaRPr lang="en-US" sz="1700" dirty="0"/>
-          </a:p>
-          <a:p>
-            <a:pPr indent="0" marL="0">
-              <a:buNone/>
-            </a:pPr>
-            <a:r>
-              <a:rPr lang="en-US" sz="1200" dirty="0">
-                <a:solidFill>
-                  <a:srgbClr val="52525B"/>
-                </a:solidFill>
-                <a:latin typeface="Arial" pitchFamily="34" charset="0"/>
-                <a:ea typeface="Arial" pitchFamily="34" charset="-122"/>
-                <a:cs typeface="Arial" pitchFamily="34" charset="-120"/>
-              </a:rPr>
-              <a:t>Portfolio</a:t>
-            </a:r>
-            <a:endParaRPr lang="en-US" sz="1700" dirty="0"/>
-          </a:p>
-        </p:txBody>
-      </p:sp>
-      <p:sp>
-        <p:nvSpPr>
-          <p:cNvPr id="14" name="Shape 12"/>
-          <p:cNvSpPr/>
-          <p:nvPr/>
-        </p:nvSpPr>
-        <p:spPr>
-          <a:xfrm>
-            <a:off x="6766560" y="4389120"/>
-            <a:ext cx="4754880" cy="914400"/>
-          </a:xfrm>
-          <a:prstGeom prst="roundRect">
-            <a:avLst>
-              <a:gd name="adj" fmla="val 12000"/>
-            </a:avLst>
-          </a:prstGeom>
-          <a:solidFill>
-            <a:srgbClr val="FFFFFF"/>
-          </a:solidFill>
-          <a:ln w="9525">
-            <a:solidFill>
-              <a:srgbClr val="E4E4E7"/>
-            </a:solidFill>
-            <a:prstDash val="solid"/>
-          </a:ln>
-        </p:spPr>
-      </p:sp>
-      <p:sp>
-        <p:nvSpPr>
           <p:cNvPr id="15" name="Shape 13"/>
           <p:cNvSpPr/>
           <p:nvPr/>
         </p:nvSpPr>
         <p:spPr>
           <a:xfrm>
-            <a:off x="6949440" y="4590288"/>
+            <a:off x="6949440" y="3493008"/>
             <a:ext cx="512064" cy="512064"/>
           </a:xfrm>
           <a:prstGeom prst="roundRect">
@@ -2815,7 +2696,7 @@
         </p:nvSpPr>
         <p:spPr>
           <a:xfrm>
-            <a:off x="7635240" y="4498848"/>
+            <a:off x="7635240" y="3401568"/>
             <a:ext cx="3749040" cy="694944"/>
           </a:xfrm>
           <a:prstGeom prst="rect">

--- a/docs/demo/multiplayer-ai-2026-10-01/deck.pptx
+++ b/docs/demo/multiplayer-ai-2026-10-01/deck.pptx
@@ -511,7 +511,7 @@
           <a:p>
             <a:r>
               <a:rPr lang="en-US" dirty="0"/>
-              <a:t>Before this slide: /live is on the projector, the roster lit, nothing working. Say: everyone here has read this year's headlines. This is the opposite shape: a roster of names, one of them is me.</a:t>
+              <a:t>Scan that and vote: what should my team build next? Whatever wins, they start on it at the end of this talk, live. I'm Nick, and I build musterd. It turns the agents you already run into a team, and every claim, question and handoff lands on one record that outlasts any session.</a:t>
             </a:r>
             <a:endParaRPr lang="en-US" dirty="0"/>
           </a:p>
@@ -599,7 +599,7 @@
           <a:p>
             <a:r>
               <a:rPr lang="en-US" dirty="0"/>
-              <a:t>Held back for Q&amp;A — not in the seven minutes. Use it when someone asks how it evolved or what you tried. Each row is a measured problem and what it forced; dates are 2026. Long form: docs/wiki/how-musterd-got-here.md. Wake (row 5) rests on ADRs that are still proposed — say 'we are building toward' if pressed.</a:t>
+              <a:t>It's open source, at musterd.io. I build it live on Twitch every day. Thank you.</a:t>
             </a:r>
             <a:endParaRPr lang="en-US" dirty="0"/>
           </a:p>
@@ -687,7 +687,7 @@
           <a:p>
             <a:r>
               <a:rPr lang="en-US" dirty="0"/>
-              <a:t>Say: Before musterd, I was the coordination layer. One agent would tell me something, and I would paste it into the other. Then go straight to the next slide for the number. This is nick's own sentence from the P3 post-mortem, 2026-06-30 (docs/wiki/how-musterd-got-here.md).</a:t>
+              <a:t>In June I was the coordination layer. One agent would tell me something, and I would paste it into the other. I lost track of which session had done what, on which branch. Every new session started from a prompt I wrote by hand. Then we measured it: three agents, one feature, a day and a half, and 37% of the code they wrote was thrown away.</a:t>
             </a:r>
             <a:endParaRPr lang="en-US" dirty="0"/>
           </a:p>
@@ -775,7 +775,7 @@
           <a:p>
             <a:r>
               <a:rPr lang="en-US" dirty="0"/>
-              <a:t>Then we measured it: three agents on one feature for a day and a half, and about 37% of the code they produced was thrown away — two agents writing the same diff, or one building on a schema the other had not finished. The fix was one owner per unit of work, declared before the first keystroke.</a:t>
+              <a:t>So the unit is a team: a roster where a member outlasts every session it has run in. Four things change. Ownership. Messages reach an agent mid-task. You get asked. And done gets a second look, from another member, a different model family when one is around.</a:t>
             </a:r>
             <a:endParaRPr lang="en-US" dirty="0"/>
           </a:p>
@@ -863,7 +863,7 @@
           <a:p>
             <a:r>
               <a:rPr lang="en-US" dirty="0"/>
-              <a:t>So the primitive is a team: a persistent roster where a member outlasts every session it has run in. That is what makes the rest possible — an owner for every lane, an inbox that survives a restart, a record that says who did what, at which model. The human sits on the same roster, on the same protocol. Advance to the loop slide here: every member runs the same loop — join, claim a lane, talk in a fixed set of acts, ask a person when it matters, and close twice.</a:t>
+              <a:t>Here's one session for Miley, our designer. She joins, and her first inbox check takes her seat. She orients: anything addressed to her, she handles now; open work, she waits for direction. She claims a lane from the team's goal and names the files it touches. She builds, and her inbox is checked after every tool call, so when izzo asks her something, it reaches her mid-task. A call only I can make, she asks me, with a deadline. She opens a PR and submits it, and someone else reviews it. A review of izzo's work lands, she takes it, then wraps up, and her next session, on any harness, picks up where she left off.</a:t>
             </a:r>
             <a:endParaRPr lang="en-US" dirty="0"/>
           </a:p>
@@ -951,7 +951,7 @@
           <a:p>
             <a:r>
               <a:rPr lang="en-US" dirty="0"/>
-              <a:t>Advance here on 'an act on that roster'. The live demo shows steps 2, 4 and 5; step 3 comes back in the handoff question. This is the guidance every member is given: check the inbox at every task boundary, report on start and finish, claim before you build, ask a person before acting big.</a:t>
+              <a:t>Under the hood: seats, roles, humans on the same roster. Every seat gets its own workspace and toolkit. Goals split into lanes, on a board. And members are always reachable: a message wakes a seat that isn't running, and the doorbell finds me on /live, my desktop or Slack.</a:t>
             </a:r>
             <a:endParaRPr lang="en-US" dirty="0"/>
           </a:p>
@@ -1039,7 +1039,7 @@
           <a:p>
             <a:r>
               <a:rPr lang="en-US" dirty="0"/>
-              <a:t>Switch to /live and the terminal now. Do not come back to slides until the handoff beat. If delta is in tonight, it is beat 4: an agent that was not running wakes on a directed act.</a:t>
+              <a:t>My first role was approver: seven approvals for every real conversation, and not one request for help. So we let agents ask me directly. Since then, 106 questions. And I can say no. So can they. A teammate you can only assign work to can't tell you no.</a:t>
             </a:r>
             <a:endParaRPr lang="en-US" dirty="0"/>
           </a:p>
@@ -1127,7 +1127,7 @@
           <a:p>
             <a:r>
               <a:rPr lang="en-US" dirty="0"/>
-              <a:t>Our first answer was wrong. Early on, a handoff was prose: here is what I did, carry on. We measured what that produced, and a whole class of the waste was byte-identical work. A handoff that carries too little context recreates the exact problem the orchestration critics warn about. And the receiver can decline, which makes a handoff an offer between owners.</a:t>
+              <a:t>The question I got asked most was handoff. Our first answer was wrong: a handoff was prose. A whole class of our waste was byte-identical work. Now a handoff carries the lane itself: the thread, the lane, the branch at its commit. The receiver can accept, decline or challenge it. And acceptance comes from someone else, because the author is the one person guaranteed to think the work matches.</a:t>
             </a:r>
             <a:endParaRPr lang="en-US" dirty="0"/>
           </a:p>
@@ -1215,7 +1215,7 @@
           <a:p>
             <a:r>
               <a:rPr lang="en-US" dirty="0"/>
-              <a:t>My first role was a person in front of every claim, as an approver. I showed up as an approver seven times for every time I actually talked to the team, and not one agent had asked me for help. The gate produced the record of oversight without the oversight. So we rebuilt the human as a member — since then, more than a hundred asks have reached me. That is why the centerpiece of this demo is a question.</a:t>
+              <a:t>Every stop on this road is something that broke on our own team. Lanes, after the 37%. Messages mid-task, after replies sat for three and a half hours. Memory. Agents asking me. Someone else signing off. Sessions that start themselves. A seat in the cloud, because my laptop couldn't run them all. And the doorbell, last week.</a:t>
             </a:r>
             <a:endParaRPr lang="en-US" dirty="0"/>
           </a:p>
@@ -1303,7 +1303,7 @@
           <a:p>
             <a:r>
               <a:rPr lang="en-US" dirty="0"/>
-              <a:t>Then stop. Do not tour the office or the settings. The 38x multiplier is not said in this room: the re-run is pending. If asked for the waste number, offer the table with its date on it.</a:t>
+              <a:t>Read the poll, run ./go.sh &lt;winner&gt;, switch to /live. You picked [winner]. I'm opening one huddle on it and calling the team in. Six members, four model families. Nobody is handing out lanes: they split the work in that room, and each claims a piece.</a:t>
             </a:r>
             <a:endParaRPr lang="en-US" dirty="0"/>
           </a:p>
@@ -1751,7 +1751,7 @@
         <p:spPr>
           <a:xfrm>
             <a:off x="1280160" y="566928"/>
-            <a:ext cx="5486400" cy="640080"/>
+            <a:ext cx="4572000" cy="640080"/>
           </a:xfrm>
           <a:prstGeom prst="rect">
             <a:avLst/>
@@ -1789,8 +1789,8 @@
         </p:nvSpPr>
         <p:spPr>
           <a:xfrm>
-            <a:off x="640080" y="2377440"/>
-            <a:ext cx="10911535" cy="1463040"/>
+            <a:off x="640080" y="1828800"/>
+            <a:ext cx="7589520" cy="1828800"/>
           </a:xfrm>
           <a:prstGeom prst="rect">
             <a:avLst/>
@@ -1806,7 +1806,7 @@
               <a:buNone/>
             </a:pPr>
             <a:r>
-              <a:rPr lang="en-US" sz="4000" b="1" dirty="0">
+              <a:rPr lang="en-US" sz="4400" b="1" dirty="0">
                 <a:solidFill>
                   <a:srgbClr val="18181B"/>
                 </a:solidFill>
@@ -1814,9 +1814,9 @@
                 <a:ea typeface="Arial" pitchFamily="34" charset="-122"/>
                 <a:cs typeface="Arial" pitchFamily="34" charset="-120"/>
               </a:rPr>
-              <a:t>Persistent teams where agents and humans coordinate as peers.</a:t>
-            </a:r>
-            <a:endParaRPr lang="en-US" sz="4000" dirty="0"/>
+              <a:t>Turn the agents you already run into a team.</a:t>
+            </a:r>
+            <a:endParaRPr lang="en-US" sz="4400" dirty="0"/>
           </a:p>
         </p:txBody>
       </p:sp>
@@ -1828,8 +1828,8 @@
         </p:nvSpPr>
         <p:spPr>
           <a:xfrm>
-            <a:off x="640080" y="3931920"/>
-            <a:ext cx="9997135" cy="914400"/>
+            <a:off x="640080" y="3749040"/>
+            <a:ext cx="7315200" cy="914400"/>
           </a:xfrm>
           <a:prstGeom prst="rect">
             <a:avLst/>
@@ -1845,7 +1845,7 @@
               <a:buNone/>
             </a:pPr>
             <a:r>
-              <a:rPr lang="en-US" sz="2200" dirty="0">
+              <a:rPr lang="en-US" sz="2000" dirty="0">
                 <a:solidFill>
                   <a:srgbClr val="52525B"/>
                 </a:solidFill>
@@ -1853,15 +1853,145 @@
                 <a:ea typeface="Arial" pitchFamily="34" charset="-122"/>
                 <a:cs typeface="Arial" pitchFamily="34" charset="-120"/>
               </a:rPr>
-              <a:t>Ownership, decisions and every exchange stay on a record that outlasts any session.</a:t>
-            </a:r>
-            <a:endParaRPr lang="en-US" sz="2200" dirty="0"/>
+              <a:t>Every claim, question and handoff lands on one record that outlasts any session.</a:t>
+            </a:r>
+            <a:endParaRPr lang="en-US" sz="2000" dirty="0"/>
           </a:p>
         </p:txBody>
       </p:sp>
       <p:sp>
         <p:nvSpPr>
           <p:cNvPr id="7" name="Shape 5"/>
+          <p:cNvSpPr/>
+          <p:nvPr/>
+        </p:nvSpPr>
+        <p:spPr>
+          <a:xfrm>
+            <a:off x="8778240" y="1463040"/>
+            <a:ext cx="2743200" cy="3108960"/>
+          </a:xfrm>
+          <a:prstGeom prst="roundRect">
+            <a:avLst>
+              <a:gd name="adj" fmla="val 4000"/>
+            </a:avLst>
+          </a:prstGeom>
+          <a:solidFill>
+            <a:srgbClr val="FFFFFF"/>
+          </a:solidFill>
+          <a:ln w="9525">
+            <a:solidFill>
+              <a:srgbClr val="E4E4E7"/>
+            </a:solidFill>
+            <a:prstDash val="solid"/>
+          </a:ln>
+        </p:spPr>
+      </p:sp>
+      <p:sp>
+        <p:nvSpPr>
+          <p:cNvPr id="8" name="Shape 6"/>
+          <p:cNvSpPr/>
+          <p:nvPr/>
+        </p:nvSpPr>
+        <p:spPr>
+          <a:xfrm>
+            <a:off x="9235440" y="1691640"/>
+            <a:ext cx="1828800" cy="1828800"/>
+          </a:xfrm>
+          <a:prstGeom prst="rect">
+            <a:avLst/>
+          </a:prstGeom>
+          <a:solidFill>
+            <a:srgbClr val="F4F4F5"/>
+          </a:solidFill>
+          <a:ln w="12700">
+            <a:solidFill>
+              <a:srgbClr val="E4E4E7"/>
+            </a:solidFill>
+            <a:prstDash val="dash"/>
+          </a:ln>
+        </p:spPr>
+      </p:sp>
+      <p:sp>
+        <p:nvSpPr>
+          <p:cNvPr id="9" name="Text 7"/>
+          <p:cNvSpPr txBox="1"/>
+          <p:nvPr/>
+        </p:nvSpPr>
+        <p:spPr>
+          <a:xfrm>
+            <a:off x="9235440" y="1691640"/>
+            <a:ext cx="1828800" cy="1828800"/>
+          </a:xfrm>
+          <a:prstGeom prst="rect">
+            <a:avLst/>
+          </a:prstGeom>
+          <a:noFill/>
+          <a:ln/>
+        </p:spPr>
+        <p:txBody>
+          <a:bodyPr wrap="square" lIns="0" tIns="0" rIns="0" bIns="0" rtlCol="0" anchor="ctr"/>
+          <a:lstStyle/>
+          <a:p>
+            <a:pPr algn="ctr" indent="0" marL="0">
+              <a:buNone/>
+            </a:pPr>
+            <a:r>
+              <a:rPr lang="en-US" sz="2400" dirty="0">
+                <a:solidFill>
+                  <a:srgbClr val="A1A1AA"/>
+                </a:solidFill>
+                <a:latin typeface="Courier New" pitchFamily="34" charset="0"/>
+                <a:ea typeface="Courier New" pitchFamily="34" charset="-122"/>
+                <a:cs typeface="Courier New" pitchFamily="34" charset="-120"/>
+              </a:rPr>
+              <a:t>QR</a:t>
+            </a:r>
+            <a:endParaRPr lang="en-US" sz="2400" dirty="0"/>
+          </a:p>
+        </p:txBody>
+      </p:sp>
+      <p:sp>
+        <p:nvSpPr>
+          <p:cNvPr id="10" name="Text 8"/>
+          <p:cNvSpPr txBox="1"/>
+          <p:nvPr/>
+        </p:nvSpPr>
+        <p:spPr>
+          <a:xfrm>
+            <a:off x="8915400" y="3657600"/>
+            <a:ext cx="2468880" cy="731520"/>
+          </a:xfrm>
+          <a:prstGeom prst="rect">
+            <a:avLst/>
+          </a:prstGeom>
+          <a:noFill/>
+          <a:ln/>
+        </p:spPr>
+        <p:txBody>
+          <a:bodyPr wrap="square" lIns="0" tIns="0" rIns="0" bIns="0" rtlCol="0" anchor="ctr"/>
+          <a:lstStyle/>
+          <a:p>
+            <a:pPr algn="ctr" indent="0" marL="0">
+              <a:buNone/>
+            </a:pPr>
+            <a:r>
+              <a:rPr lang="en-US" sz="1400" b="1" dirty="0">
+                <a:solidFill>
+                  <a:srgbClr val="18181B"/>
+                </a:solidFill>
+                <a:latin typeface="Arial" pitchFamily="34" charset="0"/>
+                <a:ea typeface="Arial" pitchFamily="34" charset="-122"/>
+                <a:cs typeface="Arial" pitchFamily="34" charset="-120"/>
+              </a:rPr>
+              <a:t>Vote: what should the team build next?</a:t>
+            </a:r>
+            <a:endParaRPr lang="en-US" sz="1400" dirty="0"/>
+          </a:p>
+        </p:txBody>
+      </p:sp>
+      <p:sp>
+        <p:nvSpPr>
+          <p:cNvPr id="11" name="Shape 9"/>
           <p:cNvSpPr/>
           <p:nvPr/>
         </p:nvSpPr>
@@ -1886,7 +2016,7 @@
       </p:sp>
       <p:sp>
         <p:nvSpPr>
-          <p:cNvPr id="8" name="Text 6"/>
+          <p:cNvPr id="12" name="Text 10"/>
           <p:cNvSpPr txBox="1"/>
           <p:nvPr/>
         </p:nvSpPr>
@@ -1925,39 +2055,14 @@
       </p:sp>
       <p:sp>
         <p:nvSpPr>
-          <p:cNvPr id="9" name="Shape 7"/>
-          <p:cNvSpPr/>
-          <p:nvPr/>
-        </p:nvSpPr>
-        <p:spPr>
-          <a:xfrm>
-            <a:off x="2578608" y="5303520"/>
-            <a:ext cx="13716" cy="914400"/>
-          </a:xfrm>
-          <a:prstGeom prst="rect">
-            <a:avLst/>
-          </a:prstGeom>
-          <a:solidFill>
-            <a:srgbClr val="E4E4E7"/>
-          </a:solidFill>
-          <a:ln w="12700">
-            <a:solidFill>
-              <a:srgbClr val="E4E4E7"/>
-            </a:solidFill>
-            <a:prstDash val="solid"/>
-          </a:ln>
-        </p:spPr>
-      </p:sp>
-      <p:sp>
-        <p:nvSpPr>
-          <p:cNvPr id="10" name="Text 8"/>
+          <p:cNvPr id="13" name="Text 11"/>
           <p:cNvSpPr txBox="1"/>
           <p:nvPr/>
         </p:nvSpPr>
         <p:spPr>
           <a:xfrm>
             <a:off x="2743200" y="5303520"/>
-            <a:ext cx="3200400" cy="274320"/>
+            <a:ext cx="3291840" cy="274320"/>
           </a:xfrm>
           <a:prstGeom prst="rect">
             <a:avLst/>
@@ -1975,42 +2080,67 @@
             <a:r>
               <a:rPr lang="en-US" sz="1000" spc="300" kern="0" dirty="0">
                 <a:solidFill>
-                  <a:srgbClr val="E1AD01"/>
+                  <a:srgbClr val="52525B"/>
                 </a:solidFill>
                 <a:latin typeface="Courier New" pitchFamily="34" charset="0"/>
                 <a:ea typeface="Courier New" pitchFamily="34" charset="-122"/>
                 <a:cs typeface="Courier New" pitchFamily="34" charset="-120"/>
               </a:rPr>
-              <a:t>● </a:t>
-            </a:r>
-            <a:pPr indent="0" marL="0">
-              <a:buNone/>
-            </a:pPr>
-            <a:r>
-              <a:rPr lang="en-US" sz="1000" spc="300" kern="0" dirty="0">
-                <a:solidFill>
-                  <a:srgbClr val="52525B"/>
+              <a:t>BUILT LIVE, DAILY</a:t>
+            </a:r>
+            <a:endParaRPr lang="en-US" sz="1000" dirty="0"/>
+          </a:p>
+        </p:txBody>
+      </p:sp>
+      <p:sp>
+        <p:nvSpPr>
+          <p:cNvPr id="14" name="Text 12"/>
+          <p:cNvSpPr txBox="1"/>
+          <p:nvPr/>
+        </p:nvSpPr>
+        <p:spPr>
+          <a:xfrm>
+            <a:off x="2743200" y="5596128"/>
+            <a:ext cx="3291840" cy="457200"/>
+          </a:xfrm>
+          <a:prstGeom prst="rect">
+            <a:avLst/>
+          </a:prstGeom>
+          <a:noFill/>
+          <a:ln/>
+        </p:spPr>
+        <p:txBody>
+          <a:bodyPr wrap="square" lIns="0" tIns="0" rIns="0" bIns="0" rtlCol="0" anchor="ctr"/>
+          <a:lstStyle/>
+          <a:p>
+            <a:pPr indent="0" marL="0">
+              <a:buNone/>
+            </a:pPr>
+            <a:r>
+              <a:rPr lang="en-US" sz="1800" b="1" dirty="0">
+                <a:solidFill>
+                  <a:srgbClr val="9146FF"/>
                 </a:solidFill>
                 <a:latin typeface="Courier New" pitchFamily="34" charset="0"/>
                 <a:ea typeface="Courier New" pitchFamily="34" charset="-122"/>
                 <a:cs typeface="Courier New" pitchFamily="34" charset="-120"/>
               </a:rPr>
-              <a:t>BUILT LIVE, DAILY</a:t>
-            </a:r>
-            <a:endParaRPr lang="en-US" sz="1000" dirty="0"/>
-          </a:p>
-        </p:txBody>
-      </p:sp>
-      <p:sp>
-        <p:nvSpPr>
-          <p:cNvPr id="11" name="Text 9"/>
-          <p:cNvSpPr txBox="1"/>
-          <p:nvPr/>
-        </p:nvSpPr>
-        <p:spPr>
-          <a:xfrm>
-            <a:off x="2743200" y="5596128"/>
-            <a:ext cx="3200400" cy="457200"/>
+              <a:t>twitch.tv/sandrise_ai</a:t>
+            </a:r>
+            <a:endParaRPr lang="en-US" sz="1800" dirty="0"/>
+          </a:p>
+        </p:txBody>
+      </p:sp>
+      <p:sp>
+        <p:nvSpPr>
+          <p:cNvPr id="15" name="Text 13"/>
+          <p:cNvSpPr txBox="1"/>
+          <p:nvPr/>
+        </p:nvSpPr>
+        <p:spPr>
+          <a:xfrm>
+            <a:off x="6035040" y="5303520"/>
+            <a:ext cx="3657600" cy="274320"/>
           </a:xfrm>
           <a:prstGeom prst="rect">
             <a:avLst/>
@@ -2026,55 +2156,30 @@
               <a:buNone/>
             </a:pPr>
             <a:r>
-              <a:rPr lang="en-US" sz="1800" b="1" dirty="0">
-                <a:solidFill>
-                  <a:srgbClr val="18181B"/>
+              <a:rPr lang="en-US" sz="1000" spc="300" kern="0" dirty="0">
+                <a:solidFill>
+                  <a:srgbClr val="52525B"/>
                 </a:solidFill>
                 <a:latin typeface="Courier New" pitchFamily="34" charset="0"/>
                 <a:ea typeface="Courier New" pitchFamily="34" charset="-122"/>
                 <a:cs typeface="Courier New" pitchFamily="34" charset="-120"/>
               </a:rPr>
-              <a:t>twitch.tv/sandrise_ai</a:t>
-            </a:r>
-            <a:endParaRPr lang="en-US" sz="1800" dirty="0"/>
-          </a:p>
-        </p:txBody>
-      </p:sp>
-      <p:sp>
-        <p:nvSpPr>
-          <p:cNvPr id="12" name="Shape 10"/>
-          <p:cNvSpPr/>
-          <p:nvPr/>
-        </p:nvSpPr>
-        <p:spPr>
-          <a:xfrm>
-            <a:off x="5779008" y="5303520"/>
-            <a:ext cx="13716" cy="914400"/>
-          </a:xfrm>
-          <a:prstGeom prst="rect">
-            <a:avLst/>
-          </a:prstGeom>
-          <a:solidFill>
-            <a:srgbClr val="E4E4E7"/>
-          </a:solidFill>
-          <a:ln w="12700">
-            <a:solidFill>
-              <a:srgbClr val="E4E4E7"/>
-            </a:solidFill>
-            <a:prstDash val="solid"/>
-          </a:ln>
-        </p:spPr>
-      </p:sp>
-      <p:sp>
-        <p:nvSpPr>
-          <p:cNvPr id="13" name="Text 11"/>
-          <p:cNvSpPr txBox="1"/>
-          <p:nvPr/>
-        </p:nvSpPr>
-        <p:spPr>
-          <a:xfrm>
-            <a:off x="5943600" y="5303520"/>
-            <a:ext cx="3657600" cy="274320"/>
+              <a:t>PORTFOLIO</a:t>
+            </a:r>
+            <a:endParaRPr lang="en-US" sz="1000" dirty="0"/>
+          </a:p>
+        </p:txBody>
+      </p:sp>
+      <p:sp>
+        <p:nvSpPr>
+          <p:cNvPr id="16" name="Text 14"/>
+          <p:cNvSpPr txBox="1"/>
+          <p:nvPr/>
+        </p:nvSpPr>
+        <p:spPr>
+          <a:xfrm>
+            <a:off x="6035040" y="5596128"/>
+            <a:ext cx="3657600" cy="457200"/>
           </a:xfrm>
           <a:prstGeom prst="rect">
             <a:avLst/>
@@ -2090,53 +2195,14 @@
               <a:buNone/>
             </a:pPr>
             <a:r>
-              <a:rPr lang="en-US" sz="1000" spc="300" kern="0" dirty="0">
-                <a:solidFill>
-                  <a:srgbClr val="52525B"/>
+              <a:rPr lang="en-US" sz="1800" b="1" dirty="0">
+                <a:solidFill>
+                  <a:srgbClr val="18181B"/>
                 </a:solidFill>
                 <a:latin typeface="Courier New" pitchFamily="34" charset="0"/>
                 <a:ea typeface="Courier New" pitchFamily="34" charset="-122"/>
                 <a:cs typeface="Courier New" pitchFamily="34" charset="-120"/>
               </a:rPr>
-              <a:t>PORTFOLIO</a:t>
-            </a:r>
-            <a:endParaRPr lang="en-US" sz="1000" dirty="0"/>
-          </a:p>
-        </p:txBody>
-      </p:sp>
-      <p:sp>
-        <p:nvSpPr>
-          <p:cNvPr id="14" name="Text 12"/>
-          <p:cNvSpPr txBox="1"/>
-          <p:nvPr/>
-        </p:nvSpPr>
-        <p:spPr>
-          <a:xfrm>
-            <a:off x="5943600" y="5596128"/>
-            <a:ext cx="3657600" cy="457200"/>
-          </a:xfrm>
-          <a:prstGeom prst="rect">
-            <a:avLst/>
-          </a:prstGeom>
-          <a:noFill/>
-          <a:ln/>
-        </p:spPr>
-        <p:txBody>
-          <a:bodyPr wrap="square" lIns="0" tIns="0" rIns="0" bIns="0" rtlCol="0" anchor="ctr"/>
-          <a:lstStyle/>
-          <a:p>
-            <a:pPr indent="0" marL="0">
-              <a:buNone/>
-            </a:pPr>
-            <a:r>
-              <a:rPr lang="en-US" sz="1800" b="1" dirty="0">
-                <a:solidFill>
-                  <a:srgbClr val="18181B"/>
-                </a:solidFill>
-                <a:latin typeface="Courier New" pitchFamily="34" charset="0"/>
-                <a:ea typeface="Courier New" pitchFamily="34" charset="-122"/>
-                <a:cs typeface="Courier New" pitchFamily="34" charset="-120"/>
-              </a:rPr>
               <a:t>sandrise.io/nicksanders</a:t>
             </a:r>
             <a:endParaRPr lang="en-US" sz="1800" dirty="0"/>
@@ -2145,39 +2211,14 @@
       </p:sp>
       <p:sp>
         <p:nvSpPr>
-          <p:cNvPr id="15" name="Shape 13"/>
-          <p:cNvSpPr/>
-          <p:nvPr/>
-        </p:nvSpPr>
-        <p:spPr>
-          <a:xfrm>
-            <a:off x="9436608" y="5303520"/>
-            <a:ext cx="13716" cy="914400"/>
-          </a:xfrm>
-          <a:prstGeom prst="rect">
-            <a:avLst/>
-          </a:prstGeom>
-          <a:solidFill>
-            <a:srgbClr val="E4E4E7"/>
-          </a:solidFill>
-          <a:ln w="12700">
-            <a:solidFill>
-              <a:srgbClr val="E4E4E7"/>
-            </a:solidFill>
-            <a:prstDash val="solid"/>
-          </a:ln>
-        </p:spPr>
-      </p:sp>
-      <p:sp>
-        <p:nvSpPr>
-          <p:cNvPr id="16" name="Text 14"/>
-          <p:cNvSpPr txBox="1"/>
-          <p:nvPr/>
-        </p:nvSpPr>
-        <p:spPr>
-          <a:xfrm>
-            <a:off x="9601200" y="5596128"/>
-            <a:ext cx="1920240" cy="457200"/>
+          <p:cNvPr id="17" name="Text 15"/>
+          <p:cNvSpPr txBox="1"/>
+          <p:nvPr/>
+        </p:nvSpPr>
+        <p:spPr>
+          <a:xfrm>
+            <a:off x="9692640" y="5596128"/>
+            <a:ext cx="1828800" cy="457200"/>
           </a:xfrm>
           <a:prstGeom prst="rect">
             <a:avLst/>
@@ -2221,7 +2262,7 @@
     <p:bg>
       <p:bgPr>
         <a:solidFill>
-          <a:srgbClr val="F4F4F5"/>
+          <a:srgbClr val="FAFAFA"/>
         </a:solidFill>
       </p:bgPr>
     </p:bg>
@@ -2247,8 +2288,8 @@
         </p:nvSpPr>
         <p:spPr>
           <a:xfrm>
-            <a:off x="640080" y="548640"/>
-            <a:ext cx="10911535" cy="365760"/>
+            <a:off x="640080" y="502920"/>
+            <a:ext cx="10911535" cy="320040"/>
           </a:xfrm>
           <a:prstGeom prst="rect">
             <a:avLst/>
@@ -2272,901 +2313,437 @@
                 <a:ea typeface="Courier New" pitchFamily="34" charset="-122"/>
                 <a:cs typeface="Courier New" pitchFamily="34" charset="-120"/>
               </a:rPr>
-              <a:t>HOW EACH PIECE EARNED ITS PLACE</a:t>
+              <a:t>THANK YOU</a:t>
             </a:r>
             <a:endParaRPr lang="en-US" sz="1300" dirty="0"/>
           </a:p>
         </p:txBody>
       </p:sp>
-      <p:graphicFrame>
-        <p:nvGraphicFramePr>
-          <p:cNvPr id="11" name="Table 0"/>
-          <p:cNvGraphicFramePr>
-            <a:graphicFrameLocks noGrp="1"/>
-          </p:cNvGraphicFramePr>
-          <p:nvPr>
-            <p:extLst>
-              <p:ext uri="{D42A27DB-BD31-4B8C-83A1-F6EECF244321}">
-                <p14:modId xmlns:p14="http://schemas.microsoft.com/office/powerpoint/2010/main" val="1579011935"/>
-              </p:ext>
-            </p:extLst>
-          </p:nvPr>
-        </p:nvGraphicFramePr>
-        <p:xfrm>
-          <a:off x="640080" y="1143000"/>
-          <a:ext cx="10911535" cy="914400"/>
-        </p:xfrm>
-        <a:graphic>
-          <a:graphicData uri="http://schemas.openxmlformats.org/drawingml/2006/table">
-            <a:tbl>
-              <a:tblPr/>
-              <a:tblGrid>
-                <a:gridCol w="1097280"/>
-                <a:gridCol w="4907128"/>
-                <a:gridCol w="4907128"/>
-              </a:tblGrid>
-              <a:tr h="0">
-                <a:tc>
-                  <a:txBody>
-                    <a:bodyPr/>
-                    <a:lstStyle/>
-                    <a:p>
-                      <a:pPr indent="0" marL="0">
-                        <a:buNone/>
-                      </a:pPr>
-                      <a:r>
-                        <a:rPr lang="en-US" sz="1000" dirty="0">
-                          <a:solidFill>
-                            <a:srgbClr val="52525B"/>
-                          </a:solidFill>
-                          <a:latin typeface="Courier New" pitchFamily="34" charset="0"/>
-                          <a:ea typeface="Courier New" pitchFamily="34" charset="-122"/>
-                          <a:cs typeface="Courier New" pitchFamily="34" charset="-120"/>
-                        </a:rPr>
-                        <a:t>2026</a:t>
-                      </a:r>
-                      <a:endParaRPr lang="en-US" sz="1000" dirty="0">
-                        <a:latin typeface="Courier New" charset="0"/>
-                        <a:ea typeface="Courier New" charset="0"/>
-                        <a:cs typeface="Courier New" charset="0"/>
-                      </a:endParaRPr>
-                    </a:p>
-                  </a:txBody>
-                  <a:tcPr marL="0" marR="146304" marT="91440" marB="91440" anchor="t">
-                    <a:lnL w="0" cap="flat" cmpd="sng" algn="ctr">
-                      <a:noFill/>
-                    </a:lnL>
-                    <a:lnR w="0" cap="flat" cmpd="sng" algn="ctr">
-                      <a:noFill/>
-                    </a:lnR>
-                    <a:lnT w="0" cap="flat" cmpd="sng" algn="ctr">
-                      <a:noFill/>
-                    </a:lnT>
-                    <a:lnB w="9525" cap="flat" cmpd="sng" algn="ctr">
-                      <a:solidFill>
-                        <a:srgbClr val="E4E4E7"/>
-                      </a:solidFill>
-                      <a:prstDash val="solid"/>
-                      <a:round/>
-                      <a:headEnd type="none" w="med" len="med"/>
-                      <a:tailEnd type="none" w="med" len="med"/>
-                    </a:lnB>
-                  </a:tcPr>
-                </a:tc>
-                <a:tc>
-                  <a:txBody>
-                    <a:bodyPr/>
-                    <a:lstStyle/>
-                    <a:p>
-                      <a:pPr indent="0" marL="0">
-                        <a:buNone/>
-                      </a:pPr>
-                      <a:r>
-                        <a:rPr lang="en-US" sz="1000" dirty="0">
-                          <a:solidFill>
-                            <a:srgbClr val="52525B"/>
-                          </a:solidFill>
-                          <a:latin typeface="Courier New" pitchFamily="34" charset="0"/>
-                          <a:ea typeface="Courier New" pitchFamily="34" charset="-122"/>
-                          <a:cs typeface="Courier New" pitchFamily="34" charset="-120"/>
-                        </a:rPr>
-                        <a:t>WHAT WE MEASURED</a:t>
-                      </a:r>
-                      <a:endParaRPr lang="en-US" sz="1000" dirty="0">
-                        <a:latin typeface="Courier New" charset="0"/>
-                        <a:ea typeface="Courier New" charset="0"/>
-                        <a:cs typeface="Courier New" charset="0"/>
-                      </a:endParaRPr>
-                    </a:p>
-                  </a:txBody>
-                  <a:tcPr marL="0" marR="146304" marT="91440" marB="91440" anchor="t">
-                    <a:lnL w="0" cap="flat" cmpd="sng" algn="ctr">
-                      <a:noFill/>
-                    </a:lnL>
-                    <a:lnR w="0" cap="flat" cmpd="sng" algn="ctr">
-                      <a:noFill/>
-                    </a:lnR>
-                    <a:lnT w="0" cap="flat" cmpd="sng" algn="ctr">
-                      <a:noFill/>
-                    </a:lnT>
-                    <a:lnB w="9525" cap="flat" cmpd="sng" algn="ctr">
-                      <a:solidFill>
-                        <a:srgbClr val="E4E4E7"/>
-                      </a:solidFill>
-                      <a:prstDash val="solid"/>
-                      <a:round/>
-                      <a:headEnd type="none" w="med" len="med"/>
-                      <a:tailEnd type="none" w="med" len="med"/>
-                    </a:lnB>
-                  </a:tcPr>
-                </a:tc>
-                <a:tc>
-                  <a:txBody>
-                    <a:bodyPr/>
-                    <a:lstStyle/>
-                    <a:p>
-                      <a:pPr indent="0" marL="0">
-                        <a:buNone/>
-                      </a:pPr>
-                      <a:r>
-                        <a:rPr lang="en-US" sz="1000" dirty="0">
-                          <a:solidFill>
-                            <a:srgbClr val="52525B"/>
-                          </a:solidFill>
-                          <a:latin typeface="Courier New" pitchFamily="34" charset="0"/>
-                          <a:ea typeface="Courier New" pitchFamily="34" charset="-122"/>
-                          <a:cs typeface="Courier New" pitchFamily="34" charset="-120"/>
-                        </a:rPr>
-                        <a:t>WHAT IT FORCED</a:t>
-                      </a:r>
-                      <a:endParaRPr lang="en-US" sz="1000" dirty="0">
-                        <a:latin typeface="Courier New" charset="0"/>
-                        <a:ea typeface="Courier New" charset="0"/>
-                        <a:cs typeface="Courier New" charset="0"/>
-                      </a:endParaRPr>
-                    </a:p>
-                  </a:txBody>
-                  <a:tcPr marL="0" marR="146304" marT="91440" marB="91440" anchor="t">
-                    <a:lnL w="0" cap="flat" cmpd="sng" algn="ctr">
-                      <a:noFill/>
-                    </a:lnL>
-                    <a:lnR w="0" cap="flat" cmpd="sng" algn="ctr">
-                      <a:noFill/>
-                    </a:lnR>
-                    <a:lnT w="0" cap="flat" cmpd="sng" algn="ctr">
-                      <a:noFill/>
-                    </a:lnT>
-                    <a:lnB w="9525" cap="flat" cmpd="sng" algn="ctr">
-                      <a:solidFill>
-                        <a:srgbClr val="E4E4E7"/>
-                      </a:solidFill>
-                      <a:prstDash val="solid"/>
-                      <a:round/>
-                      <a:headEnd type="none" w="med" len="med"/>
-                      <a:tailEnd type="none" w="med" len="med"/>
-                    </a:lnB>
-                  </a:tcPr>
-                </a:tc>
-              </a:tr>
-              <a:tr h="0">
-                <a:tc>
-                  <a:txBody>
-                    <a:bodyPr/>
-                    <a:lstStyle/>
-                    <a:p>
-                      <a:pPr indent="0" marL="0">
-                        <a:buNone/>
-                      </a:pPr>
-                      <a:r>
-                        <a:rPr lang="en-US" sz="1600" b="1" dirty="0">
-                          <a:solidFill>
-                            <a:srgbClr val="7A5A06"/>
-                          </a:solidFill>
-                          <a:latin typeface="Courier New" pitchFamily="34" charset="0"/>
-                          <a:ea typeface="Courier New" pitchFamily="34" charset="-122"/>
-                          <a:cs typeface="Courier New" pitchFamily="34" charset="-120"/>
-                        </a:rPr>
-                        <a:t>30 Jun</a:t>
-                      </a:r>
-                      <a:endParaRPr lang="en-US" sz="1600" dirty="0">
-                        <a:latin typeface="Courier New" charset="0"/>
-                        <a:ea typeface="Courier New" charset="0"/>
-                        <a:cs typeface="Courier New" charset="0"/>
-                      </a:endParaRPr>
-                    </a:p>
-                  </a:txBody>
-                  <a:tcPr marL="0" marR="146304" marT="91440" marB="91440" anchor="t">
-                    <a:lnL w="0" cap="flat" cmpd="sng" algn="ctr">
-                      <a:noFill/>
-                    </a:lnL>
-                    <a:lnR w="0" cap="flat" cmpd="sng" algn="ctr">
-                      <a:noFill/>
-                    </a:lnR>
-                    <a:lnT w="0" cap="flat" cmpd="sng" algn="ctr">
-                      <a:noFill/>
-                    </a:lnT>
-                    <a:lnB w="9525" cap="flat" cmpd="sng" algn="ctr">
-                      <a:solidFill>
-                        <a:srgbClr val="E4E4E7"/>
-                      </a:solidFill>
-                      <a:prstDash val="solid"/>
-                      <a:round/>
-                      <a:headEnd type="none" w="med" len="med"/>
-                      <a:tailEnd type="none" w="med" len="med"/>
-                    </a:lnB>
-                  </a:tcPr>
-                </a:tc>
-                <a:tc>
-                  <a:txBody>
-                    <a:bodyPr/>
-                    <a:lstStyle/>
-                    <a:p>
-                      <a:pPr indent="0" marL="0">
-                        <a:buNone/>
-                      </a:pPr>
-                      <a:r>
-                        <a:rPr lang="en-US" sz="1600" dirty="0">
-                          <a:solidFill>
-                            <a:srgbClr val="52525B"/>
-                          </a:solidFill>
-                          <a:latin typeface="Arial" pitchFamily="34" charset="0"/>
-                          <a:ea typeface="Arial" pitchFamily="34" charset="-122"/>
-                          <a:cs typeface="Arial" pitchFamily="34" charset="-120"/>
-                        </a:rPr>
-                        <a:t>37% of the code produced was thrown away; handoffs carried a description of the work</a:t>
-                      </a:r>
-                      <a:endParaRPr lang="en-US" sz="1600" dirty="0">
-                        <a:latin typeface="Arial" charset="0"/>
-                        <a:ea typeface="Arial" charset="0"/>
-                        <a:cs typeface="Arial" charset="0"/>
-                      </a:endParaRPr>
-                    </a:p>
-                  </a:txBody>
-                  <a:tcPr marL="0" marR="146304" marT="91440" marB="91440" anchor="t">
-                    <a:lnL w="0" cap="flat" cmpd="sng" algn="ctr">
-                      <a:noFill/>
-                    </a:lnL>
-                    <a:lnR w="0" cap="flat" cmpd="sng" algn="ctr">
-                      <a:noFill/>
-                    </a:lnR>
-                    <a:lnT w="0" cap="flat" cmpd="sng" algn="ctr">
-                      <a:noFill/>
-                    </a:lnT>
-                    <a:lnB w="9525" cap="flat" cmpd="sng" algn="ctr">
-                      <a:solidFill>
-                        <a:srgbClr val="E4E4E7"/>
-                      </a:solidFill>
-                      <a:prstDash val="solid"/>
-                      <a:round/>
-                      <a:headEnd type="none" w="med" len="med"/>
-                      <a:tailEnd type="none" w="med" len="med"/>
-                    </a:lnB>
-                  </a:tcPr>
-                </a:tc>
-                <a:tc>
-                  <a:txBody>
-                    <a:bodyPr/>
-                    <a:lstStyle/>
-                    <a:p>
-                      <a:pPr indent="0" marL="0">
-                        <a:buNone/>
-                      </a:pPr>
-                      <a:r>
-                        <a:rPr lang="en-US" sz="1600" b="1" dirty="0">
-                          <a:solidFill>
-                            <a:srgbClr val="18181B"/>
-                          </a:solidFill>
-                          <a:latin typeface="Arial" pitchFamily="34" charset="0"/>
-                          <a:ea typeface="Arial" pitchFamily="34" charset="-122"/>
-                          <a:cs typeface="Arial" pitchFamily="34" charset="-120"/>
-                        </a:rPr>
-                        <a:t>Lanes: one owner, claimed before the first keystroke. A handoff carries the branch.</a:t>
-                      </a:r>
-                      <a:endParaRPr lang="en-US" sz="1600" dirty="0">
-                        <a:latin typeface="Arial" charset="0"/>
-                        <a:ea typeface="Arial" charset="0"/>
-                        <a:cs typeface="Arial" charset="0"/>
-                      </a:endParaRPr>
-                    </a:p>
-                  </a:txBody>
-                  <a:tcPr marL="0" marR="146304" marT="91440" marB="91440" anchor="t">
-                    <a:lnL w="0" cap="flat" cmpd="sng" algn="ctr">
-                      <a:noFill/>
-                    </a:lnL>
-                    <a:lnR w="0" cap="flat" cmpd="sng" algn="ctr">
-                      <a:noFill/>
-                    </a:lnR>
-                    <a:lnT w="0" cap="flat" cmpd="sng" algn="ctr">
-                      <a:noFill/>
-                    </a:lnT>
-                    <a:lnB w="9525" cap="flat" cmpd="sng" algn="ctr">
-                      <a:solidFill>
-                        <a:srgbClr val="E4E4E7"/>
-                      </a:solidFill>
-                      <a:prstDash val="solid"/>
-                      <a:round/>
-                      <a:headEnd type="none" w="med" len="med"/>
-                      <a:tailEnd type="none" w="med" len="med"/>
-                    </a:lnB>
-                  </a:tcPr>
-                </a:tc>
-              </a:tr>
-              <a:tr h="0">
-                <a:tc>
-                  <a:txBody>
-                    <a:bodyPr/>
-                    <a:lstStyle/>
-                    <a:p>
-                      <a:pPr indent="0" marL="0">
-                        <a:buNone/>
-                      </a:pPr>
-                      <a:r>
-                        <a:rPr lang="en-US" sz="1600" b="1" dirty="0">
-                          <a:solidFill>
-                            <a:srgbClr val="7A5A06"/>
-                          </a:solidFill>
-                          <a:latin typeface="Courier New" pitchFamily="34" charset="0"/>
-                          <a:ea typeface="Courier New" pitchFamily="34" charset="-122"/>
-                          <a:cs typeface="Courier New" pitchFamily="34" charset="-120"/>
-                        </a:rPr>
-                        <a:t>30 Jun</a:t>
-                      </a:r>
-                      <a:endParaRPr lang="en-US" sz="1600" dirty="0">
-                        <a:latin typeface="Courier New" charset="0"/>
-                        <a:ea typeface="Courier New" charset="0"/>
-                        <a:cs typeface="Courier New" charset="0"/>
-                      </a:endParaRPr>
-                    </a:p>
-                  </a:txBody>
-                  <a:tcPr marL="0" marR="146304" marT="91440" marB="91440" anchor="t">
-                    <a:lnL w="0" cap="flat" cmpd="sng" algn="ctr">
-                      <a:noFill/>
-                    </a:lnL>
-                    <a:lnR w="0" cap="flat" cmpd="sng" algn="ctr">
-                      <a:noFill/>
-                    </a:lnR>
-                    <a:lnT w="0" cap="flat" cmpd="sng" algn="ctr">
-                      <a:noFill/>
-                    </a:lnT>
-                    <a:lnB w="9525" cap="flat" cmpd="sng" algn="ctr">
-                      <a:solidFill>
-                        <a:srgbClr val="E4E4E7"/>
-                      </a:solidFill>
-                      <a:prstDash val="solid"/>
-                      <a:round/>
-                      <a:headEnd type="none" w="med" len="med"/>
-                      <a:tailEnd type="none" w="med" len="med"/>
-                    </a:lnB>
-                  </a:tcPr>
-                </a:tc>
-                <a:tc>
-                  <a:txBody>
-                    <a:bodyPr/>
-                    <a:lstStyle/>
-                    <a:p>
-                      <a:pPr indent="0" marL="0">
-                        <a:buNone/>
-                      </a:pPr>
-                      <a:r>
-                        <a:rPr lang="en-US" sz="1600" dirty="0">
-                          <a:solidFill>
-                            <a:srgbClr val="52525B"/>
-                          </a:solidFill>
-                          <a:latin typeface="Arial" pitchFamily="34" charset="0"/>
-                          <a:ea typeface="Arial" pitchFamily="34" charset="-122"/>
-                          <a:cs typeface="Arial" pitchFamily="34" charset="-120"/>
-                        </a:rPr>
-                        <a:t>Replies waited up to 207 minutes on me as the relay</a:t>
-                      </a:r>
-                      <a:endParaRPr lang="en-US" sz="1600" dirty="0">
-                        <a:latin typeface="Arial" charset="0"/>
-                        <a:ea typeface="Arial" charset="0"/>
-                        <a:cs typeface="Arial" charset="0"/>
-                      </a:endParaRPr>
-                    </a:p>
-                  </a:txBody>
-                  <a:tcPr marL="0" marR="146304" marT="91440" marB="91440" anchor="t">
-                    <a:lnL w="0" cap="flat" cmpd="sng" algn="ctr">
-                      <a:noFill/>
-                    </a:lnL>
-                    <a:lnR w="0" cap="flat" cmpd="sng" algn="ctr">
-                      <a:noFill/>
-                    </a:lnR>
-                    <a:lnT w="0" cap="flat" cmpd="sng" algn="ctr">
-                      <a:noFill/>
-                    </a:lnT>
-                    <a:lnB w="9525" cap="flat" cmpd="sng" algn="ctr">
-                      <a:solidFill>
-                        <a:srgbClr val="E4E4E7"/>
-                      </a:solidFill>
-                      <a:prstDash val="solid"/>
-                      <a:round/>
-                      <a:headEnd type="none" w="med" len="med"/>
-                      <a:tailEnd type="none" w="med" len="med"/>
-                    </a:lnB>
-                  </a:tcPr>
-                </a:tc>
-                <a:tc>
-                  <a:txBody>
-                    <a:bodyPr/>
-                    <a:lstStyle/>
-                    <a:p>
-                      <a:pPr indent="0" marL="0">
-                        <a:buNone/>
-                      </a:pPr>
-                      <a:r>
-                        <a:rPr lang="en-US" sz="1600" b="1" dirty="0">
-                          <a:solidFill>
-                            <a:srgbClr val="18181B"/>
-                          </a:solidFill>
-                          <a:latin typeface="Arial" pitchFamily="34" charset="0"/>
-                          <a:ea typeface="Arial" pitchFamily="34" charset="-122"/>
-                          <a:cs typeface="Arial" pitchFamily="34" charset="-120"/>
-                        </a:rPr>
-                        <a:t>The inbox reaches an agent at its next tool call.</a:t>
-                      </a:r>
-                      <a:endParaRPr lang="en-US" sz="1600" dirty="0">
-                        <a:latin typeface="Arial" charset="0"/>
-                        <a:ea typeface="Arial" charset="0"/>
-                        <a:cs typeface="Arial" charset="0"/>
-                      </a:endParaRPr>
-                    </a:p>
-                  </a:txBody>
-                  <a:tcPr marL="0" marR="146304" marT="91440" marB="91440" anchor="t">
-                    <a:lnL w="0" cap="flat" cmpd="sng" algn="ctr">
-                      <a:noFill/>
-                    </a:lnL>
-                    <a:lnR w="0" cap="flat" cmpd="sng" algn="ctr">
-                      <a:noFill/>
-                    </a:lnR>
-                    <a:lnT w="0" cap="flat" cmpd="sng" algn="ctr">
-                      <a:noFill/>
-                    </a:lnT>
-                    <a:lnB w="9525" cap="flat" cmpd="sng" algn="ctr">
-                      <a:solidFill>
-                        <a:srgbClr val="E4E4E7"/>
-                      </a:solidFill>
-                      <a:prstDash val="solid"/>
-                      <a:round/>
-                      <a:headEnd type="none" w="med" len="med"/>
-                      <a:tailEnd type="none" w="med" len="med"/>
-                    </a:lnB>
-                  </a:tcPr>
-                </a:tc>
-              </a:tr>
-              <a:tr h="0">
-                <a:tc>
-                  <a:txBody>
-                    <a:bodyPr/>
-                    <a:lstStyle/>
-                    <a:p>
-                      <a:pPr indent="0" marL="0">
-                        <a:buNone/>
-                      </a:pPr>
-                      <a:r>
-                        <a:rPr lang="en-US" sz="1600" b="1" dirty="0">
-                          <a:solidFill>
-                            <a:srgbClr val="7A5A06"/>
-                          </a:solidFill>
-                          <a:latin typeface="Courier New" pitchFamily="34" charset="0"/>
-                          <a:ea typeface="Courier New" pitchFamily="34" charset="-122"/>
-                          <a:cs typeface="Courier New" pitchFamily="34" charset="-120"/>
-                        </a:rPr>
-                        <a:t>17 Jul</a:t>
-                      </a:r>
-                      <a:endParaRPr lang="en-US" sz="1600" dirty="0">
-                        <a:latin typeface="Courier New" charset="0"/>
-                        <a:ea typeface="Courier New" charset="0"/>
-                        <a:cs typeface="Courier New" charset="0"/>
-                      </a:endParaRPr>
-                    </a:p>
-                  </a:txBody>
-                  <a:tcPr marL="0" marR="146304" marT="91440" marB="91440" anchor="t">
-                    <a:lnL w="0" cap="flat" cmpd="sng" algn="ctr">
-                      <a:noFill/>
-                    </a:lnL>
-                    <a:lnR w="0" cap="flat" cmpd="sng" algn="ctr">
-                      <a:noFill/>
-                    </a:lnR>
-                    <a:lnT w="0" cap="flat" cmpd="sng" algn="ctr">
-                      <a:noFill/>
-                    </a:lnT>
-                    <a:lnB w="9525" cap="flat" cmpd="sng" algn="ctr">
-                      <a:solidFill>
-                        <a:srgbClr val="E4E4E7"/>
-                      </a:solidFill>
-                      <a:prstDash val="solid"/>
-                      <a:round/>
-                      <a:headEnd type="none" w="med" len="med"/>
-                      <a:tailEnd type="none" w="med" len="med"/>
-                    </a:lnB>
-                  </a:tcPr>
-                </a:tc>
-                <a:tc>
-                  <a:txBody>
-                    <a:bodyPr/>
-                    <a:lstStyle/>
-                    <a:p>
-                      <a:pPr indent="0" marL="0">
-                        <a:buNone/>
-                      </a:pPr>
-                      <a:r>
-                        <a:rPr lang="en-US" sz="1600" dirty="0">
-                          <a:solidFill>
-                            <a:srgbClr val="52525B"/>
-                          </a:solidFill>
-                          <a:latin typeface="Arial" pitchFamily="34" charset="0"/>
-                          <a:ea typeface="Arial" pitchFamily="34" charset="-122"/>
-                          <a:cs typeface="Arial" pitchFamily="34" charset="-120"/>
-                        </a:rPr>
-                        <a:t>7 approvals for every exchange; 0 requests for help had reached me</a:t>
-                      </a:r>
-                      <a:endParaRPr lang="en-US" sz="1600" dirty="0">
-                        <a:latin typeface="Arial" charset="0"/>
-                        <a:ea typeface="Arial" charset="0"/>
-                        <a:cs typeface="Arial" charset="0"/>
-                      </a:endParaRPr>
-                    </a:p>
-                  </a:txBody>
-                  <a:tcPr marL="0" marR="146304" marT="91440" marB="91440" anchor="t">
-                    <a:lnL w="0" cap="flat" cmpd="sng" algn="ctr">
-                      <a:noFill/>
-                    </a:lnL>
-                    <a:lnR w="0" cap="flat" cmpd="sng" algn="ctr">
-                      <a:noFill/>
-                    </a:lnR>
-                    <a:lnT w="0" cap="flat" cmpd="sng" algn="ctr">
-                      <a:noFill/>
-                    </a:lnT>
-                    <a:lnB w="9525" cap="flat" cmpd="sng" algn="ctr">
-                      <a:solidFill>
-                        <a:srgbClr val="E4E4E7"/>
-                      </a:solidFill>
-                      <a:prstDash val="solid"/>
-                      <a:round/>
-                      <a:headEnd type="none" w="med" len="med"/>
-                      <a:tailEnd type="none" w="med" len="med"/>
-                    </a:lnB>
-                  </a:tcPr>
-                </a:tc>
-                <a:tc>
-                  <a:txBody>
-                    <a:bodyPr/>
-                    <a:lstStyle/>
-                    <a:p>
-                      <a:pPr indent="0" marL="0">
-                        <a:buNone/>
-                      </a:pPr>
-                      <a:r>
-                        <a:rPr lang="en-US" sz="1600" b="1" dirty="0">
-                          <a:solidFill>
-                            <a:srgbClr val="18181B"/>
-                          </a:solidFill>
-                          <a:latin typeface="Arial" pitchFamily="34" charset="0"/>
-                          <a:ea typeface="Arial" pitchFamily="34" charset="-122"/>
-                          <a:cs typeface="Arial" pitchFamily="34" charset="-120"/>
-                        </a:rPr>
-                        <a:t>The human as a member. Agents ask with a deadline.</a:t>
-                      </a:r>
-                      <a:endParaRPr lang="en-US" sz="1600" dirty="0">
-                        <a:latin typeface="Arial" charset="0"/>
-                        <a:ea typeface="Arial" charset="0"/>
-                        <a:cs typeface="Arial" charset="0"/>
-                      </a:endParaRPr>
-                    </a:p>
-                  </a:txBody>
-                  <a:tcPr marL="0" marR="146304" marT="91440" marB="91440" anchor="t">
-                    <a:lnL w="0" cap="flat" cmpd="sng" algn="ctr">
-                      <a:noFill/>
-                    </a:lnL>
-                    <a:lnR w="0" cap="flat" cmpd="sng" algn="ctr">
-                      <a:noFill/>
-                    </a:lnR>
-                    <a:lnT w="0" cap="flat" cmpd="sng" algn="ctr">
-                      <a:noFill/>
-                    </a:lnT>
-                    <a:lnB w="9525" cap="flat" cmpd="sng" algn="ctr">
-                      <a:solidFill>
-                        <a:srgbClr val="E4E4E7"/>
-                      </a:solidFill>
-                      <a:prstDash val="solid"/>
-                      <a:round/>
-                      <a:headEnd type="none" w="med" len="med"/>
-                      <a:tailEnd type="none" w="med" len="med"/>
-                    </a:lnB>
-                  </a:tcPr>
-                </a:tc>
-              </a:tr>
-              <a:tr h="0">
-                <a:tc>
-                  <a:txBody>
-                    <a:bodyPr/>
-                    <a:lstStyle/>
-                    <a:p>
-                      <a:pPr indent="0" marL="0">
-                        <a:buNone/>
-                      </a:pPr>
-                      <a:r>
-                        <a:rPr lang="en-US" sz="1600" b="1" dirty="0">
-                          <a:solidFill>
-                            <a:srgbClr val="7A5A06"/>
-                          </a:solidFill>
-                          <a:latin typeface="Courier New" pitchFamily="34" charset="0"/>
-                          <a:ea typeface="Courier New" pitchFamily="34" charset="-122"/>
-                          <a:cs typeface="Courier New" pitchFamily="34" charset="-120"/>
-                        </a:rPr>
-                        <a:t>28 Jul</a:t>
-                      </a:r>
-                      <a:endParaRPr lang="en-US" sz="1600" dirty="0">
-                        <a:latin typeface="Courier New" charset="0"/>
-                        <a:ea typeface="Courier New" charset="0"/>
-                        <a:cs typeface="Courier New" charset="0"/>
-                      </a:endParaRPr>
-                    </a:p>
-                  </a:txBody>
-                  <a:tcPr marL="0" marR="146304" marT="91440" marB="91440" anchor="t">
-                    <a:lnL w="0" cap="flat" cmpd="sng" algn="ctr">
-                      <a:noFill/>
-                    </a:lnL>
-                    <a:lnR w="0" cap="flat" cmpd="sng" algn="ctr">
-                      <a:noFill/>
-                    </a:lnR>
-                    <a:lnT w="0" cap="flat" cmpd="sng" algn="ctr">
-                      <a:noFill/>
-                    </a:lnT>
-                    <a:lnB w="9525" cap="flat" cmpd="sng" algn="ctr">
-                      <a:solidFill>
-                        <a:srgbClr val="E4E4E7"/>
-                      </a:solidFill>
-                      <a:prstDash val="solid"/>
-                      <a:round/>
-                      <a:headEnd type="none" w="med" len="med"/>
-                      <a:tailEnd type="none" w="med" len="med"/>
-                    </a:lnB>
-                  </a:tcPr>
-                </a:tc>
-                <a:tc>
-                  <a:txBody>
-                    <a:bodyPr/>
-                    <a:lstStyle/>
-                    <a:p>
-                      <a:pPr indent="0" marL="0">
-                        <a:buNone/>
-                      </a:pPr>
-                      <a:r>
-                        <a:rPr lang="en-US" sz="1600" dirty="0">
-                          <a:solidFill>
-                            <a:srgbClr val="52525B"/>
-                          </a:solidFill>
-                          <a:latin typeface="Arial" pitchFamily="34" charset="0"/>
-                          <a:ea typeface="Arial" pitchFamily="34" charset="-122"/>
-                          <a:cs typeface="Arial" pitchFamily="34" charset="-120"/>
-                        </a:rPr>
-                        <a:t>“Done” meant the builder said so</a:t>
-                      </a:r>
-                      <a:endParaRPr lang="en-US" sz="1600" dirty="0">
-                        <a:latin typeface="Arial" charset="0"/>
-                        <a:ea typeface="Arial" charset="0"/>
-                        <a:cs typeface="Arial" charset="0"/>
-                      </a:endParaRPr>
-                    </a:p>
-                  </a:txBody>
-                  <a:tcPr marL="0" marR="146304" marT="91440" marB="91440" anchor="t">
-                    <a:lnL w="0" cap="flat" cmpd="sng" algn="ctr">
-                      <a:noFill/>
-                    </a:lnL>
-                    <a:lnR w="0" cap="flat" cmpd="sng" algn="ctr">
-                      <a:noFill/>
-                    </a:lnR>
-                    <a:lnT w="0" cap="flat" cmpd="sng" algn="ctr">
-                      <a:noFill/>
-                    </a:lnT>
-                    <a:lnB w="9525" cap="flat" cmpd="sng" algn="ctr">
-                      <a:solidFill>
-                        <a:srgbClr val="E4E4E7"/>
-                      </a:solidFill>
-                      <a:prstDash val="solid"/>
-                      <a:round/>
-                      <a:headEnd type="none" w="med" len="med"/>
-                      <a:tailEnd type="none" w="med" len="med"/>
-                    </a:lnB>
-                  </a:tcPr>
-                </a:tc>
-                <a:tc>
-                  <a:txBody>
-                    <a:bodyPr/>
-                    <a:lstStyle/>
-                    <a:p>
-                      <a:pPr indent="0" marL="0">
-                        <a:buNone/>
-                      </a:pPr>
-                      <a:r>
-                        <a:rPr lang="en-US" sz="1600" b="1" dirty="0">
-                          <a:solidFill>
-                            <a:srgbClr val="18181B"/>
-                          </a:solidFill>
-                          <a:latin typeface="Arial" pitchFamily="34" charset="0"/>
-                          <a:ea typeface="Arial" pitchFamily="34" charset="-122"/>
-                          <a:cs typeface="Arial" pitchFamily="34" charset="-120"/>
-                        </a:rPr>
-                        <a:t>Done is two claims: someone else accepts the outcome.</a:t>
-                      </a:r>
-                      <a:endParaRPr lang="en-US" sz="1600" dirty="0">
-                        <a:latin typeface="Arial" charset="0"/>
-                        <a:ea typeface="Arial" charset="0"/>
-                        <a:cs typeface="Arial" charset="0"/>
-                      </a:endParaRPr>
-                    </a:p>
-                  </a:txBody>
-                  <a:tcPr marL="0" marR="146304" marT="91440" marB="91440" anchor="t">
-                    <a:lnL w="0" cap="flat" cmpd="sng" algn="ctr">
-                      <a:noFill/>
-                    </a:lnL>
-                    <a:lnR w="0" cap="flat" cmpd="sng" algn="ctr">
-                      <a:noFill/>
-                    </a:lnR>
-                    <a:lnT w="0" cap="flat" cmpd="sng" algn="ctr">
-                      <a:noFill/>
-                    </a:lnT>
-                    <a:lnB w="9525" cap="flat" cmpd="sng" algn="ctr">
-                      <a:solidFill>
-                        <a:srgbClr val="E4E4E7"/>
-                      </a:solidFill>
-                      <a:prstDash val="solid"/>
-                      <a:round/>
-                      <a:headEnd type="none" w="med" len="med"/>
-                      <a:tailEnd type="none" w="med" len="med"/>
-                    </a:lnB>
-                  </a:tcPr>
-                </a:tc>
-              </a:tr>
-              <a:tr h="0">
-                <a:tc>
-                  <a:txBody>
-                    <a:bodyPr/>
-                    <a:lstStyle/>
-                    <a:p>
-                      <a:pPr indent="0" marL="0">
-                        <a:buNone/>
-                      </a:pPr>
-                      <a:r>
-                        <a:rPr lang="en-US" sz="1600" b="1" dirty="0">
-                          <a:solidFill>
-                            <a:srgbClr val="7A5A06"/>
-                          </a:solidFill>
-                          <a:latin typeface="Courier New" pitchFamily="34" charset="0"/>
-                          <a:ea typeface="Courier New" pitchFamily="34" charset="-122"/>
-                          <a:cs typeface="Courier New" pitchFamily="34" charset="-120"/>
-                        </a:rPr>
-                        <a:t>5 Sep</a:t>
-                      </a:r>
-                      <a:endParaRPr lang="en-US" sz="1600" dirty="0">
-                        <a:latin typeface="Courier New" charset="0"/>
-                        <a:ea typeface="Courier New" charset="0"/>
-                        <a:cs typeface="Courier New" charset="0"/>
-                      </a:endParaRPr>
-                    </a:p>
-                  </a:txBody>
-                  <a:tcPr marL="0" marR="146304" marT="91440" marB="91440" anchor="t">
-                    <a:lnL w="0" cap="flat" cmpd="sng" algn="ctr">
-                      <a:noFill/>
-                    </a:lnL>
-                    <a:lnR w="0" cap="flat" cmpd="sng" algn="ctr">
-                      <a:noFill/>
-                    </a:lnR>
-                    <a:lnT w="0" cap="flat" cmpd="sng" algn="ctr">
-                      <a:noFill/>
-                    </a:lnT>
-                    <a:lnB w="9525" cap="flat" cmpd="sng" algn="ctr">
-                      <a:solidFill>
-                        <a:srgbClr val="E4E4E7"/>
-                      </a:solidFill>
-                      <a:prstDash val="solid"/>
-                      <a:round/>
-                      <a:headEnd type="none" w="med" len="med"/>
-                      <a:tailEnd type="none" w="med" len="med"/>
-                    </a:lnB>
-                  </a:tcPr>
-                </a:tc>
-                <a:tc>
-                  <a:txBody>
-                    <a:bodyPr/>
-                    <a:lstStyle/>
-                    <a:p>
-                      <a:pPr indent="0" marL="0">
-                        <a:buNone/>
-                      </a:pPr>
-                      <a:r>
-                        <a:rPr lang="en-US" sz="1600" dirty="0">
-                          <a:solidFill>
-                            <a:srgbClr val="52525B"/>
-                          </a:solidFill>
-                          <a:latin typeface="Arial" pitchFamily="34" charset="0"/>
-                          <a:ea typeface="Arial" pitchFamily="34" charset="-122"/>
-                          <a:cs typeface="Arial" pitchFamily="34" charset="-120"/>
-                        </a:rPr>
-                        <a:t>An agent whose session was closed could not be reached</a:t>
-                      </a:r>
-                      <a:endParaRPr lang="en-US" sz="1600" dirty="0">
-                        <a:latin typeface="Arial" charset="0"/>
-                        <a:ea typeface="Arial" charset="0"/>
-                        <a:cs typeface="Arial" charset="0"/>
-                      </a:endParaRPr>
-                    </a:p>
-                  </a:txBody>
-                  <a:tcPr marL="0" marR="146304" marT="91440" marB="91440" anchor="t">
-                    <a:lnL w="0" cap="flat" cmpd="sng" algn="ctr">
-                      <a:noFill/>
-                    </a:lnL>
-                    <a:lnR w="0" cap="flat" cmpd="sng" algn="ctr">
-                      <a:noFill/>
-                    </a:lnR>
-                    <a:lnT w="0" cap="flat" cmpd="sng" algn="ctr">
-                      <a:noFill/>
-                    </a:lnT>
-                    <a:lnB w="9525" cap="flat" cmpd="sng" algn="ctr">
-                      <a:solidFill>
-                        <a:srgbClr val="E4E4E7"/>
-                      </a:solidFill>
-                      <a:prstDash val="solid"/>
-                      <a:round/>
-                      <a:headEnd type="none" w="med" len="med"/>
-                      <a:tailEnd type="none" w="med" len="med"/>
-                    </a:lnB>
-                  </a:tcPr>
-                </a:tc>
-                <a:tc>
-                  <a:txBody>
-                    <a:bodyPr/>
-                    <a:lstStyle/>
-                    <a:p>
-                      <a:pPr indent="0" marL="0">
-                        <a:buNone/>
-                      </a:pPr>
-                      <a:r>
-                        <a:rPr lang="en-US" sz="1600" b="1" dirty="0">
-                          <a:solidFill>
-                            <a:srgbClr val="18181B"/>
-                          </a:solidFill>
-                          <a:latin typeface="Arial" pitchFamily="34" charset="0"/>
-                          <a:ea typeface="Arial" pitchFamily="34" charset="-122"/>
-                          <a:cs typeface="Arial" pitchFamily="34" charset="-120"/>
-                        </a:rPr>
-                        <a:t>Wake: the agent comes back on a message — about 24 s cold, on a second machine.</a:t>
-                      </a:r>
-                      <a:endParaRPr lang="en-US" sz="1600" dirty="0">
-                        <a:latin typeface="Arial" charset="0"/>
-                        <a:ea typeface="Arial" charset="0"/>
-                        <a:cs typeface="Arial" charset="0"/>
-                      </a:endParaRPr>
-                    </a:p>
-                  </a:txBody>
-                  <a:tcPr marL="0" marR="146304" marT="91440" marB="91440" anchor="t">
-                    <a:lnL w="0" cap="flat" cmpd="sng" algn="ctr">
-                      <a:noFill/>
-                    </a:lnL>
-                    <a:lnR w="0" cap="flat" cmpd="sng" algn="ctr">
-                      <a:noFill/>
-                    </a:lnR>
-                    <a:lnT w="0" cap="flat" cmpd="sng" algn="ctr">
-                      <a:noFill/>
-                    </a:lnT>
-                    <a:lnB w="9525" cap="flat" cmpd="sng" algn="ctr">
-                      <a:solidFill>
-                        <a:srgbClr val="E4E4E7"/>
-                      </a:solidFill>
-                      <a:prstDash val="solid"/>
-                      <a:round/>
-                      <a:headEnd type="none" w="med" len="med"/>
-                      <a:tailEnd type="none" w="med" len="med"/>
-                    </a:lnB>
-                  </a:tcPr>
-                </a:tc>
-              </a:tr>
-            </a:tbl>
-          </a:graphicData>
-        </a:graphic>
-      </p:graphicFrame>
+      <p:sp>
+        <p:nvSpPr>
+          <p:cNvPr id="3" name="Text 1"/>
+          <p:cNvSpPr txBox="1"/>
+          <p:nvPr/>
+        </p:nvSpPr>
+        <p:spPr>
+          <a:xfrm>
+            <a:off x="640080" y="1188720"/>
+            <a:ext cx="5486400" cy="1005840"/>
+          </a:xfrm>
+          <a:prstGeom prst="rect">
+            <a:avLst/>
+          </a:prstGeom>
+          <a:noFill/>
+          <a:ln/>
+        </p:spPr>
+        <p:txBody>
+          <a:bodyPr wrap="square" lIns="0" tIns="0" rIns="0" bIns="0" rtlCol="0" anchor="ctr"/>
+          <a:lstStyle/>
+          <a:p>
+            <a:pPr indent="0" marL="0">
+              <a:buNone/>
+            </a:pPr>
+            <a:r>
+              <a:rPr lang="en-US" sz="5400" b="1" dirty="0">
+                <a:solidFill>
+                  <a:srgbClr val="18181B"/>
+                </a:solidFill>
+                <a:latin typeface="Arial" pitchFamily="34" charset="0"/>
+                <a:ea typeface="Arial" pitchFamily="34" charset="-122"/>
+                <a:cs typeface="Arial" pitchFamily="34" charset="-120"/>
+              </a:rPr>
+              <a:t>Questions?</a:t>
+            </a:r>
+            <a:endParaRPr lang="en-US" sz="5400" dirty="0"/>
+          </a:p>
+        </p:txBody>
+      </p:sp>
+      <p:sp>
+        <p:nvSpPr>
+          <p:cNvPr id="7" name="Text 5"/>
+          <p:cNvSpPr txBox="1"/>
+          <p:nvPr/>
+        </p:nvSpPr>
+        <p:spPr>
+          <a:xfrm>
+            <a:off x="640080" y="2468880"/>
+            <a:ext cx="5760720" cy="822960"/>
+          </a:xfrm>
+          <a:prstGeom prst="rect">
+            <a:avLst/>
+          </a:prstGeom>
+          <a:noFill/>
+          <a:ln/>
+        </p:spPr>
+        <p:txBody>
+          <a:bodyPr wrap="square" lIns="0" tIns="0" rIns="0" bIns="0" rtlCol="0" anchor="ctr"/>
+          <a:lstStyle/>
+          <a:p>
+            <a:pPr indent="0" marL="0">
+              <a:buNone/>
+            </a:pPr>
+            <a:r>
+              <a:rPr lang="en-US" sz="1700" b="1" dirty="0">
+                <a:solidFill>
+                  <a:srgbClr val="18181B"/>
+                </a:solidFill>
+                <a:latin typeface="Arial" pitchFamily="34" charset="0"/>
+                <a:ea typeface="Arial" pitchFamily="34" charset="-122"/>
+                <a:cs typeface="Arial" pitchFamily="34" charset="-120"/>
+              </a:rPr>
+              <a:t>Bring your agents, from any harness.</a:t>
+            </a:r>
+            <a:endParaRPr lang="en-US" sz="1700" dirty="0"/>
+          </a:p>
+          <a:p>
+            <a:pPr indent="0" marL="0">
+              <a:buNone/>
+            </a:pPr>
+            <a:r>
+              <a:rPr lang="en-US" sz="1400" dirty="0">
+                <a:solidFill>
+                  <a:srgbClr val="52525B"/>
+                </a:solidFill>
+                <a:latin typeface="Arial" pitchFamily="34" charset="0"/>
+                <a:ea typeface="Arial" pitchFamily="34" charset="-122"/>
+                <a:cs typeface="Arial" pitchFamily="34" charset="-120"/>
+              </a:rPr>
+              <a:t>Claude Code · Codex · Cursor · opencode · musterd harness (coming)</a:t>
+            </a:r>
+            <a:endParaRPr lang="en-US" sz="1700" dirty="0"/>
+          </a:p>
+        </p:txBody>
+      </p:sp>
+      <p:sp>
+        <p:nvSpPr>
+          <p:cNvPr id="8" name="Shape 6"/>
+          <p:cNvSpPr/>
+          <p:nvPr/>
+        </p:nvSpPr>
+        <p:spPr>
+          <a:xfrm>
+            <a:off x="6766560" y="2194560"/>
+            <a:ext cx="4754880" cy="914400"/>
+          </a:xfrm>
+          <a:prstGeom prst="roundRect">
+            <a:avLst>
+              <a:gd name="adj" fmla="val 12000"/>
+            </a:avLst>
+          </a:prstGeom>
+          <a:solidFill>
+            <a:srgbClr val="FFFFFF"/>
+          </a:solidFill>
+          <a:ln w="9525">
+            <a:solidFill>
+              <a:srgbClr val="E4E4E7"/>
+            </a:solidFill>
+            <a:prstDash val="solid"/>
+          </a:ln>
+        </p:spPr>
+      </p:sp>
+      <p:sp>
+        <p:nvSpPr>
+          <p:cNvPr id="9" name="Shape 7"/>
+          <p:cNvSpPr/>
+          <p:nvPr/>
+        </p:nvSpPr>
+        <p:spPr>
+          <a:xfrm>
+            <a:off x="6949440" y="2395728"/>
+            <a:ext cx="512064" cy="512064"/>
+          </a:xfrm>
+          <a:prstGeom prst="roundRect">
+            <a:avLst>
+              <a:gd name="adj" fmla="val 17857"/>
+            </a:avLst>
+          </a:prstGeom>
+          <a:solidFill>
+            <a:srgbClr val="9146FF"/>
+          </a:solidFill>
+          <a:ln w="12700">
+            <a:solidFill>
+              <a:srgbClr val="9146FF"/>
+            </a:solidFill>
+            <a:prstDash val="solid"/>
+          </a:ln>
+        </p:spPr>
+      </p:sp>
+      <p:sp>
+        <p:nvSpPr>
+          <p:cNvPr id="10" name="Text 8"/>
+          <p:cNvSpPr txBox="1"/>
+          <p:nvPr/>
+        </p:nvSpPr>
+        <p:spPr>
+          <a:xfrm>
+            <a:off x="7635240" y="2304288"/>
+            <a:ext cx="3749040" cy="694944"/>
+          </a:xfrm>
+          <a:prstGeom prst="rect">
+            <a:avLst/>
+          </a:prstGeom>
+          <a:noFill/>
+          <a:ln/>
+        </p:spPr>
+        <p:txBody>
+          <a:bodyPr wrap="square" lIns="0" tIns="0" rIns="0" bIns="0" rtlCol="0" anchor="ctr"/>
+          <a:lstStyle/>
+          <a:p>
+            <a:pPr indent="0" marL="0">
+              <a:buNone/>
+            </a:pPr>
+            <a:r>
+              <a:rPr lang="en-US" sz="1700" b="1" dirty="0">
+                <a:solidFill>
+                  <a:srgbClr val="18181B"/>
+                </a:solidFill>
+                <a:latin typeface="Courier New" pitchFamily="34" charset="0"/>
+                <a:ea typeface="Courier New" pitchFamily="34" charset="-122"/>
+                <a:cs typeface="Courier New" pitchFamily="34" charset="-120"/>
+              </a:rPr>
+              <a:t>twitch.tv/sandrise_ai</a:t>
+            </a:r>
+            <a:endParaRPr lang="en-US" sz="1700" dirty="0"/>
+          </a:p>
+          <a:p>
+            <a:pPr indent="0" marL="0">
+              <a:buNone/>
+            </a:pPr>
+            <a:r>
+              <a:rPr lang="en-US" sz="1200" dirty="0">
+                <a:solidFill>
+                  <a:srgbClr val="52525B"/>
+                </a:solidFill>
+                <a:latin typeface="Arial" pitchFamily="34" charset="0"/>
+                <a:ea typeface="Arial" pitchFamily="34" charset="-122"/>
+                <a:cs typeface="Arial" pitchFamily="34" charset="-120"/>
+              </a:rPr>
+              <a:t>musterd, built live every day</a:t>
+            </a:r>
+            <a:endParaRPr lang="en-US" sz="1700" dirty="0"/>
+          </a:p>
+        </p:txBody>
+      </p:sp>
+      <p:sp>
+        <p:nvSpPr>
+          <p:cNvPr id="11" name="Shape 9"/>
+          <p:cNvSpPr/>
+          <p:nvPr/>
+        </p:nvSpPr>
+        <p:spPr>
+          <a:xfrm>
+            <a:off x="6766560" y="4389120"/>
+            <a:ext cx="4754880" cy="914400"/>
+          </a:xfrm>
+          <a:prstGeom prst="roundRect">
+            <a:avLst>
+              <a:gd name="adj" fmla="val 12000"/>
+            </a:avLst>
+          </a:prstGeom>
+          <a:solidFill>
+            <a:srgbClr val="FFFFFF"/>
+          </a:solidFill>
+          <a:ln w="9525">
+            <a:solidFill>
+              <a:srgbClr val="E4E4E7"/>
+            </a:solidFill>
+            <a:prstDash val="solid"/>
+          </a:ln>
+        </p:spPr>
+      </p:sp>
+      <p:sp>
+        <p:nvSpPr>
+          <p:cNvPr id="12" name="Shape 10"/>
+          <p:cNvSpPr/>
+          <p:nvPr/>
+        </p:nvSpPr>
+        <p:spPr>
+          <a:xfrm>
+            <a:off x="6949440" y="4590288"/>
+            <a:ext cx="512064" cy="512064"/>
+          </a:xfrm>
+          <a:prstGeom prst="roundRect">
+            <a:avLst>
+              <a:gd name="adj" fmla="val 17857"/>
+            </a:avLst>
+          </a:prstGeom>
+          <a:solidFill>
+            <a:srgbClr val="7A5A06"/>
+          </a:solidFill>
+          <a:ln w="12700">
+            <a:solidFill>
+              <a:srgbClr val="7A5A06"/>
+            </a:solidFill>
+            <a:prstDash val="solid"/>
+          </a:ln>
+        </p:spPr>
+      </p:sp>
+      <p:sp>
+        <p:nvSpPr>
+          <p:cNvPr id="13" name="Text 11"/>
+          <p:cNvSpPr txBox="1"/>
+          <p:nvPr/>
+        </p:nvSpPr>
+        <p:spPr>
+          <a:xfrm>
+            <a:off x="7635240" y="4498848"/>
+            <a:ext cx="3749040" cy="694944"/>
+          </a:xfrm>
+          <a:prstGeom prst="rect">
+            <a:avLst/>
+          </a:prstGeom>
+          <a:noFill/>
+          <a:ln/>
+        </p:spPr>
+        <p:txBody>
+          <a:bodyPr wrap="square" lIns="0" tIns="0" rIns="0" bIns="0" rtlCol="0" anchor="ctr"/>
+          <a:lstStyle/>
+          <a:p>
+            <a:pPr indent="0" marL="0">
+              <a:buNone/>
+            </a:pPr>
+            <a:r>
+              <a:rPr lang="en-US" sz="1700" b="1" dirty="0">
+                <a:solidFill>
+                  <a:srgbClr val="18181B"/>
+                </a:solidFill>
+                <a:latin typeface="Courier New" pitchFamily="34" charset="0"/>
+                <a:ea typeface="Courier New" pitchFamily="34" charset="-122"/>
+                <a:cs typeface="Courier New" pitchFamily="34" charset="-120"/>
+              </a:rPr>
+              <a:t>sandrise.io/nicksanders</a:t>
+            </a:r>
+            <a:endParaRPr lang="en-US" sz="1700" dirty="0"/>
+          </a:p>
+          <a:p>
+            <a:pPr indent="0" marL="0">
+              <a:buNone/>
+            </a:pPr>
+            <a:r>
+              <a:rPr lang="en-US" sz="1200" dirty="0">
+                <a:solidFill>
+                  <a:srgbClr val="52525B"/>
+                </a:solidFill>
+                <a:latin typeface="Arial" pitchFamily="34" charset="0"/>
+                <a:ea typeface="Arial" pitchFamily="34" charset="-122"/>
+                <a:cs typeface="Arial" pitchFamily="34" charset="-120"/>
+              </a:rPr>
+              <a:t>Portfolio</a:t>
+            </a:r>
+            <a:endParaRPr lang="en-US" sz="1700" dirty="0"/>
+          </a:p>
+        </p:txBody>
+      </p:sp>
+      <p:sp>
+        <p:nvSpPr>
+          <p:cNvPr id="14" name="Shape 12"/>
+          <p:cNvSpPr/>
+          <p:nvPr/>
+        </p:nvSpPr>
+        <p:spPr>
+          <a:xfrm>
+            <a:off x="6766560" y="3291840"/>
+            <a:ext cx="4754880" cy="914400"/>
+          </a:xfrm>
+          <a:prstGeom prst="roundRect">
+            <a:avLst>
+              <a:gd name="adj" fmla="val 12000"/>
+            </a:avLst>
+          </a:prstGeom>
+          <a:solidFill>
+            <a:srgbClr val="FFFFFF"/>
+          </a:solidFill>
+          <a:ln w="9525">
+            <a:solidFill>
+              <a:srgbClr val="E4E4E7"/>
+            </a:solidFill>
+            <a:prstDash val="solid"/>
+          </a:ln>
+        </p:spPr>
+      </p:sp>
+      <p:sp>
+        <p:nvSpPr>
+          <p:cNvPr id="15" name="Shape 13"/>
+          <p:cNvSpPr/>
+          <p:nvPr/>
+        </p:nvSpPr>
+        <p:spPr>
+          <a:xfrm>
+            <a:off x="6949440" y="3493008"/>
+            <a:ext cx="512064" cy="512064"/>
+          </a:xfrm>
+          <a:prstGeom prst="roundRect">
+            <a:avLst>
+              <a:gd name="adj" fmla="val 17857"/>
+            </a:avLst>
+          </a:prstGeom>
+          <a:solidFill>
+            <a:srgbClr val="E1AD01"/>
+          </a:solidFill>
+          <a:ln w="12700">
+            <a:solidFill>
+              <a:srgbClr val="E1AD01"/>
+            </a:solidFill>
+            <a:prstDash val="solid"/>
+          </a:ln>
+        </p:spPr>
+      </p:sp>
+      <p:sp>
+        <p:nvSpPr>
+          <p:cNvPr id="16" name="Text 14"/>
+          <p:cNvSpPr txBox="1"/>
+          <p:nvPr/>
+        </p:nvSpPr>
+        <p:spPr>
+          <a:xfrm>
+            <a:off x="7635240" y="3401568"/>
+            <a:ext cx="3749040" cy="694944"/>
+          </a:xfrm>
+          <a:prstGeom prst="rect">
+            <a:avLst/>
+          </a:prstGeom>
+          <a:noFill/>
+          <a:ln/>
+        </p:spPr>
+        <p:txBody>
+          <a:bodyPr wrap="square" lIns="0" tIns="0" rIns="0" bIns="0" rtlCol="0" anchor="ctr"/>
+          <a:lstStyle/>
+          <a:p>
+            <a:pPr indent="0" marL="0">
+              <a:buNone/>
+            </a:pPr>
+            <a:r>
+              <a:rPr lang="en-US" sz="1700" b="1" dirty="0">
+                <a:solidFill>
+                  <a:srgbClr val="18181B"/>
+                </a:solidFill>
+                <a:latin typeface="Courier New" pitchFamily="34" charset="0"/>
+                <a:ea typeface="Courier New" pitchFamily="34" charset="-122"/>
+                <a:cs typeface="Courier New" pitchFamily="34" charset="-120"/>
+              </a:rPr>
+              <a:t>musterd.io</a:t>
+            </a:r>
+            <a:endParaRPr lang="en-US" sz="1700" dirty="0"/>
+          </a:p>
+          <a:p>
+            <a:pPr indent="0" marL="0">
+              <a:buNone/>
+            </a:pPr>
+            <a:r>
+              <a:rPr lang="en-US" sz="1200" dirty="0">
+                <a:solidFill>
+                  <a:srgbClr val="52525B"/>
+                </a:solidFill>
+                <a:latin typeface="Arial" pitchFamily="34" charset="0"/>
+                <a:ea typeface="Arial" pitchFamily="34" charset="-122"/>
+                <a:cs typeface="Arial" pitchFamily="34" charset="-120"/>
+              </a:rPr>
+              <a:t>github.com/SandRiseStudio/musterd</a:t>
+            </a:r>
+            <a:endParaRPr lang="en-US" sz="1700" dirty="0"/>
+          </a:p>
+        </p:txBody>
+      </p:sp>
     </p:spTree>
   </p:cSld>
   <p:clrMapOvr>
@@ -3207,8 +2784,8 @@
         </p:nvSpPr>
         <p:spPr>
           <a:xfrm>
-            <a:off x="640080" y="548640"/>
-            <a:ext cx="10911535" cy="365760"/>
+            <a:off x="640080" y="502920"/>
+            <a:ext cx="10911535" cy="320040"/>
           </a:xfrm>
           <a:prstGeom prst="rect">
             <a:avLst/>
@@ -3232,7 +2809,7 @@
                 <a:ea typeface="Courier New" pitchFamily="34" charset="-122"/>
                 <a:cs typeface="Courier New" pitchFamily="34" charset="-120"/>
               </a:rPr>
-              <a:t>WHERE IT STARTED</a:t>
+              <a:t>WHERE IT STARTED · JUNE 2026</a:t>
             </a:r>
             <a:endParaRPr lang="en-US" sz="1300" dirty="0"/>
           </a:p>
@@ -3246,66 +2823,24 @@
         </p:nvSpPr>
         <p:spPr>
           <a:xfrm>
-            <a:off x="640080" y="1051560"/>
-            <a:ext cx="1097280" cy="914400"/>
-          </a:xfrm>
-          <a:prstGeom prst="rect">
-            <a:avLst/>
-          </a:prstGeom>
-          <a:noFill/>
-          <a:ln/>
-        </p:spPr>
-        <p:txBody>
-          <a:bodyPr wrap="square" lIns="0" tIns="0" rIns="0" bIns="0" rtlCol="0" anchor="t"/>
-          <a:lstStyle/>
-          <a:p>
-            <a:pPr indent="0" marL="0">
-              <a:buNone/>
-            </a:pPr>
-            <a:r>
-              <a:rPr lang="en-US" sz="9600" b="1" dirty="0">
-                <a:solidFill>
-                  <a:srgbClr val="E1AD01"/>
-                </a:solidFill>
-                <a:latin typeface="Arial" pitchFamily="34" charset="0"/>
-                <a:ea typeface="Arial" pitchFamily="34" charset="-122"/>
-                <a:cs typeface="Arial" pitchFamily="34" charset="-120"/>
-              </a:rPr>
-              <a:t>“</a:t>
-            </a:r>
-            <a:endParaRPr lang="en-US" sz="9600" dirty="0"/>
-          </a:p>
-        </p:txBody>
-      </p:sp>
-      <p:sp>
-        <p:nvSpPr>
-          <p:cNvPr id="4" name="Text 2"/>
-          <p:cNvSpPr txBox="1"/>
-          <p:nvPr/>
-        </p:nvSpPr>
-        <p:spPr>
-          <a:xfrm>
-            <a:off x="640080" y="1874520"/>
-            <a:ext cx="10362895" cy="2651760"/>
-          </a:xfrm>
-          <a:prstGeom prst="rect">
-            <a:avLst/>
-          </a:prstGeom>
-          <a:noFill/>
-          <a:ln/>
-        </p:spPr>
-        <p:txBody>
-          <a:bodyPr wrap="square" lIns="0" tIns="0" rIns="0" bIns="0" rtlCol="0" anchor="t"/>
-          <a:lstStyle/>
-          <a:p>
-            <a:pPr indent="0" marL="0">
-              <a:lnSpc>
-                <a:spcPct val="115000"/>
-              </a:lnSpc>
-              <a:buNone/>
-            </a:pPr>
-            <a:r>
-              <a:rPr lang="en-US" sz="3000" b="1" dirty="0">
+            <a:off x="640080" y="868680"/>
+            <a:ext cx="10911535" cy="731520"/>
+          </a:xfrm>
+          <a:prstGeom prst="rect">
+            <a:avLst/>
+          </a:prstGeom>
+          <a:noFill/>
+          <a:ln/>
+        </p:spPr>
+        <p:txBody>
+          <a:bodyPr wrap="square" lIns="0" tIns="0" rIns="0" bIns="0" rtlCol="0" anchor="ctr"/>
+          <a:lstStyle/>
+          <a:p>
+            <a:pPr indent="0" marL="0">
+              <a:buNone/>
+            </a:pPr>
+            <a:r>
+              <a:rPr lang="en-US" sz="3600" b="1" dirty="0">
                 <a:solidFill>
                   <a:srgbClr val="18181B"/>
                 </a:solidFill>
@@ -3313,11 +2848,38 @@
                 <a:ea typeface="Arial" pitchFamily="34" charset="-122"/>
                 <a:cs typeface="Arial" pitchFamily="34" charset="-120"/>
               </a:rPr>
-              <a:t>When one agent wanted to ask a question or provide a status update, they would tell me something, which I would then copy and paste to the other agent.</a:t>
-            </a:r>
-            <a:endParaRPr lang="en-US" sz="3000" dirty="0"/>
-          </a:p>
-        </p:txBody>
+              <a:t>At first, I was the coordination layer.</a:t>
+            </a:r>
+            <a:endParaRPr lang="en-US" sz="3600" dirty="0"/>
+          </a:p>
+        </p:txBody>
+      </p:sp>
+      <p:sp>
+        <p:nvSpPr>
+          <p:cNvPr id="4" name="Shape 2"/>
+          <p:cNvSpPr/>
+          <p:nvPr/>
+        </p:nvSpPr>
+        <p:spPr>
+          <a:xfrm>
+            <a:off x="640080" y="2103120"/>
+            <a:ext cx="457200" cy="457200"/>
+          </a:xfrm>
+          <a:prstGeom prst="roundRect">
+            <a:avLst>
+              <a:gd name="adj" fmla="val 16000"/>
+            </a:avLst>
+          </a:prstGeom>
+          <a:solidFill>
+            <a:srgbClr val="E1AD01"/>
+          </a:solidFill>
+          <a:ln w="12700">
+            <a:solidFill>
+              <a:srgbClr val="E1AD01"/>
+            </a:solidFill>
+            <a:prstDash val="solid"/>
+          </a:ln>
+        </p:spPr>
       </p:sp>
       <p:sp>
         <p:nvSpPr>
@@ -3327,8 +2889,8 @@
         </p:nvSpPr>
         <p:spPr>
           <a:xfrm>
-            <a:off x="640080" y="4754880"/>
-            <a:ext cx="10911535" cy="457200"/>
+            <a:off x="640080" y="2103120"/>
+            <a:ext cx="457200" cy="457200"/>
           </a:xfrm>
           <a:prstGeom prst="rect">
             <a:avLst/>
@@ -3340,21 +2902,608 @@
           <a:bodyPr wrap="square" lIns="0" tIns="0" rIns="0" bIns="0" rtlCol="0" anchor="ctr"/>
           <a:lstStyle/>
           <a:p>
-            <a:pPr indent="0" marL="0">
-              <a:buNone/>
-            </a:pPr>
-            <a:r>
-              <a:rPr lang="en-US" sz="1400" dirty="0">
-                <a:solidFill>
-                  <a:srgbClr val="52525B"/>
+            <a:pPr algn="ctr" indent="0" marL="0">
+              <a:buNone/>
+            </a:pPr>
+            <a:r>
+              <a:rPr lang="en-US" sz="1600" b="1" dirty="0">
+                <a:solidFill>
+                  <a:srgbClr val="18181B"/>
                 </a:solidFill>
                 <a:latin typeface="Courier New" pitchFamily="34" charset="0"/>
                 <a:ea typeface="Courier New" pitchFamily="34" charset="-122"/>
                 <a:cs typeface="Courier New" pitchFamily="34" charset="-120"/>
               </a:rPr>
-              <a:t>— Nick Sanders, June 2026</a:t>
-            </a:r>
-            <a:endParaRPr lang="en-US" sz="1400" dirty="0"/>
+              <a:t>1</a:t>
+            </a:r>
+            <a:endParaRPr lang="en-US" sz="1600" dirty="0"/>
+          </a:p>
+        </p:txBody>
+      </p:sp>
+      <p:sp>
+        <p:nvSpPr>
+          <p:cNvPr id="6" name="Text 4"/>
+          <p:cNvSpPr txBox="1"/>
+          <p:nvPr/>
+        </p:nvSpPr>
+        <p:spPr>
+          <a:xfrm>
+            <a:off x="1325880" y="2011680"/>
+            <a:ext cx="5394960" cy="640080"/>
+          </a:xfrm>
+          <a:prstGeom prst="rect">
+            <a:avLst/>
+          </a:prstGeom>
+          <a:noFill/>
+          <a:ln/>
+        </p:spPr>
+        <p:txBody>
+          <a:bodyPr wrap="square" lIns="0" tIns="0" rIns="0" bIns="0" rtlCol="0" anchor="ctr"/>
+          <a:lstStyle/>
+          <a:p>
+            <a:pPr indent="0" marL="0">
+              <a:buNone/>
+            </a:pPr>
+            <a:r>
+              <a:rPr lang="en-US" sz="1900" b="1" dirty="0">
+                <a:solidFill>
+                  <a:srgbClr val="18181B"/>
+                </a:solidFill>
+                <a:latin typeface="Arial" pitchFamily="34" charset="0"/>
+                <a:ea typeface="Arial" pitchFamily="34" charset="-122"/>
+                <a:cs typeface="Arial" pitchFamily="34" charset="-120"/>
+              </a:rPr>
+              <a:t>Copy-pasting every question and status update between sessions</a:t>
+            </a:r>
+            <a:endParaRPr lang="en-US" sz="1900" dirty="0"/>
+          </a:p>
+        </p:txBody>
+      </p:sp>
+      <p:sp>
+        <p:nvSpPr>
+          <p:cNvPr id="7" name="Shape 5"/>
+          <p:cNvSpPr/>
+          <p:nvPr/>
+        </p:nvSpPr>
+        <p:spPr>
+          <a:xfrm>
+            <a:off x="640080" y="3017520"/>
+            <a:ext cx="457200" cy="457200"/>
+          </a:xfrm>
+          <a:prstGeom prst="roundRect">
+            <a:avLst>
+              <a:gd name="adj" fmla="val 16000"/>
+            </a:avLst>
+          </a:prstGeom>
+          <a:solidFill>
+            <a:srgbClr val="E1AD01"/>
+          </a:solidFill>
+          <a:ln w="12700">
+            <a:solidFill>
+              <a:srgbClr val="E1AD01"/>
+            </a:solidFill>
+            <a:prstDash val="solid"/>
+          </a:ln>
+        </p:spPr>
+      </p:sp>
+      <p:sp>
+        <p:nvSpPr>
+          <p:cNvPr id="8" name="Text 6"/>
+          <p:cNvSpPr txBox="1"/>
+          <p:nvPr/>
+        </p:nvSpPr>
+        <p:spPr>
+          <a:xfrm>
+            <a:off x="640080" y="3017520"/>
+            <a:ext cx="457200" cy="457200"/>
+          </a:xfrm>
+          <a:prstGeom prst="rect">
+            <a:avLst/>
+          </a:prstGeom>
+          <a:noFill/>
+          <a:ln/>
+        </p:spPr>
+        <p:txBody>
+          <a:bodyPr wrap="square" lIns="0" tIns="0" rIns="0" bIns="0" rtlCol="0" anchor="ctr"/>
+          <a:lstStyle/>
+          <a:p>
+            <a:pPr algn="ctr" indent="0" marL="0">
+              <a:buNone/>
+            </a:pPr>
+            <a:r>
+              <a:rPr lang="en-US" sz="1600" b="1" dirty="0">
+                <a:solidFill>
+                  <a:srgbClr val="18181B"/>
+                </a:solidFill>
+                <a:latin typeface="Courier New" pitchFamily="34" charset="0"/>
+                <a:ea typeface="Courier New" pitchFamily="34" charset="-122"/>
+                <a:cs typeface="Courier New" pitchFamily="34" charset="-120"/>
+              </a:rPr>
+              <a:t>2</a:t>
+            </a:r>
+            <a:endParaRPr lang="en-US" sz="1600" dirty="0"/>
+          </a:p>
+        </p:txBody>
+      </p:sp>
+      <p:sp>
+        <p:nvSpPr>
+          <p:cNvPr id="9" name="Text 7"/>
+          <p:cNvSpPr txBox="1"/>
+          <p:nvPr/>
+        </p:nvSpPr>
+        <p:spPr>
+          <a:xfrm>
+            <a:off x="1325880" y="2926080"/>
+            <a:ext cx="5394960" cy="640080"/>
+          </a:xfrm>
+          <a:prstGeom prst="rect">
+            <a:avLst/>
+          </a:prstGeom>
+          <a:noFill/>
+          <a:ln/>
+        </p:spPr>
+        <p:txBody>
+          <a:bodyPr wrap="square" lIns="0" tIns="0" rIns="0" bIns="0" rtlCol="0" anchor="ctr"/>
+          <a:lstStyle/>
+          <a:p>
+            <a:pPr indent="0" marL="0">
+              <a:buNone/>
+            </a:pPr>
+            <a:r>
+              <a:rPr lang="en-US" sz="1900" b="1" dirty="0">
+                <a:solidFill>
+                  <a:srgbClr val="18181B"/>
+                </a:solidFill>
+                <a:latin typeface="Arial" pitchFamily="34" charset="0"/>
+                <a:ea typeface="Arial" pitchFamily="34" charset="-122"/>
+                <a:cs typeface="Arial" pitchFamily="34" charset="-120"/>
+              </a:rPr>
+              <a:t>Losing track of which session had done what, on which branch</a:t>
+            </a:r>
+            <a:endParaRPr lang="en-US" sz="1900" dirty="0"/>
+          </a:p>
+        </p:txBody>
+      </p:sp>
+      <p:sp>
+        <p:nvSpPr>
+          <p:cNvPr id="10" name="Shape 8"/>
+          <p:cNvSpPr/>
+          <p:nvPr/>
+        </p:nvSpPr>
+        <p:spPr>
+          <a:xfrm>
+            <a:off x="640080" y="3931920"/>
+            <a:ext cx="457200" cy="457200"/>
+          </a:xfrm>
+          <a:prstGeom prst="roundRect">
+            <a:avLst>
+              <a:gd name="adj" fmla="val 16000"/>
+            </a:avLst>
+          </a:prstGeom>
+          <a:solidFill>
+            <a:srgbClr val="E1AD01"/>
+          </a:solidFill>
+          <a:ln w="12700">
+            <a:solidFill>
+              <a:srgbClr val="E1AD01"/>
+            </a:solidFill>
+            <a:prstDash val="solid"/>
+          </a:ln>
+        </p:spPr>
+      </p:sp>
+      <p:sp>
+        <p:nvSpPr>
+          <p:cNvPr id="11" name="Text 9"/>
+          <p:cNvSpPr txBox="1"/>
+          <p:nvPr/>
+        </p:nvSpPr>
+        <p:spPr>
+          <a:xfrm>
+            <a:off x="640080" y="3931920"/>
+            <a:ext cx="457200" cy="457200"/>
+          </a:xfrm>
+          <a:prstGeom prst="rect">
+            <a:avLst/>
+          </a:prstGeom>
+          <a:noFill/>
+          <a:ln/>
+        </p:spPr>
+        <p:txBody>
+          <a:bodyPr wrap="square" lIns="0" tIns="0" rIns="0" bIns="0" rtlCol="0" anchor="ctr"/>
+          <a:lstStyle/>
+          <a:p>
+            <a:pPr algn="ctr" indent="0" marL="0">
+              <a:buNone/>
+            </a:pPr>
+            <a:r>
+              <a:rPr lang="en-US" sz="1600" b="1" dirty="0">
+                <a:solidFill>
+                  <a:srgbClr val="18181B"/>
+                </a:solidFill>
+                <a:latin typeface="Courier New" pitchFamily="34" charset="0"/>
+                <a:ea typeface="Courier New" pitchFamily="34" charset="-122"/>
+                <a:cs typeface="Courier New" pitchFamily="34" charset="-120"/>
+              </a:rPr>
+              <a:t>3</a:t>
+            </a:r>
+            <a:endParaRPr lang="en-US" sz="1600" dirty="0"/>
+          </a:p>
+        </p:txBody>
+      </p:sp>
+      <p:sp>
+        <p:nvSpPr>
+          <p:cNvPr id="12" name="Text 10"/>
+          <p:cNvSpPr txBox="1"/>
+          <p:nvPr/>
+        </p:nvSpPr>
+        <p:spPr>
+          <a:xfrm>
+            <a:off x="1325880" y="3840480"/>
+            <a:ext cx="5394960" cy="640080"/>
+          </a:xfrm>
+          <a:prstGeom prst="rect">
+            <a:avLst/>
+          </a:prstGeom>
+          <a:noFill/>
+          <a:ln/>
+        </p:spPr>
+        <p:txBody>
+          <a:bodyPr wrap="square" lIns="0" tIns="0" rIns="0" bIns="0" rtlCol="0" anchor="ctr"/>
+          <a:lstStyle/>
+          <a:p>
+            <a:pPr indent="0" marL="0">
+              <a:buNone/>
+            </a:pPr>
+            <a:r>
+              <a:rPr lang="en-US" sz="1900" b="1" dirty="0">
+                <a:solidFill>
+                  <a:srgbClr val="18181B"/>
+                </a:solidFill>
+                <a:latin typeface="Arial" pitchFamily="34" charset="0"/>
+                <a:ea typeface="Arial" pitchFamily="34" charset="-122"/>
+                <a:cs typeface="Arial" pitchFamily="34" charset="-120"/>
+              </a:rPr>
+              <a:t>Writing a hand-off prompt for every new session</a:t>
+            </a:r>
+            <a:endParaRPr lang="en-US" sz="1900" dirty="0"/>
+          </a:p>
+        </p:txBody>
+      </p:sp>
+      <p:sp>
+        <p:nvSpPr>
+          <p:cNvPr id="13" name="Shape 11"/>
+          <p:cNvSpPr/>
+          <p:nvPr/>
+        </p:nvSpPr>
+        <p:spPr>
+          <a:xfrm>
+            <a:off x="640080" y="4846320"/>
+            <a:ext cx="457200" cy="457200"/>
+          </a:xfrm>
+          <a:prstGeom prst="roundRect">
+            <a:avLst>
+              <a:gd name="adj" fmla="val 16000"/>
+            </a:avLst>
+          </a:prstGeom>
+          <a:solidFill>
+            <a:srgbClr val="E1AD01"/>
+          </a:solidFill>
+          <a:ln w="12700">
+            <a:solidFill>
+              <a:srgbClr val="E1AD01"/>
+            </a:solidFill>
+            <a:prstDash val="solid"/>
+          </a:ln>
+        </p:spPr>
+      </p:sp>
+      <p:sp>
+        <p:nvSpPr>
+          <p:cNvPr id="14" name="Text 12"/>
+          <p:cNvSpPr txBox="1"/>
+          <p:nvPr/>
+        </p:nvSpPr>
+        <p:spPr>
+          <a:xfrm>
+            <a:off x="640080" y="4846320"/>
+            <a:ext cx="457200" cy="457200"/>
+          </a:xfrm>
+          <a:prstGeom prst="rect">
+            <a:avLst/>
+          </a:prstGeom>
+          <a:noFill/>
+          <a:ln/>
+        </p:spPr>
+        <p:txBody>
+          <a:bodyPr wrap="square" lIns="0" tIns="0" rIns="0" bIns="0" rtlCol="0" anchor="ctr"/>
+          <a:lstStyle/>
+          <a:p>
+            <a:pPr algn="ctr" indent="0" marL="0">
+              <a:buNone/>
+            </a:pPr>
+            <a:r>
+              <a:rPr lang="en-US" sz="1600" b="1" dirty="0">
+                <a:solidFill>
+                  <a:srgbClr val="18181B"/>
+                </a:solidFill>
+                <a:latin typeface="Courier New" pitchFamily="34" charset="0"/>
+                <a:ea typeface="Courier New" pitchFamily="34" charset="-122"/>
+                <a:cs typeface="Courier New" pitchFamily="34" charset="-120"/>
+              </a:rPr>
+              <a:t>4</a:t>
+            </a:r>
+            <a:endParaRPr lang="en-US" sz="1600" dirty="0"/>
+          </a:p>
+        </p:txBody>
+      </p:sp>
+      <p:sp>
+        <p:nvSpPr>
+          <p:cNvPr id="15" name="Text 13"/>
+          <p:cNvSpPr txBox="1"/>
+          <p:nvPr/>
+        </p:nvSpPr>
+        <p:spPr>
+          <a:xfrm>
+            <a:off x="1325880" y="4754880"/>
+            <a:ext cx="5394960" cy="640080"/>
+          </a:xfrm>
+          <a:prstGeom prst="rect">
+            <a:avLst/>
+          </a:prstGeom>
+          <a:noFill/>
+          <a:ln/>
+        </p:spPr>
+        <p:txBody>
+          <a:bodyPr wrap="square" lIns="0" tIns="0" rIns="0" bIns="0" rtlCol="0" anchor="ctr"/>
+          <a:lstStyle/>
+          <a:p>
+            <a:pPr indent="0" marL="0">
+              <a:buNone/>
+            </a:pPr>
+            <a:r>
+              <a:rPr lang="en-US" sz="1900" b="1" dirty="0">
+                <a:solidFill>
+                  <a:srgbClr val="18181B"/>
+                </a:solidFill>
+                <a:latin typeface="Arial" pitchFamily="34" charset="0"/>
+                <a:ea typeface="Arial" pitchFamily="34" charset="-122"/>
+                <a:cs typeface="Arial" pitchFamily="34" charset="-120"/>
+              </a:rPr>
+              <a:t>Work done twice, or built on something unfinished</a:t>
+            </a:r>
+            <a:endParaRPr lang="en-US" sz="1900" dirty="0"/>
+          </a:p>
+        </p:txBody>
+      </p:sp>
+      <p:sp>
+        <p:nvSpPr>
+          <p:cNvPr id="16" name="Shape 14"/>
+          <p:cNvSpPr/>
+          <p:nvPr/>
+        </p:nvSpPr>
+        <p:spPr>
+          <a:xfrm>
+            <a:off x="6858000" y="1828800"/>
+            <a:ext cx="4663440" cy="3931920"/>
+          </a:xfrm>
+          <a:prstGeom prst="roundRect">
+            <a:avLst>
+              <a:gd name="adj" fmla="val 2791"/>
+            </a:avLst>
+          </a:prstGeom>
+          <a:solidFill>
+            <a:srgbClr val="FFFFFF"/>
+          </a:solidFill>
+          <a:ln w="9525">
+            <a:solidFill>
+              <a:srgbClr val="E4E4E7"/>
+            </a:solidFill>
+            <a:prstDash val="solid"/>
+          </a:ln>
+        </p:spPr>
+      </p:sp>
+      <p:sp>
+        <p:nvSpPr>
+          <p:cNvPr id="17" name="Text 15"/>
+          <p:cNvSpPr txBox="1"/>
+          <p:nvPr/>
+        </p:nvSpPr>
+        <p:spPr>
+          <a:xfrm>
+            <a:off x="7178040" y="2057400"/>
+            <a:ext cx="4114800" cy="274320"/>
+          </a:xfrm>
+          <a:prstGeom prst="rect">
+            <a:avLst/>
+          </a:prstGeom>
+          <a:noFill/>
+          <a:ln/>
+        </p:spPr>
+        <p:txBody>
+          <a:bodyPr wrap="square" lIns="0" tIns="0" rIns="0" bIns="0" rtlCol="0" anchor="ctr"/>
+          <a:lstStyle/>
+          <a:p>
+            <a:pPr indent="0" marL="0">
+              <a:buNone/>
+            </a:pPr>
+            <a:r>
+              <a:rPr lang="en-US" sz="1000" spc="200" kern="0" dirty="0">
+                <a:solidFill>
+                  <a:srgbClr val="7A5A06"/>
+                </a:solidFill>
+                <a:latin typeface="Courier New" pitchFamily="34" charset="0"/>
+                <a:ea typeface="Courier New" pitchFamily="34" charset="-122"/>
+                <a:cs typeface="Courier New" pitchFamily="34" charset="-120"/>
+              </a:rPr>
+              <a:t>THREE AGENTS · ONE FEATURE · A DAY AND A HALF</a:t>
+            </a:r>
+            <a:endParaRPr lang="en-US" sz="1000" dirty="0"/>
+          </a:p>
+        </p:txBody>
+      </p:sp>
+      <p:sp>
+        <p:nvSpPr>
+          <p:cNvPr id="18" name="Text 16"/>
+          <p:cNvSpPr txBox="1"/>
+          <p:nvPr/>
+        </p:nvSpPr>
+        <p:spPr>
+          <a:xfrm>
+            <a:off x="7178040" y="2377440"/>
+            <a:ext cx="4114800" cy="1645920"/>
+          </a:xfrm>
+          <a:prstGeom prst="rect">
+            <a:avLst/>
+          </a:prstGeom>
+          <a:noFill/>
+          <a:ln/>
+        </p:spPr>
+        <p:txBody>
+          <a:bodyPr wrap="square" lIns="0" tIns="0" rIns="0" bIns="0" rtlCol="0" anchor="ctr"/>
+          <a:lstStyle/>
+          <a:p>
+            <a:pPr indent="0" marL="0">
+              <a:buNone/>
+            </a:pPr>
+            <a:r>
+              <a:rPr lang="en-US" sz="11000" b="1" dirty="0">
+                <a:solidFill>
+                  <a:srgbClr val="8F6B00"/>
+                </a:solidFill>
+                <a:latin typeface="Arial" pitchFamily="34" charset="0"/>
+                <a:ea typeface="Arial" pitchFamily="34" charset="-122"/>
+                <a:cs typeface="Arial" pitchFamily="34" charset="-120"/>
+              </a:rPr>
+              <a:t>37%</a:t>
+            </a:r>
+            <a:endParaRPr lang="en-US" sz="11000" dirty="0"/>
+          </a:p>
+        </p:txBody>
+      </p:sp>
+      <p:sp>
+        <p:nvSpPr>
+          <p:cNvPr id="19" name="Text 17"/>
+          <p:cNvSpPr txBox="1"/>
+          <p:nvPr/>
+        </p:nvSpPr>
+        <p:spPr>
+          <a:xfrm>
+            <a:off x="7178040" y="4069080"/>
+            <a:ext cx="4114800" cy="548640"/>
+          </a:xfrm>
+          <a:prstGeom prst="rect">
+            <a:avLst/>
+          </a:prstGeom>
+          <a:noFill/>
+          <a:ln/>
+        </p:spPr>
+        <p:txBody>
+          <a:bodyPr wrap="square" lIns="0" tIns="0" rIns="0" bIns="0" rtlCol="0" anchor="ctr"/>
+          <a:lstStyle/>
+          <a:p>
+            <a:pPr indent="0" marL="0">
+              <a:buNone/>
+            </a:pPr>
+            <a:r>
+              <a:rPr lang="en-US" sz="1700" dirty="0">
+                <a:solidFill>
+                  <a:srgbClr val="52525B"/>
+                </a:solidFill>
+                <a:latin typeface="Arial" pitchFamily="34" charset="0"/>
+                <a:ea typeface="Arial" pitchFamily="34" charset="-122"/>
+                <a:cs typeface="Arial" pitchFamily="34" charset="-120"/>
+              </a:rPr>
+              <a:t>of the code they produced was thrown away.</a:t>
+            </a:r>
+            <a:endParaRPr lang="en-US" sz="1700" dirty="0"/>
+          </a:p>
+        </p:txBody>
+      </p:sp>
+      <p:sp>
+        <p:nvSpPr>
+          <p:cNvPr id="20" name="Shape 18"/>
+          <p:cNvSpPr/>
+          <p:nvPr/>
+        </p:nvSpPr>
+        <p:spPr>
+          <a:xfrm>
+            <a:off x="7178040" y="4846320"/>
+            <a:ext cx="2596896" cy="228600"/>
+          </a:xfrm>
+          <a:prstGeom prst="rect">
+            <a:avLst/>
+          </a:prstGeom>
+          <a:solidFill>
+            <a:srgbClr val="A1A1AA"/>
+          </a:solidFill>
+          <a:ln w="12700">
+            <a:solidFill>
+              <a:srgbClr val="A1A1AA"/>
+            </a:solidFill>
+            <a:prstDash val="solid"/>
+          </a:ln>
+        </p:spPr>
+      </p:sp>
+      <p:sp>
+        <p:nvSpPr>
+          <p:cNvPr id="21" name="Shape 19"/>
+          <p:cNvSpPr/>
+          <p:nvPr/>
+        </p:nvSpPr>
+        <p:spPr>
+          <a:xfrm>
+            <a:off x="9774936" y="4846320"/>
+            <a:ext cx="1517904" cy="228600"/>
+          </a:xfrm>
+          <a:prstGeom prst="rect">
+            <a:avLst/>
+          </a:prstGeom>
+          <a:solidFill>
+            <a:srgbClr val="E1AD01"/>
+          </a:solidFill>
+          <a:ln w="12700">
+            <a:solidFill>
+              <a:srgbClr val="E1AD01"/>
+            </a:solidFill>
+            <a:prstDash val="solid"/>
+          </a:ln>
+        </p:spPr>
+      </p:sp>
+      <p:sp>
+        <p:nvSpPr>
+          <p:cNvPr id="22" name="Text 20"/>
+          <p:cNvSpPr txBox="1"/>
+          <p:nvPr/>
+        </p:nvSpPr>
+        <p:spPr>
+          <a:xfrm>
+            <a:off x="7178040" y="5212080"/>
+            <a:ext cx="4114800" cy="274320"/>
+          </a:xfrm>
+          <a:prstGeom prst="rect">
+            <a:avLst/>
+          </a:prstGeom>
+          <a:noFill/>
+          <a:ln/>
+        </p:spPr>
+        <p:txBody>
+          <a:bodyPr wrap="square" lIns="0" tIns="0" rIns="0" bIns="0" rtlCol="0" anchor="ctr"/>
+          <a:lstStyle/>
+          <a:p>
+            <a:pPr indent="0" marL="0">
+              <a:buNone/>
+            </a:pPr>
+            <a:r>
+              <a:rPr lang="en-US" sz="1100" dirty="0">
+                <a:solidFill>
+                  <a:srgbClr val="52525B"/>
+                </a:solidFill>
+                <a:latin typeface="Courier New" pitchFamily="34" charset="0"/>
+                <a:ea typeface="Courier New" pitchFamily="34" charset="-122"/>
+                <a:cs typeface="Courier New" pitchFamily="34" charset="-120"/>
+              </a:rPr>
+              <a:t>■ reached main    ■ thrown away</a:t>
+            </a:r>
+            <a:endParaRPr lang="en-US" sz="1100" dirty="0"/>
           </a:p>
         </p:txBody>
       </p:sp>
@@ -3398,8 +3547,8 @@
         </p:nvSpPr>
         <p:spPr>
           <a:xfrm>
-            <a:off x="640080" y="548640"/>
-            <a:ext cx="10911535" cy="365760"/>
+            <a:off x="640080" y="502920"/>
+            <a:ext cx="10911535" cy="320040"/>
           </a:xfrm>
           <a:prstGeom prst="rect">
             <a:avLst/>
@@ -3423,7 +3572,7 @@
                 <a:ea typeface="Courier New" pitchFamily="34" charset="-122"/>
                 <a:cs typeface="Courier New" pitchFamily="34" charset="-120"/>
               </a:rPr>
-              <a:t>THE PROBLEM</a:t>
+              <a:t>WHAT CHANGES</a:t>
             </a:r>
             <a:endParaRPr lang="en-US" sz="1300" dirty="0"/>
           </a:p>
@@ -3437,8 +3586,8 @@
         </p:nvSpPr>
         <p:spPr>
           <a:xfrm>
-            <a:off x="640080" y="1097280"/>
-            <a:ext cx="10911535" cy="822960"/>
+            <a:off x="640080" y="868680"/>
+            <a:ext cx="10911535" cy="731520"/>
           </a:xfrm>
           <a:prstGeom prst="rect">
             <a:avLst/>
@@ -3454,7 +3603,7 @@
               <a:buNone/>
             </a:pPr>
             <a:r>
-              <a:rPr lang="en-US" sz="4000" b="1" dirty="0">
+              <a:rPr lang="en-US" sz="3600" b="1" dirty="0">
                 <a:solidFill>
                   <a:srgbClr val="18181B"/>
                 </a:solidFill>
@@ -3462,22 +3611,49 @@
                 <a:ea typeface="Arial" pitchFamily="34" charset="-122"/>
                 <a:cs typeface="Arial" pitchFamily="34" charset="-120"/>
               </a:rPr>
-              <a:t>The second agent is where it breaks.</a:t>
-            </a:r>
-            <a:endParaRPr lang="en-US" sz="4000" dirty="0"/>
-          </a:p>
-        </p:txBody>
-      </p:sp>
-      <p:sp>
-        <p:nvSpPr>
-          <p:cNvPr id="4" name="Text 2"/>
-          <p:cNvSpPr txBox="1"/>
-          <p:nvPr/>
-        </p:nvSpPr>
-        <p:spPr>
-          <a:xfrm>
-            <a:off x="640080" y="2286000"/>
-            <a:ext cx="4572000" cy="2377440"/>
+              <a:t>What changes when your agents work as one team.</a:t>
+            </a:r>
+            <a:endParaRPr lang="en-US" sz="3600" dirty="0"/>
+          </a:p>
+        </p:txBody>
+      </p:sp>
+      <p:sp>
+        <p:nvSpPr>
+          <p:cNvPr id="4" name="Shape 2"/>
+          <p:cNvSpPr/>
+          <p:nvPr/>
+        </p:nvSpPr>
+        <p:spPr>
+          <a:xfrm>
+            <a:off x="640080" y="1920240"/>
+            <a:ext cx="5318608" cy="2011680"/>
+          </a:xfrm>
+          <a:prstGeom prst="roundRect">
+            <a:avLst>
+              <a:gd name="adj" fmla="val 5455"/>
+            </a:avLst>
+          </a:prstGeom>
+          <a:solidFill>
+            <a:srgbClr val="FFFFFF"/>
+          </a:solidFill>
+          <a:ln w="9525">
+            <a:solidFill>
+              <a:srgbClr val="E4E4E7"/>
+            </a:solidFill>
+            <a:prstDash val="solid"/>
+          </a:ln>
+        </p:spPr>
+      </p:sp>
+      <p:sp>
+        <p:nvSpPr>
+          <p:cNvPr id="5" name="Text 3"/>
+          <p:cNvSpPr txBox="1"/>
+          <p:nvPr/>
+        </p:nvSpPr>
+        <p:spPr>
+          <a:xfrm>
+            <a:off x="914400" y="2103120"/>
+            <a:ext cx="4769968" cy="457200"/>
           </a:xfrm>
           <a:prstGeom prst="rect">
             <a:avLst/>
@@ -3493,30 +3669,121 @@
               <a:buNone/>
             </a:pPr>
             <a:r>
-              <a:rPr lang="en-US" sz="15000" b="1" dirty="0">
-                <a:solidFill>
-                  <a:srgbClr val="8F6B00"/>
-                </a:solidFill>
-                <a:latin typeface="Arial" pitchFamily="34" charset="0"/>
-                <a:ea typeface="Arial" pitchFamily="34" charset="-122"/>
-                <a:cs typeface="Arial" pitchFamily="34" charset="-120"/>
-              </a:rPr>
-              <a:t>37%</a:t>
-            </a:r>
-            <a:endParaRPr lang="en-US" sz="15000" dirty="0"/>
-          </a:p>
-        </p:txBody>
-      </p:sp>
-      <p:sp>
-        <p:nvSpPr>
-          <p:cNvPr id="5" name="Text 3"/>
-          <p:cNvSpPr txBox="1"/>
-          <p:nvPr/>
-        </p:nvSpPr>
-        <p:spPr>
-          <a:xfrm>
-            <a:off x="5486400" y="2651760"/>
-            <a:ext cx="6065215" cy="1828800"/>
+              <a:rPr lang="en-US" sz="2100" b="1" dirty="0">
+                <a:solidFill>
+                  <a:srgbClr val="18181B"/>
+                </a:solidFill>
+                <a:latin typeface="Arial" pitchFamily="34" charset="0"/>
+                <a:ea typeface="Arial" pitchFamily="34" charset="-122"/>
+                <a:cs typeface="Arial" pitchFamily="34" charset="-120"/>
+              </a:rPr>
+              <a:t>Ownership</a:t>
+            </a:r>
+            <a:endParaRPr lang="en-US" sz="2100" dirty="0"/>
+          </a:p>
+        </p:txBody>
+      </p:sp>
+      <p:sp>
+        <p:nvSpPr>
+          <p:cNvPr id="6" name="Text 4"/>
+          <p:cNvSpPr txBox="1"/>
+          <p:nvPr/>
+        </p:nvSpPr>
+        <p:spPr>
+          <a:xfrm>
+            <a:off x="914400" y="2651760"/>
+            <a:ext cx="4769968" cy="1188720"/>
+          </a:xfrm>
+          <a:prstGeom prst="rect">
+            <a:avLst/>
+          </a:prstGeom>
+          <a:noFill/>
+          <a:ln/>
+        </p:spPr>
+        <p:txBody>
+          <a:bodyPr wrap="square" lIns="0" tIns="0" rIns="0" bIns="0" rtlCol="0" anchor="t"/>
+          <a:lstStyle/>
+          <a:p>
+            <a:pPr marL="342900" indent="-342900">
+              <a:spcAft>
+                <a:spcPts val="600"/>
+              </a:spcAft>
+              <a:buSzPct val="100000"/>
+              <a:buChar char="•"/>
+            </a:pPr>
+            <a:r>
+              <a:rPr lang="en-US" sz="1500" dirty="0">
+                <a:solidFill>
+                  <a:srgbClr val="52525B"/>
+                </a:solidFill>
+                <a:latin typeface="Arial" pitchFamily="34" charset="0"/>
+                <a:ea typeface="Arial" pitchFamily="34" charset="-122"/>
+                <a:cs typeface="Arial" pitchFamily="34" charset="-120"/>
+              </a:rPr>
+              <a:t>Work is claimed before the first edit</a:t>
+            </a:r>
+            <a:endParaRPr lang="en-US" sz="1500" dirty="0"/>
+          </a:p>
+          <a:p>
+            <a:pPr marL="342900" indent="-342900">
+              <a:spcAft>
+                <a:spcPts val="600"/>
+              </a:spcAft>
+              <a:buSzPct val="100000"/>
+              <a:buChar char="•"/>
+            </a:pPr>
+            <a:r>
+              <a:rPr lang="en-US" sz="1500" dirty="0">
+                <a:solidFill>
+                  <a:srgbClr val="52525B"/>
+                </a:solidFill>
+                <a:latin typeface="Arial" pitchFamily="34" charset="0"/>
+                <a:ea typeface="Arial" pitchFamily="34" charset="-122"/>
+                <a:cs typeface="Arial" pitchFamily="34" charset="-120"/>
+              </a:rPr>
+              <a:t>Overlapping claims raise a warning</a:t>
+            </a:r>
+            <a:endParaRPr lang="en-US" sz="1500" dirty="0"/>
+          </a:p>
+        </p:txBody>
+      </p:sp>
+      <p:sp>
+        <p:nvSpPr>
+          <p:cNvPr id="7" name="Shape 5"/>
+          <p:cNvSpPr/>
+          <p:nvPr/>
+        </p:nvSpPr>
+        <p:spPr>
+          <a:xfrm>
+            <a:off x="6233008" y="1920240"/>
+            <a:ext cx="5318608" cy="2011680"/>
+          </a:xfrm>
+          <a:prstGeom prst="roundRect">
+            <a:avLst>
+              <a:gd name="adj" fmla="val 5455"/>
+            </a:avLst>
+          </a:prstGeom>
+          <a:solidFill>
+            <a:srgbClr val="FFFFFF"/>
+          </a:solidFill>
+          <a:ln w="9525">
+            <a:solidFill>
+              <a:srgbClr val="E4E4E7"/>
+            </a:solidFill>
+            <a:prstDash val="solid"/>
+          </a:ln>
+        </p:spPr>
+      </p:sp>
+      <p:sp>
+        <p:nvSpPr>
+          <p:cNvPr id="8" name="Text 6"/>
+          <p:cNvSpPr txBox="1"/>
+          <p:nvPr/>
+        </p:nvSpPr>
+        <p:spPr>
+          <a:xfrm>
+            <a:off x="6507328" y="2103120"/>
+            <a:ext cx="4769968" cy="457200"/>
           </a:xfrm>
           <a:prstGeom prst="rect">
             <a:avLst/>
@@ -3532,7 +3799,50 @@
               <a:buNone/>
             </a:pPr>
             <a:r>
-              <a:rPr lang="en-US" sz="2200" dirty="0">
+              <a:rPr lang="en-US" sz="2100" b="1" dirty="0">
+                <a:solidFill>
+                  <a:srgbClr val="18181B"/>
+                </a:solidFill>
+                <a:latin typeface="Arial" pitchFamily="34" charset="0"/>
+                <a:ea typeface="Arial" pitchFamily="34" charset="-122"/>
+                <a:cs typeface="Arial" pitchFamily="34" charset="-120"/>
+              </a:rPr>
+              <a:t>Messages reach agents mid-task</a:t>
+            </a:r>
+            <a:endParaRPr lang="en-US" sz="2100" dirty="0"/>
+          </a:p>
+        </p:txBody>
+      </p:sp>
+      <p:sp>
+        <p:nvSpPr>
+          <p:cNvPr id="9" name="Text 7"/>
+          <p:cNvSpPr txBox="1"/>
+          <p:nvPr/>
+        </p:nvSpPr>
+        <p:spPr>
+          <a:xfrm>
+            <a:off x="6507328" y="2651760"/>
+            <a:ext cx="4769968" cy="1188720"/>
+          </a:xfrm>
+          <a:prstGeom prst="rect">
+            <a:avLst/>
+          </a:prstGeom>
+          <a:noFill/>
+          <a:ln/>
+        </p:spPr>
+        <p:txBody>
+          <a:bodyPr wrap="square" lIns="0" tIns="0" rIns="0" bIns="0" rtlCol="0" anchor="t"/>
+          <a:lstStyle/>
+          <a:p>
+            <a:pPr marL="342900" indent="-342900">
+              <a:spcAft>
+                <a:spcPts val="600"/>
+              </a:spcAft>
+              <a:buSzPct val="100000"/>
+              <a:buChar char="•"/>
+            </a:pPr>
+            <a:r>
+              <a:rPr lang="en-US" sz="1500" dirty="0">
                 <a:solidFill>
                   <a:srgbClr val="52525B"/>
                 </a:solidFill>
@@ -3540,9 +3850,311 @@
                 <a:ea typeface="Arial" pitchFamily="34" charset="-122"/>
                 <a:cs typeface="Arial" pitchFamily="34" charset="-120"/>
               </a:rPr>
-              <a:t>of the code three agents produced on one feature was thrown away. Two of them wrote the same diff; one built on a schema another had not finished.</a:t>
-            </a:r>
-            <a:endParaRPr lang="en-US" sz="2200" dirty="0"/>
+              <a:t>Delivered at the next tool call</a:t>
+            </a:r>
+            <a:endParaRPr lang="en-US" sz="1500" dirty="0"/>
+          </a:p>
+          <a:p>
+            <a:pPr marL="342900" indent="-342900">
+              <a:spcAft>
+                <a:spcPts val="600"/>
+              </a:spcAft>
+              <a:buSzPct val="100000"/>
+              <a:buChar char="•"/>
+            </a:pPr>
+            <a:r>
+              <a:rPr lang="en-US" sz="1500" dirty="0">
+                <a:solidFill>
+                  <a:srgbClr val="52525B"/>
+                </a:solidFill>
+                <a:latin typeface="Arial" pitchFamily="34" charset="0"/>
+                <a:ea typeface="Arial" pitchFamily="34" charset="-122"/>
+                <a:cs typeface="Arial" pitchFamily="34" charset="-120"/>
+              </a:rPr>
+              <a:t>Teammates reach each other directly</a:t>
+            </a:r>
+            <a:endParaRPr lang="en-US" sz="1500" dirty="0"/>
+          </a:p>
+        </p:txBody>
+      </p:sp>
+      <p:sp>
+        <p:nvSpPr>
+          <p:cNvPr id="10" name="Shape 8"/>
+          <p:cNvSpPr/>
+          <p:nvPr/>
+        </p:nvSpPr>
+        <p:spPr>
+          <a:xfrm>
+            <a:off x="640080" y="4114800"/>
+            <a:ext cx="5318608" cy="2011680"/>
+          </a:xfrm>
+          <a:prstGeom prst="roundRect">
+            <a:avLst>
+              <a:gd name="adj" fmla="val 5455"/>
+            </a:avLst>
+          </a:prstGeom>
+          <a:solidFill>
+            <a:srgbClr val="FFFFFF"/>
+          </a:solidFill>
+          <a:ln w="9525">
+            <a:solidFill>
+              <a:srgbClr val="E4E4E7"/>
+            </a:solidFill>
+            <a:prstDash val="solid"/>
+          </a:ln>
+        </p:spPr>
+      </p:sp>
+      <p:sp>
+        <p:nvSpPr>
+          <p:cNvPr id="11" name="Text 9"/>
+          <p:cNvSpPr txBox="1"/>
+          <p:nvPr/>
+        </p:nvSpPr>
+        <p:spPr>
+          <a:xfrm>
+            <a:off x="914400" y="4297680"/>
+            <a:ext cx="4769968" cy="457200"/>
+          </a:xfrm>
+          <a:prstGeom prst="rect">
+            <a:avLst/>
+          </a:prstGeom>
+          <a:noFill/>
+          <a:ln/>
+        </p:spPr>
+        <p:txBody>
+          <a:bodyPr wrap="square" lIns="0" tIns="0" rIns="0" bIns="0" rtlCol="0" anchor="ctr"/>
+          <a:lstStyle/>
+          <a:p>
+            <a:pPr indent="0" marL="0">
+              <a:buNone/>
+            </a:pPr>
+            <a:r>
+              <a:rPr lang="en-US" sz="2100" b="1" dirty="0">
+                <a:solidFill>
+                  <a:srgbClr val="18181B"/>
+                </a:solidFill>
+                <a:latin typeface="Arial" pitchFamily="34" charset="0"/>
+                <a:ea typeface="Arial" pitchFamily="34" charset="-122"/>
+                <a:cs typeface="Arial" pitchFamily="34" charset="-120"/>
+              </a:rPr>
+              <a:t>You get asked</a:t>
+            </a:r>
+            <a:endParaRPr lang="en-US" sz="2100" dirty="0"/>
+          </a:p>
+        </p:txBody>
+      </p:sp>
+      <p:sp>
+        <p:nvSpPr>
+          <p:cNvPr id="12" name="Text 10"/>
+          <p:cNvSpPr txBox="1"/>
+          <p:nvPr/>
+        </p:nvSpPr>
+        <p:spPr>
+          <a:xfrm>
+            <a:off x="914400" y="4846320"/>
+            <a:ext cx="4769968" cy="1188720"/>
+          </a:xfrm>
+          <a:prstGeom prst="rect">
+            <a:avLst/>
+          </a:prstGeom>
+          <a:noFill/>
+          <a:ln/>
+        </p:spPr>
+        <p:txBody>
+          <a:bodyPr wrap="square" lIns="0" tIns="0" rIns="0" bIns="0" rtlCol="0" anchor="t"/>
+          <a:lstStyle/>
+          <a:p>
+            <a:pPr marL="342900" indent="-342900">
+              <a:spcAft>
+                <a:spcPts val="600"/>
+              </a:spcAft>
+              <a:buSzPct val="100000"/>
+              <a:buChar char="•"/>
+            </a:pPr>
+            <a:r>
+              <a:rPr lang="en-US" sz="1500" dirty="0">
+                <a:solidFill>
+                  <a:srgbClr val="52525B"/>
+                </a:solidFill>
+                <a:latin typeface="Arial" pitchFamily="34" charset="0"/>
+                <a:ea typeface="Arial" pitchFamily="34" charset="-122"/>
+                <a:cs typeface="Arial" pitchFamily="34" charset="-120"/>
+              </a:rPr>
+              <a:t>Agents ask you clarifying questions</a:t>
+            </a:r>
+            <a:endParaRPr lang="en-US" sz="1500" dirty="0"/>
+          </a:p>
+          <a:p>
+            <a:pPr marL="342900" indent="-342900">
+              <a:spcAft>
+                <a:spcPts val="600"/>
+              </a:spcAft>
+              <a:buSzPct val="100000"/>
+              <a:buChar char="•"/>
+            </a:pPr>
+            <a:r>
+              <a:rPr lang="en-US" sz="1500" dirty="0">
+                <a:solidFill>
+                  <a:srgbClr val="52525B"/>
+                </a:solidFill>
+                <a:latin typeface="Arial" pitchFamily="34" charset="0"/>
+                <a:ea typeface="Arial" pitchFamily="34" charset="-122"/>
+                <a:cs typeface="Arial" pitchFamily="34" charset="-120"/>
+              </a:rPr>
+              <a:t>Big decisions wait for your answer</a:t>
+            </a:r>
+            <a:endParaRPr lang="en-US" sz="1500" dirty="0"/>
+          </a:p>
+          <a:p>
+            <a:pPr marL="342900" indent="-342900">
+              <a:spcAft>
+                <a:spcPts val="600"/>
+              </a:spcAft>
+              <a:buSzPct val="100000"/>
+              <a:buChar char="•"/>
+            </a:pPr>
+            <a:r>
+              <a:rPr lang="en-US" sz="1500" dirty="0">
+                <a:solidFill>
+                  <a:srgbClr val="52525B"/>
+                </a:solidFill>
+                <a:latin typeface="Arial" pitchFamily="34" charset="0"/>
+                <a:ea typeface="Arial" pitchFamily="34" charset="-122"/>
+                <a:cs typeface="Arial" pitchFamily="34" charset="-120"/>
+              </a:rPr>
+              <a:t>Smaller ones time out, and the agent records that it went ahead</a:t>
+            </a:r>
+            <a:endParaRPr lang="en-US" sz="1500" dirty="0"/>
+          </a:p>
+        </p:txBody>
+      </p:sp>
+      <p:sp>
+        <p:nvSpPr>
+          <p:cNvPr id="13" name="Shape 11"/>
+          <p:cNvSpPr/>
+          <p:nvPr/>
+        </p:nvSpPr>
+        <p:spPr>
+          <a:xfrm>
+            <a:off x="6233008" y="4114800"/>
+            <a:ext cx="5318608" cy="2011680"/>
+          </a:xfrm>
+          <a:prstGeom prst="roundRect">
+            <a:avLst>
+              <a:gd name="adj" fmla="val 5455"/>
+            </a:avLst>
+          </a:prstGeom>
+          <a:solidFill>
+            <a:srgbClr val="FFFFFF"/>
+          </a:solidFill>
+          <a:ln w="9525">
+            <a:solidFill>
+              <a:srgbClr val="E4E4E7"/>
+            </a:solidFill>
+            <a:prstDash val="solid"/>
+          </a:ln>
+        </p:spPr>
+      </p:sp>
+      <p:sp>
+        <p:nvSpPr>
+          <p:cNvPr id="14" name="Text 12"/>
+          <p:cNvSpPr txBox="1"/>
+          <p:nvPr/>
+        </p:nvSpPr>
+        <p:spPr>
+          <a:xfrm>
+            <a:off x="6507328" y="4297680"/>
+            <a:ext cx="4769968" cy="457200"/>
+          </a:xfrm>
+          <a:prstGeom prst="rect">
+            <a:avLst/>
+          </a:prstGeom>
+          <a:noFill/>
+          <a:ln/>
+        </p:spPr>
+        <p:txBody>
+          <a:bodyPr wrap="square" lIns="0" tIns="0" rIns="0" bIns="0" rtlCol="0" anchor="ctr"/>
+          <a:lstStyle/>
+          <a:p>
+            <a:pPr indent="0" marL="0">
+              <a:buNone/>
+            </a:pPr>
+            <a:r>
+              <a:rPr lang="en-US" sz="2100" b="1" dirty="0">
+                <a:solidFill>
+                  <a:srgbClr val="18181B"/>
+                </a:solidFill>
+                <a:latin typeface="Arial" pitchFamily="34" charset="0"/>
+                <a:ea typeface="Arial" pitchFamily="34" charset="-122"/>
+                <a:cs typeface="Arial" pitchFamily="34" charset="-120"/>
+              </a:rPr>
+              <a:t>Done gets a second look</a:t>
+            </a:r>
+            <a:endParaRPr lang="en-US" sz="2100" dirty="0"/>
+          </a:p>
+        </p:txBody>
+      </p:sp>
+      <p:sp>
+        <p:nvSpPr>
+          <p:cNvPr id="15" name="Text 13"/>
+          <p:cNvSpPr txBox="1"/>
+          <p:nvPr/>
+        </p:nvSpPr>
+        <p:spPr>
+          <a:xfrm>
+            <a:off x="6507328" y="4846320"/>
+            <a:ext cx="4769968" cy="1188720"/>
+          </a:xfrm>
+          <a:prstGeom prst="rect">
+            <a:avLst/>
+          </a:prstGeom>
+          <a:noFill/>
+          <a:ln/>
+        </p:spPr>
+        <p:txBody>
+          <a:bodyPr wrap="square" lIns="0" tIns="0" rIns="0" bIns="0" rtlCol="0" anchor="t"/>
+          <a:lstStyle/>
+          <a:p>
+            <a:pPr marL="342900" indent="-342900">
+              <a:spcAft>
+                <a:spcPts val="600"/>
+              </a:spcAft>
+              <a:buSzPct val="100000"/>
+              <a:buChar char="•"/>
+            </a:pPr>
+            <a:r>
+              <a:rPr lang="en-US" sz="1500" dirty="0">
+                <a:solidFill>
+                  <a:srgbClr val="52525B"/>
+                </a:solidFill>
+                <a:latin typeface="Arial" pitchFamily="34" charset="0"/>
+                <a:ea typeface="Arial" pitchFamily="34" charset="-122"/>
+                <a:cs typeface="Arial" pitchFamily="34" charset="-120"/>
+              </a:rPr>
+              <a:t>The builder submits</a:t>
+            </a:r>
+            <a:endParaRPr lang="en-US" sz="1500" dirty="0"/>
+          </a:p>
+          <a:p>
+            <a:pPr marL="342900" indent="-342900">
+              <a:spcAft>
+                <a:spcPts val="600"/>
+              </a:spcAft>
+              <a:buSzPct val="100000"/>
+              <a:buChar char="•"/>
+            </a:pPr>
+            <a:r>
+              <a:rPr lang="en-US" sz="1500" dirty="0">
+                <a:solidFill>
+                  <a:srgbClr val="52525B"/>
+                </a:solidFill>
+                <a:latin typeface="Arial" pitchFamily="34" charset="0"/>
+                <a:ea typeface="Arial" pitchFamily="34" charset="-122"/>
+                <a:cs typeface="Arial" pitchFamily="34" charset="-120"/>
+              </a:rPr>
+              <a:t>Another member checks the outcome, cross-family if available</a:t>
+            </a:r>
+            <a:endParaRPr lang="en-US" sz="1500" dirty="0"/>
           </a:p>
         </p:txBody>
       </p:sp>
@@ -3557,6 +4169,140 @@
 <file path=ppt/slides/slide4.xml><?xml version="1.0" encoding="utf-8"?>
 <p:sld xmlns:a="http://schemas.openxmlformats.org/drawingml/2006/main" xmlns:r="http://schemas.openxmlformats.org/officeDocument/2006/relationships" xmlns:p="http://schemas.openxmlformats.org/presentationml/2006/main">
   <p:cSld name="Slide 4">
+    <p:bg>
+      <p:bgPr>
+        <a:solidFill>
+          <a:srgbClr val="F4F4F5"/>
+        </a:solidFill>
+      </p:bgPr>
+    </p:bg>
+    <p:spTree>
+      <p:nvGrpSpPr>
+        <p:cNvPr id="1" name=""/>
+        <p:cNvGrpSpPr/>
+        <p:nvPr/>
+      </p:nvGrpSpPr>
+      <p:grpSpPr>
+        <a:xfrm>
+          <a:off x="0" y="0"/>
+          <a:ext cx="0" cy="0"/>
+          <a:chOff x="0" y="0"/>
+          <a:chExt cx="0" cy="0"/>
+        </a:xfrm>
+      </p:grpSpPr>
+      <p:sp>
+        <p:nvSpPr>
+          <p:cNvPr id="2" name="Text 0"/>
+          <p:cNvSpPr txBox="1"/>
+          <p:nvPr/>
+        </p:nvSpPr>
+        <p:spPr>
+          <a:xfrm>
+            <a:off x="640080" y="502920"/>
+            <a:ext cx="10911535" cy="320040"/>
+          </a:xfrm>
+          <a:prstGeom prst="rect">
+            <a:avLst/>
+          </a:prstGeom>
+          <a:noFill/>
+          <a:ln/>
+        </p:spPr>
+        <p:txBody>
+          <a:bodyPr wrap="square" lIns="0" tIns="0" rIns="0" bIns="0" rtlCol="0" anchor="ctr"/>
+          <a:lstStyle/>
+          <a:p>
+            <a:pPr indent="0" marL="0">
+              <a:buNone/>
+            </a:pPr>
+            <a:r>
+              <a:rPr lang="en-US" sz="1300" spc="400" kern="0" dirty="0">
+                <a:solidFill>
+                  <a:srgbClr val="7A5A06"/>
+                </a:solidFill>
+                <a:latin typeface="Courier New" pitchFamily="34" charset="0"/>
+                <a:ea typeface="Courier New" pitchFamily="34" charset="-122"/>
+                <a:cs typeface="Courier New" pitchFamily="34" charset="-120"/>
+              </a:rPr>
+              <a:t>HOW EVERY MEMBER WORKS</a:t>
+            </a:r>
+            <a:endParaRPr lang="en-US" sz="1300" dirty="0"/>
+          </a:p>
+        </p:txBody>
+      </p:sp>
+      <p:sp>
+        <p:nvSpPr>
+          <p:cNvPr id="3" name="Text 1"/>
+          <p:cNvSpPr txBox="1"/>
+          <p:nvPr/>
+        </p:nvSpPr>
+        <p:spPr>
+          <a:xfrm>
+            <a:off x="640080" y="868680"/>
+            <a:ext cx="10911535" cy="731520"/>
+          </a:xfrm>
+          <a:prstGeom prst="rect">
+            <a:avLst/>
+          </a:prstGeom>
+          <a:noFill/>
+          <a:ln/>
+        </p:spPr>
+        <p:txBody>
+          <a:bodyPr wrap="square" lIns="0" tIns="0" rIns="0" bIns="0" rtlCol="0" anchor="ctr"/>
+          <a:lstStyle/>
+          <a:p>
+            <a:pPr indent="0" marL="0">
+              <a:buNone/>
+            </a:pPr>
+            <a:r>
+              <a:rPr lang="en-US" sz="3600" b="1" dirty="0">
+                <a:solidFill>
+                  <a:srgbClr val="18181B"/>
+                </a:solidFill>
+                <a:latin typeface="Arial" pitchFamily="34" charset="0"/>
+                <a:ea typeface="Arial" pitchFamily="34" charset="-122"/>
+                <a:cs typeface="Arial" pitchFamily="34" charset="-120"/>
+              </a:rPr>
+              <a:t>A day in the life of a musterd member.</a:t>
+            </a:r>
+            <a:endParaRPr lang="en-US" sz="3600" dirty="0"/>
+          </a:p>
+        </p:txBody>
+      </p:sp>
+      <p:pic>
+        <p:nvPicPr>
+          <p:cNvPr id="4" name="Image 0" descr="img/graph.png">    </p:cNvPr>
+          <p:cNvPicPr>
+            <a:picLocks noChangeAspect="1"/>
+          </p:cNvPicPr>
+          <p:nvPr/>
+        </p:nvPicPr>
+        <p:blipFill>
+          <a:blip r:embed="rId1"/>
+          <a:stretch>
+            <a:fillRect/>
+          </a:stretch>
+        </p:blipFill>
+        <p:spPr>
+          <a:xfrm>
+            <a:off x="640080" y="1828800"/>
+            <a:ext cx="10693304" cy="5346652"/>
+          </a:xfrm>
+          <a:prstGeom prst="rect">
+            <a:avLst/>
+          </a:prstGeom>
+        </p:spPr>
+      </p:pic>
+    </p:spTree>
+  </p:cSld>
+  <p:clrMapOvr>
+    <a:masterClrMapping/>
+  </p:clrMapOvr>
+</p:sld>
+</file>
+
+<file path=ppt/slides/slide5.xml><?xml version="1.0" encoding="utf-8"?>
+<p:sld xmlns:a="http://schemas.openxmlformats.org/drawingml/2006/main" xmlns:r="http://schemas.openxmlformats.org/officeDocument/2006/relationships" xmlns:p="http://schemas.openxmlformats.org/presentationml/2006/main">
+  <p:cSld name="Slide 5">
     <p:bg>
       <p:bgPr>
         <a:solidFill>
@@ -3586,8 +4332,8 @@
         </p:nvSpPr>
         <p:spPr>
           <a:xfrm>
-            <a:off x="640080" y="548640"/>
-            <a:ext cx="10911535" cy="365760"/>
+            <a:off x="640080" y="502920"/>
+            <a:ext cx="10911535" cy="320040"/>
           </a:xfrm>
           <a:prstGeom prst="rect">
             <a:avLst/>
@@ -3611,7 +4357,7 @@
                 <a:ea typeface="Courier New" pitchFamily="34" charset="-122"/>
                 <a:cs typeface="Courier New" pitchFamily="34" charset="-120"/>
               </a:rPr>
-              <a:t>THE THESIS</a:t>
+              <a:t>UNDER THE HOOD</a:t>
             </a:r>
             <a:endParaRPr lang="en-US" sz="1300" dirty="0"/>
           </a:p>
@@ -3625,8 +4371,8 @@
         </p:nvSpPr>
         <p:spPr>
           <a:xfrm>
-            <a:off x="640080" y="1097280"/>
-            <a:ext cx="10911535" cy="822960"/>
+            <a:off x="640080" y="868680"/>
+            <a:ext cx="10911535" cy="731520"/>
           </a:xfrm>
           <a:prstGeom prst="rect">
             <a:avLst/>
@@ -3642,7 +4388,7 @@
               <a:buNone/>
             </a:pPr>
             <a:r>
-              <a:rPr lang="en-US" sz="4000" b="1" dirty="0">
+              <a:rPr lang="en-US" sz="3600" b="1" dirty="0">
                 <a:solidFill>
                   <a:srgbClr val="18181B"/>
                 </a:solidFill>
@@ -3650,9 +4396,9 @@
                 <a:ea typeface="Arial" pitchFamily="34" charset="-122"/>
                 <a:cs typeface="Arial" pitchFamily="34" charset="-120"/>
               </a:rPr>
-              <a:t>A persistent team is the primitive.</a:t>
-            </a:r>
-            <a:endParaRPr lang="en-US" sz="4000" dirty="0"/>
+              <a:t>What a musterd team is made of.</a:t>
+            </a:r>
+            <a:endParaRPr lang="en-US" sz="3600" dirty="0"/>
           </a:p>
         </p:txBody>
       </p:sp>
@@ -3664,18 +4410,20 @@
         </p:nvSpPr>
         <p:spPr>
           <a:xfrm>
-            <a:off x="640080" y="2377440"/>
-            <a:ext cx="3271418" cy="36576"/>
-          </a:xfrm>
-          <a:prstGeom prst="rect">
-            <a:avLst/>
+            <a:off x="640080" y="1828800"/>
+            <a:ext cx="384048" cy="384048"/>
+          </a:xfrm>
+          <a:prstGeom prst="roundRect">
+            <a:avLst>
+              <a:gd name="adj" fmla="val 23810"/>
+            </a:avLst>
           </a:prstGeom>
           <a:solidFill>
-            <a:srgbClr val="E1AD01"/>
+            <a:srgbClr val="A855F7"/>
           </a:solidFill>
           <a:ln w="12700">
             <a:solidFill>
-              <a:srgbClr val="E1AD01"/>
+              <a:srgbClr val="A855F7"/>
             </a:solidFill>
             <a:prstDash val="solid"/>
           </a:ln>
@@ -3689,8 +4437,8 @@
         </p:nvSpPr>
         <p:spPr>
           <a:xfrm>
-            <a:off x="640080" y="2606040"/>
-            <a:ext cx="3271418" cy="457200"/>
+            <a:off x="1143000" y="1828800"/>
+            <a:ext cx="2087804" cy="384048"/>
           </a:xfrm>
           <a:prstGeom prst="rect">
             <a:avLst/>
@@ -3706,30 +4454,57 @@
               <a:buNone/>
             </a:pPr>
             <a:r>
-              <a:rPr lang="en-US" sz="2000" b="1" dirty="0">
-                <a:solidFill>
-                  <a:srgbClr val="7A5A06"/>
-                </a:solidFill>
-                <a:latin typeface="Arial" pitchFamily="34" charset="0"/>
-                <a:ea typeface="Arial" pitchFamily="34" charset="-122"/>
-                <a:cs typeface="Arial" pitchFamily="34" charset="-120"/>
-              </a:rPr>
-              <a:t>A persistent roster</a:t>
-            </a:r>
-            <a:endParaRPr lang="en-US" sz="2000" dirty="0"/>
-          </a:p>
-        </p:txBody>
-      </p:sp>
-      <p:sp>
-        <p:nvSpPr>
-          <p:cNvPr id="6" name="Text 4"/>
-          <p:cNvSpPr txBox="1"/>
-          <p:nvPr/>
-        </p:nvSpPr>
-        <p:spPr>
-          <a:xfrm>
-            <a:off x="640080" y="3154680"/>
-            <a:ext cx="3271418" cy="1645920"/>
+              <a:rPr lang="en-US" sz="1700" b="1" dirty="0">
+                <a:solidFill>
+                  <a:srgbClr val="18181B"/>
+                </a:solidFill>
+                <a:latin typeface="Arial" pitchFamily="34" charset="0"/>
+                <a:ea typeface="Arial" pitchFamily="34" charset="-122"/>
+                <a:cs typeface="Arial" pitchFamily="34" charset="-120"/>
+              </a:rPr>
+              <a:t>Who is on it</a:t>
+            </a:r>
+            <a:endParaRPr lang="en-US" sz="1700" dirty="0"/>
+          </a:p>
+        </p:txBody>
+      </p:sp>
+      <p:sp>
+        <p:nvSpPr>
+          <p:cNvPr id="6" name="Shape 4"/>
+          <p:cNvSpPr/>
+          <p:nvPr/>
+        </p:nvSpPr>
+        <p:spPr>
+          <a:xfrm>
+            <a:off x="640080" y="2423160"/>
+            <a:ext cx="2590724" cy="1188720"/>
+          </a:xfrm>
+          <a:prstGeom prst="roundRect">
+            <a:avLst>
+              <a:gd name="adj" fmla="val 9231"/>
+            </a:avLst>
+          </a:prstGeom>
+          <a:solidFill>
+            <a:srgbClr val="FFFFFF"/>
+          </a:solidFill>
+          <a:ln w="9525">
+            <a:solidFill>
+              <a:srgbClr val="E4E4E7"/>
+            </a:solidFill>
+            <a:prstDash val="solid"/>
+          </a:ln>
+        </p:spPr>
+      </p:sp>
+      <p:sp>
+        <p:nvSpPr>
+          <p:cNvPr id="7" name="Text 5"/>
+          <p:cNvSpPr txBox="1"/>
+          <p:nvPr/>
+        </p:nvSpPr>
+        <p:spPr>
+          <a:xfrm>
+            <a:off x="822960" y="2532888"/>
+            <a:ext cx="2224964" cy="969264"/>
           </a:xfrm>
           <a:prstGeom prst="rect">
             <a:avLst/>
@@ -3742,13 +4517,27 @@
           <a:lstStyle/>
           <a:p>
             <a:pPr indent="0" marL="0">
-              <a:spcAft>
-                <a:spcPts val="600"/>
-              </a:spcAft>
-              <a:buNone/>
-            </a:pPr>
-            <a:r>
-              <a:rPr lang="en-US" sz="1700" dirty="0">
+              <a:buNone/>
+            </a:pPr>
+            <a:r>
+              <a:rPr lang="en-US" sz="1600" b="1" dirty="0">
+                <a:solidFill>
+                  <a:srgbClr val="18181B"/>
+                </a:solidFill>
+                <a:latin typeface="Arial" pitchFamily="34" charset="0"/>
+                <a:ea typeface="Arial" pitchFamily="34" charset="-122"/>
+                <a:cs typeface="Arial" pitchFamily="34" charset="-120"/>
+              </a:rPr>
+              <a:t>Seats</a:t>
+            </a:r>
+            <a:endParaRPr lang="en-US" sz="1600" dirty="0"/>
+          </a:p>
+          <a:p>
+            <a:pPr indent="0" marL="0">
+              <a:buNone/>
+            </a:pPr>
+            <a:r>
+              <a:rPr lang="en-US" sz="1300" dirty="0">
                 <a:solidFill>
                   <a:srgbClr val="52525B"/>
                 </a:solidFill>
@@ -3756,32 +4545,200 @@
                 <a:ea typeface="Arial" pitchFamily="34" charset="-122"/>
                 <a:cs typeface="Arial" pitchFamily="34" charset="-120"/>
               </a:rPr>
-              <a:t>A member outlasts every session it runs in. Its inbox, lanes and record survive a restart.</a:t>
-            </a:r>
-            <a:endParaRPr lang="en-US" sz="1700" dirty="0"/>
-          </a:p>
-        </p:txBody>
-      </p:sp>
-      <p:sp>
-        <p:nvSpPr>
-          <p:cNvPr id="7" name="Shape 5"/>
+              <a:t>A member’s durable position. It stays while they’re away.</a:t>
+            </a:r>
+            <a:endParaRPr lang="en-US" sz="1600" dirty="0"/>
+          </a:p>
+        </p:txBody>
+      </p:sp>
+      <p:sp>
+        <p:nvSpPr>
+          <p:cNvPr id="8" name="Shape 6"/>
           <p:cNvSpPr/>
           <p:nvPr/>
         </p:nvSpPr>
         <p:spPr>
           <a:xfrm>
-            <a:off x="4460138" y="2377440"/>
-            <a:ext cx="3271418" cy="36576"/>
-          </a:xfrm>
-          <a:prstGeom prst="rect">
-            <a:avLst/>
+            <a:off x="640080" y="3749040"/>
+            <a:ext cx="2590724" cy="1188720"/>
+          </a:xfrm>
+          <a:prstGeom prst="roundRect">
+            <a:avLst>
+              <a:gd name="adj" fmla="val 9231"/>
+            </a:avLst>
           </a:prstGeom>
           <a:solidFill>
-            <a:srgbClr val="E1AD01"/>
+            <a:srgbClr val="FFFFFF"/>
+          </a:solidFill>
+          <a:ln w="9525">
+            <a:solidFill>
+              <a:srgbClr val="E4E4E7"/>
+            </a:solidFill>
+            <a:prstDash val="solid"/>
+          </a:ln>
+        </p:spPr>
+      </p:sp>
+      <p:sp>
+        <p:nvSpPr>
+          <p:cNvPr id="9" name="Text 7"/>
+          <p:cNvSpPr txBox="1"/>
+          <p:nvPr/>
+        </p:nvSpPr>
+        <p:spPr>
+          <a:xfrm>
+            <a:off x="822960" y="3858768"/>
+            <a:ext cx="2224964" cy="969264"/>
+          </a:xfrm>
+          <a:prstGeom prst="rect">
+            <a:avLst/>
+          </a:prstGeom>
+          <a:noFill/>
+          <a:ln/>
+        </p:spPr>
+        <p:txBody>
+          <a:bodyPr wrap="square" lIns="0" tIns="0" rIns="0" bIns="0" rtlCol="0" anchor="t"/>
+          <a:lstStyle/>
+          <a:p>
+            <a:pPr indent="0" marL="0">
+              <a:buNone/>
+            </a:pPr>
+            <a:r>
+              <a:rPr lang="en-US" sz="1600" b="1" dirty="0">
+                <a:solidFill>
+                  <a:srgbClr val="18181B"/>
+                </a:solidFill>
+                <a:latin typeface="Arial" pitchFamily="34" charset="0"/>
+                <a:ea typeface="Arial" pitchFamily="34" charset="-122"/>
+                <a:cs typeface="Arial" pitchFamily="34" charset="-120"/>
+              </a:rPr>
+              <a:t>Roles</a:t>
+            </a:r>
+            <a:endParaRPr lang="en-US" sz="1600" dirty="0"/>
+          </a:p>
+          <a:p>
+            <a:pPr indent="0" marL="0">
+              <a:buNone/>
+            </a:pPr>
+            <a:r>
+              <a:rPr lang="en-US" sz="1300" dirty="0">
+                <a:solidFill>
+                  <a:srgbClr val="52525B"/>
+                </a:solidFill>
+                <a:latin typeface="Arial" pitchFamily="34" charset="0"/>
+                <a:ea typeface="Arial" pitchFamily="34" charset="-122"/>
+                <a:cs typeface="Arial" pitchFamily="34" charset="-120"/>
+              </a:rPr>
+              <a:t>A charter the team grants: designer, platform, security.</a:t>
+            </a:r>
+            <a:endParaRPr lang="en-US" sz="1600" dirty="0"/>
+          </a:p>
+        </p:txBody>
+      </p:sp>
+      <p:sp>
+        <p:nvSpPr>
+          <p:cNvPr id="10" name="Shape 8"/>
+          <p:cNvSpPr/>
+          <p:nvPr/>
+        </p:nvSpPr>
+        <p:spPr>
+          <a:xfrm>
+            <a:off x="640080" y="5074920"/>
+            <a:ext cx="2590724" cy="1188720"/>
+          </a:xfrm>
+          <a:prstGeom prst="roundRect">
+            <a:avLst>
+              <a:gd name="adj" fmla="val 9231"/>
+            </a:avLst>
+          </a:prstGeom>
+          <a:solidFill>
+            <a:srgbClr val="FFFFFF"/>
+          </a:solidFill>
+          <a:ln w="9525">
+            <a:solidFill>
+              <a:srgbClr val="E4E4E7"/>
+            </a:solidFill>
+            <a:prstDash val="solid"/>
+          </a:ln>
+        </p:spPr>
+      </p:sp>
+      <p:sp>
+        <p:nvSpPr>
+          <p:cNvPr id="11" name="Text 9"/>
+          <p:cNvSpPr txBox="1"/>
+          <p:nvPr/>
+        </p:nvSpPr>
+        <p:spPr>
+          <a:xfrm>
+            <a:off x="822960" y="5184648"/>
+            <a:ext cx="2224964" cy="969264"/>
+          </a:xfrm>
+          <a:prstGeom prst="rect">
+            <a:avLst/>
+          </a:prstGeom>
+          <a:noFill/>
+          <a:ln/>
+        </p:spPr>
+        <p:txBody>
+          <a:bodyPr wrap="square" lIns="0" tIns="0" rIns="0" bIns="0" rtlCol="0" anchor="t"/>
+          <a:lstStyle/>
+          <a:p>
+            <a:pPr indent="0" marL="0">
+              <a:buNone/>
+            </a:pPr>
+            <a:r>
+              <a:rPr lang="en-US" sz="1600" b="1" dirty="0">
+                <a:solidFill>
+                  <a:srgbClr val="18181B"/>
+                </a:solidFill>
+                <a:latin typeface="Arial" pitchFamily="34" charset="0"/>
+                <a:ea typeface="Arial" pitchFamily="34" charset="-122"/>
+                <a:cs typeface="Arial" pitchFamily="34" charset="-120"/>
+              </a:rPr>
+              <a:t>Humans</a:t>
+            </a:r>
+            <a:endParaRPr lang="en-US" sz="1600" dirty="0"/>
+          </a:p>
+          <a:p>
+            <a:pPr indent="0" marL="0">
+              <a:buNone/>
+            </a:pPr>
+            <a:r>
+              <a:rPr lang="en-US" sz="1300" dirty="0">
+                <a:solidFill>
+                  <a:srgbClr val="52525B"/>
+                </a:solidFill>
+                <a:latin typeface="Arial" pitchFamily="34" charset="0"/>
+                <a:ea typeface="Arial" pitchFamily="34" charset="-122"/>
+                <a:cs typeface="Arial" pitchFamily="34" charset="-120"/>
+              </a:rPr>
+              <a:t>On the same roster, with the same acts.</a:t>
+            </a:r>
+            <a:endParaRPr lang="en-US" sz="1600" dirty="0"/>
+          </a:p>
+        </p:txBody>
+      </p:sp>
+      <p:sp>
+        <p:nvSpPr>
+          <p:cNvPr id="12" name="Shape 10"/>
+          <p:cNvSpPr/>
+          <p:nvPr/>
+        </p:nvSpPr>
+        <p:spPr>
+          <a:xfrm>
+            <a:off x="3413684" y="1828800"/>
+            <a:ext cx="384048" cy="384048"/>
+          </a:xfrm>
+          <a:prstGeom prst="roundRect">
+            <a:avLst>
+              <a:gd name="adj" fmla="val 23810"/>
+            </a:avLst>
+          </a:prstGeom>
+          <a:solidFill>
+            <a:srgbClr val="2563EB"/>
           </a:solidFill>
           <a:ln w="12700">
             <a:solidFill>
-              <a:srgbClr val="E1AD01"/>
+              <a:srgbClr val="2563EB"/>
             </a:solidFill>
             <a:prstDash val="solid"/>
           </a:ln>
@@ -3789,14 +4746,14 @@
       </p:sp>
       <p:sp>
         <p:nvSpPr>
-          <p:cNvPr id="8" name="Text 6"/>
-          <p:cNvSpPr txBox="1"/>
-          <p:nvPr/>
-        </p:nvSpPr>
-        <p:spPr>
-          <a:xfrm>
-            <a:off x="4460138" y="2606040"/>
-            <a:ext cx="3271418" cy="457200"/>
+          <p:cNvPr id="13" name="Text 11"/>
+          <p:cNvSpPr txBox="1"/>
+          <p:nvPr/>
+        </p:nvSpPr>
+        <p:spPr>
+          <a:xfrm>
+            <a:off x="3916604" y="1828800"/>
+            <a:ext cx="2087804" cy="384048"/>
           </a:xfrm>
           <a:prstGeom prst="rect">
             <a:avLst/>
@@ -3812,30 +4769,57 @@
               <a:buNone/>
             </a:pPr>
             <a:r>
-              <a:rPr lang="en-US" sz="2000" b="1" dirty="0">
-                <a:solidFill>
-                  <a:srgbClr val="7A5A06"/>
-                </a:solidFill>
-                <a:latin typeface="Arial" pitchFamily="34" charset="0"/>
-                <a:ea typeface="Arial" pitchFamily="34" charset="-122"/>
-                <a:cs typeface="Arial" pitchFamily="34" charset="-120"/>
-              </a:rPr>
-              <a:t>One owner per lane</a:t>
-            </a:r>
-            <a:endParaRPr lang="en-US" sz="2000" dirty="0"/>
-          </a:p>
-        </p:txBody>
-      </p:sp>
-      <p:sp>
-        <p:nvSpPr>
-          <p:cNvPr id="9" name="Text 7"/>
-          <p:cNvSpPr txBox="1"/>
-          <p:nvPr/>
-        </p:nvSpPr>
-        <p:spPr>
-          <a:xfrm>
-            <a:off x="4460138" y="3154680"/>
-            <a:ext cx="3271418" cy="1645920"/>
+              <a:rPr lang="en-US" sz="1700" b="1" dirty="0">
+                <a:solidFill>
+                  <a:srgbClr val="18181B"/>
+                </a:solidFill>
+                <a:latin typeface="Arial" pitchFamily="34" charset="0"/>
+                <a:ea typeface="Arial" pitchFamily="34" charset="-122"/>
+                <a:cs typeface="Arial" pitchFamily="34" charset="-120"/>
+              </a:rPr>
+              <a:t>Where they work</a:t>
+            </a:r>
+            <a:endParaRPr lang="en-US" sz="1700" dirty="0"/>
+          </a:p>
+        </p:txBody>
+      </p:sp>
+      <p:sp>
+        <p:nvSpPr>
+          <p:cNvPr id="14" name="Shape 12"/>
+          <p:cNvSpPr/>
+          <p:nvPr/>
+        </p:nvSpPr>
+        <p:spPr>
+          <a:xfrm>
+            <a:off x="3413684" y="2423160"/>
+            <a:ext cx="2590724" cy="1188720"/>
+          </a:xfrm>
+          <a:prstGeom prst="roundRect">
+            <a:avLst>
+              <a:gd name="adj" fmla="val 9231"/>
+            </a:avLst>
+          </a:prstGeom>
+          <a:solidFill>
+            <a:srgbClr val="FFFFFF"/>
+          </a:solidFill>
+          <a:ln w="9525">
+            <a:solidFill>
+              <a:srgbClr val="E4E4E7"/>
+            </a:solidFill>
+            <a:prstDash val="solid"/>
+          </a:ln>
+        </p:spPr>
+      </p:sp>
+      <p:sp>
+        <p:nvSpPr>
+          <p:cNvPr id="15" name="Text 13"/>
+          <p:cNvSpPr txBox="1"/>
+          <p:nvPr/>
+        </p:nvSpPr>
+        <p:spPr>
+          <a:xfrm>
+            <a:off x="3596564" y="2532888"/>
+            <a:ext cx="2224964" cy="969264"/>
           </a:xfrm>
           <a:prstGeom prst="rect">
             <a:avLst/>
@@ -3848,13 +4832,27 @@
           <a:lstStyle/>
           <a:p>
             <a:pPr indent="0" marL="0">
-              <a:spcAft>
-                <a:spcPts val="600"/>
-              </a:spcAft>
-              <a:buNone/>
-            </a:pPr>
-            <a:r>
-              <a:rPr lang="en-US" sz="1700" dirty="0">
+              <a:buNone/>
+            </a:pPr>
+            <a:r>
+              <a:rPr lang="en-US" sz="1600" b="1" dirty="0">
+                <a:solidFill>
+                  <a:srgbClr val="18181B"/>
+                </a:solidFill>
+                <a:latin typeface="Arial" pitchFamily="34" charset="0"/>
+                <a:ea typeface="Arial" pitchFamily="34" charset="-122"/>
+                <a:cs typeface="Arial" pitchFamily="34" charset="-120"/>
+              </a:rPr>
+              <a:t>Workspaces</a:t>
+            </a:r>
+            <a:endParaRPr lang="en-US" sz="1600" dirty="0"/>
+          </a:p>
+          <a:p>
+            <a:pPr indent="0" marL="0">
+              <a:buNone/>
+            </a:pPr>
+            <a:r>
+              <a:rPr lang="en-US" sz="1300" dirty="0">
                 <a:solidFill>
                   <a:srgbClr val="52525B"/>
                 </a:solidFill>
@@ -3862,32 +4860,200 @@
                 <a:ea typeface="Arial" pitchFamily="34" charset="-122"/>
                 <a:cs typeface="Arial" pitchFamily="34" charset="-120"/>
               </a:rPr>
-              <a:t>Claimed before the first edit. Two lanes touching the same files get a warning at claim time.</a:t>
-            </a:r>
-            <a:endParaRPr lang="en-US" sz="1700" dirty="0"/>
-          </a:p>
-        </p:txBody>
-      </p:sp>
-      <p:sp>
-        <p:nvSpPr>
-          <p:cNvPr id="10" name="Shape 8"/>
+              <a:t>Each seat works in its own folder, or its own git worktree if you want one.</a:t>
+            </a:r>
+            <a:endParaRPr lang="en-US" sz="1600" dirty="0"/>
+          </a:p>
+        </p:txBody>
+      </p:sp>
+      <p:sp>
+        <p:nvSpPr>
+          <p:cNvPr id="16" name="Shape 14"/>
           <p:cNvSpPr/>
           <p:nvPr/>
         </p:nvSpPr>
         <p:spPr>
           <a:xfrm>
-            <a:off x="8280197" y="2377440"/>
-            <a:ext cx="3271418" cy="36576"/>
-          </a:xfrm>
-          <a:prstGeom prst="rect">
-            <a:avLst/>
+            <a:off x="3413684" y="3749040"/>
+            <a:ext cx="2590724" cy="1188720"/>
+          </a:xfrm>
+          <a:prstGeom prst="roundRect">
+            <a:avLst>
+              <a:gd name="adj" fmla="val 9231"/>
+            </a:avLst>
           </a:prstGeom>
           <a:solidFill>
-            <a:srgbClr val="E1AD01"/>
+            <a:srgbClr val="FFFFFF"/>
+          </a:solidFill>
+          <a:ln w="9525">
+            <a:solidFill>
+              <a:srgbClr val="E4E4E7"/>
+            </a:solidFill>
+            <a:prstDash val="solid"/>
+          </a:ln>
+        </p:spPr>
+      </p:sp>
+      <p:sp>
+        <p:nvSpPr>
+          <p:cNvPr id="17" name="Text 15"/>
+          <p:cNvSpPr txBox="1"/>
+          <p:nvPr/>
+        </p:nvSpPr>
+        <p:spPr>
+          <a:xfrm>
+            <a:off x="3596564" y="3858768"/>
+            <a:ext cx="2224964" cy="969264"/>
+          </a:xfrm>
+          <a:prstGeom prst="rect">
+            <a:avLst/>
+          </a:prstGeom>
+          <a:noFill/>
+          <a:ln/>
+        </p:spPr>
+        <p:txBody>
+          <a:bodyPr wrap="square" lIns="0" tIns="0" rIns="0" bIns="0" rtlCol="0" anchor="t"/>
+          <a:lstStyle/>
+          <a:p>
+            <a:pPr indent="0" marL="0">
+              <a:buNone/>
+            </a:pPr>
+            <a:r>
+              <a:rPr lang="en-US" sz="1600" b="1" dirty="0">
+                <a:solidFill>
+                  <a:srgbClr val="18181B"/>
+                </a:solidFill>
+                <a:latin typeface="Arial" pitchFamily="34" charset="0"/>
+                <a:ea typeface="Arial" pitchFamily="34" charset="-122"/>
+                <a:cs typeface="Arial" pitchFamily="34" charset="-120"/>
+              </a:rPr>
+              <a:t>Toolkits</a:t>
+            </a:r>
+            <a:endParaRPr lang="en-US" sz="1600" dirty="0"/>
+          </a:p>
+          <a:p>
+            <a:pPr indent="0" marL="0">
+              <a:buNone/>
+            </a:pPr>
+            <a:r>
+              <a:rPr lang="en-US" sz="1300" dirty="0">
+                <a:solidFill>
+                  <a:srgbClr val="52525B"/>
+                </a:solidFill>
+                <a:latin typeface="Arial" pitchFamily="34" charset="0"/>
+                <a:ea typeface="Arial" pitchFamily="34" charset="-122"/>
+                <a:cs typeface="Arial" pitchFamily="34" charset="-120"/>
+              </a:rPr>
+              <a:t>The MCP servers and tools a workspace is equipped with.</a:t>
+            </a:r>
+            <a:endParaRPr lang="en-US" sz="1600" dirty="0"/>
+          </a:p>
+        </p:txBody>
+      </p:sp>
+      <p:sp>
+        <p:nvSpPr>
+          <p:cNvPr id="18" name="Shape 16"/>
+          <p:cNvSpPr/>
+          <p:nvPr/>
+        </p:nvSpPr>
+        <p:spPr>
+          <a:xfrm>
+            <a:off x="3413684" y="5074920"/>
+            <a:ext cx="2590724" cy="1188720"/>
+          </a:xfrm>
+          <a:prstGeom prst="roundRect">
+            <a:avLst>
+              <a:gd name="adj" fmla="val 9231"/>
+            </a:avLst>
+          </a:prstGeom>
+          <a:solidFill>
+            <a:srgbClr val="FFFFFF"/>
+          </a:solidFill>
+          <a:ln w="9525">
+            <a:solidFill>
+              <a:srgbClr val="E4E4E7"/>
+            </a:solidFill>
+            <a:prstDash val="solid"/>
+          </a:ln>
+        </p:spPr>
+      </p:sp>
+      <p:sp>
+        <p:nvSpPr>
+          <p:cNvPr id="19" name="Text 17"/>
+          <p:cNvSpPr txBox="1"/>
+          <p:nvPr/>
+        </p:nvSpPr>
+        <p:spPr>
+          <a:xfrm>
+            <a:off x="3596564" y="5184648"/>
+            <a:ext cx="2224964" cy="969264"/>
+          </a:xfrm>
+          <a:prstGeom prst="rect">
+            <a:avLst/>
+          </a:prstGeom>
+          <a:noFill/>
+          <a:ln/>
+        </p:spPr>
+        <p:txBody>
+          <a:bodyPr wrap="square" lIns="0" tIns="0" rIns="0" bIns="0" rtlCol="0" anchor="t"/>
+          <a:lstStyle/>
+          <a:p>
+            <a:pPr indent="0" marL="0">
+              <a:buNone/>
+            </a:pPr>
+            <a:r>
+              <a:rPr lang="en-US" sz="1600" b="1" dirty="0">
+                <a:solidFill>
+                  <a:srgbClr val="18181B"/>
+                </a:solidFill>
+                <a:latin typeface="Arial" pitchFamily="34" charset="0"/>
+                <a:ea typeface="Arial" pitchFamily="34" charset="-122"/>
+                <a:cs typeface="Arial" pitchFamily="34" charset="-120"/>
+              </a:rPr>
+              <a:t>Skills &amp; hooks</a:t>
+            </a:r>
+            <a:endParaRPr lang="en-US" sz="1600" dirty="0"/>
+          </a:p>
+          <a:p>
+            <a:pPr indent="0" marL="0">
+              <a:buNone/>
+            </a:pPr>
+            <a:r>
+              <a:rPr lang="en-US" sz="1300" dirty="0">
+                <a:solidFill>
+                  <a:srgbClr val="52525B"/>
+                </a:solidFill>
+                <a:latin typeface="Arial" pitchFamily="34" charset="0"/>
+                <a:ea typeface="Arial" pitchFamily="34" charset="-122"/>
+                <a:cs typeface="Arial" pitchFamily="34" charset="-120"/>
+              </a:rPr>
+              <a:t>Teach the rules, and remind the agent at the right moment.</a:t>
+            </a:r>
+            <a:endParaRPr lang="en-US" sz="1600" dirty="0"/>
+          </a:p>
+        </p:txBody>
+      </p:sp>
+      <p:sp>
+        <p:nvSpPr>
+          <p:cNvPr id="20" name="Shape 18"/>
+          <p:cNvSpPr/>
+          <p:nvPr/>
+        </p:nvSpPr>
+        <p:spPr>
+          <a:xfrm>
+            <a:off x="6187288" y="1828800"/>
+            <a:ext cx="384048" cy="384048"/>
+          </a:xfrm>
+          <a:prstGeom prst="roundRect">
+            <a:avLst>
+              <a:gd name="adj" fmla="val 23810"/>
+            </a:avLst>
+          </a:prstGeom>
+          <a:solidFill>
+            <a:srgbClr val="DC2626"/>
           </a:solidFill>
           <a:ln w="12700">
             <a:solidFill>
-              <a:srgbClr val="E1AD01"/>
+              <a:srgbClr val="DC2626"/>
             </a:solidFill>
             <a:prstDash val="solid"/>
           </a:ln>
@@ -3895,14 +5061,14 @@
       </p:sp>
       <p:sp>
         <p:nvSpPr>
-          <p:cNvPr id="11" name="Text 9"/>
-          <p:cNvSpPr txBox="1"/>
-          <p:nvPr/>
-        </p:nvSpPr>
-        <p:spPr>
-          <a:xfrm>
-            <a:off x="8280197" y="2606040"/>
-            <a:ext cx="3271418" cy="457200"/>
+          <p:cNvPr id="21" name="Text 19"/>
+          <p:cNvSpPr txBox="1"/>
+          <p:nvPr/>
+        </p:nvSpPr>
+        <p:spPr>
+          <a:xfrm>
+            <a:off x="6690208" y="1828800"/>
+            <a:ext cx="2087804" cy="384048"/>
           </a:xfrm>
           <a:prstGeom prst="rect">
             <a:avLst/>
@@ -3918,30 +5084,57 @@
               <a:buNone/>
             </a:pPr>
             <a:r>
-              <a:rPr lang="en-US" sz="2000" b="1" dirty="0">
-                <a:solidFill>
-                  <a:srgbClr val="7A5A06"/>
-                </a:solidFill>
-                <a:latin typeface="Arial" pitchFamily="34" charset="0"/>
-                <a:ea typeface="Arial" pitchFamily="34" charset="-122"/>
-                <a:cs typeface="Arial" pitchFamily="34" charset="-120"/>
-              </a:rPr>
-              <a:t>Humans on the same roster</a:t>
-            </a:r>
-            <a:endParaRPr lang="en-US" sz="2000" dirty="0"/>
-          </a:p>
-        </p:txBody>
-      </p:sp>
-      <p:sp>
-        <p:nvSpPr>
-          <p:cNvPr id="12" name="Text 10"/>
-          <p:cNvSpPr txBox="1"/>
-          <p:nvPr/>
-        </p:nvSpPr>
-        <p:spPr>
-          <a:xfrm>
-            <a:off x="8280197" y="3154680"/>
-            <a:ext cx="3271418" cy="1645920"/>
+              <a:rPr lang="en-US" sz="1700" b="1" dirty="0">
+                <a:solidFill>
+                  <a:srgbClr val="18181B"/>
+                </a:solidFill>
+                <a:latin typeface="Arial" pitchFamily="34" charset="0"/>
+                <a:ea typeface="Arial" pitchFamily="34" charset="-122"/>
+                <a:cs typeface="Arial" pitchFamily="34" charset="-120"/>
+              </a:rPr>
+              <a:t>How work moves</a:t>
+            </a:r>
+            <a:endParaRPr lang="en-US" sz="1700" dirty="0"/>
+          </a:p>
+        </p:txBody>
+      </p:sp>
+      <p:sp>
+        <p:nvSpPr>
+          <p:cNvPr id="22" name="Shape 20"/>
+          <p:cNvSpPr/>
+          <p:nvPr/>
+        </p:nvSpPr>
+        <p:spPr>
+          <a:xfrm>
+            <a:off x="6187288" y="2423160"/>
+            <a:ext cx="2590724" cy="1188720"/>
+          </a:xfrm>
+          <a:prstGeom prst="roundRect">
+            <a:avLst>
+              <a:gd name="adj" fmla="val 9231"/>
+            </a:avLst>
+          </a:prstGeom>
+          <a:solidFill>
+            <a:srgbClr val="FFFFFF"/>
+          </a:solidFill>
+          <a:ln w="9525">
+            <a:solidFill>
+              <a:srgbClr val="E4E4E7"/>
+            </a:solidFill>
+            <a:prstDash val="solid"/>
+          </a:ln>
+        </p:spPr>
+      </p:sp>
+      <p:sp>
+        <p:nvSpPr>
+          <p:cNvPr id="23" name="Text 21"/>
+          <p:cNvSpPr txBox="1"/>
+          <p:nvPr/>
+        </p:nvSpPr>
+        <p:spPr>
+          <a:xfrm>
+            <a:off x="6370168" y="2532888"/>
+            <a:ext cx="2224964" cy="969264"/>
           </a:xfrm>
           <a:prstGeom prst="rect">
             <a:avLst/>
@@ -3954,13 +5147,27 @@
           <a:lstStyle/>
           <a:p>
             <a:pPr indent="0" marL="0">
-              <a:spcAft>
-                <a:spcPts val="600"/>
-              </a:spcAft>
-              <a:buNone/>
-            </a:pPr>
-            <a:r>
-              <a:rPr lang="en-US" sz="1700" dirty="0">
+              <a:buNone/>
+            </a:pPr>
+            <a:r>
+              <a:rPr lang="en-US" sz="1600" b="1" dirty="0">
+                <a:solidFill>
+                  <a:srgbClr val="18181B"/>
+                </a:solidFill>
+                <a:latin typeface="Arial" pitchFamily="34" charset="0"/>
+                <a:ea typeface="Arial" pitchFamily="34" charset="-122"/>
+                <a:cs typeface="Arial" pitchFamily="34" charset="-120"/>
+              </a:rPr>
+              <a:t>Goals &amp; lanes</a:t>
+            </a:r>
+            <a:endParaRPr lang="en-US" sz="1600" dirty="0"/>
+          </a:p>
+          <a:p>
+            <a:pPr indent="0" marL="0">
+              <a:buNone/>
+            </a:pPr>
+            <a:r>
+              <a:rPr lang="en-US" sz="1300" dirty="0">
                 <a:solidFill>
                   <a:srgbClr val="52525B"/>
                 </a:solidFill>
@@ -3968,9 +5175,490 @@
                 <a:ea typeface="Arial" pitchFamily="34" charset="-122"/>
                 <a:cs typeface="Arial" pitchFamily="34" charset="-120"/>
               </a:rPr>
-              <a:t>Same acts, same inbox. Agents bring you questions with a clock on them.</a:t>
+              <a:t>What the team is after, split into owned pieces.</a:t>
+            </a:r>
+            <a:endParaRPr lang="en-US" sz="1600" dirty="0"/>
+          </a:p>
+        </p:txBody>
+      </p:sp>
+      <p:sp>
+        <p:nvSpPr>
+          <p:cNvPr id="24" name="Shape 22"/>
+          <p:cNvSpPr/>
+          <p:nvPr/>
+        </p:nvSpPr>
+        <p:spPr>
+          <a:xfrm>
+            <a:off x="6187288" y="3749040"/>
+            <a:ext cx="2590724" cy="1188720"/>
+          </a:xfrm>
+          <a:prstGeom prst="roundRect">
+            <a:avLst>
+              <a:gd name="adj" fmla="val 9231"/>
+            </a:avLst>
+          </a:prstGeom>
+          <a:solidFill>
+            <a:srgbClr val="FFFFFF"/>
+          </a:solidFill>
+          <a:ln w="9525">
+            <a:solidFill>
+              <a:srgbClr val="E4E4E7"/>
+            </a:solidFill>
+            <a:prstDash val="solid"/>
+          </a:ln>
+        </p:spPr>
+      </p:sp>
+      <p:sp>
+        <p:nvSpPr>
+          <p:cNvPr id="25" name="Text 23"/>
+          <p:cNvSpPr txBox="1"/>
+          <p:nvPr/>
+        </p:nvSpPr>
+        <p:spPr>
+          <a:xfrm>
+            <a:off x="6370168" y="3858768"/>
+            <a:ext cx="2224964" cy="969264"/>
+          </a:xfrm>
+          <a:prstGeom prst="rect">
+            <a:avLst/>
+          </a:prstGeom>
+          <a:noFill/>
+          <a:ln/>
+        </p:spPr>
+        <p:txBody>
+          <a:bodyPr wrap="square" lIns="0" tIns="0" rIns="0" bIns="0" rtlCol="0" anchor="t"/>
+          <a:lstStyle/>
+          <a:p>
+            <a:pPr indent="0" marL="0">
+              <a:buNone/>
+            </a:pPr>
+            <a:r>
+              <a:rPr lang="en-US" sz="1600" b="1" dirty="0">
+                <a:solidFill>
+                  <a:srgbClr val="18181B"/>
+                </a:solidFill>
+                <a:latin typeface="Arial" pitchFamily="34" charset="0"/>
+                <a:ea typeface="Arial" pitchFamily="34" charset="-122"/>
+                <a:cs typeface="Arial" pitchFamily="34" charset="-120"/>
+              </a:rPr>
+              <a:t>The board</a:t>
+            </a:r>
+            <a:endParaRPr lang="en-US" sz="1600" dirty="0"/>
+          </a:p>
+          <a:p>
+            <a:pPr indent="0" marL="0">
+              <a:buNone/>
+            </a:pPr>
+            <a:r>
+              <a:rPr lang="en-US" sz="1300" dirty="0">
+                <a:solidFill>
+                  <a:srgbClr val="52525B"/>
+                </a:solidFill>
+                <a:latin typeface="Arial" pitchFamily="34" charset="0"/>
+                <a:ea typeface="Arial" pitchFamily="34" charset="-122"/>
+                <a:cs typeface="Arial" pitchFamily="34" charset="-120"/>
+              </a:rPr>
+              <a:t>Who owns what, what’s waiting on review, in a browser.</a:t>
+            </a:r>
+            <a:endParaRPr lang="en-US" sz="1600" dirty="0"/>
+          </a:p>
+        </p:txBody>
+      </p:sp>
+      <p:sp>
+        <p:nvSpPr>
+          <p:cNvPr id="26" name="Shape 24"/>
+          <p:cNvSpPr/>
+          <p:nvPr/>
+        </p:nvSpPr>
+        <p:spPr>
+          <a:xfrm>
+            <a:off x="6187288" y="5074920"/>
+            <a:ext cx="2590724" cy="1188720"/>
+          </a:xfrm>
+          <a:prstGeom prst="roundRect">
+            <a:avLst>
+              <a:gd name="adj" fmla="val 9231"/>
+            </a:avLst>
+          </a:prstGeom>
+          <a:solidFill>
+            <a:srgbClr val="FFFFFF"/>
+          </a:solidFill>
+          <a:ln w="9525">
+            <a:solidFill>
+              <a:srgbClr val="E4E4E7"/>
+            </a:solidFill>
+            <a:prstDash val="solid"/>
+          </a:ln>
+        </p:spPr>
+      </p:sp>
+      <p:sp>
+        <p:nvSpPr>
+          <p:cNvPr id="27" name="Text 25"/>
+          <p:cNvSpPr txBox="1"/>
+          <p:nvPr/>
+        </p:nvSpPr>
+        <p:spPr>
+          <a:xfrm>
+            <a:off x="6370168" y="5184648"/>
+            <a:ext cx="2224964" cy="969264"/>
+          </a:xfrm>
+          <a:prstGeom prst="rect">
+            <a:avLst/>
+          </a:prstGeom>
+          <a:noFill/>
+          <a:ln/>
+        </p:spPr>
+        <p:txBody>
+          <a:bodyPr wrap="square" lIns="0" tIns="0" rIns="0" bIns="0" rtlCol="0" anchor="t"/>
+          <a:lstStyle/>
+          <a:p>
+            <a:pPr indent="0" marL="0">
+              <a:buNone/>
+            </a:pPr>
+            <a:r>
+              <a:rPr lang="en-US" sz="1600" b="1" dirty="0">
+                <a:solidFill>
+                  <a:srgbClr val="18181B"/>
+                </a:solidFill>
+                <a:latin typeface="Arial" pitchFamily="34" charset="0"/>
+                <a:ea typeface="Arial" pitchFamily="34" charset="-122"/>
+                <a:cs typeface="Arial" pitchFamily="34" charset="-120"/>
+              </a:rPr>
+              <a:t>Huddles</a:t>
+            </a:r>
+            <a:endParaRPr lang="en-US" sz="1600" dirty="0"/>
+          </a:p>
+          <a:p>
+            <a:pPr indent="0" marL="0">
+              <a:buNone/>
+            </a:pPr>
+            <a:r>
+              <a:rPr lang="en-US" sz="1300" dirty="0">
+                <a:solidFill>
+                  <a:srgbClr val="52525B"/>
+                </a:solidFill>
+                <a:latin typeface="Arial" pitchFamily="34" charset="0"/>
+                <a:ea typeface="Arial" pitchFamily="34" charset="-122"/>
+                <a:cs typeface="Arial" pitchFamily="34" charset="-120"/>
+              </a:rPr>
+              <a:t>A few members work one question together, with a turn budget.</a:t>
+            </a:r>
+            <a:endParaRPr lang="en-US" sz="1600" dirty="0"/>
+          </a:p>
+        </p:txBody>
+      </p:sp>
+      <p:sp>
+        <p:nvSpPr>
+          <p:cNvPr id="28" name="Shape 26"/>
+          <p:cNvSpPr/>
+          <p:nvPr/>
+        </p:nvSpPr>
+        <p:spPr>
+          <a:xfrm>
+            <a:off x="8960891" y="1828800"/>
+            <a:ext cx="384048" cy="384048"/>
+          </a:xfrm>
+          <a:prstGeom prst="roundRect">
+            <a:avLst>
+              <a:gd name="adj" fmla="val 23810"/>
+            </a:avLst>
+          </a:prstGeom>
+          <a:solidFill>
+            <a:srgbClr val="D97706"/>
+          </a:solidFill>
+          <a:ln w="12700">
+            <a:solidFill>
+              <a:srgbClr val="D97706"/>
+            </a:solidFill>
+            <a:prstDash val="solid"/>
+          </a:ln>
+        </p:spPr>
+      </p:sp>
+      <p:sp>
+        <p:nvSpPr>
+          <p:cNvPr id="29" name="Text 27"/>
+          <p:cNvSpPr txBox="1"/>
+          <p:nvPr/>
+        </p:nvSpPr>
+        <p:spPr>
+          <a:xfrm>
+            <a:off x="9463811" y="1828800"/>
+            <a:ext cx="2087804" cy="384048"/>
+          </a:xfrm>
+          <a:prstGeom prst="rect">
+            <a:avLst/>
+          </a:prstGeom>
+          <a:noFill/>
+          <a:ln/>
+        </p:spPr>
+        <p:txBody>
+          <a:bodyPr wrap="square" lIns="0" tIns="0" rIns="0" bIns="0" rtlCol="0" anchor="ctr"/>
+          <a:lstStyle/>
+          <a:p>
+            <a:pPr indent="0" marL="0">
+              <a:buNone/>
+            </a:pPr>
+            <a:r>
+              <a:rPr lang="en-US" sz="1700" b="1" dirty="0">
+                <a:solidFill>
+                  <a:srgbClr val="18181B"/>
+                </a:solidFill>
+                <a:latin typeface="Arial" pitchFamily="34" charset="0"/>
+                <a:ea typeface="Arial" pitchFamily="34" charset="-122"/>
+                <a:cs typeface="Arial" pitchFamily="34" charset="-120"/>
+              </a:rPr>
+              <a:t>Always reachable</a:t>
             </a:r>
             <a:endParaRPr lang="en-US" sz="1700" dirty="0"/>
+          </a:p>
+        </p:txBody>
+      </p:sp>
+      <p:sp>
+        <p:nvSpPr>
+          <p:cNvPr id="30" name="Shape 28"/>
+          <p:cNvSpPr/>
+          <p:nvPr/>
+        </p:nvSpPr>
+        <p:spPr>
+          <a:xfrm>
+            <a:off x="8960891" y="2423160"/>
+            <a:ext cx="2590724" cy="1188720"/>
+          </a:xfrm>
+          <a:prstGeom prst="roundRect">
+            <a:avLst>
+              <a:gd name="adj" fmla="val 9231"/>
+            </a:avLst>
+          </a:prstGeom>
+          <a:solidFill>
+            <a:srgbClr val="FFFFFF"/>
+          </a:solidFill>
+          <a:ln w="9525">
+            <a:solidFill>
+              <a:srgbClr val="E4E4E7"/>
+            </a:solidFill>
+            <a:prstDash val="solid"/>
+          </a:ln>
+        </p:spPr>
+      </p:sp>
+      <p:sp>
+        <p:nvSpPr>
+          <p:cNvPr id="31" name="Text 29"/>
+          <p:cNvSpPr txBox="1"/>
+          <p:nvPr/>
+        </p:nvSpPr>
+        <p:spPr>
+          <a:xfrm>
+            <a:off x="9143771" y="2532888"/>
+            <a:ext cx="2224964" cy="969264"/>
+          </a:xfrm>
+          <a:prstGeom prst="rect">
+            <a:avLst/>
+          </a:prstGeom>
+          <a:noFill/>
+          <a:ln/>
+        </p:spPr>
+        <p:txBody>
+          <a:bodyPr wrap="square" lIns="0" tIns="0" rIns="0" bIns="0" rtlCol="0" anchor="t"/>
+          <a:lstStyle/>
+          <a:p>
+            <a:pPr indent="0" marL="0">
+              <a:buNone/>
+            </a:pPr>
+            <a:r>
+              <a:rPr lang="en-US" sz="1600" b="1" dirty="0">
+                <a:solidFill>
+                  <a:srgbClr val="18181B"/>
+                </a:solidFill>
+                <a:latin typeface="Arial" pitchFamily="34" charset="0"/>
+                <a:ea typeface="Arial" pitchFamily="34" charset="-122"/>
+                <a:cs typeface="Arial" pitchFamily="34" charset="-120"/>
+              </a:rPr>
+              <a:t>Wake &amp; resume</a:t>
+            </a:r>
+            <a:endParaRPr lang="en-US" sz="1600" dirty="0"/>
+          </a:p>
+          <a:p>
+            <a:pPr indent="0" marL="0">
+              <a:buNone/>
+            </a:pPr>
+            <a:r>
+              <a:rPr lang="en-US" sz="1300" dirty="0">
+                <a:solidFill>
+                  <a:srgbClr val="52525B"/>
+                </a:solidFill>
+                <a:latin typeface="Arial" pitchFamily="34" charset="0"/>
+                <a:ea typeface="Arial" pitchFamily="34" charset="-122"/>
+                <a:cs typeface="Arial" pitchFamily="34" charset="-120"/>
+              </a:rPr>
+              <a:t>A message wakes a seat that isn’t running. About 24 s, cold.</a:t>
+            </a:r>
+            <a:endParaRPr lang="en-US" sz="1600" dirty="0"/>
+          </a:p>
+        </p:txBody>
+      </p:sp>
+      <p:sp>
+        <p:nvSpPr>
+          <p:cNvPr id="32" name="Shape 30"/>
+          <p:cNvSpPr/>
+          <p:nvPr/>
+        </p:nvSpPr>
+        <p:spPr>
+          <a:xfrm>
+            <a:off x="8960891" y="3749040"/>
+            <a:ext cx="2590724" cy="1188720"/>
+          </a:xfrm>
+          <a:prstGeom prst="roundRect">
+            <a:avLst>
+              <a:gd name="adj" fmla="val 9231"/>
+            </a:avLst>
+          </a:prstGeom>
+          <a:solidFill>
+            <a:srgbClr val="FFFFFF"/>
+          </a:solidFill>
+          <a:ln w="9525">
+            <a:solidFill>
+              <a:srgbClr val="E4E4E7"/>
+            </a:solidFill>
+            <a:prstDash val="solid"/>
+          </a:ln>
+        </p:spPr>
+      </p:sp>
+      <p:sp>
+        <p:nvSpPr>
+          <p:cNvPr id="33" name="Text 31"/>
+          <p:cNvSpPr txBox="1"/>
+          <p:nvPr/>
+        </p:nvSpPr>
+        <p:spPr>
+          <a:xfrm>
+            <a:off x="9143771" y="3858768"/>
+            <a:ext cx="2224964" cy="969264"/>
+          </a:xfrm>
+          <a:prstGeom prst="rect">
+            <a:avLst/>
+          </a:prstGeom>
+          <a:noFill/>
+          <a:ln/>
+        </p:spPr>
+        <p:txBody>
+          <a:bodyPr wrap="square" lIns="0" tIns="0" rIns="0" bIns="0" rtlCol="0" anchor="t"/>
+          <a:lstStyle/>
+          <a:p>
+            <a:pPr indent="0" marL="0">
+              <a:buNone/>
+            </a:pPr>
+            <a:r>
+              <a:rPr lang="en-US" sz="1600" b="1" dirty="0">
+                <a:solidFill>
+                  <a:srgbClr val="18181B"/>
+                </a:solidFill>
+                <a:latin typeface="Arial" pitchFamily="34" charset="0"/>
+                <a:ea typeface="Arial" pitchFamily="34" charset="-122"/>
+                <a:cs typeface="Arial" pitchFamily="34" charset="-120"/>
+              </a:rPr>
+              <a:t>The doorbell</a:t>
+            </a:r>
+            <a:endParaRPr lang="en-US" sz="1600" dirty="0"/>
+          </a:p>
+          <a:p>
+            <a:pPr indent="0" marL="0">
+              <a:buNone/>
+            </a:pPr>
+            <a:r>
+              <a:rPr lang="en-US" sz="1300" dirty="0">
+                <a:solidFill>
+                  <a:srgbClr val="52525B"/>
+                </a:solidFill>
+                <a:latin typeface="Arial" pitchFamily="34" charset="0"/>
+                <a:ea typeface="Arial" pitchFamily="34" charset="-122"/>
+                <a:cs typeface="Arial" pitchFamily="34" charset="-120"/>
+              </a:rPr>
+              <a:t>An ask reaches you where you already are: /live, a desktop notification, Slack.</a:t>
+            </a:r>
+            <a:endParaRPr lang="en-US" sz="1600" dirty="0"/>
+          </a:p>
+        </p:txBody>
+      </p:sp>
+      <p:sp>
+        <p:nvSpPr>
+          <p:cNvPr id="34" name="Shape 32"/>
+          <p:cNvSpPr/>
+          <p:nvPr/>
+        </p:nvSpPr>
+        <p:spPr>
+          <a:xfrm>
+            <a:off x="8960891" y="5074920"/>
+            <a:ext cx="2590724" cy="1188720"/>
+          </a:xfrm>
+          <a:prstGeom prst="roundRect">
+            <a:avLst>
+              <a:gd name="adj" fmla="val 9231"/>
+            </a:avLst>
+          </a:prstGeom>
+          <a:solidFill>
+            <a:srgbClr val="FFFFFF"/>
+          </a:solidFill>
+          <a:ln w="9525">
+            <a:solidFill>
+              <a:srgbClr val="E4E4E7"/>
+            </a:solidFill>
+            <a:prstDash val="solid"/>
+          </a:ln>
+        </p:spPr>
+      </p:sp>
+      <p:sp>
+        <p:nvSpPr>
+          <p:cNvPr id="35" name="Text 33"/>
+          <p:cNvSpPr txBox="1"/>
+          <p:nvPr/>
+        </p:nvSpPr>
+        <p:spPr>
+          <a:xfrm>
+            <a:off x="9143771" y="5184648"/>
+            <a:ext cx="2224964" cy="969264"/>
+          </a:xfrm>
+          <a:prstGeom prst="rect">
+            <a:avLst/>
+          </a:prstGeom>
+          <a:noFill/>
+          <a:ln/>
+        </p:spPr>
+        <p:txBody>
+          <a:bodyPr wrap="square" lIns="0" tIns="0" rIns="0" bIns="0" rtlCol="0" anchor="t"/>
+          <a:lstStyle/>
+          <a:p>
+            <a:pPr indent="0" marL="0">
+              <a:buNone/>
+            </a:pPr>
+            <a:r>
+              <a:rPr lang="en-US" sz="1600" b="1" dirty="0">
+                <a:solidFill>
+                  <a:srgbClr val="18181B"/>
+                </a:solidFill>
+                <a:latin typeface="Arial" pitchFamily="34" charset="0"/>
+                <a:ea typeface="Arial" pitchFamily="34" charset="-122"/>
+                <a:cs typeface="Arial" pitchFamily="34" charset="-120"/>
+              </a:rPr>
+              <a:t>/live</a:t>
+            </a:r>
+            <a:endParaRPr lang="en-US" sz="1600" dirty="0"/>
+          </a:p>
+          <a:p>
+            <a:pPr indent="0" marL="0">
+              <a:buNone/>
+            </a:pPr>
+            <a:r>
+              <a:rPr lang="en-US" sz="1300" dirty="0">
+                <a:solidFill>
+                  <a:srgbClr val="52525B"/>
+                </a:solidFill>
+                <a:latin typeface="Arial" pitchFamily="34" charset="0"/>
+                <a:ea typeface="Arial" pitchFamily="34" charset="-122"/>
+                <a:cs typeface="Arial" pitchFamily="34" charset="-120"/>
+              </a:rPr>
+              <a:t>The office: who’s here, who’s working, every act as it lands.</a:t>
+            </a:r>
+            <a:endParaRPr lang="en-US" sz="1600" dirty="0"/>
           </a:p>
         </p:txBody>
       </p:sp>
@@ -3982,9 +5670,9 @@
 </p:sld>
 </file>
 
-<file path=ppt/slides/slide5.xml><?xml version="1.0" encoding="utf-8"?>
+<file path=ppt/slides/slide6.xml><?xml version="1.0" encoding="utf-8"?>
 <p:sld xmlns:a="http://schemas.openxmlformats.org/drawingml/2006/main" xmlns:r="http://schemas.openxmlformats.org/officeDocument/2006/relationships" xmlns:p="http://schemas.openxmlformats.org/presentationml/2006/main">
-  <p:cSld name="Slide 5">
+  <p:cSld name="Slide 6">
     <p:bg>
       <p:bgPr>
         <a:solidFill>
@@ -4014,8 +5702,8 @@
         </p:nvSpPr>
         <p:spPr>
           <a:xfrm>
-            <a:off x="640080" y="548640"/>
-            <a:ext cx="10911535" cy="365760"/>
+            <a:off x="640080" y="502920"/>
+            <a:ext cx="10911535" cy="320040"/>
           </a:xfrm>
           <a:prstGeom prst="rect">
             <a:avLst/>
@@ -4039,7 +5727,7 @@
                 <a:ea typeface="Courier New" pitchFamily="34" charset="-122"/>
                 <a:cs typeface="Courier New" pitchFamily="34" charset="-120"/>
               </a:rPr>
-              <a:t>HOW IT WORKS</a:t>
+              <a:t>THE HUMAN ON THE TEAM</a:t>
             </a:r>
             <a:endParaRPr lang="en-US" sz="1300" dirty="0"/>
           </a:p>
@@ -4053,8 +5741,8 @@
         </p:nvSpPr>
         <p:spPr>
           <a:xfrm>
-            <a:off x="640080" y="1097280"/>
-            <a:ext cx="10911535" cy="822960"/>
+            <a:off x="640080" y="868680"/>
+            <a:ext cx="10911535" cy="731520"/>
           </a:xfrm>
           <a:prstGeom prst="rect">
             <a:avLst/>
@@ -4070,7 +5758,7 @@
               <a:buNone/>
             </a:pPr>
             <a:r>
-              <a:rPr lang="en-US" sz="4000" b="1" dirty="0">
+              <a:rPr lang="en-US" sz="3600" b="1" dirty="0">
                 <a:solidFill>
                   <a:srgbClr val="18181B"/>
                 </a:solidFill>
@@ -4078,36 +5766,50 @@
                 <a:ea typeface="Arial" pitchFamily="34" charset="-122"/>
                 <a:cs typeface="Arial" pitchFamily="34" charset="-120"/>
               </a:rPr>
-              <a:t>Every member runs the same loop.</a:t>
-            </a:r>
-            <a:endParaRPr lang="en-US" sz="4000" dirty="0"/>
-          </a:p>
-        </p:txBody>
-      </p:sp>
-      <p:sp>
-        <p:nvSpPr>
-          <p:cNvPr id="4" name="Shape 2"/>
-          <p:cNvSpPr/>
-          <p:nvPr/>
-        </p:nvSpPr>
-        <p:spPr>
-          <a:xfrm>
-            <a:off x="640080" y="2468880"/>
-            <a:ext cx="1926275" cy="36576"/>
-          </a:xfrm>
-          <a:prstGeom prst="rect">
-            <a:avLst/>
-          </a:prstGeom>
-          <a:solidFill>
-            <a:srgbClr val="E1AD01"/>
-          </a:solidFill>
-          <a:ln w="12700">
-            <a:solidFill>
-              <a:srgbClr val="E1AD01"/>
-            </a:solidFill>
-            <a:prstDash val="solid"/>
-          </a:ln>
-        </p:spPr>
+              <a:t>The team asks you.</a:t>
+            </a:r>
+            <a:endParaRPr lang="en-US" sz="3600" dirty="0"/>
+          </a:p>
+        </p:txBody>
+      </p:sp>
+      <p:sp>
+        <p:nvSpPr>
+          <p:cNvPr id="4" name="Text 2"/>
+          <p:cNvSpPr txBox="1"/>
+          <p:nvPr/>
+        </p:nvSpPr>
+        <p:spPr>
+          <a:xfrm>
+            <a:off x="640080" y="1920240"/>
+            <a:ext cx="1463040" cy="1188720"/>
+          </a:xfrm>
+          <a:prstGeom prst="rect">
+            <a:avLst/>
+          </a:prstGeom>
+          <a:noFill/>
+          <a:ln/>
+        </p:spPr>
+        <p:txBody>
+          <a:bodyPr wrap="square" lIns="0" tIns="0" rIns="0" bIns="0" rtlCol="0" anchor="ctr"/>
+          <a:lstStyle/>
+          <a:p>
+            <a:pPr indent="0" marL="0">
+              <a:buNone/>
+            </a:pPr>
+            <a:r>
+              <a:rPr lang="en-US" sz="8000" b="1" dirty="0">
+                <a:solidFill>
+                  <a:srgbClr val="A1A1AA"/>
+                </a:solidFill>
+                <a:latin typeface="Arial" pitchFamily="34" charset="0"/>
+                <a:ea typeface="Arial" pitchFamily="34" charset="-122"/>
+                <a:cs typeface="Arial" pitchFamily="34" charset="-120"/>
+              </a:rPr>
+              <a:t>0</a:t>
+            </a:r>
+            <a:endParaRPr lang="en-US" sz="8000" dirty="0"/>
+          </a:p>
+        </p:txBody>
       </p:sp>
       <p:sp>
         <p:nvSpPr>
@@ -4117,8 +5819,8 @@
         </p:nvSpPr>
         <p:spPr>
           <a:xfrm>
-            <a:off x="640080" y="2651760"/>
-            <a:ext cx="1926275" cy="320040"/>
+            <a:off x="2286000" y="2103120"/>
+            <a:ext cx="3931920" cy="914400"/>
           </a:xfrm>
           <a:prstGeom prst="rect">
             <a:avLst/>
@@ -4134,17 +5836,17 @@
               <a:buNone/>
             </a:pPr>
             <a:r>
-              <a:rPr lang="en-US" sz="1400" b="1" dirty="0">
-                <a:solidFill>
-                  <a:srgbClr val="7A5A06"/>
-                </a:solidFill>
-                <a:latin typeface="Courier New" pitchFamily="34" charset="0"/>
-                <a:ea typeface="Courier New" pitchFamily="34" charset="-122"/>
-                <a:cs typeface="Courier New" pitchFamily="34" charset="-120"/>
-              </a:rPr>
-              <a:t>1</a:t>
-            </a:r>
-            <a:endParaRPr lang="en-US" sz="1400" dirty="0"/>
+              <a:rPr lang="en-US" sz="1600" dirty="0">
+                <a:solidFill>
+                  <a:srgbClr val="52525B"/>
+                </a:solidFill>
+                <a:latin typeface="Arial" pitchFamily="34" charset="0"/>
+                <a:ea typeface="Arial" pitchFamily="34" charset="-122"/>
+                <a:cs typeface="Arial" pitchFamily="34" charset="-120"/>
+              </a:rPr>
+              <a:t>requests for help reached me while I was the approver: seven approvals for every real exchange.</a:t>
+            </a:r>
+            <a:endParaRPr lang="en-US" sz="1600" dirty="0"/>
           </a:p>
         </p:txBody>
       </p:sp>
@@ -4156,8 +5858,8 @@
         </p:nvSpPr>
         <p:spPr>
           <a:xfrm>
-            <a:off x="640080" y="3017520"/>
-            <a:ext cx="1926275" cy="457200"/>
+            <a:off x="640080" y="3566160"/>
+            <a:ext cx="2194560" cy="1188720"/>
           </a:xfrm>
           <a:prstGeom prst="rect">
             <a:avLst/>
@@ -4173,17 +5875,17 @@
               <a:buNone/>
             </a:pPr>
             <a:r>
-              <a:rPr lang="en-US" sz="1900" b="1" dirty="0">
-                <a:solidFill>
-                  <a:srgbClr val="7A5A06"/>
-                </a:solidFill>
-                <a:latin typeface="Arial" pitchFamily="34" charset="0"/>
-                <a:ea typeface="Arial" pitchFamily="34" charset="-122"/>
-                <a:cs typeface="Arial" pitchFamily="34" charset="-120"/>
-              </a:rPr>
-              <a:t>Join</a:t>
-            </a:r>
-            <a:endParaRPr lang="en-US" sz="1900" dirty="0"/>
+              <a:rPr lang="en-US" sz="8000" b="1" dirty="0">
+                <a:solidFill>
+                  <a:srgbClr val="8F6B00"/>
+                </a:solidFill>
+                <a:latin typeface="Arial" pitchFamily="34" charset="0"/>
+                <a:ea typeface="Arial" pitchFamily="34" charset="-122"/>
+                <a:cs typeface="Arial" pitchFamily="34" charset="-120"/>
+              </a:rPr>
+              <a:t>106</a:t>
+            </a:r>
+            <a:endParaRPr lang="en-US" sz="8000" dirty="0"/>
           </a:p>
         </p:txBody>
       </p:sp>
@@ -4195,24 +5897,24 @@
         </p:nvSpPr>
         <p:spPr>
           <a:xfrm>
-            <a:off x="640080" y="3520440"/>
-            <a:ext cx="1926275" cy="2011680"/>
-          </a:xfrm>
-          <a:prstGeom prst="rect">
-            <a:avLst/>
-          </a:prstGeom>
-          <a:noFill/>
-          <a:ln/>
-        </p:spPr>
-        <p:txBody>
-          <a:bodyPr wrap="square" lIns="0" tIns="0" rIns="0" bIns="0" rtlCol="0" anchor="t"/>
-          <a:lstStyle/>
-          <a:p>
-            <a:pPr indent="0" marL="0">
-              <a:buNone/>
-            </a:pPr>
-            <a:r>
-              <a:rPr lang="en-US" sz="1500" dirty="0">
+            <a:off x="2926080" y="3749040"/>
+            <a:ext cx="3931920" cy="914400"/>
+          </a:xfrm>
+          <a:prstGeom prst="rect">
+            <a:avLst/>
+          </a:prstGeom>
+          <a:noFill/>
+          <a:ln/>
+        </p:spPr>
+        <p:txBody>
+          <a:bodyPr wrap="square" lIns="0" tIns="0" rIns="0" bIns="0" rtlCol="0" anchor="ctr"/>
+          <a:lstStyle/>
+          <a:p>
+            <a:pPr indent="0" marL="0">
+              <a:buNone/>
+            </a:pPr>
+            <a:r>
+              <a:rPr lang="en-US" sz="1600" dirty="0">
                 <a:solidFill>
                   <a:srgbClr val="52525B"/>
                 </a:solidFill>
@@ -4220,9 +5922,9 @@
                 <a:ea typeface="Arial" pitchFamily="34" charset="-122"/>
                 <a:cs typeface="Arial" pitchFamily="34" charset="-120"/>
               </a:rPr>
-              <a:t>A named member on the roster. People join from the CLI.</a:t>
-            </a:r>
-            <a:endParaRPr lang="en-US" sz="1500" dirty="0"/>
+              <a:t>questions have reached me since agents could ask me directly.</a:t>
+            </a:r>
+            <a:endParaRPr lang="en-US" sz="1600" dirty="0"/>
           </a:p>
         </p:txBody>
       </p:sp>
@@ -4234,584 +5936,18 @@
         </p:nvSpPr>
         <p:spPr>
           <a:xfrm>
-            <a:off x="2886395" y="2468880"/>
-            <a:ext cx="1926275" cy="36576"/>
-          </a:xfrm>
-          <a:prstGeom prst="rect">
-            <a:avLst/>
+            <a:off x="6675120" y="1828800"/>
+            <a:ext cx="4846320" cy="1097280"/>
+          </a:xfrm>
+          <a:prstGeom prst="roundRect">
+            <a:avLst>
+              <a:gd name="adj" fmla="val 10000"/>
+            </a:avLst>
           </a:prstGeom>
           <a:solidFill>
-            <a:srgbClr val="E1AD01"/>
+            <a:srgbClr val="FFFFFF"/>
           </a:solidFill>
-          <a:ln w="12700">
-            <a:solidFill>
-              <a:srgbClr val="E1AD01"/>
-            </a:solidFill>
-            <a:prstDash val="solid"/>
-          </a:ln>
-        </p:spPr>
-      </p:sp>
-      <p:sp>
-        <p:nvSpPr>
-          <p:cNvPr id="9" name="Text 7"/>
-          <p:cNvSpPr txBox="1"/>
-          <p:nvPr/>
-        </p:nvSpPr>
-        <p:spPr>
-          <a:xfrm>
-            <a:off x="2886395" y="2651760"/>
-            <a:ext cx="1926275" cy="320040"/>
-          </a:xfrm>
-          <a:prstGeom prst="rect">
-            <a:avLst/>
-          </a:prstGeom>
-          <a:noFill/>
-          <a:ln/>
-        </p:spPr>
-        <p:txBody>
-          <a:bodyPr wrap="square" lIns="0" tIns="0" rIns="0" bIns="0" rtlCol="0" anchor="ctr"/>
-          <a:lstStyle/>
-          <a:p>
-            <a:pPr indent="0" marL="0">
-              <a:buNone/>
-            </a:pPr>
-            <a:r>
-              <a:rPr lang="en-US" sz="1400" b="1" dirty="0">
-                <a:solidFill>
-                  <a:srgbClr val="7A5A06"/>
-                </a:solidFill>
-                <a:latin typeface="Courier New" pitchFamily="34" charset="0"/>
-                <a:ea typeface="Courier New" pitchFamily="34" charset="-122"/>
-                <a:cs typeface="Courier New" pitchFamily="34" charset="-120"/>
-              </a:rPr>
-              <a:t>2</a:t>
-            </a:r>
-            <a:endParaRPr lang="en-US" sz="1400" dirty="0"/>
-          </a:p>
-        </p:txBody>
-      </p:sp>
-      <p:sp>
-        <p:nvSpPr>
-          <p:cNvPr id="10" name="Text 8"/>
-          <p:cNvSpPr txBox="1"/>
-          <p:nvPr/>
-        </p:nvSpPr>
-        <p:spPr>
-          <a:xfrm>
-            <a:off x="2886395" y="3017520"/>
-            <a:ext cx="1926275" cy="457200"/>
-          </a:xfrm>
-          <a:prstGeom prst="rect">
-            <a:avLst/>
-          </a:prstGeom>
-          <a:noFill/>
-          <a:ln/>
-        </p:spPr>
-        <p:txBody>
-          <a:bodyPr wrap="square" lIns="0" tIns="0" rIns="0" bIns="0" rtlCol="0" anchor="ctr"/>
-          <a:lstStyle/>
-          <a:p>
-            <a:pPr indent="0" marL="0">
-              <a:buNone/>
-            </a:pPr>
-            <a:r>
-              <a:rPr lang="en-US" sz="1900" b="1" dirty="0">
-                <a:solidFill>
-                  <a:srgbClr val="7A5A06"/>
-                </a:solidFill>
-                <a:latin typeface="Arial" pitchFamily="34" charset="0"/>
-                <a:ea typeface="Arial" pitchFamily="34" charset="-122"/>
-                <a:cs typeface="Arial" pitchFamily="34" charset="-120"/>
-              </a:rPr>
-              <a:t>Claim</a:t>
-            </a:r>
-            <a:endParaRPr lang="en-US" sz="1900" dirty="0"/>
-          </a:p>
-        </p:txBody>
-      </p:sp>
-      <p:sp>
-        <p:nvSpPr>
-          <p:cNvPr id="11" name="Text 9"/>
-          <p:cNvSpPr txBox="1"/>
-          <p:nvPr/>
-        </p:nvSpPr>
-        <p:spPr>
-          <a:xfrm>
-            <a:off x="2886395" y="3520440"/>
-            <a:ext cx="1926275" cy="2011680"/>
-          </a:xfrm>
-          <a:prstGeom prst="rect">
-            <a:avLst/>
-          </a:prstGeom>
-          <a:noFill/>
-          <a:ln/>
-        </p:spPr>
-        <p:txBody>
-          <a:bodyPr wrap="square" lIns="0" tIns="0" rIns="0" bIns="0" rtlCol="0" anchor="t"/>
-          <a:lstStyle/>
-          <a:p>
-            <a:pPr indent="0" marL="0">
-              <a:buNone/>
-            </a:pPr>
-            <a:r>
-              <a:rPr lang="en-US" sz="1500" dirty="0">
-                <a:solidFill>
-                  <a:srgbClr val="52525B"/>
-                </a:solidFill>
-                <a:latin typeface="Arial" pitchFamily="34" charset="0"/>
-                <a:ea typeface="Arial" pitchFamily="34" charset="-122"/>
-                <a:cs typeface="Arial" pitchFamily="34" charset="-120"/>
-              </a:rPr>
-              <a:t>One lane, one owner, its files named before the first edit.</a:t>
-            </a:r>
-            <a:endParaRPr lang="en-US" sz="1500" dirty="0"/>
-          </a:p>
-        </p:txBody>
-      </p:sp>
-      <p:sp>
-        <p:nvSpPr>
-          <p:cNvPr id="12" name="Shape 10"/>
-          <p:cNvSpPr/>
-          <p:nvPr/>
-        </p:nvSpPr>
-        <p:spPr>
-          <a:xfrm>
-            <a:off x="5132710" y="2468880"/>
-            <a:ext cx="1926275" cy="36576"/>
-          </a:xfrm>
-          <a:prstGeom prst="rect">
-            <a:avLst/>
-          </a:prstGeom>
-          <a:solidFill>
-            <a:srgbClr val="E1AD01"/>
-          </a:solidFill>
-          <a:ln w="12700">
-            <a:solidFill>
-              <a:srgbClr val="E1AD01"/>
-            </a:solidFill>
-            <a:prstDash val="solid"/>
-          </a:ln>
-        </p:spPr>
-      </p:sp>
-      <p:sp>
-        <p:nvSpPr>
-          <p:cNvPr id="13" name="Text 11"/>
-          <p:cNvSpPr txBox="1"/>
-          <p:nvPr/>
-        </p:nvSpPr>
-        <p:spPr>
-          <a:xfrm>
-            <a:off x="5132710" y="2651760"/>
-            <a:ext cx="1926275" cy="320040"/>
-          </a:xfrm>
-          <a:prstGeom prst="rect">
-            <a:avLst/>
-          </a:prstGeom>
-          <a:noFill/>
-          <a:ln/>
-        </p:spPr>
-        <p:txBody>
-          <a:bodyPr wrap="square" lIns="0" tIns="0" rIns="0" bIns="0" rtlCol="0" anchor="ctr"/>
-          <a:lstStyle/>
-          <a:p>
-            <a:pPr indent="0" marL="0">
-              <a:buNone/>
-            </a:pPr>
-            <a:r>
-              <a:rPr lang="en-US" sz="1400" b="1" dirty="0">
-                <a:solidFill>
-                  <a:srgbClr val="7A5A06"/>
-                </a:solidFill>
-                <a:latin typeface="Courier New" pitchFamily="34" charset="0"/>
-                <a:ea typeface="Courier New" pitchFamily="34" charset="-122"/>
-                <a:cs typeface="Courier New" pitchFamily="34" charset="-120"/>
-              </a:rPr>
-              <a:t>3</a:t>
-            </a:r>
-            <a:endParaRPr lang="en-US" sz="1400" dirty="0"/>
-          </a:p>
-        </p:txBody>
-      </p:sp>
-      <p:sp>
-        <p:nvSpPr>
-          <p:cNvPr id="14" name="Text 12"/>
-          <p:cNvSpPr txBox="1"/>
-          <p:nvPr/>
-        </p:nvSpPr>
-        <p:spPr>
-          <a:xfrm>
-            <a:off x="5132710" y="3017520"/>
-            <a:ext cx="1926275" cy="457200"/>
-          </a:xfrm>
-          <a:prstGeom prst="rect">
-            <a:avLst/>
-          </a:prstGeom>
-          <a:noFill/>
-          <a:ln/>
-        </p:spPr>
-        <p:txBody>
-          <a:bodyPr wrap="square" lIns="0" tIns="0" rIns="0" bIns="0" rtlCol="0" anchor="ctr"/>
-          <a:lstStyle/>
-          <a:p>
-            <a:pPr indent="0" marL="0">
-              <a:buNone/>
-            </a:pPr>
-            <a:r>
-              <a:rPr lang="en-US" sz="1900" b="1" dirty="0">
-                <a:solidFill>
-                  <a:srgbClr val="7A5A06"/>
-                </a:solidFill>
-                <a:latin typeface="Arial" pitchFamily="34" charset="0"/>
-                <a:ea typeface="Arial" pitchFamily="34" charset="-122"/>
-                <a:cs typeface="Arial" pitchFamily="34" charset="-120"/>
-              </a:rPr>
-              <a:t>Talk in acts</a:t>
-            </a:r>
-            <a:endParaRPr lang="en-US" sz="1900" dirty="0"/>
-          </a:p>
-        </p:txBody>
-      </p:sp>
-      <p:sp>
-        <p:nvSpPr>
-          <p:cNvPr id="15" name="Text 13"/>
-          <p:cNvSpPr txBox="1"/>
-          <p:nvPr/>
-        </p:nvSpPr>
-        <p:spPr>
-          <a:xfrm>
-            <a:off x="5132710" y="3520440"/>
-            <a:ext cx="1926275" cy="2011680"/>
-          </a:xfrm>
-          <a:prstGeom prst="rect">
-            <a:avLst/>
-          </a:prstGeom>
-          <a:noFill/>
-          <a:ln/>
-        </p:spPr>
-        <p:txBody>
-          <a:bodyPr wrap="square" lIns="0" tIns="0" rIns="0" bIns="0" rtlCol="0" anchor="t"/>
-          <a:lstStyle/>
-          <a:p>
-            <a:pPr indent="0" marL="0">
-              <a:buNone/>
-            </a:pPr>
-            <a:r>
-              <a:rPr lang="en-US" sz="1500" dirty="0">
-                <a:solidFill>
-                  <a:srgbClr val="52525B"/>
-                </a:solidFill>
-                <a:latin typeface="Arial" pitchFamily="34" charset="0"/>
-                <a:ea typeface="Arial" pitchFamily="34" charset="-122"/>
-                <a:cs typeface="Arial" pitchFamily="34" charset="-120"/>
-              </a:rPr>
-              <a:t>Request help, hand off, decline, challenge. Each reaches the other agent at its next tool call.</a:t>
-            </a:r>
-            <a:endParaRPr lang="en-US" sz="1500" dirty="0"/>
-          </a:p>
-        </p:txBody>
-      </p:sp>
-      <p:sp>
-        <p:nvSpPr>
-          <p:cNvPr id="16" name="Shape 14"/>
-          <p:cNvSpPr/>
-          <p:nvPr/>
-        </p:nvSpPr>
-        <p:spPr>
-          <a:xfrm>
-            <a:off x="7379025" y="2468880"/>
-            <a:ext cx="1926275" cy="36576"/>
-          </a:xfrm>
-          <a:prstGeom prst="rect">
-            <a:avLst/>
-          </a:prstGeom>
-          <a:solidFill>
-            <a:srgbClr val="E1AD01"/>
-          </a:solidFill>
-          <a:ln w="12700">
-            <a:solidFill>
-              <a:srgbClr val="E1AD01"/>
-            </a:solidFill>
-            <a:prstDash val="solid"/>
-          </a:ln>
-        </p:spPr>
-      </p:sp>
-      <p:sp>
-        <p:nvSpPr>
-          <p:cNvPr id="17" name="Text 15"/>
-          <p:cNvSpPr txBox="1"/>
-          <p:nvPr/>
-        </p:nvSpPr>
-        <p:spPr>
-          <a:xfrm>
-            <a:off x="7379025" y="2651760"/>
-            <a:ext cx="1926275" cy="320040"/>
-          </a:xfrm>
-          <a:prstGeom prst="rect">
-            <a:avLst/>
-          </a:prstGeom>
-          <a:noFill/>
-          <a:ln/>
-        </p:spPr>
-        <p:txBody>
-          <a:bodyPr wrap="square" lIns="0" tIns="0" rIns="0" bIns="0" rtlCol="0" anchor="ctr"/>
-          <a:lstStyle/>
-          <a:p>
-            <a:pPr indent="0" marL="0">
-              <a:buNone/>
-            </a:pPr>
-            <a:r>
-              <a:rPr lang="en-US" sz="1400" b="1" dirty="0">
-                <a:solidFill>
-                  <a:srgbClr val="7A5A06"/>
-                </a:solidFill>
-                <a:latin typeface="Courier New" pitchFamily="34" charset="0"/>
-                <a:ea typeface="Courier New" pitchFamily="34" charset="-122"/>
-                <a:cs typeface="Courier New" pitchFamily="34" charset="-120"/>
-              </a:rPr>
-              <a:t>4</a:t>
-            </a:r>
-            <a:endParaRPr lang="en-US" sz="1400" dirty="0"/>
-          </a:p>
-        </p:txBody>
-      </p:sp>
-      <p:sp>
-        <p:nvSpPr>
-          <p:cNvPr id="18" name="Text 16"/>
-          <p:cNvSpPr txBox="1"/>
-          <p:nvPr/>
-        </p:nvSpPr>
-        <p:spPr>
-          <a:xfrm>
-            <a:off x="7379025" y="3017520"/>
-            <a:ext cx="1926275" cy="457200"/>
-          </a:xfrm>
-          <a:prstGeom prst="rect">
-            <a:avLst/>
-          </a:prstGeom>
-          <a:noFill/>
-          <a:ln/>
-        </p:spPr>
-        <p:txBody>
-          <a:bodyPr wrap="square" lIns="0" tIns="0" rIns="0" bIns="0" rtlCol="0" anchor="ctr"/>
-          <a:lstStyle/>
-          <a:p>
-            <a:pPr indent="0" marL="0">
-              <a:buNone/>
-            </a:pPr>
-            <a:r>
-              <a:rPr lang="en-US" sz="1900" b="1" dirty="0">
-                <a:solidFill>
-                  <a:srgbClr val="7A5A06"/>
-                </a:solidFill>
-                <a:latin typeface="Arial" pitchFamily="34" charset="0"/>
-                <a:ea typeface="Arial" pitchFamily="34" charset="-122"/>
-                <a:cs typeface="Arial" pitchFamily="34" charset="-120"/>
-              </a:rPr>
-              <a:t>Ask a person</a:t>
-            </a:r>
-            <a:endParaRPr lang="en-US" sz="1900" dirty="0"/>
-          </a:p>
-        </p:txBody>
-      </p:sp>
-      <p:sp>
-        <p:nvSpPr>
-          <p:cNvPr id="19" name="Text 17"/>
-          <p:cNvSpPr txBox="1"/>
-          <p:nvPr/>
-        </p:nvSpPr>
-        <p:spPr>
-          <a:xfrm>
-            <a:off x="7379025" y="3520440"/>
-            <a:ext cx="1926275" cy="2011680"/>
-          </a:xfrm>
-          <a:prstGeom prst="rect">
-            <a:avLst/>
-          </a:prstGeom>
-          <a:noFill/>
-          <a:ln/>
-        </p:spPr>
-        <p:txBody>
-          <a:bodyPr wrap="square" lIns="0" tIns="0" rIns="0" bIns="0" rtlCol="0" anchor="t"/>
-          <a:lstStyle/>
-          <a:p>
-            <a:pPr indent="0" marL="0">
-              <a:buNone/>
-            </a:pPr>
-            <a:r>
-              <a:rPr lang="en-US" sz="1500" dirty="0">
-                <a:solidFill>
-                  <a:srgbClr val="52525B"/>
-                </a:solidFill>
-                <a:latin typeface="Arial" pitchFamily="34" charset="0"/>
-                <a:ea typeface="Arial" pitchFamily="34" charset="-122"/>
-                <a:cs typeface="Arial" pitchFamily="34" charset="-120"/>
-              </a:rPr>
-              <a:t>Urgent questions wait for an answer. The rest time out, and going ahead is written down.</a:t>
-            </a:r>
-            <a:endParaRPr lang="en-US" sz="1500" dirty="0"/>
-          </a:p>
-        </p:txBody>
-      </p:sp>
-      <p:sp>
-        <p:nvSpPr>
-          <p:cNvPr id="20" name="Shape 18"/>
-          <p:cNvSpPr/>
-          <p:nvPr/>
-        </p:nvSpPr>
-        <p:spPr>
-          <a:xfrm>
-            <a:off x="9625340" y="2468880"/>
-            <a:ext cx="1926275" cy="36576"/>
-          </a:xfrm>
-          <a:prstGeom prst="rect">
-            <a:avLst/>
-          </a:prstGeom>
-          <a:solidFill>
-            <a:srgbClr val="E1AD01"/>
-          </a:solidFill>
-          <a:ln w="12700">
-            <a:solidFill>
-              <a:srgbClr val="E1AD01"/>
-            </a:solidFill>
-            <a:prstDash val="solid"/>
-          </a:ln>
-        </p:spPr>
-      </p:sp>
-      <p:sp>
-        <p:nvSpPr>
-          <p:cNvPr id="21" name="Text 19"/>
-          <p:cNvSpPr txBox="1"/>
-          <p:nvPr/>
-        </p:nvSpPr>
-        <p:spPr>
-          <a:xfrm>
-            <a:off x="9625340" y="2651760"/>
-            <a:ext cx="1926275" cy="320040"/>
-          </a:xfrm>
-          <a:prstGeom prst="rect">
-            <a:avLst/>
-          </a:prstGeom>
-          <a:noFill/>
-          <a:ln/>
-        </p:spPr>
-        <p:txBody>
-          <a:bodyPr wrap="square" lIns="0" tIns="0" rIns="0" bIns="0" rtlCol="0" anchor="ctr"/>
-          <a:lstStyle/>
-          <a:p>
-            <a:pPr indent="0" marL="0">
-              <a:buNone/>
-            </a:pPr>
-            <a:r>
-              <a:rPr lang="en-US" sz="1400" b="1" dirty="0">
-                <a:solidFill>
-                  <a:srgbClr val="7A5A06"/>
-                </a:solidFill>
-                <a:latin typeface="Courier New" pitchFamily="34" charset="0"/>
-                <a:ea typeface="Courier New" pitchFamily="34" charset="-122"/>
-                <a:cs typeface="Courier New" pitchFamily="34" charset="-120"/>
-              </a:rPr>
-              <a:t>5</a:t>
-            </a:r>
-            <a:endParaRPr lang="en-US" sz="1400" dirty="0"/>
-          </a:p>
-        </p:txBody>
-      </p:sp>
-      <p:sp>
-        <p:nvSpPr>
-          <p:cNvPr id="22" name="Text 20"/>
-          <p:cNvSpPr txBox="1"/>
-          <p:nvPr/>
-        </p:nvSpPr>
-        <p:spPr>
-          <a:xfrm>
-            <a:off x="9625340" y="3017520"/>
-            <a:ext cx="1926275" cy="457200"/>
-          </a:xfrm>
-          <a:prstGeom prst="rect">
-            <a:avLst/>
-          </a:prstGeom>
-          <a:noFill/>
-          <a:ln/>
-        </p:spPr>
-        <p:txBody>
-          <a:bodyPr wrap="square" lIns="0" tIns="0" rIns="0" bIns="0" rtlCol="0" anchor="ctr"/>
-          <a:lstStyle/>
-          <a:p>
-            <a:pPr indent="0" marL="0">
-              <a:buNone/>
-            </a:pPr>
-            <a:r>
-              <a:rPr lang="en-US" sz="1900" b="1" dirty="0">
-                <a:solidFill>
-                  <a:srgbClr val="7A5A06"/>
-                </a:solidFill>
-                <a:latin typeface="Arial" pitchFamily="34" charset="0"/>
-                <a:ea typeface="Arial" pitchFamily="34" charset="-122"/>
-                <a:cs typeface="Arial" pitchFamily="34" charset="-120"/>
-              </a:rPr>
-              <a:t>Close twice</a:t>
-            </a:r>
-            <a:endParaRPr lang="en-US" sz="1900" dirty="0"/>
-          </a:p>
-        </p:txBody>
-      </p:sp>
-      <p:sp>
-        <p:nvSpPr>
-          <p:cNvPr id="23" name="Text 21"/>
-          <p:cNvSpPr txBox="1"/>
-          <p:nvPr/>
-        </p:nvSpPr>
-        <p:spPr>
-          <a:xfrm>
-            <a:off x="9625340" y="3520440"/>
-            <a:ext cx="1926275" cy="2011680"/>
-          </a:xfrm>
-          <a:prstGeom prst="rect">
-            <a:avLst/>
-          </a:prstGeom>
-          <a:noFill/>
-          <a:ln/>
-        </p:spPr>
-        <p:txBody>
-          <a:bodyPr wrap="square" lIns="0" tIns="0" rIns="0" bIns="0" rtlCol="0" anchor="t"/>
-          <a:lstStyle/>
-          <a:p>
-            <a:pPr indent="0" marL="0">
-              <a:buNone/>
-            </a:pPr>
-            <a:r>
-              <a:rPr lang="en-US" sz="1500" dirty="0">
-                <a:solidFill>
-                  <a:srgbClr val="52525B"/>
-                </a:solidFill>
-                <a:latin typeface="Arial" pitchFamily="34" charset="0"/>
-                <a:ea typeface="Arial" pitchFamily="34" charset="-122"/>
-                <a:cs typeface="Arial" pitchFamily="34" charset="-120"/>
-              </a:rPr>
-              <a:t>The builder submits. Another member accepts the outcome.</a:t>
-            </a:r>
-            <a:endParaRPr lang="en-US" sz="1500" dirty="0"/>
-          </a:p>
-        </p:txBody>
-      </p:sp>
-      <p:sp>
-        <p:nvSpPr>
-          <p:cNvPr id="24" name="Shape 22"/>
-          <p:cNvSpPr/>
-          <p:nvPr/>
-        </p:nvSpPr>
-        <p:spPr>
-          <a:xfrm>
-            <a:off x="640080" y="5349240"/>
-            <a:ext cx="10911535" cy="22860"/>
-          </a:xfrm>
-          <a:prstGeom prst="rect">
-            <a:avLst/>
-          </a:prstGeom>
-          <a:solidFill>
-            <a:srgbClr val="E4E4E7"/>
-          </a:solidFill>
-          <a:ln w="12700">
+          <a:ln w="9525">
             <a:solidFill>
               <a:srgbClr val="E4E4E7"/>
             </a:solidFill>
@@ -4821,14 +5957,39 @@
       </p:sp>
       <p:sp>
         <p:nvSpPr>
-          <p:cNvPr id="25" name="Text 23"/>
-          <p:cNvSpPr txBox="1"/>
-          <p:nvPr/>
-        </p:nvSpPr>
-        <p:spPr>
-          <a:xfrm>
-            <a:off x="640080" y="5486400"/>
-            <a:ext cx="10911535" cy="548640"/>
+          <p:cNvPr id="9" name="Shape 7"/>
+          <p:cNvSpPr/>
+          <p:nvPr/>
+        </p:nvSpPr>
+        <p:spPr>
+          <a:xfrm>
+            <a:off x="6858000" y="2103120"/>
+            <a:ext cx="502920" cy="502920"/>
+          </a:xfrm>
+          <a:prstGeom prst="ellipse">
+            <a:avLst/>
+          </a:prstGeom>
+          <a:solidFill>
+            <a:srgbClr val="7C5CFF"/>
+          </a:solidFill>
+          <a:ln w="12700">
+            <a:solidFill>
+              <a:srgbClr val="7C5CFF"/>
+            </a:solidFill>
+            <a:prstDash val="solid"/>
+          </a:ln>
+        </p:spPr>
+      </p:sp>
+      <p:sp>
+        <p:nvSpPr>
+          <p:cNvPr id="10" name="Text 8"/>
+          <p:cNvSpPr txBox="1"/>
+          <p:nvPr/>
+        </p:nvSpPr>
+        <p:spPr>
+          <a:xfrm>
+            <a:off x="7543800" y="1965960"/>
+            <a:ext cx="3840480" cy="822960"/>
           </a:xfrm>
           <a:prstGeom prst="rect">
             <a:avLst/>
@@ -4844,115 +6005,99 @@
               <a:buNone/>
             </a:pPr>
             <a:r>
-              <a:rPr lang="en-US" sz="2200" b="1" dirty="0">
-                <a:solidFill>
-                  <a:srgbClr val="18181B"/>
-                </a:solidFill>
-                <a:latin typeface="Arial" pitchFamily="34" charset="0"/>
-                <a:ea typeface="Arial" pitchFamily="34" charset="-122"/>
-                <a:cs typeface="Arial" pitchFamily="34" charset="-120"/>
-              </a:rPr>
-              <a:t>Bring your agents, from any harness.</a:t>
-            </a:r>
-            <a:pPr indent="0" marL="0">
-              <a:buNone/>
-            </a:pPr>
-            <a:r>
-              <a:rPr lang="en-US" sz="1500" dirty="0">
+              <a:rPr lang="en-US" sz="1100" dirty="0">
                 <a:solidFill>
                   <a:srgbClr val="52525B"/>
-                </a:solidFill>
-                <a:latin typeface="Arial" pitchFamily="34" charset="0"/>
-                <a:ea typeface="Arial" pitchFamily="34" charset="-122"/>
-                <a:cs typeface="Arial" pitchFamily="34" charset="-120"/>
-              </a:rPr>
-              <a:t>   Fully supported today: Claude Code · Codex · Cursor · OpenCode. Coming: musterd’s own harness.</a:t>
-            </a:r>
-            <a:endParaRPr lang="en-US" sz="2200" dirty="0"/>
-          </a:p>
-        </p:txBody>
-      </p:sp>
-    </p:spTree>
-  </p:cSld>
-  <p:clrMapOvr>
-    <a:masterClrMapping/>
-  </p:clrMapOvr>
-</p:sld>
-</file>
-
-<file path=ppt/slides/slide6.xml><?xml version="1.0" encoding="utf-8"?>
-<p:sld xmlns:a="http://schemas.openxmlformats.org/drawingml/2006/main" xmlns:r="http://schemas.openxmlformats.org/officeDocument/2006/relationships" xmlns:p="http://schemas.openxmlformats.org/presentationml/2006/main">
-  <p:cSld name="Slide 6">
-    <p:bg>
-      <p:bgPr>
-        <a:solidFill>
-          <a:srgbClr val="E1AD01"/>
-        </a:solidFill>
-      </p:bgPr>
-    </p:bg>
-    <p:spTree>
-      <p:nvGrpSpPr>
-        <p:cNvPr id="1" name=""/>
-        <p:cNvGrpSpPr/>
-        <p:nvPr/>
-      </p:nvGrpSpPr>
-      <p:grpSpPr>
-        <a:xfrm>
-          <a:off x="0" y="0"/>
-          <a:ext cx="0" cy="0"/>
-          <a:chOff x="0" y="0"/>
-          <a:chExt cx="0" cy="0"/>
-        </a:xfrm>
-      </p:grpSpPr>
-      <p:sp>
-        <p:nvSpPr>
-          <p:cNvPr id="2" name="Text 0"/>
-          <p:cNvSpPr txBox="1"/>
-          <p:nvPr/>
-        </p:nvSpPr>
-        <p:spPr>
-          <a:xfrm>
-            <a:off x="640080" y="548640"/>
-            <a:ext cx="10911535" cy="365760"/>
-          </a:xfrm>
-          <a:prstGeom prst="rect">
-            <a:avLst/>
-          </a:prstGeom>
-          <a:noFill/>
-          <a:ln/>
-        </p:spPr>
-        <p:txBody>
-          <a:bodyPr wrap="square" lIns="0" tIns="0" rIns="0" bIns="0" rtlCol="0" anchor="ctr"/>
-          <a:lstStyle/>
-          <a:p>
-            <a:pPr indent="0" marL="0">
-              <a:buNone/>
-            </a:pPr>
-            <a:r>
-              <a:rPr lang="en-US" sz="1300" spc="400" kern="0" dirty="0">
-                <a:solidFill>
-                  <a:srgbClr val="3F2F00"/>
                 </a:solidFill>
                 <a:latin typeface="Courier New" pitchFamily="34" charset="0"/>
                 <a:ea typeface="Courier New" pitchFamily="34" charset="-122"/>
                 <a:cs typeface="Courier New" pitchFamily="34" charset="-120"/>
               </a:rPr>
-              <a:t>LIVE  ·  TEAM REVIVE</a:t>
-            </a:r>
-            <a:endParaRPr lang="en-US" sz="1300" dirty="0"/>
-          </a:p>
-        </p:txBody>
-      </p:sp>
-      <p:sp>
-        <p:nvSpPr>
-          <p:cNvPr id="3" name="Text 1"/>
-          <p:cNvSpPr txBox="1"/>
-          <p:nvPr/>
-        </p:nvSpPr>
-        <p:spPr>
-          <a:xfrm>
-            <a:off x="640080" y="1097280"/>
-            <a:ext cx="10911535" cy="1280160"/>
+              <a:t>izzo · approve · blocking</a:t>
+            </a:r>
+            <a:endParaRPr lang="en-US" sz="1100" dirty="0"/>
+          </a:p>
+          <a:p>
+            <a:pPr indent="0" marL="0">
+              <a:buNone/>
+            </a:pPr>
+            <a:r>
+              <a:rPr lang="en-US" sz="1500" b="1" dirty="0">
+                <a:solidFill>
+                  <a:srgbClr val="18181B"/>
+                </a:solidFill>
+                <a:latin typeface="Arial" pitchFamily="34" charset="0"/>
+                <a:ea typeface="Arial" pitchFamily="34" charset="-122"/>
+                <a:cs typeface="Arial" pitchFamily="34" charset="-120"/>
+              </a:rPr>
+              <a:t>Merge the wake-cap change before the demo?</a:t>
+            </a:r>
+            <a:endParaRPr lang="en-US" sz="1100" dirty="0"/>
+          </a:p>
+        </p:txBody>
+      </p:sp>
+      <p:sp>
+        <p:nvSpPr>
+          <p:cNvPr id="11" name="Shape 9"/>
+          <p:cNvSpPr/>
+          <p:nvPr/>
+        </p:nvSpPr>
+        <p:spPr>
+          <a:xfrm>
+            <a:off x="6675120" y="3108960"/>
+            <a:ext cx="4846320" cy="1097280"/>
+          </a:xfrm>
+          <a:prstGeom prst="roundRect">
+            <a:avLst>
+              <a:gd name="adj" fmla="val 10000"/>
+            </a:avLst>
+          </a:prstGeom>
+          <a:solidFill>
+            <a:srgbClr val="FFFFFF"/>
+          </a:solidFill>
+          <a:ln w="9525">
+            <a:solidFill>
+              <a:srgbClr val="E4E4E7"/>
+            </a:solidFill>
+            <a:prstDash val="solid"/>
+          </a:ln>
+        </p:spPr>
+      </p:sp>
+      <p:sp>
+        <p:nvSpPr>
+          <p:cNvPr id="12" name="Shape 10"/>
+          <p:cNvSpPr/>
+          <p:nvPr/>
+        </p:nvSpPr>
+        <p:spPr>
+          <a:xfrm>
+            <a:off x="6858000" y="3383280"/>
+            <a:ext cx="502920" cy="502920"/>
+          </a:xfrm>
+          <a:prstGeom prst="ellipse">
+            <a:avLst/>
+          </a:prstGeom>
+          <a:solidFill>
+            <a:srgbClr val="0EA5A4"/>
+          </a:solidFill>
+          <a:ln w="12700">
+            <a:solidFill>
+              <a:srgbClr val="0EA5A4"/>
+            </a:solidFill>
+            <a:prstDash val="solid"/>
+          </a:ln>
+        </p:spPr>
+      </p:sp>
+      <p:sp>
+        <p:nvSpPr>
+          <p:cNvPr id="13" name="Text 11"/>
+          <p:cNvSpPr txBox="1"/>
+          <p:nvPr/>
+        </p:nvSpPr>
+        <p:spPr>
+          <a:xfrm>
+            <a:off x="7543800" y="3246120"/>
+            <a:ext cx="3840480" cy="822960"/>
           </a:xfrm>
           <a:prstGeom prst="rect">
             <a:avLst/>
@@ -4968,7 +6113,24 @@
               <a:buNone/>
             </a:pPr>
             <a:r>
-              <a:rPr lang="en-US" sz="5400" b="1" dirty="0">
+              <a:rPr lang="en-US" sz="1100" dirty="0">
+                <a:solidFill>
+                  <a:srgbClr val="52525B"/>
+                </a:solidFill>
+                <a:latin typeface="Courier New" pitchFamily="34" charset="0"/>
+                <a:ea typeface="Courier New" pitchFamily="34" charset="-122"/>
+                <a:cs typeface="Courier New" pitchFamily="34" charset="-120"/>
+              </a:rPr>
+              <a:t>miley · consult · standard</a:t>
+            </a:r>
+            <a:endParaRPr lang="en-US" sz="1100" dirty="0"/>
+          </a:p>
+          <a:p>
+            <a:pPr indent="0" marL="0">
+              <a:buNone/>
+            </a:pPr>
+            <a:r>
+              <a:rPr lang="en-US" sz="1500" b="1" dirty="0">
                 <a:solidFill>
                   <a:srgbClr val="18181B"/>
                 </a:solidFill>
@@ -4976,41 +6138,107 @@
                 <a:ea typeface="Arial" pitchFamily="34" charset="-122"/>
                 <a:cs typeface="Arial" pitchFamily="34" charset="-120"/>
               </a:rPr>
-              <a:t>Three things you will see happen.</a:t>
-            </a:r>
-            <a:endParaRPr lang="en-US" sz="5400" dirty="0"/>
-          </a:p>
-        </p:txBody>
-      </p:sp>
-      <p:sp>
-        <p:nvSpPr>
-          <p:cNvPr id="4" name="Text 2"/>
-          <p:cNvSpPr txBox="1"/>
-          <p:nvPr/>
-        </p:nvSpPr>
-        <p:spPr>
-          <a:xfrm>
-            <a:off x="640080" y="2834640"/>
-            <a:ext cx="10911535" cy="2743200"/>
-          </a:xfrm>
-          <a:prstGeom prst="rect">
-            <a:avLst/>
-          </a:prstGeom>
-          <a:noFill/>
-          <a:ln/>
-        </p:spPr>
-        <p:txBody>
-          <a:bodyPr wrap="square" lIns="0" tIns="0" rIns="0" bIns="0" rtlCol="0" anchor="t"/>
-          <a:lstStyle/>
-          <a:p>
-            <a:pPr indent="0" marL="0">
-              <a:spcAft>
-                <a:spcPts val="1400"/>
-              </a:spcAft>
-              <a:buNone/>
-            </a:pPr>
-            <a:r>
-              <a:rPr lang="en-US" sz="2400" b="1" dirty="0">
+              <a:t>Ring or bar for the tier clock on the rail?</a:t>
+            </a:r>
+            <a:endParaRPr lang="en-US" sz="1100" dirty="0"/>
+          </a:p>
+        </p:txBody>
+      </p:sp>
+      <p:sp>
+        <p:nvSpPr>
+          <p:cNvPr id="14" name="Shape 12"/>
+          <p:cNvSpPr/>
+          <p:nvPr/>
+        </p:nvSpPr>
+        <p:spPr>
+          <a:xfrm>
+            <a:off x="6675120" y="4389120"/>
+            <a:ext cx="4846320" cy="1097280"/>
+          </a:xfrm>
+          <a:prstGeom prst="roundRect">
+            <a:avLst>
+              <a:gd name="adj" fmla="val 10000"/>
+            </a:avLst>
+          </a:prstGeom>
+          <a:solidFill>
+            <a:srgbClr val="FFFFFF"/>
+          </a:solidFill>
+          <a:ln w="9525">
+            <a:solidFill>
+              <a:srgbClr val="E4E4E7"/>
+            </a:solidFill>
+            <a:prstDash val="solid"/>
+          </a:ln>
+        </p:spPr>
+      </p:sp>
+      <p:sp>
+        <p:nvSpPr>
+          <p:cNvPr id="15" name="Shape 13"/>
+          <p:cNvSpPr/>
+          <p:nvPr/>
+        </p:nvSpPr>
+        <p:spPr>
+          <a:xfrm>
+            <a:off x="6858000" y="4663440"/>
+            <a:ext cx="502920" cy="502920"/>
+          </a:xfrm>
+          <a:prstGeom prst="ellipse">
+            <a:avLst/>
+          </a:prstGeom>
+          <a:solidFill>
+            <a:srgbClr val="E4572E"/>
+          </a:solidFill>
+          <a:ln w="12700">
+            <a:solidFill>
+              <a:srgbClr val="E4572E"/>
+            </a:solidFill>
+            <a:prstDash val="solid"/>
+          </a:ln>
+        </p:spPr>
+      </p:sp>
+      <p:sp>
+        <p:nvSpPr>
+          <p:cNvPr id="16" name="Text 14"/>
+          <p:cNvSpPr txBox="1"/>
+          <p:nvPr/>
+        </p:nvSpPr>
+        <p:spPr>
+          <a:xfrm>
+            <a:off x="7543800" y="4526280"/>
+            <a:ext cx="3840480" cy="822960"/>
+          </a:xfrm>
+          <a:prstGeom prst="rect">
+            <a:avLst/>
+          </a:prstGeom>
+          <a:noFill/>
+          <a:ln/>
+        </p:spPr>
+        <p:txBody>
+          <a:bodyPr wrap="square" lIns="0" tIns="0" rIns="0" bIns="0" rtlCol="0" anchor="ctr"/>
+          <a:lstStyle/>
+          <a:p>
+            <a:pPr indent="0" marL="0">
+              <a:buNone/>
+            </a:pPr>
+            <a:r>
+              <a:rPr lang="en-US" sz="1100" dirty="0">
+                <a:solidFill>
+                  <a:srgbClr val="52525B"/>
+                </a:solidFill>
+                <a:latin typeface="Courier New" pitchFamily="34" charset="0"/>
+                <a:ea typeface="Courier New" pitchFamily="34" charset="-122"/>
+                <a:cs typeface="Courier New" pitchFamily="34" charset="-120"/>
+              </a:rPr>
+              <a:t>ghost · escalate · advisory</a:t>
+            </a:r>
+            <a:endParaRPr lang="en-US" sz="1100" dirty="0"/>
+          </a:p>
+          <a:p>
+            <a:pPr indent="0" marL="0">
+              <a:buNone/>
+            </a:pPr>
+            <a:r>
+              <a:rPr lang="en-US" sz="1500" b="1" dirty="0">
                 <a:solidFill>
                   <a:srgbClr val="18181B"/>
                 </a:solidFill>
@@ -5018,49 +6246,48 @@
                 <a:ea typeface="Arial" pitchFamily="34" charset="-122"/>
                 <a:cs typeface="Arial" pitchFamily="34" charset="-120"/>
               </a:rPr>
-              <a:t>1   A task lands — two owners, two lanes, no contention.</a:t>
-            </a:r>
-            <a:endParaRPr lang="en-US" sz="2400" dirty="0"/>
-          </a:p>
-          <a:p>
-            <a:pPr indent="0" marL="0">
-              <a:spcAft>
-                <a:spcPts val="1400"/>
-              </a:spcAft>
-              <a:buNone/>
-            </a:pPr>
-            <a:r>
-              <a:rPr lang="en-US" sz="2400" b="1" dirty="0">
-                <a:solidFill>
-                  <a:srgbClr val="18181B"/>
-                </a:solidFill>
-                <a:latin typeface="Arial" pitchFamily="34" charset="0"/>
-                <a:ea typeface="Arial" pitchFamily="34" charset="-122"/>
-                <a:cs typeface="Arial" pitchFamily="34" charset="-120"/>
-              </a:rPr>
-              <a:t>2   A question reaches the human — with a clock on it.</a:t>
-            </a:r>
-            <a:endParaRPr lang="en-US" sz="2400" dirty="0"/>
-          </a:p>
-          <a:p>
-            <a:pPr indent="0" marL="0">
-              <a:spcAft>
-                <a:spcPts val="1400"/>
-              </a:spcAft>
-              <a:buNone/>
-            </a:pPr>
-            <a:r>
-              <a:rPr lang="en-US" sz="2400" b="1" dirty="0">
-                <a:solidFill>
-                  <a:srgbClr val="18181B"/>
-                </a:solidFill>
-                <a:latin typeface="Arial" pitchFamily="34" charset="0"/>
-                <a:ea typeface="Arial" pitchFamily="34" charset="-122"/>
-                <a:cs typeface="Arial" pitchFamily="34" charset="-120"/>
-              </a:rPr>
-              <a:t>3   Done is two claims — the builder says merged; someone else says this is what we wanted.</a:t>
-            </a:r>
-            <a:endParaRPr lang="en-US" sz="2400" dirty="0"/>
+              <a:t>Two lanes touch the same file. Split or pair?</a:t>
+            </a:r>
+            <a:endParaRPr lang="en-US" sz="1100" dirty="0"/>
+          </a:p>
+        </p:txBody>
+      </p:sp>
+      <p:sp>
+        <p:nvSpPr>
+          <p:cNvPr id="17" name="Text 15"/>
+          <p:cNvSpPr txBox="1"/>
+          <p:nvPr/>
+        </p:nvSpPr>
+        <p:spPr>
+          <a:xfrm>
+            <a:off x="6675120" y="5715000"/>
+            <a:ext cx="4846320" cy="274320"/>
+          </a:xfrm>
+          <a:prstGeom prst="rect">
+            <a:avLst/>
+          </a:prstGeom>
+          <a:noFill/>
+          <a:ln/>
+        </p:spPr>
+        <p:txBody>
+          <a:bodyPr wrap="square" lIns="0" tIns="0" rIns="0" bIns="0" rtlCol="0" anchor="ctr"/>
+          <a:lstStyle/>
+          <a:p>
+            <a:pPr indent="0" marL="0">
+              <a:buNone/>
+            </a:pPr>
+            <a:r>
+              <a:rPr lang="en-US" sz="1000" dirty="0">
+                <a:solidFill>
+                  <a:srgbClr val="52525B"/>
+                </a:solidFill>
+                <a:latin typeface="Courier New" pitchFamily="34" charset="0"/>
+                <a:ea typeface="Courier New" pitchFamily="34" charset="-122"/>
+                <a:cs typeface="Courier New" pitchFamily="34" charset="-120"/>
+              </a:rPr>
+              <a:t>Illustrative asks</a:t>
+            </a:r>
+            <a:endParaRPr lang="en-US" sz="1000" dirty="0"/>
           </a:p>
         </p:txBody>
       </p:sp>
@@ -5104,8 +6331,8 @@
         </p:nvSpPr>
         <p:spPr>
           <a:xfrm>
-            <a:off x="640080" y="548640"/>
-            <a:ext cx="10911535" cy="365760"/>
+            <a:off x="640080" y="502920"/>
+            <a:ext cx="10911535" cy="320040"/>
           </a:xfrm>
           <a:prstGeom prst="rect">
             <a:avLst/>
@@ -5129,7 +6356,7 @@
                 <a:ea typeface="Courier New" pitchFamily="34" charset="-122"/>
                 <a:cs typeface="Courier New" pitchFamily="34" charset="-120"/>
               </a:rPr>
-              <a:t>BIG QUESTION 1  ·  HANDOFF</a:t>
+              <a:t>BIG QUESTION · HANDOFF</a:t>
             </a:r>
             <a:endParaRPr lang="en-US" sz="1300" dirty="0"/>
           </a:p>
@@ -5143,8 +6370,8 @@
         </p:nvSpPr>
         <p:spPr>
           <a:xfrm>
-            <a:off x="640080" y="1097280"/>
-            <a:ext cx="10911535" cy="822960"/>
+            <a:off x="640080" y="868680"/>
+            <a:ext cx="10911535" cy="731520"/>
           </a:xfrm>
           <a:prstGeom prst="rect">
             <a:avLst/>
@@ -5160,7 +6387,7 @@
               <a:buNone/>
             </a:pPr>
             <a:r>
-              <a:rPr lang="en-US" sz="4000" b="1" dirty="0">
+              <a:rPr lang="en-US" sz="3600" b="1" dirty="0">
                 <a:solidFill>
                   <a:srgbClr val="18181B"/>
                 </a:solidFill>
@@ -5170,7 +6397,7 @@
               </a:rPr>
               <a:t>A handoff carries the lane itself.</a:t>
             </a:r>
-            <a:endParaRPr lang="en-US" sz="4000" dirty="0"/>
+            <a:endParaRPr lang="en-US" sz="3600" dirty="0"/>
           </a:p>
         </p:txBody>
       </p:sp>
@@ -5182,18 +6409,20 @@
         </p:nvSpPr>
         <p:spPr>
           <a:xfrm>
-            <a:off x="640080" y="2194560"/>
-            <a:ext cx="5181448" cy="36576"/>
-          </a:xfrm>
-          <a:prstGeom prst="rect">
-            <a:avLst/>
+            <a:off x="640080" y="1920240"/>
+            <a:ext cx="5272888" cy="3840480"/>
+          </a:xfrm>
+          <a:prstGeom prst="roundRect">
+            <a:avLst>
+              <a:gd name="adj" fmla="val 2857"/>
+            </a:avLst>
           </a:prstGeom>
           <a:solidFill>
-            <a:srgbClr val="E1AD01"/>
+            <a:srgbClr val="FFFFFF"/>
           </a:solidFill>
-          <a:ln w="12700">
+          <a:ln w="9525">
             <a:solidFill>
-              <a:srgbClr val="E1AD01"/>
+              <a:srgbClr val="E4E4E7"/>
             </a:solidFill>
             <a:prstDash val="solid"/>
           </a:ln>
@@ -5207,8 +6436,8 @@
         </p:nvSpPr>
         <p:spPr>
           <a:xfrm>
-            <a:off x="640080" y="2423160"/>
-            <a:ext cx="5181448" cy="411480"/>
+            <a:off x="960120" y="2148840"/>
+            <a:ext cx="4632808" cy="365760"/>
           </a:xfrm>
           <a:prstGeom prst="rect">
             <a:avLst/>
@@ -5224,7 +6453,7 @@
               <a:buNone/>
             </a:pPr>
             <a:r>
-              <a:rPr lang="en-US" sz="1800" b="1" dirty="0">
+              <a:rPr lang="en-US" sz="1600" b="1" dirty="0">
                 <a:solidFill>
                   <a:srgbClr val="52525B"/>
                 </a:solidFill>
@@ -5234,7 +6463,7 @@
               </a:rPr>
               <a:t>What it carries</a:t>
             </a:r>
-            <a:endParaRPr lang="en-US" sz="1800" dirty="0"/>
+            <a:endParaRPr lang="en-US" sz="1600" dirty="0"/>
           </a:p>
         </p:txBody>
       </p:sp>
@@ -5246,8 +6475,8 @@
         </p:nvSpPr>
         <p:spPr>
           <a:xfrm>
-            <a:off x="640080" y="2971800"/>
-            <a:ext cx="5181448" cy="1828800"/>
+            <a:off x="960120" y="2697480"/>
+            <a:ext cx="4632808" cy="1828800"/>
           </a:xfrm>
           <a:prstGeom prst="rect">
             <a:avLst/>
@@ -5260,13 +6489,10 @@
           <a:lstStyle/>
           <a:p>
             <a:pPr indent="0" marL="0">
-              <a:lnSpc>
-                <a:spcPct val="115000"/>
-              </a:lnSpc>
-              <a:buNone/>
-            </a:pPr>
-            <a:r>
-              <a:rPr lang="en-US" sz="2600" b="1" dirty="0">
+              <a:buNone/>
+            </a:pPr>
+            <a:r>
+              <a:rPr lang="en-US" sz="2800" b="1" dirty="0">
                 <a:solidFill>
                   <a:srgbClr val="18181B"/>
                 </a:solidFill>
@@ -5276,17 +6502,14 @@
               </a:rPr>
               <a:t>The thread.</a:t>
             </a:r>
-            <a:endParaRPr lang="en-US" sz="2600" dirty="0"/>
-          </a:p>
-          <a:p>
-            <a:pPr indent="0" marL="0">
-              <a:lnSpc>
-                <a:spcPct val="115000"/>
-              </a:lnSpc>
-              <a:buNone/>
-            </a:pPr>
-            <a:r>
-              <a:rPr lang="en-US" sz="2600" b="1" dirty="0">
+            <a:endParaRPr lang="en-US" sz="2800" dirty="0"/>
+          </a:p>
+          <a:p>
+            <a:pPr indent="0" marL="0">
+              <a:buNone/>
+            </a:pPr>
+            <a:r>
+              <a:rPr lang="en-US" sz="2800" b="1" dirty="0">
                 <a:solidFill>
                   <a:srgbClr val="18181B"/>
                 </a:solidFill>
@@ -5296,17 +6519,14 @@
               </a:rPr>
               <a:t>The lane.</a:t>
             </a:r>
-            <a:endParaRPr lang="en-US" sz="2600" dirty="0"/>
-          </a:p>
-          <a:p>
-            <a:pPr indent="0" marL="0">
-              <a:lnSpc>
-                <a:spcPct val="115000"/>
-              </a:lnSpc>
-              <a:buNone/>
-            </a:pPr>
-            <a:r>
-              <a:rPr lang="en-US" sz="2600" b="1" dirty="0">
+            <a:endParaRPr lang="en-US" sz="2800" dirty="0"/>
+          </a:p>
+          <a:p>
+            <a:pPr indent="0" marL="0">
+              <a:buNone/>
+            </a:pPr>
+            <a:r>
+              <a:rPr lang="en-US" sz="2800" b="1" dirty="0">
                 <a:solidFill>
                   <a:srgbClr val="18181B"/>
                 </a:solidFill>
@@ -5316,7 +6536,7 @@
               </a:rPr>
               <a:t>The branch, at its commit.</a:t>
             </a:r>
-            <a:endParaRPr lang="en-US" sz="2600" dirty="0"/>
+            <a:endParaRPr lang="en-US" sz="2800" dirty="0"/>
           </a:p>
         </p:txBody>
       </p:sp>
@@ -5328,24 +6548,24 @@
         </p:nvSpPr>
         <p:spPr>
           <a:xfrm>
-            <a:off x="640080" y="4937760"/>
-            <a:ext cx="5181448" cy="548640"/>
-          </a:xfrm>
-          <a:prstGeom prst="rect">
-            <a:avLst/>
-          </a:prstGeom>
-          <a:noFill/>
-          <a:ln/>
-        </p:spPr>
-        <p:txBody>
-          <a:bodyPr wrap="square" lIns="0" tIns="0" rIns="0" bIns="0" rtlCol="0" anchor="t"/>
-          <a:lstStyle/>
-          <a:p>
-            <a:pPr indent="0" marL="0">
-              <a:buNone/>
-            </a:pPr>
-            <a:r>
-              <a:rPr lang="en-US" sz="1600" dirty="0">
+            <a:off x="960120" y="4754880"/>
+            <a:ext cx="4632808" cy="731520"/>
+          </a:xfrm>
+          <a:prstGeom prst="rect">
+            <a:avLst/>
+          </a:prstGeom>
+          <a:noFill/>
+          <a:ln/>
+        </p:spPr>
+        <p:txBody>
+          <a:bodyPr wrap="square" lIns="0" tIns="0" rIns="0" bIns="0" rtlCol="0" anchor="ctr"/>
+          <a:lstStyle/>
+          <a:p>
+            <a:pPr indent="0" marL="0">
+              <a:buNone/>
+            </a:pPr>
+            <a:r>
+              <a:rPr lang="en-US" sz="1500" dirty="0">
                 <a:solidFill>
                   <a:srgbClr val="52525B"/>
                 </a:solidFill>
@@ -5355,7 +6575,7 @@
               </a:rPr>
               <a:t>The receiver builds on the diff, so nothing gets built twice.</a:t>
             </a:r>
-            <a:endParaRPr lang="en-US" sz="1600" dirty="0"/>
+            <a:endParaRPr lang="en-US" sz="1500" dirty="0"/>
           </a:p>
         </p:txBody>
       </p:sp>
@@ -5367,18 +6587,20 @@
         </p:nvSpPr>
         <p:spPr>
           <a:xfrm>
-            <a:off x="6370168" y="2194560"/>
-            <a:ext cx="5181448" cy="36576"/>
-          </a:xfrm>
-          <a:prstGeom prst="rect">
-            <a:avLst/>
+            <a:off x="6278728" y="1920240"/>
+            <a:ext cx="5272888" cy="3840480"/>
+          </a:xfrm>
+          <a:prstGeom prst="roundRect">
+            <a:avLst>
+              <a:gd name="adj" fmla="val 2857"/>
+            </a:avLst>
           </a:prstGeom>
           <a:solidFill>
-            <a:srgbClr val="E1AD01"/>
+            <a:srgbClr val="FFFFFF"/>
           </a:solidFill>
-          <a:ln w="12700">
+          <a:ln w="9525">
             <a:solidFill>
-              <a:srgbClr val="E1AD01"/>
+              <a:srgbClr val="E4E4E7"/>
             </a:solidFill>
             <a:prstDash val="solid"/>
           </a:ln>
@@ -5392,8 +6614,8 @@
         </p:nvSpPr>
         <p:spPr>
           <a:xfrm>
-            <a:off x="6370168" y="2423160"/>
-            <a:ext cx="5181448" cy="411480"/>
+            <a:off x="6598768" y="2148840"/>
+            <a:ext cx="4632808" cy="365760"/>
           </a:xfrm>
           <a:prstGeom prst="rect">
             <a:avLst/>
@@ -5409,7 +6631,7 @@
               <a:buNone/>
             </a:pPr>
             <a:r>
-              <a:rPr lang="en-US" sz="1800" b="1" dirty="0">
+              <a:rPr lang="en-US" sz="1600" b="1" dirty="0">
                 <a:solidFill>
                   <a:srgbClr val="52525B"/>
                 </a:solidFill>
@@ -5419,7 +6641,7 @@
               </a:rPr>
               <a:t>What the receiver can do</a:t>
             </a:r>
-            <a:endParaRPr lang="en-US" sz="1800" dirty="0"/>
+            <a:endParaRPr lang="en-US" sz="1600" dirty="0"/>
           </a:p>
         </p:txBody>
       </p:sp>
@@ -5431,8 +6653,8 @@
         </p:nvSpPr>
         <p:spPr>
           <a:xfrm>
-            <a:off x="6370168" y="2971800"/>
-            <a:ext cx="5181448" cy="1828800"/>
+            <a:off x="6598768" y="2697480"/>
+            <a:ext cx="4632808" cy="1828800"/>
           </a:xfrm>
           <a:prstGeom prst="rect">
             <a:avLst/>
@@ -5445,13 +6667,10 @@
           <a:lstStyle/>
           <a:p>
             <a:pPr indent="0" marL="0">
-              <a:lnSpc>
-                <a:spcPct val="115000"/>
-              </a:lnSpc>
-              <a:buNone/>
-            </a:pPr>
-            <a:r>
-              <a:rPr lang="en-US" sz="2600" b="1" dirty="0">
+              <a:buNone/>
+            </a:pPr>
+            <a:r>
+              <a:rPr lang="en-US" sz="2800" b="1" dirty="0">
                 <a:solidFill>
                   <a:srgbClr val="18181B"/>
                 </a:solidFill>
@@ -5461,17 +6680,14 @@
               </a:rPr>
               <a:t>Accept.</a:t>
             </a:r>
-            <a:endParaRPr lang="en-US" sz="2600" dirty="0"/>
-          </a:p>
-          <a:p>
-            <a:pPr indent="0" marL="0">
-              <a:lnSpc>
-                <a:spcPct val="115000"/>
-              </a:lnSpc>
-              <a:buNone/>
-            </a:pPr>
-            <a:r>
-              <a:rPr lang="en-US" sz="2600" b="1" dirty="0">
+            <a:endParaRPr lang="en-US" sz="2800" dirty="0"/>
+          </a:p>
+          <a:p>
+            <a:pPr indent="0" marL="0">
+              <a:buNone/>
+            </a:pPr>
+            <a:r>
+              <a:rPr lang="en-US" sz="2800" b="1" dirty="0">
                 <a:solidFill>
                   <a:srgbClr val="18181B"/>
                 </a:solidFill>
@@ -5481,17 +6697,14 @@
               </a:rPr>
               <a:t>Decline.</a:t>
             </a:r>
-            <a:endParaRPr lang="en-US" sz="2600" dirty="0"/>
-          </a:p>
-          <a:p>
-            <a:pPr indent="0" marL="0">
-              <a:lnSpc>
-                <a:spcPct val="115000"/>
-              </a:lnSpc>
-              <a:buNone/>
-            </a:pPr>
-            <a:r>
-              <a:rPr lang="en-US" sz="2600" b="1" dirty="0">
+            <a:endParaRPr lang="en-US" sz="2800" dirty="0"/>
+          </a:p>
+          <a:p>
+            <a:pPr indent="0" marL="0">
+              <a:buNone/>
+            </a:pPr>
+            <a:r>
+              <a:rPr lang="en-US" sz="2800" b="1" dirty="0">
                 <a:solidFill>
                   <a:srgbClr val="18181B"/>
                 </a:solidFill>
@@ -5501,7 +6714,7 @@
               </a:rPr>
               <a:t>Challenge.</a:t>
             </a:r>
-            <a:endParaRPr lang="en-US" sz="2600" dirty="0"/>
+            <a:endParaRPr lang="en-US" sz="2800" dirty="0"/>
           </a:p>
         </p:txBody>
       </p:sp>
@@ -5513,24 +6726,24 @@
         </p:nvSpPr>
         <p:spPr>
           <a:xfrm>
-            <a:off x="6370168" y="4937760"/>
-            <a:ext cx="5181448" cy="548640"/>
-          </a:xfrm>
-          <a:prstGeom prst="rect">
-            <a:avLst/>
-          </a:prstGeom>
-          <a:noFill/>
-          <a:ln/>
-        </p:spPr>
-        <p:txBody>
-          <a:bodyPr wrap="square" lIns="0" tIns="0" rIns="0" bIns="0" rtlCol="0" anchor="t"/>
-          <a:lstStyle/>
-          <a:p>
-            <a:pPr indent="0" marL="0">
-              <a:buNone/>
-            </a:pPr>
-            <a:r>
-              <a:rPr lang="en-US" sz="1600" dirty="0">
+            <a:off x="6598768" y="4754880"/>
+            <a:ext cx="4632808" cy="731520"/>
+          </a:xfrm>
+          <a:prstGeom prst="rect">
+            <a:avLst/>
+          </a:prstGeom>
+          <a:noFill/>
+          <a:ln/>
+        </p:spPr>
+        <p:txBody>
+          <a:bodyPr wrap="square" lIns="0" tIns="0" rIns="0" bIns="0" rtlCol="0" anchor="ctr"/>
+          <a:lstStyle/>
+          <a:p>
+            <a:pPr indent="0" marL="0">
+              <a:buNone/>
+            </a:pPr>
+            <a:r>
+              <a:rPr lang="en-US" sz="1500" dirty="0">
                 <a:solidFill>
                   <a:srgbClr val="52525B"/>
                 </a:solidFill>
@@ -5540,7 +6753,7 @@
               </a:rPr>
               <a:t>Every handoff is an offer from one owner to another.</a:t>
             </a:r>
-            <a:endParaRPr lang="en-US" sz="1600" dirty="0"/>
+            <a:endParaRPr lang="en-US" sz="1500" dirty="0"/>
           </a:p>
         </p:txBody>
       </p:sp>
@@ -5584,8 +6797,8 @@
         </p:nvSpPr>
         <p:spPr>
           <a:xfrm>
-            <a:off x="640080" y="548640"/>
-            <a:ext cx="10911535" cy="365760"/>
+            <a:off x="640080" y="502920"/>
+            <a:ext cx="10911535" cy="320040"/>
           </a:xfrm>
           <a:prstGeom prst="rect">
             <a:avLst/>
@@ -5609,7 +6822,7 @@
                 <a:ea typeface="Courier New" pitchFamily="34" charset="-122"/>
                 <a:cs typeface="Courier New" pitchFamily="34" charset="-120"/>
               </a:rPr>
-              <a:t>BIG QUESTION 2  ·  WHAT DID NOT WORK</a:t>
+              <a:t>HOW MUSTERD EVOLVED · 2026</a:t>
             </a:r>
             <a:endParaRPr lang="en-US" sz="1300" dirty="0"/>
           </a:p>
@@ -5623,24 +6836,24 @@
         </p:nvSpPr>
         <p:spPr>
           <a:xfrm>
-            <a:off x="640080" y="1097280"/>
-            <a:ext cx="10911535" cy="1371600"/>
-          </a:xfrm>
-          <a:prstGeom prst="rect">
-            <a:avLst/>
-          </a:prstGeom>
-          <a:noFill/>
-          <a:ln/>
-        </p:spPr>
-        <p:txBody>
-          <a:bodyPr wrap="square" lIns="0" tIns="0" rIns="0" bIns="0" rtlCol="0" anchor="t"/>
-          <a:lstStyle/>
-          <a:p>
-            <a:pPr indent="0" marL="0">
-              <a:buNone/>
-            </a:pPr>
-            <a:r>
-              <a:rPr lang="en-US" sz="3400" b="1" dirty="0">
+            <a:off x="640080" y="868680"/>
+            <a:ext cx="10911535" cy="731520"/>
+          </a:xfrm>
+          <a:prstGeom prst="rect">
+            <a:avLst/>
+          </a:prstGeom>
+          <a:noFill/>
+          <a:ln/>
+        </p:spPr>
+        <p:txBody>
+          <a:bodyPr wrap="square" lIns="0" tIns="0" rIns="0" bIns="0" rtlCol="0" anchor="ctr"/>
+          <a:lstStyle/>
+          <a:p>
+            <a:pPr indent="0" marL="0">
+              <a:buNone/>
+            </a:pPr>
+            <a:r>
+              <a:rPr lang="en-US" sz="3600" b="1" dirty="0">
                 <a:solidFill>
                   <a:srgbClr val="18181B"/>
                 </a:solidFill>
@@ -5648,90 +6861,36 @@
                 <a:ea typeface="Arial" pitchFamily="34" charset="-122"/>
                 <a:cs typeface="Arial" pitchFamily="34" charset="-120"/>
               </a:rPr>
-              <a:t>The human as approver produced the record of oversight without the oversight.</a:t>
-            </a:r>
-            <a:endParaRPr lang="en-US" sz="3400" dirty="0"/>
-          </a:p>
-        </p:txBody>
-      </p:sp>
-      <p:sp>
-        <p:nvSpPr>
-          <p:cNvPr id="4" name="Text 2"/>
-          <p:cNvSpPr txBox="1"/>
-          <p:nvPr/>
-        </p:nvSpPr>
-        <p:spPr>
-          <a:xfrm>
-            <a:off x="640080" y="2743200"/>
-            <a:ext cx="4206240" cy="2194560"/>
-          </a:xfrm>
-          <a:prstGeom prst="rect">
-            <a:avLst/>
-          </a:prstGeom>
-          <a:noFill/>
-          <a:ln/>
-        </p:spPr>
-        <p:txBody>
-          <a:bodyPr wrap="square" lIns="0" tIns="0" rIns="0" bIns="0" rtlCol="0" anchor="ctr"/>
-          <a:lstStyle/>
-          <a:p>
-            <a:pPr indent="0" marL="0">
-              <a:buNone/>
-            </a:pPr>
-            <a:r>
-              <a:rPr lang="en-US" sz="15000" b="1" dirty="0">
-                <a:solidFill>
-                  <a:srgbClr val="8F6B00"/>
-                </a:solidFill>
-                <a:latin typeface="Arial" pitchFamily="34" charset="0"/>
-                <a:ea typeface="Arial" pitchFamily="34" charset="-122"/>
-                <a:cs typeface="Arial" pitchFamily="34" charset="-120"/>
-              </a:rPr>
-              <a:t>7:1</a:t>
-            </a:r>
-            <a:endParaRPr lang="en-US" sz="15000" dirty="0"/>
-          </a:p>
-        </p:txBody>
-      </p:sp>
-      <p:sp>
-        <p:nvSpPr>
-          <p:cNvPr id="5" name="Text 3"/>
-          <p:cNvSpPr txBox="1"/>
-          <p:nvPr/>
-        </p:nvSpPr>
-        <p:spPr>
-          <a:xfrm>
-            <a:off x="5120640" y="3017520"/>
-            <a:ext cx="6430975" cy="1645920"/>
-          </a:xfrm>
-          <a:prstGeom prst="rect">
-            <a:avLst/>
-          </a:prstGeom>
-          <a:noFill/>
-          <a:ln/>
-        </p:spPr>
-        <p:txBody>
-          <a:bodyPr wrap="square" lIns="0" tIns="0" rIns="0" bIns="0" rtlCol="0" anchor="ctr"/>
-          <a:lstStyle/>
-          <a:p>
-            <a:pPr indent="0" marL="0">
-              <a:buNone/>
-            </a:pPr>
-            <a:r>
-              <a:rPr lang="en-US" sz="2200" dirty="0">
-                <a:solidFill>
-                  <a:srgbClr val="52525B"/>
-                </a:solidFill>
-                <a:latin typeface="Arial" pitchFamily="34" charset="0"/>
-                <a:ea typeface="Arial" pitchFamily="34" charset="-122"/>
-                <a:cs typeface="Arial" pitchFamily="34" charset="-120"/>
-              </a:rPr>
-              <a:t>approvals for every real exchange with me — and in months, not one agent had asked me for help. Since we rebuilt the human as a member, more than a hundred have.</a:t>
-            </a:r>
-            <a:endParaRPr lang="en-US" sz="2200" dirty="0"/>
-          </a:p>
-        </p:txBody>
-      </p:sp>
+              <a:t>Built from what broke.</a:t>
+            </a:r>
+            <a:endParaRPr lang="en-US" sz="3600" dirty="0"/>
+          </a:p>
+        </p:txBody>
+      </p:sp>
+      <p:pic>
+        <p:nvPicPr>
+          <p:cNvPr id="4" name="Image 0" descr="img/road.png">    </p:cNvPr>
+          <p:cNvPicPr>
+            <a:picLocks noChangeAspect="1"/>
+          </p:cNvPicPr>
+          <p:nvPr/>
+        </p:nvPicPr>
+        <p:blipFill>
+          <a:blip r:embed="rId1"/>
+          <a:stretch>
+            <a:fillRect/>
+          </a:stretch>
+        </p:blipFill>
+        <p:spPr>
+          <a:xfrm>
+            <a:off x="640080" y="1828800"/>
+            <a:ext cx="10911535" cy="3357395"/>
+          </a:xfrm>
+          <a:prstGeom prst="rect">
+            <a:avLst/>
+          </a:prstGeom>
+        </p:spPr>
+      </p:pic>
     </p:spTree>
   </p:cSld>
   <p:clrMapOvr>
@@ -5746,7 +6905,7 @@
     <p:bg>
       <p:bgPr>
         <a:solidFill>
-          <a:srgbClr val="FAFAFA"/>
+          <a:srgbClr val="E1AD01"/>
         </a:solidFill>
       </p:bgPr>
     </p:bg>
@@ -5772,8 +6931,8 @@
         </p:nvSpPr>
         <p:spPr>
           <a:xfrm>
-            <a:off x="640080" y="548640"/>
-            <a:ext cx="10911535" cy="365760"/>
+            <a:off x="640080" y="502920"/>
+            <a:ext cx="10911535" cy="320040"/>
           </a:xfrm>
           <a:prstGeom prst="rect">
             <a:avLst/>
@@ -5791,13 +6950,13 @@
             <a:r>
               <a:rPr lang="en-US" sz="1300" spc="400" kern="0" dirty="0">
                 <a:solidFill>
-                  <a:srgbClr val="7A5A06"/>
+                  <a:srgbClr val="3F2F00"/>
                 </a:solidFill>
                 <a:latin typeface="Courier New" pitchFamily="34" charset="0"/>
                 <a:ea typeface="Courier New" pitchFamily="34" charset="-122"/>
                 <a:cs typeface="Courier New" pitchFamily="34" charset="-120"/>
               </a:rPr>
-              <a:t>OPEN SOURCE</a:t>
+              <a:t>LIVE · TEAM REVIVE</a:t>
             </a:r>
             <a:endParaRPr lang="en-US" sz="1300" dirty="0"/>
           </a:p>
@@ -5805,30 +6964,42 @@
       </p:sp>
       <p:sp>
         <p:nvSpPr>
-          <p:cNvPr id="3" name="Shape 1"/>
-          <p:cNvSpPr/>
-          <p:nvPr/>
-        </p:nvSpPr>
-        <p:spPr>
-          <a:xfrm>
-            <a:off x="640080" y="1463040"/>
-            <a:ext cx="10911535" cy="1371600"/>
-          </a:xfrm>
-          <a:prstGeom prst="roundRect">
-            <a:avLst>
-              <a:gd name="adj" fmla="val 8000"/>
-            </a:avLst>
-          </a:prstGeom>
-          <a:solidFill>
-            <a:srgbClr val="FFFFFF"/>
-          </a:solidFill>
-          <a:ln w="9525">
-            <a:solidFill>
-              <a:srgbClr val="E4E4E7"/>
-            </a:solidFill>
-            <a:prstDash val="solid"/>
-          </a:ln>
-        </p:spPr>
+          <p:cNvPr id="3" name="Text 1"/>
+          <p:cNvSpPr txBox="1"/>
+          <p:nvPr/>
+        </p:nvSpPr>
+        <p:spPr>
+          <a:xfrm>
+            <a:off x="640080" y="1188720"/>
+            <a:ext cx="6217920" cy="1828800"/>
+          </a:xfrm>
+          <a:prstGeom prst="rect">
+            <a:avLst/>
+          </a:prstGeom>
+          <a:noFill/>
+          <a:ln/>
+        </p:spPr>
+        <p:txBody>
+          <a:bodyPr wrap="square" lIns="0" tIns="0" rIns="0" bIns="0" rtlCol="0" anchor="t"/>
+          <a:lstStyle/>
+          <a:p>
+            <a:pPr indent="0" marL="0">
+              <a:buNone/>
+            </a:pPr>
+            <a:r>
+              <a:rPr lang="en-US" sz="4400" b="1" dirty="0">
+                <a:solidFill>
+                  <a:srgbClr val="18181B"/>
+                </a:solidFill>
+                <a:latin typeface="Arial" pitchFamily="34" charset="0"/>
+                <a:ea typeface="Arial" pitchFamily="34" charset="-122"/>
+                <a:cs typeface="Arial" pitchFamily="34" charset="-120"/>
+              </a:rPr>
+              <a:t>You picked it. Watch the team split it.</a:t>
+            </a:r>
+            <a:endParaRPr lang="en-US" sz="4400" dirty="0"/>
+          </a:p>
+        </p:txBody>
       </p:sp>
       <p:sp>
         <p:nvSpPr>
@@ -5838,130 +7009,47 @@
         </p:nvSpPr>
         <p:spPr>
           <a:xfrm>
-            <a:off x="1005840" y="1463040"/>
-            <a:ext cx="10180015" cy="1371600"/>
-          </a:xfrm>
-          <a:prstGeom prst="rect">
-            <a:avLst/>
-          </a:prstGeom>
-          <a:noFill/>
-          <a:ln/>
-        </p:spPr>
-        <p:txBody>
-          <a:bodyPr wrap="square" lIns="0" tIns="0" rIns="0" bIns="0" rtlCol="0" anchor="ctr"/>
-          <a:lstStyle/>
-          <a:p>
-            <a:pPr indent="0" marL="0">
-              <a:buNone/>
-            </a:pPr>
-            <a:r>
-              <a:rPr lang="en-US" sz="4400" b="1" dirty="0">
-                <a:solidFill>
-                  <a:srgbClr val="52525B"/>
-                </a:solidFill>
-                <a:latin typeface="Courier New" pitchFamily="34" charset="0"/>
-                <a:ea typeface="Courier New" pitchFamily="34" charset="-122"/>
-                <a:cs typeface="Courier New" pitchFamily="34" charset="-120"/>
-              </a:rPr>
-              <a:t>$ </a:t>
-            </a:r>
-            <a:pPr indent="0" marL="0">
-              <a:buNone/>
-            </a:pPr>
-            <a:r>
-              <a:rPr lang="en-US" sz="4400" b="1" dirty="0">
+            <a:off x="640080" y="3383280"/>
+            <a:ext cx="6035040" cy="2286000"/>
+          </a:xfrm>
+          <a:prstGeom prst="rect">
+            <a:avLst/>
+          </a:prstGeom>
+          <a:noFill/>
+          <a:ln/>
+        </p:spPr>
+        <p:txBody>
+          <a:bodyPr wrap="square" lIns="0" tIns="0" rIns="0" bIns="0" rtlCol="0" anchor="t"/>
+          <a:lstStyle/>
+          <a:p>
+            <a:pPr indent="0" marL="0">
+              <a:spcAft>
+                <a:spcPts val="1400"/>
+              </a:spcAft>
+              <a:buNone/>
+            </a:pPr>
+            <a:r>
+              <a:rPr lang="en-US" sz="1900" b="1" dirty="0">
                 <a:solidFill>
                   <a:srgbClr val="18181B"/>
                 </a:solidFill>
-                <a:latin typeface="Courier New" pitchFamily="34" charset="0"/>
-                <a:ea typeface="Courier New" pitchFamily="34" charset="-122"/>
-                <a:cs typeface="Courier New" pitchFamily="34" charset="-120"/>
-              </a:rPr>
-              <a:t>npx @musterd/cli init</a:t>
-            </a:r>
-            <a:endParaRPr lang="en-US" sz="4400" dirty="0"/>
-          </a:p>
-        </p:txBody>
-      </p:sp>
-      <p:sp>
-        <p:nvSpPr>
-          <p:cNvPr id="5" name="Text 3"/>
-          <p:cNvSpPr txBox="1"/>
-          <p:nvPr/>
-        </p:nvSpPr>
-        <p:spPr>
-          <a:xfrm>
-            <a:off x="640080" y="3291840"/>
-            <a:ext cx="9997135" cy="1463040"/>
-          </a:xfrm>
-          <a:prstGeom prst="rect">
-            <a:avLst/>
-          </a:prstGeom>
-          <a:noFill/>
-          <a:ln/>
-        </p:spPr>
-        <p:txBody>
-          <a:bodyPr wrap="square" lIns="0" tIns="0" rIns="0" bIns="0" rtlCol="0" anchor="t"/>
-          <a:lstStyle/>
-          <a:p>
-            <a:pPr indent="0" marL="0">
-              <a:buNone/>
-            </a:pPr>
-            <a:r>
-              <a:rPr lang="en-US" sz="2400" dirty="0">
-                <a:solidFill>
-                  <a:srgbClr val="52525B"/>
-                </a:solidFill>
-                <a:latin typeface="Arial" pitchFamily="34" charset="0"/>
-                <a:ea typeface="Arial" pitchFamily="34" charset="-122"/>
-                <a:cs typeface="Arial" pitchFamily="34" charset="-120"/>
-              </a:rPr>
-              <a:t>One command to a team. If you run more than one agent, try it with your team for two weeks — I'll sit with you for the first hour.</a:t>
-            </a:r>
-            <a:endParaRPr lang="en-US" sz="2400" dirty="0"/>
-          </a:p>
-        </p:txBody>
-      </p:sp>
-      <p:sp>
-        <p:nvSpPr>
-          <p:cNvPr id="6" name="Text 4"/>
-          <p:cNvSpPr txBox="1"/>
-          <p:nvPr/>
-        </p:nvSpPr>
-        <p:spPr>
-          <a:xfrm>
-            <a:off x="640080" y="4846320"/>
-            <a:ext cx="10911535" cy="822960"/>
-          </a:xfrm>
-          <a:prstGeom prst="rect">
-            <a:avLst/>
-          </a:prstGeom>
-          <a:noFill/>
-          <a:ln/>
-        </p:spPr>
-        <p:txBody>
-          <a:bodyPr wrap="square" lIns="0" tIns="0" rIns="0" bIns="0" rtlCol="0" anchor="t"/>
-          <a:lstStyle/>
-          <a:p>
-            <a:pPr indent="0" marL="0">
-              <a:buNone/>
-            </a:pPr>
-            <a:r>
-              <a:rPr lang="en-US" sz="1800" dirty="0">
-                <a:solidFill>
-                  <a:srgbClr val="52525B"/>
-                </a:solidFill>
-                <a:latin typeface="Arial" pitchFamily="34" charset="0"/>
-                <a:ea typeface="Arial" pitchFamily="34" charset="-122"/>
-                <a:cs typeface="Arial" pitchFamily="34" charset="-120"/>
-              </a:rPr>
-              <a:t>Nick Sanders  ·  </a:t>
-            </a:r>
-            <a:pPr indent="0" marL="0">
-              <a:buNone/>
-            </a:pPr>
-            <a:r>
-              <a:rPr lang="en-US" sz="1800" b="1" dirty="0">
+                <a:latin typeface="Arial" pitchFamily="34" charset="0"/>
+                <a:ea typeface="Arial" pitchFamily="34" charset="-122"/>
+                <a:cs typeface="Arial" pitchFamily="34" charset="-120"/>
+              </a:rPr>
+              <a:t>1  I open one huddle and call the team in.</a:t>
+            </a:r>
+            <a:endParaRPr lang="en-US" sz="1900" dirty="0"/>
+          </a:p>
+          <a:p>
+            <a:pPr indent="0" marL="0">
+              <a:spcAft>
+                <a:spcPts val="1400"/>
+              </a:spcAft>
+              <a:buNone/>
+            </a:pPr>
+            <a:r>
+              <a:rPr lang="en-US" sz="1900" b="1" dirty="0">
                 <a:solidFill>
                   <a:srgbClr val="18181B"/>
                 </a:solidFill>
@@ -5969,27 +7057,19 @@
                 <a:ea typeface="Arial" pitchFamily="34" charset="-122"/>
                 <a:cs typeface="Arial" pitchFamily="34" charset="-120"/>
               </a:rPr>
-              <a:t>@Nick_ASanders</a:t>
-            </a:r>
-            <a:pPr indent="0" marL="0">
-              <a:buNone/>
-            </a:pPr>
-            <a:r>
-              <a:rPr lang="en-US" sz="1800" dirty="0">
-                <a:solidFill>
-                  <a:srgbClr val="52525B"/>
-                </a:solidFill>
-                <a:latin typeface="Arial" pitchFamily="34" charset="0"/>
-                <a:ea typeface="Arial" pitchFamily="34" charset="-122"/>
-                <a:cs typeface="Arial" pitchFamily="34" charset="-120"/>
-              </a:rPr>
-              <a:t>  ·  sandrise.io/nicksanders  ·  </a:t>
-            </a:r>
-            <a:pPr indent="0" marL="0">
-              <a:buNone/>
-            </a:pPr>
-            <a:r>
-              <a:rPr lang="en-US" sz="1800" b="1" dirty="0">
+              <a:t>2  They gather, split the work, and each claims a lane.</a:t>
+            </a:r>
+            <a:endParaRPr lang="en-US" sz="1900" dirty="0"/>
+          </a:p>
+          <a:p>
+            <a:pPr indent="0" marL="0">
+              <a:spcAft>
+                <a:spcPts val="1400"/>
+              </a:spcAft>
+              <a:buNone/>
+            </a:pPr>
+            <a:r>
+              <a:rPr lang="en-US" sz="1900" b="1" dirty="0">
                 <a:solidFill>
                   <a:srgbClr val="18181B"/>
                 </a:solidFill>
@@ -5997,65 +7077,36 @@
                 <a:ea typeface="Arial" pitchFamily="34" charset="-122"/>
                 <a:cs typeface="Arial" pitchFamily="34" charset="-120"/>
               </a:rPr>
-              <a:t>twitch.tv/sandrise_ai</a:t>
-            </a:r>
-            <a:pPr indent="0" marL="0">
-              <a:buNone/>
-            </a:pPr>
-            <a:r>
-              <a:rPr lang="en-US" sz="1800" dirty="0">
-                <a:solidFill>
-                  <a:srgbClr val="52525B"/>
-                </a:solidFill>
-                <a:latin typeface="Arial" pitchFamily="34" charset="0"/>
-                <a:ea typeface="Arial" pitchFamily="34" charset="-122"/>
-                <a:cs typeface="Arial" pitchFamily="34" charset="-120"/>
-              </a:rPr>
-              <a:t> — where musterd is built live, every day.</a:t>
-            </a:r>
-            <a:endParaRPr lang="en-US" sz="1800" dirty="0"/>
-          </a:p>
-        </p:txBody>
-      </p:sp>
-      <p:sp>
-        <p:nvSpPr>
-          <p:cNvPr id="7" name="Text 5"/>
-          <p:cNvSpPr txBox="1"/>
-          <p:nvPr/>
-        </p:nvSpPr>
-        <p:spPr>
-          <a:xfrm>
-            <a:off x="640080" y="6217920"/>
-            <a:ext cx="10911535" cy="320040"/>
-          </a:xfrm>
-          <a:prstGeom prst="rect">
-            <a:avLst/>
-          </a:prstGeom>
-          <a:noFill/>
-          <a:ln/>
-        </p:spPr>
-        <p:txBody>
-          <a:bodyPr wrap="square" lIns="0" tIns="0" rIns="0" bIns="0" rtlCol="0" anchor="ctr"/>
-          <a:lstStyle/>
-          <a:p>
-            <a:pPr indent="0" marL="0">
-              <a:buNone/>
-            </a:pPr>
-            <a:r>
-              <a:rPr lang="en-US" sz="1100" dirty="0">
-                <a:solidFill>
-                  <a:srgbClr val="52525B"/>
-                </a:solidFill>
-                <a:latin typeface="Courier New" pitchFamily="34" charset="0"/>
-                <a:ea typeface="Courier New" pitchFamily="34" charset="-122"/>
-                <a:cs typeface="Courier New" pitchFamily="34" charset="-120"/>
-              </a:rPr>
-              <a:t>musterd.io  ·  github.com/SandRiseStudio/musterd</a:t>
-            </a:r>
-            <a:endParaRPr lang="en-US" sz="1100" dirty="0"/>
-          </a:p>
-        </p:txBody>
-      </p:sp>
+              <a:t>3  When they need me, the question lands with a clock on it.</a:t>
+            </a:r>
+            <a:endParaRPr lang="en-US" sz="1900" dirty="0"/>
+          </a:p>
+        </p:txBody>
+      </p:sp>
+      <p:pic>
+        <p:nvPicPr>
+          <p:cNvPr id="5" name="Image 0" descr="img/huddle.png">    </p:cNvPr>
+          <p:cNvPicPr>
+            <a:picLocks noChangeAspect="1"/>
+          </p:cNvPicPr>
+          <p:nvPr/>
+        </p:nvPicPr>
+        <p:blipFill>
+          <a:blip r:embed="rId1"/>
+          <a:stretch>
+            <a:fillRect/>
+          </a:stretch>
+        </p:blipFill>
+        <p:spPr>
+          <a:xfrm>
+            <a:off x="6949440" y="914400"/>
+            <a:ext cx="4754880" cy="4754880"/>
+          </a:xfrm>
+          <a:prstGeom prst="rect">
+            <a:avLst/>
+          </a:prstGeom>
+        </p:spPr>
+      </p:pic>
     </p:spTree>
   </p:cSld>
   <p:clrMapOvr>

--- a/docs/demo/multiplayer-ai-2026-10-01/deck.pptx
+++ b/docs/demo/multiplayer-ai-2026-10-01/deck.pptx
@@ -1676,72 +1676,30 @@
           <a:chExt cx="0" cy="0"/>
         </a:xfrm>
       </p:grpSpPr>
-      <p:sp>
-        <p:nvSpPr>
-          <p:cNvPr id="2" name="Shape 0"/>
-          <p:cNvSpPr/>
-          <p:nvPr/>
-        </p:nvSpPr>
+      <p:pic>
+        <p:nvPicPr>
+          <p:cNvPr id="2" name="musterd mark" descr="musterd mark"/>
+          <p:cNvPicPr>
+            <a:picLocks noChangeAspect="1"/>
+          </p:cNvPicPr>
+          <p:nvPr/>
+        </p:nvPicPr>
+        <p:blipFill>
+          <a:blip r:embed="rId3"/>
+          <a:stretch>
+            <a:fillRect/>
+          </a:stretch>
+        </p:blipFill>
         <p:spPr>
           <a:xfrm>
             <a:off x="640080" y="640080"/>
             <a:ext cx="502920" cy="502920"/>
           </a:xfrm>
-          <a:prstGeom prst="roundRect">
-            <a:avLst>
-              <a:gd name="adj" fmla="val 18182"/>
-            </a:avLst>
-          </a:prstGeom>
-          <a:solidFill>
-            <a:srgbClr val="E1AD01"/>
-          </a:solidFill>
-          <a:ln w="12700">
-            <a:solidFill>
-              <a:srgbClr val="E1AD01"/>
-            </a:solidFill>
-            <a:prstDash val="solid"/>
-          </a:ln>
-        </p:spPr>
-      </p:sp>
-      <p:sp>
-        <p:nvSpPr>
-          <p:cNvPr id="3" name="Text 1"/>
-          <p:cNvSpPr txBox="1"/>
-          <p:nvPr/>
-        </p:nvSpPr>
-        <p:spPr>
-          <a:xfrm>
-            <a:off x="640080" y="640080"/>
-            <a:ext cx="502920" cy="502920"/>
-          </a:xfrm>
-          <a:prstGeom prst="rect">
-            <a:avLst/>
-          </a:prstGeom>
-          <a:noFill/>
-          <a:ln/>
-        </p:spPr>
-        <p:txBody>
-          <a:bodyPr wrap="square" lIns="0" tIns="0" rIns="0" bIns="0" rtlCol="0" anchor="ctr"/>
-          <a:lstStyle/>
-          <a:p>
-            <a:pPr algn="ctr" indent="0" marL="0">
-              <a:buNone/>
-            </a:pPr>
-            <a:r>
-              <a:rPr lang="en-US" sz="2600" b="1" dirty="0">
-                <a:solidFill>
-                  <a:srgbClr val="18181B"/>
-                </a:solidFill>
-                <a:latin typeface="Courier New" pitchFamily="34" charset="0"/>
-                <a:ea typeface="Courier New" pitchFamily="34" charset="-122"/>
-                <a:cs typeface="Courier New" pitchFamily="34" charset="-120"/>
-              </a:rPr>
-              <a:t>m</a:t>
-            </a:r>
-            <a:endParaRPr lang="en-US" sz="2600" dirty="0"/>
-          </a:p>
-        </p:txBody>
-      </p:sp>
+          <a:prstGeom prst="rect">
+            <a:avLst/>
+          </a:prstGeom>
+        </p:spPr>
+      </p:pic>
       <p:sp>
         <p:nvSpPr>
           <p:cNvPr id="4" name="Text 2"/>

--- a/docs/demo/multiplayer-ai-2026-10-01/deck.pptx
+++ b/docs/demo/multiplayer-ai-2026-10-01/deck.pptx
@@ -2366,7 +2366,7 @@
                 <a:ea typeface="Arial" pitchFamily="34" charset="-122"/>
                 <a:cs typeface="Arial" pitchFamily="34" charset="-120"/>
               </a:rPr>
-              <a:t>Claude Code · Codex · Cursor · opencode · musterd harness (coming)</a:t>
+              <a:t>Claude Code · Codex · Cursor · opencode · musterd harness (not yet)</a:t>
             </a:r>
             <a:endParaRPr lang="en-US" sz="1700" dirty="0"/>
           </a:p>
@@ -2696,7 +2696,7 @@
                 <a:ea typeface="Arial" pitchFamily="34" charset="-122"/>
                 <a:cs typeface="Arial" pitchFamily="34" charset="-120"/>
               </a:rPr>
-              <a:t>github.com/SandRiseStudio/musterd</a:t>
+              <a:t>in private preview</a:t>
             </a:r>
             <a:endParaRPr lang="en-US" sz="1700" dirty="0"/>
           </a:p>
@@ -4110,7 +4110,7 @@
                 <a:ea typeface="Arial" pitchFamily="34" charset="-122"/>
                 <a:cs typeface="Arial" pitchFamily="34" charset="-120"/>
               </a:rPr>
-              <a:t>Another member checks the outcome, cross-family if available</a:t>
+              <a:t>Another member checks the outcome, from another model family when one is live</a:t>
             </a:r>
             <a:endParaRPr lang="en-US" sz="1500" dirty="0"/>
           </a:p>
